--- a/assets/lessons/lectures/digital-signal-processing/mixing-2018.pptx
+++ b/assets/lessons/lectures/digital-signal-processing/mixing-2018.pptx
@@ -15,7 +15,7 @@
     <p:sldId id="268" r:id="rId6"/>
     <p:sldId id="269" r:id="rId7"/>
   </p:sldIdLst>
-  <p:sldSz cx="12192000" cy="6858000"/>
+  <p:sldSz cx="12192000" cy="7543800"/>
   <p:notesSz cx="6858000" cy="9144000"/>
   <p:defaultTextStyle>
     <a:defPPr>
@@ -113,6 +113,185 @@
     </a:lvl9pPr>
   </p:defaultTextStyle>
 </p:presentation>
+</file>
+
+<file path=ppt/customXml/item1.xml><?xml version="1.0" encoding="utf-8"?>
+<ct:contentTypeSchema xmlns:ct="http://schemas.microsoft.com/office/2006/metadata/contentType" xmlns:ma="http://schemas.microsoft.com/office/2006/metadata/properties/metaAttributes" ct:_="" ma:_="" ma:contentTypeName="Document" ma:contentTypeID="0x01010016C36F108F9F92488C988DDF36346911" ma:contentTypeVersion="5" ma:contentTypeDescription="Create a new document." ma:contentTypeScope="" ma:versionID="c417924321fef32731141cd966ef6f94">
+  <xsd:schema xmlns:xsd="http://www.w3.org/2001/XMLSchema" xmlns:xs="http://www.w3.org/2001/XMLSchema" xmlns:p="http://schemas.microsoft.com/office/2006/metadata/properties" xmlns:ns2="1bb24863-89de-455f-aabf-4424925aa312" targetNamespace="http://schemas.microsoft.com/office/2006/metadata/properties" ma:root="true" ma:fieldsID="a7d3b2212d350eb904df17fc79fef4f4" ns2:_="">
+    <xsd:import namespace="1bb24863-89de-455f-aabf-4424925aa312"/>
+    <xsd:element name="properties">
+      <xsd:complexType>
+        <xsd:sequence>
+          <xsd:element name="documentManagement">
+            <xsd:complexType>
+              <xsd:all>
+                <xsd:element ref="ns2:MediaServiceMetadata" minOccurs="0"/>
+                <xsd:element ref="ns2:MediaServiceFastMetadata" minOccurs="0"/>
+                <xsd:element ref="ns2:MediaServiceAutoTags" minOccurs="0"/>
+                <xsd:element ref="ns2:MediaServiceOCR" minOccurs="0"/>
+                <xsd:element ref="ns2:MediaServiceDateTaken" minOccurs="0"/>
+              </xsd:all>
+            </xsd:complexType>
+          </xsd:element>
+        </xsd:sequence>
+      </xsd:complexType>
+    </xsd:element>
+  </xsd:schema>
+  <xsd:schema xmlns:xsd="http://www.w3.org/2001/XMLSchema" xmlns:xs="http://www.w3.org/2001/XMLSchema" xmlns:dms="http://schemas.microsoft.com/office/2006/documentManagement/types" xmlns:pc="http://schemas.microsoft.com/office/infopath/2007/PartnerControls" targetNamespace="1bb24863-89de-455f-aabf-4424925aa312" elementFormDefault="qualified">
+    <xsd:import namespace="http://schemas.microsoft.com/office/2006/documentManagement/types"/>
+    <xsd:import namespace="http://schemas.microsoft.com/office/infopath/2007/PartnerControls"/>
+    <xsd:element name="MediaServiceMetadata" ma:index="8" nillable="true" ma:displayName="MediaServiceMetadata" ma:hidden="true" ma:internalName="MediaServiceMetadata" ma:readOnly="true">
+      <xsd:simpleType>
+        <xsd:restriction base="dms:Note"/>
+      </xsd:simpleType>
+    </xsd:element>
+    <xsd:element name="MediaServiceFastMetadata" ma:index="9" nillable="true" ma:displayName="MediaServiceFastMetadata" ma:hidden="true" ma:internalName="MediaServiceFastMetadata" ma:readOnly="true">
+      <xsd:simpleType>
+        <xsd:restriction base="dms:Note"/>
+      </xsd:simpleType>
+    </xsd:element>
+    <xsd:element name="MediaServiceAutoTags" ma:index="10" nillable="true" ma:displayName="MediaServiceAutoTags" ma:internalName="MediaServiceAutoTags" ma:readOnly="true">
+      <xsd:simpleType>
+        <xsd:restriction base="dms:Text"/>
+      </xsd:simpleType>
+    </xsd:element>
+    <xsd:element name="MediaServiceOCR" ma:index="11" nillable="true" ma:displayName="MediaServiceOCR" ma:internalName="MediaServiceOCR" ma:readOnly="true">
+      <xsd:simpleType>
+        <xsd:restriction base="dms:Note">
+          <xsd:maxLength value="255"/>
+        </xsd:restriction>
+      </xsd:simpleType>
+    </xsd:element>
+    <xsd:element name="MediaServiceDateTaken" ma:index="12" nillable="true" ma:displayName="MediaServiceDateTaken" ma:hidden="true" ma:internalName="MediaServiceDateTaken" ma:readOnly="true">
+      <xsd:simpleType>
+        <xsd:restriction base="dms:Text"/>
+      </xsd:simpleType>
+    </xsd:element>
+  </xsd:schema>
+  <xsd:schema xmlns="http://schemas.openxmlformats.org/package/2006/metadata/core-properties" xmlns:xsd="http://www.w3.org/2001/XMLSchema" xmlns:xsi="http://www.w3.org/2001/XMLSchema-instance" xmlns:dc="http://purl.org/dc/elements/1.1/" xmlns:dcterms="http://purl.org/dc/terms/" xmlns:odoc="http://schemas.microsoft.com/internal/obd" targetNamespace="http://schemas.openxmlformats.org/package/2006/metadata/core-properties" elementFormDefault="qualified" attributeFormDefault="unqualified" blockDefault="#all">
+    <xsd:import namespace="http://purl.org/dc/elements/1.1/" schemaLocation="http://dublincore.org/schemas/xmls/qdc/2003/04/02/dc.xsd"/>
+    <xsd:import namespace="http://purl.org/dc/terms/" schemaLocation="http://dublincore.org/schemas/xmls/qdc/2003/04/02/dcterms.xsd"/>
+    <xsd:element name="coreProperties" type="CT_coreProperties"/>
+    <xsd:complexType name="CT_coreProperties">
+      <xsd:all>
+        <xsd:element ref="dc:creator" minOccurs="0" maxOccurs="1"/>
+        <xsd:element ref="dcterms:created" minOccurs="0" maxOccurs="1"/>
+        <xsd:element ref="dc:identifier" minOccurs="0" maxOccurs="1"/>
+        <xsd:element name="contentType" minOccurs="0" maxOccurs="1" type="xsd:string" ma:index="0" ma:displayName="Content Type"/>
+        <xsd:element ref="dc:title" minOccurs="0" maxOccurs="1" ma:index="4" ma:displayName="Title"/>
+        <xsd:element ref="dc:subject" minOccurs="0" maxOccurs="1"/>
+        <xsd:element ref="dc:description" minOccurs="0" maxOccurs="1"/>
+        <xsd:element name="keywords" minOccurs="0" maxOccurs="1" type="xsd:string"/>
+        <xsd:element ref="dc:language" minOccurs="0" maxOccurs="1"/>
+        <xsd:element name="category" minOccurs="0" maxOccurs="1" type="xsd:string"/>
+        <xsd:element name="version" minOccurs="0" maxOccurs="1" type="xsd:string"/>
+        <xsd:element name="revision" minOccurs="0" maxOccurs="1" type="xsd:string">
+          <xsd:annotation>
+            <xsd:documentation>
+                        This value indicates the number of saves or revisions. The application is responsible for updating this value after each revision.
+                    </xsd:documentation>
+          </xsd:annotation>
+        </xsd:element>
+        <xsd:element name="lastModifiedBy" minOccurs="0" maxOccurs="1" type="xsd:string"/>
+        <xsd:element ref="dcterms:modified" minOccurs="0" maxOccurs="1"/>
+        <xsd:element name="contentStatus" minOccurs="0" maxOccurs="1" type="xsd:string"/>
+      </xsd:all>
+    </xsd:complexType>
+  </xsd:schema>
+  <xs:schema xmlns:pc="http://schemas.microsoft.com/office/infopath/2007/PartnerControls" xmlns:xs="http://www.w3.org/2001/XMLSchema" targetNamespace="http://schemas.microsoft.com/office/infopath/2007/PartnerControls" elementFormDefault="qualified" attributeFormDefault="unqualified">
+    <xs:element name="Person">
+      <xs:complexType>
+        <xs:sequence>
+          <xs:element ref="pc:DisplayName" minOccurs="0"/>
+          <xs:element ref="pc:AccountId" minOccurs="0"/>
+          <xs:element ref="pc:AccountType" minOccurs="0"/>
+        </xs:sequence>
+      </xs:complexType>
+    </xs:element>
+    <xs:element name="DisplayName" type="xs:string"/>
+    <xs:element name="AccountId" type="xs:string"/>
+    <xs:element name="AccountType" type="xs:string"/>
+    <xs:element name="BDCAssociatedEntity">
+      <xs:complexType>
+        <xs:sequence>
+          <xs:element ref="pc:BDCEntity" minOccurs="0" maxOccurs="unbounded"/>
+        </xs:sequence>
+        <xs:attribute ref="pc:EntityNamespace"/>
+        <xs:attribute ref="pc:EntityName"/>
+        <xs:attribute ref="pc:SystemInstanceName"/>
+        <xs:attribute ref="pc:AssociationName"/>
+      </xs:complexType>
+    </xs:element>
+    <xs:attribute name="EntityNamespace" type="xs:string"/>
+    <xs:attribute name="EntityName" type="xs:string"/>
+    <xs:attribute name="SystemInstanceName" type="xs:string"/>
+    <xs:attribute name="AssociationName" type="xs:string"/>
+    <xs:element name="BDCEntity">
+      <xs:complexType>
+        <xs:sequence>
+          <xs:element ref="pc:EntityDisplayName" minOccurs="0"/>
+          <xs:element ref="pc:EntityInstanceReference" minOccurs="0"/>
+          <xs:element ref="pc:EntityId1" minOccurs="0"/>
+          <xs:element ref="pc:EntityId2" minOccurs="0"/>
+          <xs:element ref="pc:EntityId3" minOccurs="0"/>
+          <xs:element ref="pc:EntityId4" minOccurs="0"/>
+          <xs:element ref="pc:EntityId5" minOccurs="0"/>
+        </xs:sequence>
+      </xs:complexType>
+    </xs:element>
+    <xs:element name="EntityDisplayName" type="xs:string"/>
+    <xs:element name="EntityInstanceReference" type="xs:string"/>
+    <xs:element name="EntityId1" type="xs:string"/>
+    <xs:element name="EntityId2" type="xs:string"/>
+    <xs:element name="EntityId3" type="xs:string"/>
+    <xs:element name="EntityId4" type="xs:string"/>
+    <xs:element name="EntityId5" type="xs:string"/>
+    <xs:element name="Terms">
+      <xs:complexType>
+        <xs:sequence>
+          <xs:element ref="pc:TermInfo" minOccurs="0" maxOccurs="unbounded"/>
+        </xs:sequence>
+      </xs:complexType>
+    </xs:element>
+    <xs:element name="TermInfo">
+      <xs:complexType>
+        <xs:sequence>
+          <xs:element ref="pc:TermName" minOccurs="0"/>
+          <xs:element ref="pc:TermId" minOccurs="0"/>
+        </xs:sequence>
+      </xs:complexType>
+    </xs:element>
+    <xs:element name="TermName" type="xs:string"/>
+    <xs:element name="TermId" type="xs:string"/>
+  </xs:schema>
+</ct:contentTypeSchema>
+</file>
+
+<file path=ppt/customXml/item2.xml><?xml version="1.0" encoding="utf-8"?>
+<?mso-contentType ?>
+<FormTemplates xmlns="http://schemas.microsoft.com/sharepoint/v3/contenttype/forms">
+  <Display>DocumentLibraryForm</Display>
+  <Edit>DocumentLibraryForm</Edit>
+  <New>DocumentLibraryForm</New>
+</FormTemplates>
+</file>
+
+<file path=ppt/customXml/item3.xml><?xml version="1.0" encoding="utf-8"?>
+<p:properties xmlns:p="http://schemas.microsoft.com/office/2006/metadata/properties" xmlns:xsi="http://www.w3.org/2001/XMLSchema-instance" xmlns:pc="http://schemas.microsoft.com/office/infopath/2007/PartnerControls">
+  <documentManagement/>
+</p:properties>
+</file>
+
+<file path=ppt/customXml/itemProps1.xml><?xml version="1.0" encoding="utf-8"?>
+<ds:datastoreItem xmlns:ds="http://schemas.openxmlformats.org/officeDocument/2006/customXml" ds:itemID="{9DCE3C33-DA20-4137-8780-2DFB9D124B5F}"/>
+</file>
+
+<file path=ppt/customXml/itemProps2.xml><?xml version="1.0" encoding="utf-8"?>
+<ds:datastoreItem xmlns:ds="http://schemas.openxmlformats.org/officeDocument/2006/customXml" ds:itemID="{EF52A612-AF78-47DD-B93F-797A255C919D}"/>
+</file>
+
+<file path=ppt/customXml/itemProps3.xml><?xml version="1.0" encoding="utf-8"?>
+<ds:datastoreItem xmlns:ds="http://schemas.openxmlformats.org/officeDocument/2006/customXml" ds:itemID="{4DD8559E-0254-4CDB-A1BC-0C5BFDA8332E}"/>
 </file>
 
 <file path=ppt/notesMasters/notesMaster1.xml><?xml version="1.0" encoding="utf-8"?>
@@ -499,7 +678,7 @@
         </p:nvSpPr>
         <p:spPr>
           <a:xfrm>
-            <a:off x="1524000" y="1122363"/>
+            <a:off x="1524000" y="1465263"/>
             <a:ext cx="9144000" cy="2387600"/>
           </a:xfrm>
         </p:spPr>
@@ -507,7 +686,7 @@
           <a:bodyPr anchor="b"/>
           <a:lstStyle>
             <a:lvl1pPr algn="ctr">
-              <a:defRPr sz="6000"/>
+              <a:defRPr sz="4800"/>
             </a:lvl1pPr>
           </a:lstStyle>
           <a:p>
@@ -536,7 +715,7 @@
         </p:nvSpPr>
         <p:spPr>
           <a:xfrm>
-            <a:off x="1524000" y="3602038"/>
+            <a:off x="1524000" y="3944938"/>
             <a:ext cx="9144000" cy="1655762"/>
           </a:xfrm>
         </p:spPr>
@@ -545,39 +724,39 @@
           <a:lstStyle>
             <a:lvl1pPr marL="0" indent="0" algn="ctr">
               <a:buNone/>
-              <a:defRPr sz="2400"/>
+              <a:defRPr sz="1920"/>
             </a:lvl1pPr>
             <a:lvl2pPr marL="457200" indent="0" algn="ctr">
               <a:buNone/>
-              <a:defRPr sz="2000"/>
+              <a:defRPr sz="1600"/>
             </a:lvl2pPr>
             <a:lvl3pPr marL="914400" indent="0" algn="ctr">
               <a:buNone/>
-              <a:defRPr sz="1800"/>
+              <a:defRPr sz="1440"/>
             </a:lvl3pPr>
             <a:lvl4pPr marL="1371600" indent="0" algn="ctr">
               <a:buNone/>
-              <a:defRPr sz="1600"/>
+              <a:defRPr sz="1280"/>
             </a:lvl4pPr>
             <a:lvl5pPr marL="1828800" indent="0" algn="ctr">
               <a:buNone/>
-              <a:defRPr sz="1600"/>
+              <a:defRPr sz="1280"/>
             </a:lvl5pPr>
             <a:lvl6pPr marL="2286000" indent="0" algn="ctr">
               <a:buNone/>
-              <a:defRPr sz="1600"/>
+              <a:defRPr sz="1280"/>
             </a:lvl6pPr>
             <a:lvl7pPr marL="2743200" indent="0" algn="ctr">
               <a:buNone/>
-              <a:defRPr sz="1600"/>
+              <a:defRPr sz="1280"/>
             </a:lvl7pPr>
             <a:lvl8pPr marL="3200400" indent="0" algn="ctr">
               <a:buNone/>
-              <a:defRPr sz="1600"/>
+              <a:defRPr sz="1280"/>
             </a:lvl8pPr>
             <a:lvl9pPr marL="3657600" indent="0" algn="ctr">
               <a:buNone/>
-              <a:defRPr sz="1600"/>
+              <a:defRPr sz="1280"/>
             </a:lvl9pPr>
           </a:lstStyle>
           <a:p>
@@ -638,35 +817,6 @@
           <a:bodyPr/>
           <a:lstStyle/>
           <a:p>
-            <a:endParaRPr lang="en-US"/>
-          </a:p>
-        </p:txBody>
-      </p:sp>
-      <p:sp>
-        <p:nvSpPr>
-          <p:cNvPr id="6" name="Slide Number Placeholder 5">
-            <a:extLst>
-              <a:ext uri="{FF2B5EF4-FFF2-40B4-BE49-F238E27FC236}">
-                <a16:creationId xmlns:a16="http://schemas.microsoft.com/office/drawing/2014/main" id="{9204156B-9C3C-4C2B-AF94-73CABB38CDE5}"/>
-              </a:ext>
-            </a:extLst>
-          </p:cNvPr>
-          <p:cNvSpPr>
-            <a:spLocks noGrp="1"/>
-          </p:cNvSpPr>
-          <p:nvPr>
-            <p:ph type="sldNum" sz="quarter" idx="12"/>
-          </p:nvPr>
-        </p:nvSpPr>
-        <p:spPr/>
-        <p:txBody>
-          <a:bodyPr/>
-          <a:lstStyle/>
-          <a:p>
-            <a:fld id="{4A609AEB-AA43-4F11-B5F7-17FA2DC3DBF4}" type="slidenum">
-              <a:rPr lang="en-US" smtClean="0"/>
-              <a:t>‹#›</a:t>
-            </a:fld>
             <a:endParaRPr lang="en-US"/>
           </a:p>
         </p:txBody>
@@ -840,35 +990,6 @@
           </a:p>
         </p:txBody>
       </p:sp>
-      <p:sp>
-        <p:nvSpPr>
-          <p:cNvPr id="6" name="Slide Number Placeholder 5">
-            <a:extLst>
-              <a:ext uri="{FF2B5EF4-FFF2-40B4-BE49-F238E27FC236}">
-                <a16:creationId xmlns:a16="http://schemas.microsoft.com/office/drawing/2014/main" id="{6A9228E3-237E-4F6B-ADC2-263474A903CD}"/>
-              </a:ext>
-            </a:extLst>
-          </p:cNvPr>
-          <p:cNvSpPr>
-            <a:spLocks noGrp="1"/>
-          </p:cNvSpPr>
-          <p:nvPr>
-            <p:ph type="sldNum" sz="quarter" idx="12"/>
-          </p:nvPr>
-        </p:nvSpPr>
-        <p:spPr/>
-        <p:txBody>
-          <a:bodyPr/>
-          <a:lstStyle/>
-          <a:p>
-            <a:fld id="{4A609AEB-AA43-4F11-B5F7-17FA2DC3DBF4}" type="slidenum">
-              <a:rPr lang="en-US" smtClean="0"/>
-              <a:t>‹#›</a:t>
-            </a:fld>
-            <a:endParaRPr lang="en-US"/>
-          </a:p>
-        </p:txBody>
-      </p:sp>
     </p:spTree>
     <p:extLst>
       <p:ext uri="{BB962C8B-B14F-4D97-AF65-F5344CB8AC3E}">
@@ -917,7 +1038,7 @@
         </p:nvSpPr>
         <p:spPr>
           <a:xfrm>
-            <a:off x="8724900" y="365125"/>
+            <a:off x="8724900" y="708025"/>
             <a:ext cx="2628900" cy="5811838"/>
           </a:xfrm>
         </p:spPr>
@@ -950,7 +1071,7 @@
         </p:nvSpPr>
         <p:spPr>
           <a:xfrm>
-            <a:off x="838200" y="365125"/>
+            <a:off x="838200" y="708025"/>
             <a:ext cx="7734300" cy="5811838"/>
           </a:xfrm>
         </p:spPr>
@@ -1044,35 +1165,6 @@
           <a:bodyPr/>
           <a:lstStyle/>
           <a:p>
-            <a:endParaRPr lang="en-US"/>
-          </a:p>
-        </p:txBody>
-      </p:sp>
-      <p:sp>
-        <p:nvSpPr>
-          <p:cNvPr id="6" name="Slide Number Placeholder 5">
-            <a:extLst>
-              <a:ext uri="{FF2B5EF4-FFF2-40B4-BE49-F238E27FC236}">
-                <a16:creationId xmlns:a16="http://schemas.microsoft.com/office/drawing/2014/main" id="{1F38B704-A5BD-482C-B261-3A36037BA6CB}"/>
-              </a:ext>
-            </a:extLst>
-          </p:cNvPr>
-          <p:cNvSpPr>
-            <a:spLocks noGrp="1"/>
-          </p:cNvSpPr>
-          <p:nvPr>
-            <p:ph type="sldNum" sz="quarter" idx="12"/>
-          </p:nvPr>
-        </p:nvSpPr>
-        <p:spPr/>
-        <p:txBody>
-          <a:bodyPr/>
-          <a:lstStyle/>
-          <a:p>
-            <a:fld id="{4A609AEB-AA43-4F11-B5F7-17FA2DC3DBF4}" type="slidenum">
-              <a:rPr lang="en-US" smtClean="0"/>
-              <a:t>‹#›</a:t>
-            </a:fld>
             <a:endParaRPr lang="en-US"/>
           </a:p>
         </p:txBody>
@@ -1246,35 +1338,6 @@
           </a:p>
         </p:txBody>
       </p:sp>
-      <p:sp>
-        <p:nvSpPr>
-          <p:cNvPr id="6" name="Slide Number Placeholder 5">
-            <a:extLst>
-              <a:ext uri="{FF2B5EF4-FFF2-40B4-BE49-F238E27FC236}">
-                <a16:creationId xmlns:a16="http://schemas.microsoft.com/office/drawing/2014/main" id="{805FCF8C-5F0F-4042-A702-FF77831509C1}"/>
-              </a:ext>
-            </a:extLst>
-          </p:cNvPr>
-          <p:cNvSpPr>
-            <a:spLocks noGrp="1"/>
-          </p:cNvSpPr>
-          <p:nvPr>
-            <p:ph type="sldNum" sz="quarter" idx="12"/>
-          </p:nvPr>
-        </p:nvSpPr>
-        <p:spPr/>
-        <p:txBody>
-          <a:bodyPr/>
-          <a:lstStyle/>
-          <a:p>
-            <a:fld id="{4A609AEB-AA43-4F11-B5F7-17FA2DC3DBF4}" type="slidenum">
-              <a:rPr lang="en-US" smtClean="0"/>
-              <a:t>‹#›</a:t>
-            </a:fld>
-            <a:endParaRPr lang="en-US"/>
-          </a:p>
-        </p:txBody>
-      </p:sp>
     </p:spTree>
     <p:extLst>
       <p:ext uri="{BB962C8B-B14F-4D97-AF65-F5344CB8AC3E}">
@@ -1323,7 +1386,7 @@
         </p:nvSpPr>
         <p:spPr>
           <a:xfrm>
-            <a:off x="831850" y="1709738"/>
+            <a:off x="831850" y="2052638"/>
             <a:ext cx="10515600" cy="2852737"/>
           </a:xfrm>
         </p:spPr>
@@ -1331,7 +1394,7 @@
           <a:bodyPr anchor="b"/>
           <a:lstStyle>
             <a:lvl1pPr>
-              <a:defRPr sz="6000"/>
+              <a:defRPr sz="4800"/>
             </a:lvl1pPr>
           </a:lstStyle>
           <a:p>
@@ -1360,7 +1423,7 @@
         </p:nvSpPr>
         <p:spPr>
           <a:xfrm>
-            <a:off x="831850" y="4589463"/>
+            <a:off x="831850" y="4932363"/>
             <a:ext cx="10515600" cy="1500187"/>
           </a:xfrm>
         </p:spPr>
@@ -1369,7 +1432,7 @@
           <a:lstStyle>
             <a:lvl1pPr marL="0" indent="0">
               <a:buNone/>
-              <a:defRPr sz="2400">
+              <a:defRPr sz="1920">
                 <a:solidFill>
                   <a:schemeClr val="tx1">
                     <a:tint val="75000"/>
@@ -1379,7 +1442,7 @@
             </a:lvl1pPr>
             <a:lvl2pPr marL="457200" indent="0">
               <a:buNone/>
-              <a:defRPr sz="2000">
+              <a:defRPr sz="1600">
                 <a:solidFill>
                   <a:schemeClr val="tx1">
                     <a:tint val="75000"/>
@@ -1389,7 +1452,7 @@
             </a:lvl2pPr>
             <a:lvl3pPr marL="914400" indent="0">
               <a:buNone/>
-              <a:defRPr sz="1800">
+              <a:defRPr sz="1440">
                 <a:solidFill>
                   <a:schemeClr val="tx1">
                     <a:tint val="75000"/>
@@ -1399,7 +1462,7 @@
             </a:lvl3pPr>
             <a:lvl4pPr marL="1371600" indent="0">
               <a:buNone/>
-              <a:defRPr sz="1600">
+              <a:defRPr sz="1280">
                 <a:solidFill>
                   <a:schemeClr val="tx1">
                     <a:tint val="75000"/>
@@ -1409,7 +1472,7 @@
             </a:lvl4pPr>
             <a:lvl5pPr marL="1828800" indent="0">
               <a:buNone/>
-              <a:defRPr sz="1600">
+              <a:defRPr sz="1280">
                 <a:solidFill>
                   <a:schemeClr val="tx1">
                     <a:tint val="75000"/>
@@ -1419,7 +1482,7 @@
             </a:lvl5pPr>
             <a:lvl6pPr marL="2286000" indent="0">
               <a:buNone/>
-              <a:defRPr sz="1600">
+              <a:defRPr sz="1280">
                 <a:solidFill>
                   <a:schemeClr val="tx1">
                     <a:tint val="75000"/>
@@ -1429,7 +1492,7 @@
             </a:lvl6pPr>
             <a:lvl7pPr marL="2743200" indent="0">
               <a:buNone/>
-              <a:defRPr sz="1600">
+              <a:defRPr sz="1280">
                 <a:solidFill>
                   <a:schemeClr val="tx1">
                     <a:tint val="75000"/>
@@ -1439,7 +1502,7 @@
             </a:lvl7pPr>
             <a:lvl8pPr marL="3200400" indent="0">
               <a:buNone/>
-              <a:defRPr sz="1600">
+              <a:defRPr sz="1280">
                 <a:solidFill>
                   <a:schemeClr val="tx1">
                     <a:tint val="75000"/>
@@ -1449,7 +1512,7 @@
             </a:lvl8pPr>
             <a:lvl9pPr marL="3657600" indent="0">
               <a:buNone/>
-              <a:defRPr sz="1600">
+              <a:defRPr sz="1280">
                 <a:solidFill>
                   <a:schemeClr val="tx1">
                     <a:tint val="75000"/>
@@ -1517,35 +1580,6 @@
           <a:bodyPr/>
           <a:lstStyle/>
           <a:p>
-            <a:endParaRPr lang="en-US"/>
-          </a:p>
-        </p:txBody>
-      </p:sp>
-      <p:sp>
-        <p:nvSpPr>
-          <p:cNvPr id="6" name="Slide Number Placeholder 5">
-            <a:extLst>
-              <a:ext uri="{FF2B5EF4-FFF2-40B4-BE49-F238E27FC236}">
-                <a16:creationId xmlns:a16="http://schemas.microsoft.com/office/drawing/2014/main" id="{62C23A76-5C57-44B5-9C83-AA163080D29C}"/>
-              </a:ext>
-            </a:extLst>
-          </p:cNvPr>
-          <p:cNvSpPr>
-            <a:spLocks noGrp="1"/>
-          </p:cNvSpPr>
-          <p:nvPr>
-            <p:ph type="sldNum" sz="quarter" idx="12"/>
-          </p:nvPr>
-        </p:nvSpPr>
-        <p:spPr/>
-        <p:txBody>
-          <a:bodyPr/>
-          <a:lstStyle/>
-          <a:p>
-            <a:fld id="{4A609AEB-AA43-4F11-B5F7-17FA2DC3DBF4}" type="slidenum">
-              <a:rPr lang="en-US" smtClean="0"/>
-              <a:t>‹#›</a:t>
-            </a:fld>
             <a:endParaRPr lang="en-US"/>
           </a:p>
         </p:txBody>
@@ -1626,7 +1660,7 @@
         </p:nvSpPr>
         <p:spPr>
           <a:xfrm>
-            <a:off x="838200" y="1825625"/>
+            <a:off x="838200" y="2168525"/>
             <a:ext cx="5181600" cy="4351338"/>
           </a:xfrm>
         </p:spPr>
@@ -1688,7 +1722,7 @@
         </p:nvSpPr>
         <p:spPr>
           <a:xfrm>
-            <a:off x="6172200" y="1825625"/>
+            <a:off x="6172200" y="2168525"/>
             <a:ext cx="5181600" cy="4351338"/>
           </a:xfrm>
         </p:spPr>
@@ -1782,35 +1816,6 @@
           <a:bodyPr/>
           <a:lstStyle/>
           <a:p>
-            <a:endParaRPr lang="en-US"/>
-          </a:p>
-        </p:txBody>
-      </p:sp>
-      <p:sp>
-        <p:nvSpPr>
-          <p:cNvPr id="7" name="Slide Number Placeholder 6">
-            <a:extLst>
-              <a:ext uri="{FF2B5EF4-FFF2-40B4-BE49-F238E27FC236}">
-                <a16:creationId xmlns:a16="http://schemas.microsoft.com/office/drawing/2014/main" id="{17FA61DC-1169-4285-8C79-466F006ABD77}"/>
-              </a:ext>
-            </a:extLst>
-          </p:cNvPr>
-          <p:cNvSpPr>
-            <a:spLocks noGrp="1"/>
-          </p:cNvSpPr>
-          <p:nvPr>
-            <p:ph type="sldNum" sz="quarter" idx="12"/>
-          </p:nvPr>
-        </p:nvSpPr>
-        <p:spPr/>
-        <p:txBody>
-          <a:bodyPr/>
-          <a:lstStyle/>
-          <a:p>
-            <a:fld id="{4A609AEB-AA43-4F11-B5F7-17FA2DC3DBF4}" type="slidenum">
-              <a:rPr lang="en-US" smtClean="0"/>
-              <a:t>‹#›</a:t>
-            </a:fld>
             <a:endParaRPr lang="en-US"/>
           </a:p>
         </p:txBody>
@@ -1863,7 +1868,7 @@
         </p:nvSpPr>
         <p:spPr>
           <a:xfrm>
-            <a:off x="839788" y="365125"/>
+            <a:off x="839788" y="708025"/>
             <a:ext cx="10515600" cy="1325563"/>
           </a:xfrm>
         </p:spPr>
@@ -1896,7 +1901,7 @@
         </p:nvSpPr>
         <p:spPr>
           <a:xfrm>
-            <a:off x="839788" y="1681163"/>
+            <a:off x="839788" y="2024063"/>
             <a:ext cx="5157787" cy="823912"/>
           </a:xfrm>
         </p:spPr>
@@ -1905,39 +1910,39 @@
           <a:lstStyle>
             <a:lvl1pPr marL="0" indent="0">
               <a:buNone/>
-              <a:defRPr sz="2400" b="1"/>
+              <a:defRPr sz="1920" b="1"/>
             </a:lvl1pPr>
             <a:lvl2pPr marL="457200" indent="0">
               <a:buNone/>
-              <a:defRPr sz="2000" b="1"/>
+              <a:defRPr sz="1600" b="1"/>
             </a:lvl2pPr>
             <a:lvl3pPr marL="914400" indent="0">
               <a:buNone/>
-              <a:defRPr sz="1800" b="1"/>
+              <a:defRPr sz="1440" b="1"/>
             </a:lvl3pPr>
             <a:lvl4pPr marL="1371600" indent="0">
               <a:buNone/>
-              <a:defRPr sz="1600" b="1"/>
+              <a:defRPr sz="1280" b="1"/>
             </a:lvl4pPr>
             <a:lvl5pPr marL="1828800" indent="0">
               <a:buNone/>
-              <a:defRPr sz="1600" b="1"/>
+              <a:defRPr sz="1280" b="1"/>
             </a:lvl5pPr>
             <a:lvl6pPr marL="2286000" indent="0">
               <a:buNone/>
-              <a:defRPr sz="1600" b="1"/>
+              <a:defRPr sz="1280" b="1"/>
             </a:lvl6pPr>
             <a:lvl7pPr marL="2743200" indent="0">
               <a:buNone/>
-              <a:defRPr sz="1600" b="1"/>
+              <a:defRPr sz="1280" b="1"/>
             </a:lvl7pPr>
             <a:lvl8pPr marL="3200400" indent="0">
               <a:buNone/>
-              <a:defRPr sz="1600" b="1"/>
+              <a:defRPr sz="1280" b="1"/>
             </a:lvl8pPr>
             <a:lvl9pPr marL="3657600" indent="0">
               <a:buNone/>
-              <a:defRPr sz="1600" b="1"/>
+              <a:defRPr sz="1280" b="1"/>
             </a:lvl9pPr>
           </a:lstStyle>
           <a:p>
@@ -1967,7 +1972,7 @@
         </p:nvSpPr>
         <p:spPr>
           <a:xfrm>
-            <a:off x="839788" y="2505075"/>
+            <a:off x="839788" y="2847975"/>
             <a:ext cx="5157787" cy="3684588"/>
           </a:xfrm>
         </p:spPr>
@@ -2029,7 +2034,7 @@
         </p:nvSpPr>
         <p:spPr>
           <a:xfrm>
-            <a:off x="6172200" y="1681163"/>
+            <a:off x="6172200" y="2024063"/>
             <a:ext cx="5183188" cy="823912"/>
           </a:xfrm>
         </p:spPr>
@@ -2038,39 +2043,39 @@
           <a:lstStyle>
             <a:lvl1pPr marL="0" indent="0">
               <a:buNone/>
-              <a:defRPr sz="2400" b="1"/>
+              <a:defRPr sz="1920" b="1"/>
             </a:lvl1pPr>
             <a:lvl2pPr marL="457200" indent="0">
               <a:buNone/>
-              <a:defRPr sz="2000" b="1"/>
+              <a:defRPr sz="1600" b="1"/>
             </a:lvl2pPr>
             <a:lvl3pPr marL="914400" indent="0">
               <a:buNone/>
-              <a:defRPr sz="1800" b="1"/>
+              <a:defRPr sz="1440" b="1"/>
             </a:lvl3pPr>
             <a:lvl4pPr marL="1371600" indent="0">
               <a:buNone/>
-              <a:defRPr sz="1600" b="1"/>
+              <a:defRPr sz="1280" b="1"/>
             </a:lvl4pPr>
             <a:lvl5pPr marL="1828800" indent="0">
               <a:buNone/>
-              <a:defRPr sz="1600" b="1"/>
+              <a:defRPr sz="1280" b="1"/>
             </a:lvl5pPr>
             <a:lvl6pPr marL="2286000" indent="0">
               <a:buNone/>
-              <a:defRPr sz="1600" b="1"/>
+              <a:defRPr sz="1280" b="1"/>
             </a:lvl6pPr>
             <a:lvl7pPr marL="2743200" indent="0">
               <a:buNone/>
-              <a:defRPr sz="1600" b="1"/>
+              <a:defRPr sz="1280" b="1"/>
             </a:lvl7pPr>
             <a:lvl8pPr marL="3200400" indent="0">
               <a:buNone/>
-              <a:defRPr sz="1600" b="1"/>
+              <a:defRPr sz="1280" b="1"/>
             </a:lvl8pPr>
             <a:lvl9pPr marL="3657600" indent="0">
               <a:buNone/>
-              <a:defRPr sz="1600" b="1"/>
+              <a:defRPr sz="1280" b="1"/>
             </a:lvl9pPr>
           </a:lstStyle>
           <a:p>
@@ -2100,7 +2105,7 @@
         </p:nvSpPr>
         <p:spPr>
           <a:xfrm>
-            <a:off x="6172200" y="2505075"/>
+            <a:off x="6172200" y="2847975"/>
             <a:ext cx="5183188" cy="3684588"/>
           </a:xfrm>
         </p:spPr>
@@ -2194,35 +2199,6 @@
           <a:bodyPr/>
           <a:lstStyle/>
           <a:p>
-            <a:endParaRPr lang="en-US"/>
-          </a:p>
-        </p:txBody>
-      </p:sp>
-      <p:sp>
-        <p:nvSpPr>
-          <p:cNvPr id="9" name="Slide Number Placeholder 8">
-            <a:extLst>
-              <a:ext uri="{FF2B5EF4-FFF2-40B4-BE49-F238E27FC236}">
-                <a16:creationId xmlns:a16="http://schemas.microsoft.com/office/drawing/2014/main" id="{A67B7171-6F26-4A68-A4FF-F3C6DC10113D}"/>
-              </a:ext>
-            </a:extLst>
-          </p:cNvPr>
-          <p:cNvSpPr>
-            <a:spLocks noGrp="1"/>
-          </p:cNvSpPr>
-          <p:nvPr>
-            <p:ph type="sldNum" sz="quarter" idx="12"/>
-          </p:nvPr>
-        </p:nvSpPr>
-        <p:spPr/>
-        <p:txBody>
-          <a:bodyPr/>
-          <a:lstStyle/>
-          <a:p>
-            <a:fld id="{4A609AEB-AA43-4F11-B5F7-17FA2DC3DBF4}" type="slidenum">
-              <a:rPr lang="en-US" smtClean="0"/>
-              <a:t>‹#›</a:t>
-            </a:fld>
             <a:endParaRPr lang="en-US"/>
           </a:p>
         </p:txBody>
@@ -2339,35 +2315,6 @@
           </a:p>
         </p:txBody>
       </p:sp>
-      <p:sp>
-        <p:nvSpPr>
-          <p:cNvPr id="5" name="Slide Number Placeholder 4">
-            <a:extLst>
-              <a:ext uri="{FF2B5EF4-FFF2-40B4-BE49-F238E27FC236}">
-                <a16:creationId xmlns:a16="http://schemas.microsoft.com/office/drawing/2014/main" id="{931844B3-38EA-46B1-9B16-7C34E23B980F}"/>
-              </a:ext>
-            </a:extLst>
-          </p:cNvPr>
-          <p:cNvSpPr>
-            <a:spLocks noGrp="1"/>
-          </p:cNvSpPr>
-          <p:nvPr>
-            <p:ph type="sldNum" sz="quarter" idx="12"/>
-          </p:nvPr>
-        </p:nvSpPr>
-        <p:spPr/>
-        <p:txBody>
-          <a:bodyPr/>
-          <a:lstStyle/>
-          <a:p>
-            <a:fld id="{4A609AEB-AA43-4F11-B5F7-17FA2DC3DBF4}" type="slidenum">
-              <a:rPr lang="en-US" smtClean="0"/>
-              <a:t>‹#›</a:t>
-            </a:fld>
-            <a:endParaRPr lang="en-US"/>
-          </a:p>
-        </p:txBody>
-      </p:sp>
     </p:spTree>
     <p:extLst>
       <p:ext uri="{BB962C8B-B14F-4D97-AF65-F5344CB8AC3E}">
@@ -2452,35 +2399,6 @@
           </a:p>
         </p:txBody>
       </p:sp>
-      <p:sp>
-        <p:nvSpPr>
-          <p:cNvPr id="4" name="Slide Number Placeholder 3">
-            <a:extLst>
-              <a:ext uri="{FF2B5EF4-FFF2-40B4-BE49-F238E27FC236}">
-                <a16:creationId xmlns:a16="http://schemas.microsoft.com/office/drawing/2014/main" id="{F4FBAC04-EE29-4BA7-8DB3-599F7F533070}"/>
-              </a:ext>
-            </a:extLst>
-          </p:cNvPr>
-          <p:cNvSpPr>
-            <a:spLocks noGrp="1"/>
-          </p:cNvSpPr>
-          <p:nvPr>
-            <p:ph type="sldNum" sz="quarter" idx="12"/>
-          </p:nvPr>
-        </p:nvSpPr>
-        <p:spPr/>
-        <p:txBody>
-          <a:bodyPr/>
-          <a:lstStyle/>
-          <a:p>
-            <a:fld id="{4A609AEB-AA43-4F11-B5F7-17FA2DC3DBF4}" type="slidenum">
-              <a:rPr lang="en-US" smtClean="0"/>
-              <a:t>‹#›</a:t>
-            </a:fld>
-            <a:endParaRPr lang="en-US"/>
-          </a:p>
-        </p:txBody>
-      </p:sp>
     </p:spTree>
     <p:extLst>
       <p:ext uri="{BB962C8B-B14F-4D97-AF65-F5344CB8AC3E}">
@@ -2529,7 +2447,7 @@
         </p:nvSpPr>
         <p:spPr>
           <a:xfrm>
-            <a:off x="839788" y="457200"/>
+            <a:off x="839788" y="800100"/>
             <a:ext cx="3932237" cy="1600200"/>
           </a:xfrm>
         </p:spPr>
@@ -2537,7 +2455,7 @@
           <a:bodyPr anchor="b"/>
           <a:lstStyle>
             <a:lvl1pPr>
-              <a:defRPr sz="3200"/>
+              <a:defRPr sz="2560"/>
             </a:lvl1pPr>
           </a:lstStyle>
           <a:p>
@@ -2566,7 +2484,7 @@
         </p:nvSpPr>
         <p:spPr>
           <a:xfrm>
-            <a:off x="5183188" y="987425"/>
+            <a:off x="5183188" y="1330325"/>
             <a:ext cx="6172200" cy="4873625"/>
           </a:xfrm>
         </p:spPr>
@@ -2574,31 +2492,31 @@
           <a:bodyPr/>
           <a:lstStyle>
             <a:lvl1pPr>
-              <a:defRPr sz="3200"/>
+              <a:defRPr sz="2560"/>
             </a:lvl1pPr>
             <a:lvl2pPr>
-              <a:defRPr sz="2800"/>
+              <a:defRPr sz="2240"/>
             </a:lvl2pPr>
             <a:lvl3pPr>
-              <a:defRPr sz="2400"/>
+              <a:defRPr sz="1920"/>
             </a:lvl3pPr>
             <a:lvl4pPr>
-              <a:defRPr sz="2000"/>
+              <a:defRPr sz="1600"/>
             </a:lvl4pPr>
             <a:lvl5pPr>
-              <a:defRPr sz="2000"/>
+              <a:defRPr sz="1600"/>
             </a:lvl5pPr>
             <a:lvl6pPr>
-              <a:defRPr sz="2000"/>
+              <a:defRPr sz="1600"/>
             </a:lvl6pPr>
             <a:lvl7pPr>
-              <a:defRPr sz="2000"/>
+              <a:defRPr sz="1600"/>
             </a:lvl7pPr>
             <a:lvl8pPr>
-              <a:defRPr sz="2000"/>
+              <a:defRPr sz="1600"/>
             </a:lvl8pPr>
             <a:lvl9pPr>
-              <a:defRPr sz="2000"/>
+              <a:defRPr sz="1600"/>
             </a:lvl9pPr>
           </a:lstStyle>
           <a:p>
@@ -2656,7 +2574,7 @@
         </p:nvSpPr>
         <p:spPr>
           <a:xfrm>
-            <a:off x="839788" y="2057400"/>
+            <a:off x="839788" y="2400300"/>
             <a:ext cx="3932237" cy="3811588"/>
           </a:xfrm>
         </p:spPr>
@@ -2665,39 +2583,39 @@
           <a:lstStyle>
             <a:lvl1pPr marL="0" indent="0">
               <a:buNone/>
-              <a:defRPr sz="1600"/>
+              <a:defRPr sz="1280"/>
             </a:lvl1pPr>
             <a:lvl2pPr marL="457200" indent="0">
               <a:buNone/>
-              <a:defRPr sz="1400"/>
+              <a:defRPr sz="1120"/>
             </a:lvl2pPr>
             <a:lvl3pPr marL="914400" indent="0">
               <a:buNone/>
-              <a:defRPr sz="1200"/>
+              <a:defRPr sz="960"/>
             </a:lvl3pPr>
             <a:lvl4pPr marL="1371600" indent="0">
               <a:buNone/>
-              <a:defRPr sz="1000"/>
+              <a:defRPr sz="800"/>
             </a:lvl4pPr>
             <a:lvl5pPr marL="1828800" indent="0">
               <a:buNone/>
-              <a:defRPr sz="1000"/>
+              <a:defRPr sz="800"/>
             </a:lvl5pPr>
             <a:lvl6pPr marL="2286000" indent="0">
               <a:buNone/>
-              <a:defRPr sz="1000"/>
+              <a:defRPr sz="800"/>
             </a:lvl6pPr>
             <a:lvl7pPr marL="2743200" indent="0">
               <a:buNone/>
-              <a:defRPr sz="1000"/>
+              <a:defRPr sz="800"/>
             </a:lvl7pPr>
             <a:lvl8pPr marL="3200400" indent="0">
               <a:buNone/>
-              <a:defRPr sz="1000"/>
+              <a:defRPr sz="800"/>
             </a:lvl8pPr>
             <a:lvl9pPr marL="3657600" indent="0">
               <a:buNone/>
-              <a:defRPr sz="1000"/>
+              <a:defRPr sz="800"/>
             </a:lvl9pPr>
           </a:lstStyle>
           <a:p>
@@ -2759,35 +2677,6 @@
           <a:bodyPr/>
           <a:lstStyle/>
           <a:p>
-            <a:endParaRPr lang="en-US"/>
-          </a:p>
-        </p:txBody>
-      </p:sp>
-      <p:sp>
-        <p:nvSpPr>
-          <p:cNvPr id="7" name="Slide Number Placeholder 6">
-            <a:extLst>
-              <a:ext uri="{FF2B5EF4-FFF2-40B4-BE49-F238E27FC236}">
-                <a16:creationId xmlns:a16="http://schemas.microsoft.com/office/drawing/2014/main" id="{82016D7F-D125-4E83-A94B-170F9FBF88BF}"/>
-              </a:ext>
-            </a:extLst>
-          </p:cNvPr>
-          <p:cNvSpPr>
-            <a:spLocks noGrp="1"/>
-          </p:cNvSpPr>
-          <p:nvPr>
-            <p:ph type="sldNum" sz="quarter" idx="12"/>
-          </p:nvPr>
-        </p:nvSpPr>
-        <p:spPr/>
-        <p:txBody>
-          <a:bodyPr/>
-          <a:lstStyle/>
-          <a:p>
-            <a:fld id="{4A609AEB-AA43-4F11-B5F7-17FA2DC3DBF4}" type="slidenum">
-              <a:rPr lang="en-US" smtClean="0"/>
-              <a:t>‹#›</a:t>
-            </a:fld>
             <a:endParaRPr lang="en-US"/>
           </a:p>
         </p:txBody>
@@ -2840,7 +2729,7 @@
         </p:nvSpPr>
         <p:spPr>
           <a:xfrm>
-            <a:off x="839788" y="457200"/>
+            <a:off x="839788" y="800100"/>
             <a:ext cx="3932237" cy="1600200"/>
           </a:xfrm>
         </p:spPr>
@@ -2848,7 +2737,7 @@
           <a:bodyPr anchor="b"/>
           <a:lstStyle>
             <a:lvl1pPr>
-              <a:defRPr sz="3200"/>
+              <a:defRPr sz="2560"/>
             </a:lvl1pPr>
           </a:lstStyle>
           <a:p>
@@ -2877,7 +2766,7 @@
         </p:nvSpPr>
         <p:spPr>
           <a:xfrm>
-            <a:off x="5183188" y="987425"/>
+            <a:off x="5183188" y="1330325"/>
             <a:ext cx="6172200" cy="4873625"/>
           </a:xfrm>
         </p:spPr>
@@ -2886,39 +2775,39 @@
           <a:lstStyle>
             <a:lvl1pPr marL="0" indent="0">
               <a:buNone/>
-              <a:defRPr sz="3200"/>
+              <a:defRPr sz="2560"/>
             </a:lvl1pPr>
             <a:lvl2pPr marL="457200" indent="0">
               <a:buNone/>
-              <a:defRPr sz="2800"/>
+              <a:defRPr sz="2240"/>
             </a:lvl2pPr>
             <a:lvl3pPr marL="914400" indent="0">
               <a:buNone/>
-              <a:defRPr sz="2400"/>
+              <a:defRPr sz="1920"/>
             </a:lvl3pPr>
             <a:lvl4pPr marL="1371600" indent="0">
               <a:buNone/>
-              <a:defRPr sz="2000"/>
+              <a:defRPr sz="1600"/>
             </a:lvl4pPr>
             <a:lvl5pPr marL="1828800" indent="0">
               <a:buNone/>
-              <a:defRPr sz="2000"/>
+              <a:defRPr sz="1600"/>
             </a:lvl5pPr>
             <a:lvl6pPr marL="2286000" indent="0">
               <a:buNone/>
-              <a:defRPr sz="2000"/>
+              <a:defRPr sz="1600"/>
             </a:lvl6pPr>
             <a:lvl7pPr marL="2743200" indent="0">
               <a:buNone/>
-              <a:defRPr sz="2000"/>
+              <a:defRPr sz="1600"/>
             </a:lvl7pPr>
             <a:lvl8pPr marL="3200400" indent="0">
               <a:buNone/>
-              <a:defRPr sz="2000"/>
+              <a:defRPr sz="1600"/>
             </a:lvl8pPr>
             <a:lvl9pPr marL="3657600" indent="0">
               <a:buNone/>
-              <a:defRPr sz="2000"/>
+              <a:defRPr sz="1600"/>
             </a:lvl9pPr>
           </a:lstStyle>
           <a:p>
@@ -2944,7 +2833,7 @@
         </p:nvSpPr>
         <p:spPr>
           <a:xfrm>
-            <a:off x="839788" y="2057400"/>
+            <a:off x="839788" y="2400300"/>
             <a:ext cx="3932237" cy="3811588"/>
           </a:xfrm>
         </p:spPr>
@@ -2953,39 +2842,39 @@
           <a:lstStyle>
             <a:lvl1pPr marL="0" indent="0">
               <a:buNone/>
-              <a:defRPr sz="1600"/>
+              <a:defRPr sz="1280"/>
             </a:lvl1pPr>
             <a:lvl2pPr marL="457200" indent="0">
               <a:buNone/>
-              <a:defRPr sz="1400"/>
+              <a:defRPr sz="1120"/>
             </a:lvl2pPr>
             <a:lvl3pPr marL="914400" indent="0">
               <a:buNone/>
-              <a:defRPr sz="1200"/>
+              <a:defRPr sz="960"/>
             </a:lvl3pPr>
             <a:lvl4pPr marL="1371600" indent="0">
               <a:buNone/>
-              <a:defRPr sz="1000"/>
+              <a:defRPr sz="800"/>
             </a:lvl4pPr>
             <a:lvl5pPr marL="1828800" indent="0">
               <a:buNone/>
-              <a:defRPr sz="1000"/>
+              <a:defRPr sz="800"/>
             </a:lvl5pPr>
             <a:lvl6pPr marL="2286000" indent="0">
               <a:buNone/>
-              <a:defRPr sz="1000"/>
+              <a:defRPr sz="800"/>
             </a:lvl6pPr>
             <a:lvl7pPr marL="2743200" indent="0">
               <a:buNone/>
-              <a:defRPr sz="1000"/>
+              <a:defRPr sz="800"/>
             </a:lvl7pPr>
             <a:lvl8pPr marL="3200400" indent="0">
               <a:buNone/>
-              <a:defRPr sz="1000"/>
+              <a:defRPr sz="800"/>
             </a:lvl8pPr>
             <a:lvl9pPr marL="3657600" indent="0">
               <a:buNone/>
-              <a:defRPr sz="1000"/>
+              <a:defRPr sz="800"/>
             </a:lvl9pPr>
           </a:lstStyle>
           <a:p>
@@ -3047,35 +2936,6 @@
           <a:bodyPr/>
           <a:lstStyle/>
           <a:p>
-            <a:endParaRPr lang="en-US"/>
-          </a:p>
-        </p:txBody>
-      </p:sp>
-      <p:sp>
-        <p:nvSpPr>
-          <p:cNvPr id="7" name="Slide Number Placeholder 6">
-            <a:extLst>
-              <a:ext uri="{FF2B5EF4-FFF2-40B4-BE49-F238E27FC236}">
-                <a16:creationId xmlns:a16="http://schemas.microsoft.com/office/drawing/2014/main" id="{3E256C97-6DB1-4673-B8CB-D030E00D1F27}"/>
-              </a:ext>
-            </a:extLst>
-          </p:cNvPr>
-          <p:cNvSpPr>
-            <a:spLocks noGrp="1"/>
-          </p:cNvSpPr>
-          <p:nvPr>
-            <p:ph type="sldNum" sz="quarter" idx="12"/>
-          </p:nvPr>
-        </p:nvSpPr>
-        <p:spPr/>
-        <p:txBody>
-          <a:bodyPr/>
-          <a:lstStyle/>
-          <a:p>
-            <a:fld id="{4A609AEB-AA43-4F11-B5F7-17FA2DC3DBF4}" type="slidenum">
-              <a:rPr lang="en-US" smtClean="0"/>
-              <a:t>‹#›</a:t>
-            </a:fld>
             <a:endParaRPr lang="en-US"/>
           </a:p>
         </p:txBody>
@@ -3133,7 +2993,7 @@
         </p:nvSpPr>
         <p:spPr>
           <a:xfrm>
-            <a:off x="838200" y="365125"/>
+            <a:off x="838200" y="708025"/>
             <a:ext cx="10515600" cy="1325563"/>
           </a:xfrm>
           <a:prstGeom prst="rect">
@@ -3171,7 +3031,7 @@
         </p:nvSpPr>
         <p:spPr>
           <a:xfrm>
-            <a:off x="838200" y="1825625"/>
+            <a:off x="838200" y="2168525"/>
             <a:ext cx="10515600" cy="4351338"/>
           </a:xfrm>
           <a:prstGeom prst="rect">
@@ -3238,7 +3098,7 @@
         </p:nvSpPr>
         <p:spPr>
           <a:xfrm>
-            <a:off x="838200" y="6356350"/>
+            <a:off x="838200" y="6699250"/>
             <a:ext cx="2743200" cy="365125"/>
           </a:xfrm>
           <a:prstGeom prst="rect">
@@ -3249,7 +3109,7 @@
           <a:bodyPr vert="horz" lIns="91440" tIns="45720" rIns="91440" bIns="45720" rtlCol="0" anchor="ctr"/>
           <a:lstStyle>
             <a:lvl1pPr algn="l">
-              <a:defRPr sz="1200">
+              <a:defRPr sz="960">
                 <a:solidFill>
                   <a:schemeClr val="tx1">
                     <a:tint val="75000"/>
@@ -3285,7 +3145,7 @@
         </p:nvSpPr>
         <p:spPr>
           <a:xfrm>
-            <a:off x="4038600" y="6356350"/>
+            <a:off x="4038600" y="6699250"/>
             <a:ext cx="4114800" cy="365125"/>
           </a:xfrm>
           <a:prstGeom prst="rect">
@@ -3296,7 +3156,7 @@
           <a:bodyPr vert="horz" lIns="91440" tIns="45720" rIns="91440" bIns="45720" rtlCol="0" anchor="ctr"/>
           <a:lstStyle>
             <a:lvl1pPr algn="ctr">
-              <a:defRPr sz="1200">
+              <a:defRPr sz="960">
                 <a:solidFill>
                   <a:schemeClr val="tx1">
                     <a:tint val="75000"/>
@@ -3306,53 +3166,6 @@
             </a:lvl1pPr>
           </a:lstStyle>
           <a:p>
-            <a:endParaRPr lang="en-US"/>
-          </a:p>
-        </p:txBody>
-      </p:sp>
-      <p:sp>
-        <p:nvSpPr>
-          <p:cNvPr id="6" name="Slide Number Placeholder 5">
-            <a:extLst>
-              <a:ext uri="{FF2B5EF4-FFF2-40B4-BE49-F238E27FC236}">
-                <a16:creationId xmlns:a16="http://schemas.microsoft.com/office/drawing/2014/main" id="{47440732-2CEF-4468-A12F-B9E7D8AB22EA}"/>
-              </a:ext>
-            </a:extLst>
-          </p:cNvPr>
-          <p:cNvSpPr>
-            <a:spLocks noGrp="1"/>
-          </p:cNvSpPr>
-          <p:nvPr>
-            <p:ph type="sldNum" sz="quarter" idx="4"/>
-          </p:nvPr>
-        </p:nvSpPr>
-        <p:spPr>
-          <a:xfrm>
-            <a:off x="8610600" y="6356350"/>
-            <a:ext cx="2743200" cy="365125"/>
-          </a:xfrm>
-          <a:prstGeom prst="rect">
-            <a:avLst/>
-          </a:prstGeom>
-        </p:spPr>
-        <p:txBody>
-          <a:bodyPr vert="horz" lIns="91440" tIns="45720" rIns="91440" bIns="45720" rtlCol="0" anchor="ctr"/>
-          <a:lstStyle>
-            <a:lvl1pPr algn="r">
-              <a:defRPr sz="1200">
-                <a:solidFill>
-                  <a:schemeClr val="tx1">
-                    <a:tint val="75000"/>
-                  </a:schemeClr>
-                </a:solidFill>
-              </a:defRPr>
-            </a:lvl1pPr>
-          </a:lstStyle>
-          <a:p>
-            <a:fld id="{4A609AEB-AA43-4F11-B5F7-17FA2DC3DBF4}" type="slidenum">
-              <a:rPr lang="en-US" smtClean="0"/>
-              <a:t>‹#›</a:t>
-            </a:fld>
             <a:endParaRPr lang="en-US"/>
           </a:p>
         </p:txBody>
@@ -3389,11 +3202,11 @@
           <a:spcPct val="0"/>
         </a:spcBef>
         <a:buNone/>
-        <a:defRPr sz="4400" kern="1200">
+        <a:defRPr sz="3520" kern="1200">
           <a:solidFill>
             <a:schemeClr val="tx1"/>
           </a:solidFill>
-          <a:latin typeface="+mj-lt"/>
+          <a:latin typeface="Arial"/>
           <a:ea typeface="+mj-ea"/>
           <a:cs typeface="+mj-cs"/>
         </a:defRPr>
@@ -3409,11 +3222,11 @@
         </a:spcBef>
         <a:buFont typeface="Arial" panose="020B0604020202020204" pitchFamily="34" charset="0"/>
         <a:buChar char="•"/>
-        <a:defRPr sz="2800" kern="1200">
+        <a:defRPr sz="2240" kern="1200">
           <a:solidFill>
             <a:schemeClr val="tx1"/>
           </a:solidFill>
-          <a:latin typeface="+mn-lt"/>
+          <a:latin typeface="Arial"/>
           <a:ea typeface="+mn-ea"/>
           <a:cs typeface="+mn-cs"/>
         </a:defRPr>
@@ -3427,11 +3240,11 @@
         </a:spcBef>
         <a:buFont typeface="Arial" panose="020B0604020202020204" pitchFamily="34" charset="0"/>
         <a:buChar char="•"/>
-        <a:defRPr sz="2400" kern="1200">
+        <a:defRPr sz="1920" kern="1200">
           <a:solidFill>
             <a:schemeClr val="tx1"/>
           </a:solidFill>
-          <a:latin typeface="+mn-lt"/>
+          <a:latin typeface="Arial"/>
           <a:ea typeface="+mn-ea"/>
           <a:cs typeface="+mn-cs"/>
         </a:defRPr>
@@ -3445,11 +3258,11 @@
         </a:spcBef>
         <a:buFont typeface="Arial" panose="020B0604020202020204" pitchFamily="34" charset="0"/>
         <a:buChar char="•"/>
-        <a:defRPr sz="2000" kern="1200">
+        <a:defRPr sz="1600" kern="1200">
           <a:solidFill>
             <a:schemeClr val="tx1"/>
           </a:solidFill>
-          <a:latin typeface="+mn-lt"/>
+          <a:latin typeface="Arial"/>
           <a:ea typeface="+mn-ea"/>
           <a:cs typeface="+mn-cs"/>
         </a:defRPr>
@@ -3463,11 +3276,11 @@
         </a:spcBef>
         <a:buFont typeface="Arial" panose="020B0604020202020204" pitchFamily="34" charset="0"/>
         <a:buChar char="•"/>
-        <a:defRPr sz="1800" kern="1200">
+        <a:defRPr sz="1440" kern="1200">
           <a:solidFill>
             <a:schemeClr val="tx1"/>
           </a:solidFill>
-          <a:latin typeface="+mn-lt"/>
+          <a:latin typeface="Arial"/>
           <a:ea typeface="+mn-ea"/>
           <a:cs typeface="+mn-cs"/>
         </a:defRPr>
@@ -3481,11 +3294,11 @@
         </a:spcBef>
         <a:buFont typeface="Arial" panose="020B0604020202020204" pitchFamily="34" charset="0"/>
         <a:buChar char="•"/>
-        <a:defRPr sz="1800" kern="1200">
+        <a:defRPr sz="1440" kern="1200">
           <a:solidFill>
             <a:schemeClr val="tx1"/>
           </a:solidFill>
-          <a:latin typeface="+mn-lt"/>
+          <a:latin typeface="Arial"/>
           <a:ea typeface="+mn-ea"/>
           <a:cs typeface="+mn-cs"/>
         </a:defRPr>
@@ -3499,11 +3312,11 @@
         </a:spcBef>
         <a:buFont typeface="Arial" panose="020B0604020202020204" pitchFamily="34" charset="0"/>
         <a:buChar char="•"/>
-        <a:defRPr sz="1800" kern="1200">
+        <a:defRPr sz="1440" kern="1200">
           <a:solidFill>
             <a:schemeClr val="tx1"/>
           </a:solidFill>
-          <a:latin typeface="+mn-lt"/>
+          <a:latin typeface="Arial"/>
           <a:ea typeface="+mn-ea"/>
           <a:cs typeface="+mn-cs"/>
         </a:defRPr>
@@ -3517,11 +3330,11 @@
         </a:spcBef>
         <a:buFont typeface="Arial" panose="020B0604020202020204" pitchFamily="34" charset="0"/>
         <a:buChar char="•"/>
-        <a:defRPr sz="1800" kern="1200">
+        <a:defRPr sz="1440" kern="1200">
           <a:solidFill>
             <a:schemeClr val="tx1"/>
           </a:solidFill>
-          <a:latin typeface="+mn-lt"/>
+          <a:latin typeface="Arial"/>
           <a:ea typeface="+mn-ea"/>
           <a:cs typeface="+mn-cs"/>
         </a:defRPr>
@@ -3535,11 +3348,11 @@
         </a:spcBef>
         <a:buFont typeface="Arial" panose="020B0604020202020204" pitchFamily="34" charset="0"/>
         <a:buChar char="•"/>
-        <a:defRPr sz="1800" kern="1200">
+        <a:defRPr sz="1440" kern="1200">
           <a:solidFill>
             <a:schemeClr val="tx1"/>
           </a:solidFill>
-          <a:latin typeface="+mn-lt"/>
+          <a:latin typeface="Arial"/>
           <a:ea typeface="+mn-ea"/>
           <a:cs typeface="+mn-cs"/>
         </a:defRPr>
@@ -3553,11 +3366,11 @@
         </a:spcBef>
         <a:buFont typeface="Arial" panose="020B0604020202020204" pitchFamily="34" charset="0"/>
         <a:buChar char="•"/>
-        <a:defRPr sz="1800" kern="1200">
+        <a:defRPr sz="1440" kern="1200">
           <a:solidFill>
             <a:schemeClr val="tx1"/>
           </a:solidFill>
-          <a:latin typeface="+mn-lt"/>
+          <a:latin typeface="Arial"/>
           <a:ea typeface="+mn-ea"/>
           <a:cs typeface="+mn-cs"/>
         </a:defRPr>
@@ -3568,91 +3381,91 @@
         <a:defRPr lang="en-US"/>
       </a:defPPr>
       <a:lvl1pPr marL="0" algn="l" defTabSz="914400" rtl="0" eaLnBrk="1" latinLnBrk="0" hangingPunct="1">
-        <a:defRPr sz="1800" kern="1200">
+        <a:defRPr sz="1440" kern="1200">
           <a:solidFill>
             <a:schemeClr val="tx1"/>
           </a:solidFill>
-          <a:latin typeface="+mn-lt"/>
+          <a:latin typeface="Arial"/>
           <a:ea typeface="+mn-ea"/>
           <a:cs typeface="+mn-cs"/>
         </a:defRPr>
       </a:lvl1pPr>
       <a:lvl2pPr marL="457200" algn="l" defTabSz="914400" rtl="0" eaLnBrk="1" latinLnBrk="0" hangingPunct="1">
-        <a:defRPr sz="1800" kern="1200">
+        <a:defRPr sz="1440" kern="1200">
           <a:solidFill>
             <a:schemeClr val="tx1"/>
           </a:solidFill>
-          <a:latin typeface="+mn-lt"/>
+          <a:latin typeface="Arial"/>
           <a:ea typeface="+mn-ea"/>
           <a:cs typeface="+mn-cs"/>
         </a:defRPr>
       </a:lvl2pPr>
       <a:lvl3pPr marL="914400" algn="l" defTabSz="914400" rtl="0" eaLnBrk="1" latinLnBrk="0" hangingPunct="1">
-        <a:defRPr sz="1800" kern="1200">
+        <a:defRPr sz="1440" kern="1200">
           <a:solidFill>
             <a:schemeClr val="tx1"/>
           </a:solidFill>
-          <a:latin typeface="+mn-lt"/>
+          <a:latin typeface="Arial"/>
           <a:ea typeface="+mn-ea"/>
           <a:cs typeface="+mn-cs"/>
         </a:defRPr>
       </a:lvl3pPr>
       <a:lvl4pPr marL="1371600" algn="l" defTabSz="914400" rtl="0" eaLnBrk="1" latinLnBrk="0" hangingPunct="1">
-        <a:defRPr sz="1800" kern="1200">
+        <a:defRPr sz="1440" kern="1200">
           <a:solidFill>
             <a:schemeClr val="tx1"/>
           </a:solidFill>
-          <a:latin typeface="+mn-lt"/>
+          <a:latin typeface="Arial"/>
           <a:ea typeface="+mn-ea"/>
           <a:cs typeface="+mn-cs"/>
         </a:defRPr>
       </a:lvl4pPr>
       <a:lvl5pPr marL="1828800" algn="l" defTabSz="914400" rtl="0" eaLnBrk="1" latinLnBrk="0" hangingPunct="1">
-        <a:defRPr sz="1800" kern="1200">
+        <a:defRPr sz="1440" kern="1200">
           <a:solidFill>
             <a:schemeClr val="tx1"/>
           </a:solidFill>
-          <a:latin typeface="+mn-lt"/>
+          <a:latin typeface="Arial"/>
           <a:ea typeface="+mn-ea"/>
           <a:cs typeface="+mn-cs"/>
         </a:defRPr>
       </a:lvl5pPr>
       <a:lvl6pPr marL="2286000" algn="l" defTabSz="914400" rtl="0" eaLnBrk="1" latinLnBrk="0" hangingPunct="1">
-        <a:defRPr sz="1800" kern="1200">
+        <a:defRPr sz="1440" kern="1200">
           <a:solidFill>
             <a:schemeClr val="tx1"/>
           </a:solidFill>
-          <a:latin typeface="+mn-lt"/>
+          <a:latin typeface="Arial"/>
           <a:ea typeface="+mn-ea"/>
           <a:cs typeface="+mn-cs"/>
         </a:defRPr>
       </a:lvl6pPr>
       <a:lvl7pPr marL="2743200" algn="l" defTabSz="914400" rtl="0" eaLnBrk="1" latinLnBrk="0" hangingPunct="1">
-        <a:defRPr sz="1800" kern="1200">
+        <a:defRPr sz="1440" kern="1200">
           <a:solidFill>
             <a:schemeClr val="tx1"/>
           </a:solidFill>
-          <a:latin typeface="+mn-lt"/>
+          <a:latin typeface="Arial"/>
           <a:ea typeface="+mn-ea"/>
           <a:cs typeface="+mn-cs"/>
         </a:defRPr>
       </a:lvl7pPr>
       <a:lvl8pPr marL="3200400" algn="l" defTabSz="914400" rtl="0" eaLnBrk="1" latinLnBrk="0" hangingPunct="1">
-        <a:defRPr sz="1800" kern="1200">
+        <a:defRPr sz="1440" kern="1200">
           <a:solidFill>
             <a:schemeClr val="tx1"/>
           </a:solidFill>
-          <a:latin typeface="+mn-lt"/>
+          <a:latin typeface="Arial"/>
           <a:ea typeface="+mn-ea"/>
           <a:cs typeface="+mn-cs"/>
         </a:defRPr>
       </a:lvl8pPr>
       <a:lvl9pPr marL="3657600" algn="l" defTabSz="914400" rtl="0" eaLnBrk="1" latinLnBrk="0" hangingPunct="1">
-        <a:defRPr sz="1800" kern="1200">
+        <a:defRPr sz="1440" kern="1200">
           <a:solidFill>
             <a:schemeClr val="tx1"/>
           </a:solidFill>
-          <a:latin typeface="+mn-lt"/>
+          <a:latin typeface="Arial"/>
           <a:ea typeface="+mn-ea"/>
           <a:cs typeface="+mn-cs"/>
         </a:defRPr>
@@ -3712,7 +3525,7 @@
         </p:nvSpPr>
         <p:spPr bwMode="ltGray">
           <a:xfrm>
-            <a:off x="336883" y="321176"/>
+            <a:off x="336883" y="664076"/>
             <a:ext cx="7174247" cy="5896743"/>
           </a:xfrm>
           <a:prstGeom prst="rect">
@@ -3774,7 +3587,7 @@
         </p:nvSpPr>
         <p:spPr>
           <a:xfrm>
-            <a:off x="821516" y="640263"/>
+            <a:off x="821516" y="983163"/>
             <a:ext cx="6204984" cy="1344975"/>
           </a:xfrm>
         </p:spPr>
@@ -3785,7 +3598,7 @@
           <a:lstStyle/>
           <a:p>
             <a:r>
-              <a:rPr lang="en-US" sz="4000"/>
+              <a:rPr lang="en-US" sz="3200"/>
               <a:t>Mixing = modulation</a:t>
             </a:r>
           </a:p>
@@ -3822,19 +3635,19 @@
               <a:lstStyle/>
               <a:p>
                 <a:r>
-                  <a:rPr lang="en-US" sz="2200"/>
+                  <a:rPr lang="en-US" sz="1760"/>
                   <a:t>A low pass signal (described by low frequencies) such as voice and video cannot be sent from New York to Seattle. </a:t>
                 </a:r>
               </a:p>
               <a:p>
                 <a:r>
-                  <a:rPr lang="en-US" sz="2200"/>
+                  <a:rPr lang="en-US" sz="1760"/>
                   <a:t>In fact, voice loses power </a:t>
                 </a:r>
                 <a14:m>
                   <m:oMath xmlns:m="http://schemas.openxmlformats.org/officeDocument/2006/math">
                     <m:r>
-                      <a:rPr lang="en-US" sz="2200" i="1">
+                      <a:rPr lang="en-US" sz="1760" i="1">
                         <a:latin typeface="Cambria Math" panose="02040503050406030204" pitchFamily="18" charset="0"/>
                         <a:ea typeface="Cambria Math" panose="02040503050406030204" pitchFamily="18" charset="0"/>
                       </a:rPr>
@@ -3843,7 +3656,7 @@
                     <m:f>
                       <m:fPr>
                         <m:ctrlPr>
-                          <a:rPr lang="en-US" sz="2200" i="1">
+                          <a:rPr lang="en-US" sz="1760" i="1">
                             <a:latin typeface="Cambria Math" panose="02040503050406030204" pitchFamily="18" charset="0"/>
                             <a:ea typeface="Cambria Math" panose="02040503050406030204" pitchFamily="18" charset="0"/>
                           </a:rPr>
@@ -3851,7 +3664,7 @@
                       </m:fPr>
                       <m:num>
                         <m:r>
-                          <a:rPr lang="en-US" sz="2200" b="0" i="1">
+                          <a:rPr lang="en-US" sz="1760" b="0" i="1">
                             <a:latin typeface="Cambria Math" panose="02040503050406030204" pitchFamily="18" charset="0"/>
                             <a:ea typeface="Cambria Math" panose="02040503050406030204" pitchFamily="18" charset="0"/>
                           </a:rPr>
@@ -3862,7 +3675,7 @@
                         <m:sSup>
                           <m:sSupPr>
                             <m:ctrlPr>
-                              <a:rPr lang="en-US" sz="2200" i="1">
+                              <a:rPr lang="en-US" sz="1760" i="1">
                                 <a:latin typeface="Cambria Math" panose="02040503050406030204" pitchFamily="18" charset="0"/>
                                 <a:ea typeface="Cambria Math" panose="02040503050406030204" pitchFamily="18" charset="0"/>
                               </a:rPr>
@@ -3870,7 +3683,7 @@
                           </m:sSupPr>
                           <m:e>
                             <m:r>
-                              <a:rPr lang="en-US" sz="2200" b="0" i="1">
+                              <a:rPr lang="en-US" sz="1760" b="0" i="1">
                                 <a:latin typeface="Cambria Math" panose="02040503050406030204" pitchFamily="18" charset="0"/>
                                 <a:ea typeface="Cambria Math" panose="02040503050406030204" pitchFamily="18" charset="0"/>
                               </a:rPr>
@@ -3879,7 +3692,7 @@
                           </m:e>
                           <m:sup>
                             <m:r>
-                              <a:rPr lang="en-US" sz="2200" b="0" i="1">
+                              <a:rPr lang="en-US" sz="1760" b="0" i="1">
                                 <a:latin typeface="Cambria Math" panose="02040503050406030204" pitchFamily="18" charset="0"/>
                                 <a:ea typeface="Cambria Math" panose="02040503050406030204" pitchFamily="18" charset="0"/>
                               </a:rPr>
@@ -3892,19 +3705,19 @@
                   </m:oMath>
                 </a14:m>
                 <a:r>
-                  <a:rPr lang="en-US" sz="2200"/>
+                  <a:rPr lang="en-US" sz="1760"/>
                   <a:t> (you cannot hear me speaking if you are 30 meters away)</a:t>
                 </a:r>
               </a:p>
               <a:p>
                 <a:r>
-                  <a:rPr lang="en-US" sz="2200"/>
+                  <a:rPr lang="en-US" sz="1760"/>
                   <a:t>The fact that voice dissipates indicates that the environment (air) is resistant to low frequencies. </a:t>
                 </a:r>
               </a:p>
               <a:p>
                 <a:r>
-                  <a:rPr lang="en-US" sz="2200"/>
+                  <a:rPr lang="en-US" sz="1760"/>
                   <a:t>We can transmit voice as is, but we will need an antenna of size 10-100 km.  </a:t>
                 </a:r>
               </a:p>
@@ -3982,7 +3795,7 @@
         </p:blipFill>
         <p:spPr>
           <a:xfrm>
-            <a:off x="7829551" y="306909"/>
+            <a:off x="7829551" y="649809"/>
             <a:ext cx="4042409" cy="2286000"/>
           </a:xfrm>
           <a:prstGeom prst="rect">
@@ -4017,7 +3830,7 @@
         </p:blipFill>
         <p:spPr>
           <a:xfrm>
-            <a:off x="7829551" y="2828925"/>
+            <a:off x="7829551" y="3171825"/>
             <a:ext cx="4042410" cy="3388994"/>
           </a:xfrm>
           <a:prstGeom prst="rect">
@@ -4027,47 +3840,202 @@
       </p:pic>
       <p:sp>
         <p:nvSpPr>
-          <p:cNvPr id="8" name="Slide Number Placeholder 7">
-            <a:extLst>
-              <a:ext uri="{FF2B5EF4-FFF2-40B4-BE49-F238E27FC236}">
-                <a16:creationId xmlns:a16="http://schemas.microsoft.com/office/drawing/2014/main" id="{728C9CC5-5B04-4C9B-A2CB-69DB47B44884}"/>
-              </a:ext>
-            </a:extLst>
-          </p:cNvPr>
-          <p:cNvSpPr>
-            <a:spLocks noGrp="1"/>
-          </p:cNvSpPr>
-          <p:nvPr>
-            <p:ph type="sldNum" sz="quarter" idx="12"/>
-          </p:nvPr>
+          <p:cNvPr id="21" name="DSPIRA 1"/>
+          <p:cNvSpPr>
+            <a:spLocks noGrp="1"/>
+          </p:cNvSpPr>
+          <p:nvPr/>
         </p:nvSpPr>
         <p:spPr>
           <a:xfrm>
-            <a:off x="8610600" y="6356350"/>
-            <a:ext cx="2743200" cy="365125"/>
+            <a:off x="0" y="0"/>
+            <a:ext cx="12192000" cy="342900"/>
           </a:xfrm>
+          <a:prstGeom prst="rect">
+            <a:avLst/>
+          </a:prstGeom>
+          <a:solidFill>
+            <a:srgbClr val="FFFFFF"/>
+          </a:solidFill>
+          <a:ln w="0">
+            <a:noFill/>
+          </a:ln>
         </p:spPr>
+      </p:sp>
+      <p:sp>
+        <p:nvSpPr>
+          <p:cNvPr id="22" name="DSPIRA 2"/>
+          <p:cNvSpPr>
+            <a:spLocks noGrp="1"/>
+          </p:cNvSpPr>
+          <p:nvPr/>
+        </p:nvSpPr>
+        <p:spPr>
+          <a:xfrm>
+            <a:off x="0" y="7200900"/>
+            <a:ext cx="12192000" cy="342900"/>
+          </a:xfrm>
+          <a:prstGeom prst="rect">
+            <a:avLst/>
+          </a:prstGeom>
+          <a:solidFill>
+            <a:srgbClr val="FFFFFF"/>
+          </a:solidFill>
+          <a:ln w="0">
+            <a:noFill/>
+          </a:ln>
+        </p:spPr>
+      </p:sp>
+      <p:sp>
+        <p:nvSpPr>
+          <p:cNvPr id="23" name="DSPIRA 3"/>
+          <p:cNvSpPr>
+            <a:spLocks noGrp="1"/>
+          </p:cNvSpPr>
+          <p:nvPr/>
+        </p:nvSpPr>
+        <p:spPr>
+          <a:xfrm>
+            <a:off x="228600" y="76200"/>
+            <a:ext cx="4762500" cy="228600"/>
+          </a:xfrm>
+          <a:prstGeom prst="rect">
+            <a:avLst/>
+          </a:prstGeom>
+          <a:noFill/>
+          <a:ln w="0">
+            <a:noFill/>
+          </a:ln>
+        </p:spPr>
         <p:txBody>
           <a:bodyPr>
-            <a:normAutofit/>
+            <a:noAutofit/>
           </a:bodyPr>
           <a:lstStyle/>
           <a:p>
             <a:pPr>
-              <a:spcAft>
-                <a:spcPts val="600"/>
-              </a:spcAft>
+              <a:defRPr sz="1200" b="1">
+                <a:solidFill>
+                  <a:srgbClr val="002855"/>
+                </a:solidFill>
+                <a:latin typeface="Arial"/>
+                <a:ea typeface="Arial"/>
+                <a:cs typeface="Arial"/>
+              </a:defRPr>
             </a:pPr>
-            <a:fld id="{4A609AEB-AA43-4F11-B5F7-17FA2DC3DBF4}" type="slidenum">
-              <a:rPr lang="en-US" smtClean="0"/>
-              <a:pPr>
-                <a:spcAft>
-                  <a:spcPts val="600"/>
-                </a:spcAft>
-              </a:pPr>
-              <a:t>1</a:t>
-            </a:fld>
-            <a:endParaRPr lang="en-US"/>
+            <a:r>
+              <a:rPr sz="1200" b="1">
+                <a:solidFill>
+                  <a:srgbClr val="002855"/>
+                </a:solidFill>
+                <a:latin typeface="Arial"/>
+                <a:ea typeface="Arial"/>
+                <a:cs typeface="Arial"/>
+              </a:rPr>
+              <a:t>WVU DSPIRA</a:t>
+            </a:r>
+          </a:p>
+        </p:txBody>
+      </p:sp>
+      <p:sp>
+        <p:nvSpPr>
+          <p:cNvPr id="24" name="DSPIRA 4"/>
+          <p:cNvSpPr>
+            <a:spLocks noGrp="1"/>
+          </p:cNvSpPr>
+          <p:nvPr/>
+        </p:nvSpPr>
+        <p:spPr>
+          <a:xfrm>
+            <a:off x="228600" y="7277100"/>
+            <a:ext cx="6667500" cy="228600"/>
+          </a:xfrm>
+          <a:prstGeom prst="rect">
+            <a:avLst/>
+          </a:prstGeom>
+          <a:noFill/>
+          <a:ln w="0">
+            <a:noFill/>
+          </a:ln>
+        </p:spPr>
+        <p:txBody>
+          <a:bodyPr>
+            <a:noAutofit/>
+          </a:bodyPr>
+          <a:lstStyle/>
+          <a:p>
+            <a:pPr>
+              <a:defRPr sz="900" b="0">
+                <a:solidFill>
+                  <a:srgbClr val="002855"/>
+                </a:solidFill>
+                <a:latin typeface="Arial"/>
+                <a:ea typeface="Arial"/>
+                <a:cs typeface="Arial"/>
+              </a:defRPr>
+            </a:pPr>
+            <a:r>
+              <a:rPr sz="900" b="0">
+                <a:solidFill>
+                  <a:srgbClr val="002855"/>
+                </a:solidFill>
+                <a:latin typeface="Arial"/>
+                <a:ea typeface="Arial"/>
+                <a:cs typeface="Arial"/>
+              </a:rPr>
+              <a:t>wvurail.org/dspira</a:t>
+            </a:r>
+          </a:p>
+        </p:txBody>
+      </p:sp>
+      <p:sp>
+        <p:nvSpPr>
+          <p:cNvPr id="25" name="DSPIRA 5"/>
+          <p:cNvSpPr>
+            <a:spLocks noGrp="1"/>
+          </p:cNvSpPr>
+          <p:nvPr/>
+        </p:nvSpPr>
+        <p:spPr>
+          <a:xfrm>
+            <a:off x="11191875" y="7277100"/>
+            <a:ext cx="762000" cy="228600"/>
+          </a:xfrm>
+          <a:prstGeom prst="rect">
+            <a:avLst/>
+          </a:prstGeom>
+          <a:noFill/>
+          <a:ln w="0">
+            <a:noFill/>
+          </a:ln>
+        </p:spPr>
+        <p:txBody>
+          <a:bodyPr>
+            <a:noAutofit/>
+          </a:bodyPr>
+          <a:lstStyle/>
+          <a:p>
+            <a:pPr>
+              <a:defRPr sz="900" b="0">
+                <a:solidFill>
+                  <a:srgbClr val="002855"/>
+                </a:solidFill>
+                <a:latin typeface="Arial"/>
+                <a:ea typeface="Arial"/>
+                <a:cs typeface="Arial"/>
+              </a:defRPr>
+            </a:pPr>
+            <a:r>
+              <a:rPr sz="900" b="0">
+                <a:solidFill>
+                  <a:srgbClr val="002855"/>
+                </a:solidFill>
+                <a:latin typeface="Arial"/>
+                <a:ea typeface="Arial"/>
+                <a:cs typeface="Arial"/>
+              </a:rPr>
+              <a:t>1 of 6</a:t>
+            </a:r>
           </a:p>
         </p:txBody>
       </p:sp>
@@ -4127,7 +4095,7 @@
         </p:nvSpPr>
         <p:spPr>
           <a:xfrm>
-            <a:off x="655320" y="365125"/>
+            <a:off x="655320" y="708025"/>
             <a:ext cx="5120114" cy="1692794"/>
           </a:xfrm>
         </p:spPr>
@@ -4169,7 +4137,7 @@
         </p:nvCxnSpPr>
         <p:spPr>
           <a:xfrm>
-            <a:off x="655320" y="2316480"/>
+            <a:off x="655320" y="2659380"/>
             <a:ext cx="4572000" cy="0"/>
           </a:xfrm>
           <a:prstGeom prst="straightConnector1">
@@ -4215,7 +4183,7 @@
         </p:nvSpPr>
         <p:spPr>
           <a:xfrm>
-            <a:off x="655322" y="2575034"/>
+            <a:off x="655322" y="2917934"/>
             <a:ext cx="4687860" cy="3462228"/>
           </a:xfrm>
         </p:spPr>
@@ -4226,25 +4194,25 @@
           <a:lstStyle/>
           <a:p>
             <a:r>
-              <a:rPr lang="en-US" sz="2400" dirty="0"/>
+              <a:rPr lang="en-US" sz="1920" dirty="0"/>
               <a:t>Air (channel) acts as a band pass filter. </a:t>
             </a:r>
           </a:p>
           <a:p>
             <a:r>
-              <a:rPr lang="en-US" sz="2400" dirty="0"/>
+              <a:rPr lang="en-US" sz="1920" dirty="0"/>
               <a:t>Voice, video, etc. are low pass signals.  </a:t>
             </a:r>
           </a:p>
           <a:p>
             <a:r>
-              <a:rPr lang="en-US" sz="2400" dirty="0"/>
+              <a:rPr lang="en-US" sz="1920" dirty="0"/>
               <a:t>To pass voice over channel, we need to translate voice to medium frequency. </a:t>
             </a:r>
           </a:p>
           <a:p>
             <a:r>
-              <a:rPr lang="en-US" sz="2400" dirty="0"/>
+              <a:rPr lang="en-US" sz="1920" dirty="0"/>
               <a:t>This is done through modulation (mixing). </a:t>
             </a:r>
           </a:p>
@@ -4277,7 +4245,7 @@
         </p:blipFill>
         <p:spPr>
           <a:xfrm>
-            <a:off x="5878849" y="10"/>
+            <a:off x="5878849" y="342910"/>
             <a:ext cx="6313150" cy="6857987"/>
           </a:xfrm>
           <a:custGeom>
@@ -4358,30 +4326,202 @@
       </p:pic>
       <p:sp>
         <p:nvSpPr>
-          <p:cNvPr id="10" name="Slide Number Placeholder 9">
-            <a:extLst>
-              <a:ext uri="{FF2B5EF4-FFF2-40B4-BE49-F238E27FC236}">
-                <a16:creationId xmlns:a16="http://schemas.microsoft.com/office/drawing/2014/main" id="{E4A5DFB3-AB98-478B-A59D-974E87443940}"/>
-              </a:ext>
-            </a:extLst>
-          </p:cNvPr>
-          <p:cNvSpPr>
-            <a:spLocks noGrp="1"/>
-          </p:cNvSpPr>
-          <p:nvPr>
-            <p:ph type="sldNum" sz="quarter" idx="12"/>
-          </p:nvPr>
-        </p:nvSpPr>
-        <p:spPr/>
-        <p:txBody>
-          <a:bodyPr/>
+          <p:cNvPr id="15" name="DSPIRA 1"/>
+          <p:cNvSpPr>
+            <a:spLocks noGrp="1"/>
+          </p:cNvSpPr>
+          <p:nvPr/>
+        </p:nvSpPr>
+        <p:spPr>
+          <a:xfrm>
+            <a:off x="0" y="0"/>
+            <a:ext cx="12192000" cy="342900"/>
+          </a:xfrm>
+          <a:prstGeom prst="rect">
+            <a:avLst/>
+          </a:prstGeom>
+          <a:solidFill>
+            <a:srgbClr val="FFFFFF"/>
+          </a:solidFill>
+          <a:ln w="0">
+            <a:noFill/>
+          </a:ln>
+        </p:spPr>
+      </p:sp>
+      <p:sp>
+        <p:nvSpPr>
+          <p:cNvPr id="16" name="DSPIRA 2"/>
+          <p:cNvSpPr>
+            <a:spLocks noGrp="1"/>
+          </p:cNvSpPr>
+          <p:nvPr/>
+        </p:nvSpPr>
+        <p:spPr>
+          <a:xfrm>
+            <a:off x="0" y="7200900"/>
+            <a:ext cx="12192000" cy="342900"/>
+          </a:xfrm>
+          <a:prstGeom prst="rect">
+            <a:avLst/>
+          </a:prstGeom>
+          <a:solidFill>
+            <a:srgbClr val="FFFFFF"/>
+          </a:solidFill>
+          <a:ln w="0">
+            <a:noFill/>
+          </a:ln>
+        </p:spPr>
+      </p:sp>
+      <p:sp>
+        <p:nvSpPr>
+          <p:cNvPr id="17" name="DSPIRA 3"/>
+          <p:cNvSpPr>
+            <a:spLocks noGrp="1"/>
+          </p:cNvSpPr>
+          <p:nvPr/>
+        </p:nvSpPr>
+        <p:spPr>
+          <a:xfrm>
+            <a:off x="228600" y="76200"/>
+            <a:ext cx="4762500" cy="228600"/>
+          </a:xfrm>
+          <a:prstGeom prst="rect">
+            <a:avLst/>
+          </a:prstGeom>
+          <a:noFill/>
+          <a:ln w="0">
+            <a:noFill/>
+          </a:ln>
+        </p:spPr>
+        <p:txBody>
+          <a:bodyPr>
+            <a:noAutofit/>
+          </a:bodyPr>
           <a:lstStyle/>
           <a:p>
-            <a:fld id="{4A609AEB-AA43-4F11-B5F7-17FA2DC3DBF4}" type="slidenum">
-              <a:rPr lang="en-US" smtClean="0"/>
-              <a:t>2</a:t>
-            </a:fld>
-            <a:endParaRPr lang="en-US"/>
+            <a:pPr>
+              <a:defRPr sz="1200" b="1">
+                <a:solidFill>
+                  <a:srgbClr val="002855"/>
+                </a:solidFill>
+                <a:latin typeface="Arial"/>
+                <a:ea typeface="Arial"/>
+                <a:cs typeface="Arial"/>
+              </a:defRPr>
+            </a:pPr>
+            <a:r>
+              <a:rPr sz="1200" b="1">
+                <a:solidFill>
+                  <a:srgbClr val="002855"/>
+                </a:solidFill>
+                <a:latin typeface="Arial"/>
+                <a:ea typeface="Arial"/>
+                <a:cs typeface="Arial"/>
+              </a:rPr>
+              <a:t>WVU DSPIRA</a:t>
+            </a:r>
+          </a:p>
+        </p:txBody>
+      </p:sp>
+      <p:sp>
+        <p:nvSpPr>
+          <p:cNvPr id="18" name="DSPIRA 4"/>
+          <p:cNvSpPr>
+            <a:spLocks noGrp="1"/>
+          </p:cNvSpPr>
+          <p:nvPr/>
+        </p:nvSpPr>
+        <p:spPr>
+          <a:xfrm>
+            <a:off x="228600" y="7277100"/>
+            <a:ext cx="6667500" cy="228600"/>
+          </a:xfrm>
+          <a:prstGeom prst="rect">
+            <a:avLst/>
+          </a:prstGeom>
+          <a:noFill/>
+          <a:ln w="0">
+            <a:noFill/>
+          </a:ln>
+        </p:spPr>
+        <p:txBody>
+          <a:bodyPr>
+            <a:noAutofit/>
+          </a:bodyPr>
+          <a:lstStyle/>
+          <a:p>
+            <a:pPr>
+              <a:defRPr sz="900" b="0">
+                <a:solidFill>
+                  <a:srgbClr val="002855"/>
+                </a:solidFill>
+                <a:latin typeface="Arial"/>
+                <a:ea typeface="Arial"/>
+                <a:cs typeface="Arial"/>
+              </a:defRPr>
+            </a:pPr>
+            <a:r>
+              <a:rPr sz="900" b="0">
+                <a:solidFill>
+                  <a:srgbClr val="002855"/>
+                </a:solidFill>
+                <a:latin typeface="Arial"/>
+                <a:ea typeface="Arial"/>
+                <a:cs typeface="Arial"/>
+              </a:rPr>
+              <a:t>wvurail.org/dspira</a:t>
+            </a:r>
+          </a:p>
+        </p:txBody>
+      </p:sp>
+      <p:sp>
+        <p:nvSpPr>
+          <p:cNvPr id="19" name="DSPIRA 5"/>
+          <p:cNvSpPr>
+            <a:spLocks noGrp="1"/>
+          </p:cNvSpPr>
+          <p:nvPr/>
+        </p:nvSpPr>
+        <p:spPr>
+          <a:xfrm>
+            <a:off x="11191875" y="7277100"/>
+            <a:ext cx="762000" cy="228600"/>
+          </a:xfrm>
+          <a:prstGeom prst="rect">
+            <a:avLst/>
+          </a:prstGeom>
+          <a:noFill/>
+          <a:ln w="0">
+            <a:noFill/>
+          </a:ln>
+        </p:spPr>
+        <p:txBody>
+          <a:bodyPr>
+            <a:noAutofit/>
+          </a:bodyPr>
+          <a:lstStyle/>
+          <a:p>
+            <a:pPr>
+              <a:defRPr sz="900" b="0">
+                <a:solidFill>
+                  <a:srgbClr val="002855"/>
+                </a:solidFill>
+                <a:latin typeface="Arial"/>
+                <a:ea typeface="Arial"/>
+                <a:cs typeface="Arial"/>
+              </a:defRPr>
+            </a:pPr>
+            <a:r>
+              <a:rPr sz="900" b="0">
+                <a:solidFill>
+                  <a:srgbClr val="002855"/>
+                </a:solidFill>
+                <a:latin typeface="Arial"/>
+                <a:ea typeface="Arial"/>
+                <a:cs typeface="Arial"/>
+              </a:rPr>
+              <a:t>2 of 6</a:t>
+            </a:r>
           </a:p>
         </p:txBody>
       </p:sp>
@@ -4461,7 +4601,7 @@
         </p:nvSpPr>
         <p:spPr>
           <a:xfrm>
-            <a:off x="838200" y="1825625"/>
+            <a:off x="838200" y="2168525"/>
             <a:ext cx="5181600" cy="487807"/>
           </a:xfrm>
         </p:spPr>
@@ -4940,7 +5080,7 @@
         </p:blipFill>
         <p:spPr>
           <a:xfrm>
-            <a:off x="3266363" y="1825625"/>
+            <a:off x="3266363" y="2168525"/>
             <a:ext cx="7341770" cy="1746400"/>
           </a:xfrm>
           <a:prstGeom prst="rect">
@@ -4950,30 +5090,202 @@
       </p:pic>
       <p:sp>
         <p:nvSpPr>
-          <p:cNvPr id="6" name="Slide Number Placeholder 5">
-            <a:extLst>
-              <a:ext uri="{FF2B5EF4-FFF2-40B4-BE49-F238E27FC236}">
-                <a16:creationId xmlns:a16="http://schemas.microsoft.com/office/drawing/2014/main" id="{290D69AA-1907-41AE-B8C2-689FB4EB84EF}"/>
-              </a:ext>
-            </a:extLst>
-          </p:cNvPr>
-          <p:cNvSpPr>
-            <a:spLocks noGrp="1"/>
-          </p:cNvSpPr>
-          <p:nvPr>
-            <p:ph type="sldNum" sz="quarter" idx="12"/>
-          </p:nvPr>
-        </p:nvSpPr>
-        <p:spPr/>
-        <p:txBody>
-          <a:bodyPr/>
+          <p:cNvPr id="6" name="DSPIRA 1"/>
+          <p:cNvSpPr>
+            <a:spLocks noGrp="1"/>
+          </p:cNvSpPr>
+          <p:nvPr/>
+        </p:nvSpPr>
+        <p:spPr>
+          <a:xfrm>
+            <a:off x="0" y="0"/>
+            <a:ext cx="12192000" cy="342900"/>
+          </a:xfrm>
+          <a:prstGeom prst="rect">
+            <a:avLst/>
+          </a:prstGeom>
+          <a:solidFill>
+            <a:srgbClr val="FFFFFF"/>
+          </a:solidFill>
+          <a:ln w="0">
+            <a:noFill/>
+          </a:ln>
+        </p:spPr>
+      </p:sp>
+      <p:sp>
+        <p:nvSpPr>
+          <p:cNvPr id="7" name="DSPIRA 2"/>
+          <p:cNvSpPr>
+            <a:spLocks noGrp="1"/>
+          </p:cNvSpPr>
+          <p:nvPr/>
+        </p:nvSpPr>
+        <p:spPr>
+          <a:xfrm>
+            <a:off x="0" y="7200900"/>
+            <a:ext cx="12192000" cy="342900"/>
+          </a:xfrm>
+          <a:prstGeom prst="rect">
+            <a:avLst/>
+          </a:prstGeom>
+          <a:solidFill>
+            <a:srgbClr val="FFFFFF"/>
+          </a:solidFill>
+          <a:ln w="0">
+            <a:noFill/>
+          </a:ln>
+        </p:spPr>
+      </p:sp>
+      <p:sp>
+        <p:nvSpPr>
+          <p:cNvPr id="8" name="DSPIRA 3"/>
+          <p:cNvSpPr>
+            <a:spLocks noGrp="1"/>
+          </p:cNvSpPr>
+          <p:nvPr/>
+        </p:nvSpPr>
+        <p:spPr>
+          <a:xfrm>
+            <a:off x="228600" y="76200"/>
+            <a:ext cx="4762500" cy="228600"/>
+          </a:xfrm>
+          <a:prstGeom prst="rect">
+            <a:avLst/>
+          </a:prstGeom>
+          <a:noFill/>
+          <a:ln w="0">
+            <a:noFill/>
+          </a:ln>
+        </p:spPr>
+        <p:txBody>
+          <a:bodyPr>
+            <a:noAutofit/>
+          </a:bodyPr>
           <a:lstStyle/>
           <a:p>
-            <a:fld id="{4A609AEB-AA43-4F11-B5F7-17FA2DC3DBF4}" type="slidenum">
-              <a:rPr lang="en-US" smtClean="0"/>
-              <a:t>3</a:t>
-            </a:fld>
-            <a:endParaRPr lang="en-US"/>
+            <a:pPr>
+              <a:defRPr sz="1200" b="1">
+                <a:solidFill>
+                  <a:srgbClr val="002855"/>
+                </a:solidFill>
+                <a:latin typeface="Arial"/>
+                <a:ea typeface="Arial"/>
+                <a:cs typeface="Arial"/>
+              </a:defRPr>
+            </a:pPr>
+            <a:r>
+              <a:rPr sz="1200" b="1">
+                <a:solidFill>
+                  <a:srgbClr val="002855"/>
+                </a:solidFill>
+                <a:latin typeface="Arial"/>
+                <a:ea typeface="Arial"/>
+                <a:cs typeface="Arial"/>
+              </a:rPr>
+              <a:t>WVU DSPIRA</a:t>
+            </a:r>
+          </a:p>
+        </p:txBody>
+      </p:sp>
+      <p:sp>
+        <p:nvSpPr>
+          <p:cNvPr id="9" name="DSPIRA 4"/>
+          <p:cNvSpPr>
+            <a:spLocks noGrp="1"/>
+          </p:cNvSpPr>
+          <p:nvPr/>
+        </p:nvSpPr>
+        <p:spPr>
+          <a:xfrm>
+            <a:off x="228600" y="7277100"/>
+            <a:ext cx="6667500" cy="228600"/>
+          </a:xfrm>
+          <a:prstGeom prst="rect">
+            <a:avLst/>
+          </a:prstGeom>
+          <a:noFill/>
+          <a:ln w="0">
+            <a:noFill/>
+          </a:ln>
+        </p:spPr>
+        <p:txBody>
+          <a:bodyPr>
+            <a:noAutofit/>
+          </a:bodyPr>
+          <a:lstStyle/>
+          <a:p>
+            <a:pPr>
+              <a:defRPr sz="900" b="0">
+                <a:solidFill>
+                  <a:srgbClr val="002855"/>
+                </a:solidFill>
+                <a:latin typeface="Arial"/>
+                <a:ea typeface="Arial"/>
+                <a:cs typeface="Arial"/>
+              </a:defRPr>
+            </a:pPr>
+            <a:r>
+              <a:rPr sz="900" b="0">
+                <a:solidFill>
+                  <a:srgbClr val="002855"/>
+                </a:solidFill>
+                <a:latin typeface="Arial"/>
+                <a:ea typeface="Arial"/>
+                <a:cs typeface="Arial"/>
+              </a:rPr>
+              <a:t>wvurail.org/dspira</a:t>
+            </a:r>
+          </a:p>
+        </p:txBody>
+      </p:sp>
+      <p:sp>
+        <p:nvSpPr>
+          <p:cNvPr id="10" name="DSPIRA 5"/>
+          <p:cNvSpPr>
+            <a:spLocks noGrp="1"/>
+          </p:cNvSpPr>
+          <p:nvPr/>
+        </p:nvSpPr>
+        <p:spPr>
+          <a:xfrm>
+            <a:off x="11191875" y="7277100"/>
+            <a:ext cx="762000" cy="228600"/>
+          </a:xfrm>
+          <a:prstGeom prst="rect">
+            <a:avLst/>
+          </a:prstGeom>
+          <a:noFill/>
+          <a:ln w="0">
+            <a:noFill/>
+          </a:ln>
+        </p:spPr>
+        <p:txBody>
+          <a:bodyPr>
+            <a:noAutofit/>
+          </a:bodyPr>
+          <a:lstStyle/>
+          <a:p>
+            <a:pPr>
+              <a:defRPr sz="900" b="0">
+                <a:solidFill>
+                  <a:srgbClr val="002855"/>
+                </a:solidFill>
+                <a:latin typeface="Arial"/>
+                <a:ea typeface="Arial"/>
+                <a:cs typeface="Arial"/>
+              </a:defRPr>
+            </a:pPr>
+            <a:r>
+              <a:rPr sz="900" b="0">
+                <a:solidFill>
+                  <a:srgbClr val="002855"/>
+                </a:solidFill>
+                <a:latin typeface="Arial"/>
+                <a:ea typeface="Arial"/>
+                <a:cs typeface="Arial"/>
+              </a:rPr>
+              <a:t>3 of 6</a:t>
+            </a:r>
           </a:p>
         </p:txBody>
       </p:sp>
@@ -5040,7 +5352,7 @@
         </p:nvSpPr>
         <p:spPr>
           <a:xfrm>
-            <a:off x="0" y="4572457"/>
+            <a:off x="0" y="4915357"/>
             <a:ext cx="12188952" cy="2285543"/>
           </a:xfrm>
           <a:prstGeom prst="rect">
@@ -5093,7 +5405,7 @@
               <a:tabLst/>
               <a:defRPr/>
             </a:pPr>
-            <a:endParaRPr kumimoji="0" lang="en-US" sz="1800" b="0" i="0" u="none" strike="noStrike" kern="1200" cap="none" spc="0" normalizeH="0" baseline="0" noProof="0">
+            <a:endParaRPr kumimoji="0" lang="en-US" sz="1440" b="0" i="0" u="none" strike="noStrike" kern="1200" cap="none" spc="0" normalizeH="0" baseline="0" noProof="0">
               <a:ln>
                 <a:noFill/>
               </a:ln>
@@ -5103,7 +5415,7 @@
               <a:effectLst/>
               <a:uLnTx/>
               <a:uFillTx/>
-              <a:latin typeface="Tw Cen MT" panose="020B0602020104020603"/>
+              <a:latin typeface="Arial" panose="020B0602020104020603"/>
               <a:ea typeface="+mn-ea"/>
               <a:cs typeface="+mn-cs"/>
             </a:endParaRPr>
@@ -5128,7 +5440,7 @@
         </p:nvSpPr>
         <p:spPr>
           <a:xfrm>
-            <a:off x="634276" y="4892358"/>
+            <a:off x="634276" y="5235258"/>
             <a:ext cx="3766272" cy="1325563"/>
           </a:xfrm>
         </p:spPr>
@@ -5140,11 +5452,11 @@
           <a:p>
             <a:pPr algn="r"/>
             <a:r>
-              <a:rPr lang="en-US" sz="2400" kern="1200">
+              <a:rPr lang="en-US" sz="1920" kern="1200">
                 <a:solidFill>
                   <a:schemeClr val="bg1"/>
                 </a:solidFill>
-                <a:latin typeface="+mj-lt"/>
+                <a:latin typeface="Arial"/>
                 <a:ea typeface="+mj-ea"/>
                 <a:cs typeface="+mj-cs"/>
               </a:rPr>
@@ -5184,7 +5496,7 @@
               <a:lstStyle/>
               <a:p>
                 <a:r>
-                  <a:rPr lang="en-US" sz="1700">
+                  <a:rPr lang="en-US" sz="1360">
                     <a:solidFill>
                       <a:schemeClr val="bg1"/>
                     </a:solidFill>
@@ -5199,7 +5511,7 @@
                     <m:sSub>
                       <m:sSubPr>
                         <m:ctrlPr>
-                          <a:rPr lang="en-US" sz="1700" i="1">
+                          <a:rPr lang="en-US" sz="1360" i="1">
                             <a:solidFill>
                               <a:schemeClr val="bg1"/>
                             </a:solidFill>
@@ -5209,7 +5521,7 @@
                       </m:sSubPr>
                       <m:e>
                         <m:r>
-                          <a:rPr lang="en-US" sz="1700" b="0" i="1">
+                          <a:rPr lang="en-US" sz="1360" b="0" i="1">
                             <a:solidFill>
                               <a:schemeClr val="bg1"/>
                             </a:solidFill>
@@ -5220,7 +5532,7 @@
                       </m:e>
                       <m:sub>
                         <m:r>
-                          <a:rPr lang="en-US" sz="1700" b="0" i="1">
+                          <a:rPr lang="en-US" sz="1360" b="0" i="1">
                             <a:solidFill>
                               <a:schemeClr val="bg1"/>
                             </a:solidFill>
@@ -5231,7 +5543,7 @@
                       </m:sub>
                     </m:sSub>
                     <m:r>
-                      <a:rPr lang="en-US" sz="1700" b="0" i="1">
+                      <a:rPr lang="en-US" sz="1360" b="0" i="1">
                         <a:solidFill>
                           <a:schemeClr val="bg1"/>
                         </a:solidFill>
@@ -5240,7 +5552,7 @@
                       <m:t>(</m:t>
                     </m:r>
                     <m:r>
-                      <a:rPr lang="en-US" sz="1700" b="0" i="1">
+                      <a:rPr lang="en-US" sz="1360" b="0" i="1">
                         <a:solidFill>
                           <a:schemeClr val="bg1"/>
                         </a:solidFill>
@@ -5249,7 +5561,7 @@
                       <m:t>𝑡</m:t>
                     </m:r>
                     <m:r>
-                      <a:rPr lang="en-US" sz="1700" b="0" i="1">
+                      <a:rPr lang="en-US" sz="1360" b="0" i="1">
                         <a:solidFill>
                           <a:schemeClr val="bg1"/>
                         </a:solidFill>
@@ -5261,7 +5573,7 @@
                       <m:rPr>
                         <m:sty m:val="p"/>
                       </m:rPr>
-                      <a:rPr lang="en-US" sz="1700" b="0" i="0">
+                      <a:rPr lang="en-US" sz="1360" b="0" i="0">
                         <a:solidFill>
                           <a:schemeClr val="bg1"/>
                         </a:solidFill>
@@ -5270,7 +5582,7 @@
                       <m:t>cos</m:t>
                     </m:r>
                     <m:r>
-                      <a:rPr lang="en-US" sz="1700" b="0" i="1">
+                      <a:rPr lang="en-US" sz="1360" b="0" i="1">
                         <a:solidFill>
                           <a:schemeClr val="bg1"/>
                         </a:solidFill>
@@ -5279,7 +5591,7 @@
                       <m:t>⁡(2</m:t>
                     </m:r>
                     <m:r>
-                      <a:rPr lang="en-US" sz="1700" b="0" i="1">
+                      <a:rPr lang="en-US" sz="1360" b="0" i="1">
                         <a:solidFill>
                           <a:schemeClr val="bg1"/>
                         </a:solidFill>
@@ -5290,7 +5602,7 @@
                     <m:sSub>
                       <m:sSubPr>
                         <m:ctrlPr>
-                          <a:rPr lang="en-US" sz="1700" b="0" i="1">
+                          <a:rPr lang="en-US" sz="1360" b="0" i="1">
                             <a:solidFill>
                               <a:schemeClr val="bg1"/>
                             </a:solidFill>
@@ -5300,7 +5612,7 @@
                       </m:sSubPr>
                       <m:e>
                         <m:r>
-                          <a:rPr lang="en-US" sz="1700" b="0" i="1">
+                          <a:rPr lang="en-US" sz="1360" b="0" i="1">
                             <a:solidFill>
                               <a:schemeClr val="bg1"/>
                             </a:solidFill>
@@ -5311,7 +5623,7 @@
                       </m:e>
                       <m:sub>
                         <m:r>
-                          <a:rPr lang="en-US" sz="1700" b="0" i="1">
+                          <a:rPr lang="en-US" sz="1360" b="0" i="1">
                             <a:solidFill>
                               <a:schemeClr val="bg1"/>
                             </a:solidFill>
@@ -5322,7 +5634,7 @@
                       </m:sub>
                     </m:sSub>
                     <m:r>
-                      <a:rPr lang="en-US" sz="1700" b="0" i="1">
+                      <a:rPr lang="en-US" sz="1360" b="0" i="1">
                         <a:solidFill>
                           <a:schemeClr val="bg1"/>
                         </a:solidFill>
@@ -5331,7 +5643,7 @@
                       <m:t>𝑡</m:t>
                     </m:r>
                     <m:r>
-                      <a:rPr lang="en-US" sz="1700" b="0" i="1">
+                      <a:rPr lang="en-US" sz="1360" b="0" i="1">
                         <a:solidFill>
                           <a:schemeClr val="bg1"/>
                         </a:solidFill>
@@ -5341,7 +5653,7 @@
                     </m:r>
                   </m:oMath>
                 </a14:m>
-                <a:endParaRPr lang="en-US" sz="1700">
+                <a:endParaRPr lang="en-US" sz="1360">
                   <a:solidFill>
                     <a:schemeClr val="bg1"/>
                   </a:solidFill>
@@ -5349,7 +5661,7 @@
               </a:p>
               <a:p>
                 <a:r>
-                  <a:rPr lang="en-US" sz="1700">
+                  <a:rPr lang="en-US" sz="1360">
                     <a:solidFill>
                       <a:schemeClr val="bg1"/>
                     </a:solidFill>
@@ -5361,7 +5673,7 @@
                     <m:sSub>
                       <m:sSubPr>
                         <m:ctrlPr>
-                          <a:rPr lang="en-US" sz="1700" i="1">
+                          <a:rPr lang="en-US" sz="1360" i="1">
                             <a:solidFill>
                               <a:schemeClr val="bg1"/>
                             </a:solidFill>
@@ -5371,7 +5683,7 @@
                       </m:sSubPr>
                       <m:e>
                         <m:r>
-                          <a:rPr lang="en-US" sz="1700" b="0" i="1">
+                          <a:rPr lang="en-US" sz="1360" b="0" i="1">
                             <a:solidFill>
                               <a:schemeClr val="bg1"/>
                             </a:solidFill>
@@ -5382,7 +5694,7 @@
                       </m:e>
                       <m:sub>
                         <m:r>
-                          <a:rPr lang="en-US" sz="1700" b="0" i="1">
+                          <a:rPr lang="en-US" sz="1360" b="0" i="1">
                             <a:solidFill>
                               <a:schemeClr val="bg1"/>
                             </a:solidFill>
@@ -5393,7 +5705,7 @@
                       </m:sub>
                     </m:sSub>
                     <m:r>
-                      <a:rPr lang="en-US" sz="1700" b="0" i="1">
+                      <a:rPr lang="en-US" sz="1360" b="0" i="1">
                         <a:solidFill>
                           <a:schemeClr val="bg1"/>
                         </a:solidFill>
@@ -5402,7 +5714,7 @@
                       <m:t>=</m:t>
                     </m:r>
                     <m:r>
-                      <a:rPr lang="en-US" sz="1700" b="0" i="1">
+                      <a:rPr lang="en-US" sz="1360" b="0" i="1">
                         <a:solidFill>
                           <a:schemeClr val="bg1"/>
                         </a:solidFill>
@@ -5413,7 +5725,7 @@
                   </m:oMath>
                 </a14:m>
                 <a:r>
-                  <a:rPr lang="en-US" sz="1700">
+                  <a:rPr lang="en-US" sz="1360">
                     <a:solidFill>
                       <a:schemeClr val="bg1"/>
                     </a:solidFill>
@@ -5423,7 +5735,7 @@
               </a:p>
               <a:p>
                 <a:r>
-                  <a:rPr lang="en-US" sz="1700">
+                  <a:rPr lang="en-US" sz="1360">
                     <a:solidFill>
                       <a:schemeClr val="bg1"/>
                     </a:solidFill>
@@ -5500,7 +5812,7 @@
         </p:blipFill>
         <p:spPr>
           <a:xfrm>
-            <a:off x="1085408" y="800945"/>
+            <a:off x="1085408" y="1143845"/>
             <a:ext cx="10015378" cy="2987343"/>
           </a:xfrm>
           <a:prstGeom prst="rect">
@@ -5533,7 +5845,7 @@
         </p:nvCxnSpPr>
         <p:spPr>
           <a:xfrm flipV="1">
-            <a:off x="4639665" y="5097939"/>
+            <a:off x="4639665" y="5440839"/>
             <a:ext cx="0" cy="914400"/>
           </a:xfrm>
           <a:prstGeom prst="line">
@@ -5564,30 +5876,202 @@
       </p:cxnSp>
       <p:sp>
         <p:nvSpPr>
-          <p:cNvPr id="21" name="Slide Number Placeholder 20">
-            <a:extLst>
-              <a:ext uri="{FF2B5EF4-FFF2-40B4-BE49-F238E27FC236}">
-                <a16:creationId xmlns:a16="http://schemas.microsoft.com/office/drawing/2014/main" id="{DF86587C-9ED3-4C7F-869F-B21EE92E0A59}"/>
-              </a:ext>
-            </a:extLst>
-          </p:cNvPr>
-          <p:cNvSpPr>
-            <a:spLocks noGrp="1"/>
-          </p:cNvSpPr>
-          <p:nvPr>
-            <p:ph type="sldNum" sz="quarter" idx="12"/>
-          </p:nvPr>
-        </p:nvSpPr>
-        <p:spPr/>
-        <p:txBody>
-          <a:bodyPr/>
+          <p:cNvPr id="28" name="DSPIRA 1"/>
+          <p:cNvSpPr>
+            <a:spLocks noGrp="1"/>
+          </p:cNvSpPr>
+          <p:nvPr/>
+        </p:nvSpPr>
+        <p:spPr>
+          <a:xfrm>
+            <a:off x="0" y="0"/>
+            <a:ext cx="12192000" cy="342900"/>
+          </a:xfrm>
+          <a:prstGeom prst="rect">
+            <a:avLst/>
+          </a:prstGeom>
+          <a:solidFill>
+            <a:srgbClr val="FFFFFF"/>
+          </a:solidFill>
+          <a:ln w="0">
+            <a:noFill/>
+          </a:ln>
+        </p:spPr>
+      </p:sp>
+      <p:sp>
+        <p:nvSpPr>
+          <p:cNvPr id="29" name="DSPIRA 2"/>
+          <p:cNvSpPr>
+            <a:spLocks noGrp="1"/>
+          </p:cNvSpPr>
+          <p:nvPr/>
+        </p:nvSpPr>
+        <p:spPr>
+          <a:xfrm>
+            <a:off x="0" y="7200900"/>
+            <a:ext cx="12192000" cy="342900"/>
+          </a:xfrm>
+          <a:prstGeom prst="rect">
+            <a:avLst/>
+          </a:prstGeom>
+          <a:solidFill>
+            <a:srgbClr val="FFFFFF"/>
+          </a:solidFill>
+          <a:ln w="0">
+            <a:noFill/>
+          </a:ln>
+        </p:spPr>
+      </p:sp>
+      <p:sp>
+        <p:nvSpPr>
+          <p:cNvPr id="30" name="DSPIRA 3"/>
+          <p:cNvSpPr>
+            <a:spLocks noGrp="1"/>
+          </p:cNvSpPr>
+          <p:nvPr/>
+        </p:nvSpPr>
+        <p:spPr>
+          <a:xfrm>
+            <a:off x="228600" y="76200"/>
+            <a:ext cx="4762500" cy="228600"/>
+          </a:xfrm>
+          <a:prstGeom prst="rect">
+            <a:avLst/>
+          </a:prstGeom>
+          <a:noFill/>
+          <a:ln w="0">
+            <a:noFill/>
+          </a:ln>
+        </p:spPr>
+        <p:txBody>
+          <a:bodyPr>
+            <a:noAutofit/>
+          </a:bodyPr>
           <a:lstStyle/>
           <a:p>
-            <a:fld id="{4A609AEB-AA43-4F11-B5F7-17FA2DC3DBF4}" type="slidenum">
-              <a:rPr lang="en-US" smtClean="0"/>
-              <a:t>4</a:t>
-            </a:fld>
-            <a:endParaRPr lang="en-US"/>
+            <a:pPr>
+              <a:defRPr sz="1200" b="1">
+                <a:solidFill>
+                  <a:srgbClr val="002855"/>
+                </a:solidFill>
+                <a:latin typeface="Arial"/>
+                <a:ea typeface="Arial"/>
+                <a:cs typeface="Arial"/>
+              </a:defRPr>
+            </a:pPr>
+            <a:r>
+              <a:rPr sz="1200" b="1">
+                <a:solidFill>
+                  <a:srgbClr val="002855"/>
+                </a:solidFill>
+                <a:latin typeface="Arial"/>
+                <a:ea typeface="Arial"/>
+                <a:cs typeface="Arial"/>
+              </a:rPr>
+              <a:t>WVU DSPIRA</a:t>
+            </a:r>
+          </a:p>
+        </p:txBody>
+      </p:sp>
+      <p:sp>
+        <p:nvSpPr>
+          <p:cNvPr id="31" name="DSPIRA 4"/>
+          <p:cNvSpPr>
+            <a:spLocks noGrp="1"/>
+          </p:cNvSpPr>
+          <p:nvPr/>
+        </p:nvSpPr>
+        <p:spPr>
+          <a:xfrm>
+            <a:off x="228600" y="7277100"/>
+            <a:ext cx="6667500" cy="228600"/>
+          </a:xfrm>
+          <a:prstGeom prst="rect">
+            <a:avLst/>
+          </a:prstGeom>
+          <a:noFill/>
+          <a:ln w="0">
+            <a:noFill/>
+          </a:ln>
+        </p:spPr>
+        <p:txBody>
+          <a:bodyPr>
+            <a:noAutofit/>
+          </a:bodyPr>
+          <a:lstStyle/>
+          <a:p>
+            <a:pPr>
+              <a:defRPr sz="900" b="0">
+                <a:solidFill>
+                  <a:srgbClr val="002855"/>
+                </a:solidFill>
+                <a:latin typeface="Arial"/>
+                <a:ea typeface="Arial"/>
+                <a:cs typeface="Arial"/>
+              </a:defRPr>
+            </a:pPr>
+            <a:r>
+              <a:rPr sz="900" b="0">
+                <a:solidFill>
+                  <a:srgbClr val="002855"/>
+                </a:solidFill>
+                <a:latin typeface="Arial"/>
+                <a:ea typeface="Arial"/>
+                <a:cs typeface="Arial"/>
+              </a:rPr>
+              <a:t>wvurail.org/dspira</a:t>
+            </a:r>
+          </a:p>
+        </p:txBody>
+      </p:sp>
+      <p:sp>
+        <p:nvSpPr>
+          <p:cNvPr id="32" name="DSPIRA 5"/>
+          <p:cNvSpPr>
+            <a:spLocks noGrp="1"/>
+          </p:cNvSpPr>
+          <p:nvPr/>
+        </p:nvSpPr>
+        <p:spPr>
+          <a:xfrm>
+            <a:off x="11191875" y="7277100"/>
+            <a:ext cx="762000" cy="228600"/>
+          </a:xfrm>
+          <a:prstGeom prst="rect">
+            <a:avLst/>
+          </a:prstGeom>
+          <a:noFill/>
+          <a:ln w="0">
+            <a:noFill/>
+          </a:ln>
+        </p:spPr>
+        <p:txBody>
+          <a:bodyPr>
+            <a:noAutofit/>
+          </a:bodyPr>
+          <a:lstStyle/>
+          <a:p>
+            <a:pPr>
+              <a:defRPr sz="900" b="0">
+                <a:solidFill>
+                  <a:srgbClr val="002855"/>
+                </a:solidFill>
+                <a:latin typeface="Arial"/>
+                <a:ea typeface="Arial"/>
+                <a:cs typeface="Arial"/>
+              </a:defRPr>
+            </a:pPr>
+            <a:r>
+              <a:rPr sz="900" b="0">
+                <a:solidFill>
+                  <a:srgbClr val="002855"/>
+                </a:solidFill>
+                <a:latin typeface="Arial"/>
+                <a:ea typeface="Arial"/>
+                <a:cs typeface="Arial"/>
+              </a:rPr>
+              <a:t>4 of 6</a:t>
+            </a:r>
           </a:p>
         </p:txBody>
       </p:sp>
@@ -5654,7 +6138,7 @@
         </p:nvSpPr>
         <p:spPr bwMode="ltGray">
           <a:xfrm>
-            <a:off x="336883" y="321176"/>
+            <a:off x="336883" y="664076"/>
             <a:ext cx="7174247" cy="5896743"/>
           </a:xfrm>
           <a:prstGeom prst="rect">
@@ -5716,7 +6200,7 @@
         </p:nvSpPr>
         <p:spPr>
           <a:xfrm>
-            <a:off x="821516" y="640263"/>
+            <a:off x="821516" y="983163"/>
             <a:ext cx="6204984" cy="1344975"/>
           </a:xfrm>
         </p:spPr>
@@ -5727,7 +6211,7 @@
           <a:lstStyle/>
           <a:p>
             <a:r>
-              <a:rPr lang="en-US" sz="4000" dirty="0"/>
+              <a:rPr lang="en-US" sz="3200" dirty="0"/>
               <a:t>A random experiment</a:t>
             </a:r>
           </a:p>
@@ -5751,7 +6235,7 @@
         </p:nvSpPr>
         <p:spPr>
           <a:xfrm>
-            <a:off x="821515" y="2121762"/>
+            <a:off x="821515" y="2464662"/>
             <a:ext cx="6204984" cy="3626917"/>
           </a:xfrm>
         </p:spPr>
@@ -5762,30 +6246,30 @@
           <a:lstStyle/>
           <a:p>
             <a:r>
-              <a:rPr lang="en-US" sz="2400"/>
+              <a:rPr lang="en-US" sz="1920"/>
               <a:t>Random experiment = outcome cannot be predicted</a:t>
             </a:r>
           </a:p>
           <a:p>
             <a:r>
-              <a:rPr lang="en-US" sz="2400"/>
+              <a:rPr lang="en-US" sz="1920"/>
               <a:t>Example: Bow and arrows (2d target)</a:t>
             </a:r>
           </a:p>
           <a:p>
             <a:r>
-              <a:rPr lang="en-US" sz="2400"/>
+              <a:rPr lang="en-US" sz="1920"/>
               <a:t>Outcomes and their probabilities = weights (how often do we observe an outcome?)</a:t>
             </a:r>
           </a:p>
           <a:p>
             <a:r>
-              <a:rPr lang="en-US" sz="2400"/>
+              <a:rPr lang="en-US" sz="1920"/>
               <a:t>Fit a 2D function into the point on the target and look at the slice – it is a Gaussian bell. </a:t>
             </a:r>
           </a:p>
           <a:p>
-            <a:endParaRPr lang="en-US" sz="2400"/>
+            <a:endParaRPr lang="en-US" sz="1920"/>
           </a:p>
         </p:txBody>
       </p:sp>
@@ -5817,7 +6301,7 @@
         </p:blipFill>
         <p:spPr>
           <a:xfrm>
-            <a:off x="8315927" y="637397"/>
+            <a:off x="8315927" y="980297"/>
             <a:ext cx="3037873" cy="2286000"/>
           </a:xfrm>
           <a:prstGeom prst="rect">
@@ -5853,7 +6337,7 @@
         </p:blipFill>
         <p:spPr>
           <a:xfrm>
-            <a:off x="7995762" y="3122422"/>
+            <a:off x="7995762" y="3465322"/>
             <a:ext cx="4042410" cy="3233928"/>
           </a:xfrm>
           <a:prstGeom prst="rect">
@@ -5863,47 +6347,202 @@
       </p:pic>
       <p:sp>
         <p:nvSpPr>
-          <p:cNvPr id="4" name="Slide Number Placeholder 3">
-            <a:extLst>
-              <a:ext uri="{FF2B5EF4-FFF2-40B4-BE49-F238E27FC236}">
-                <a16:creationId xmlns:a16="http://schemas.microsoft.com/office/drawing/2014/main" id="{E48D008C-59DA-4EF1-AC50-E312B930813D}"/>
-              </a:ext>
-            </a:extLst>
-          </p:cNvPr>
-          <p:cNvSpPr>
-            <a:spLocks noGrp="1"/>
-          </p:cNvSpPr>
-          <p:nvPr>
-            <p:ph type="sldNum" sz="quarter" idx="12"/>
-          </p:nvPr>
+          <p:cNvPr id="18" name="DSPIRA 1"/>
+          <p:cNvSpPr>
+            <a:spLocks noGrp="1"/>
+          </p:cNvSpPr>
+          <p:nvPr/>
         </p:nvSpPr>
         <p:spPr>
           <a:xfrm>
-            <a:off x="8610600" y="6356350"/>
-            <a:ext cx="2743200" cy="365125"/>
+            <a:off x="0" y="0"/>
+            <a:ext cx="12192000" cy="342900"/>
           </a:xfrm>
+          <a:prstGeom prst="rect">
+            <a:avLst/>
+          </a:prstGeom>
+          <a:solidFill>
+            <a:srgbClr val="FFFFFF"/>
+          </a:solidFill>
+          <a:ln w="0">
+            <a:noFill/>
+          </a:ln>
         </p:spPr>
+      </p:sp>
+      <p:sp>
+        <p:nvSpPr>
+          <p:cNvPr id="19" name="DSPIRA 2"/>
+          <p:cNvSpPr>
+            <a:spLocks noGrp="1"/>
+          </p:cNvSpPr>
+          <p:nvPr/>
+        </p:nvSpPr>
+        <p:spPr>
+          <a:xfrm>
+            <a:off x="0" y="7200900"/>
+            <a:ext cx="12192000" cy="342900"/>
+          </a:xfrm>
+          <a:prstGeom prst="rect">
+            <a:avLst/>
+          </a:prstGeom>
+          <a:solidFill>
+            <a:srgbClr val="FFFFFF"/>
+          </a:solidFill>
+          <a:ln w="0">
+            <a:noFill/>
+          </a:ln>
+        </p:spPr>
+      </p:sp>
+      <p:sp>
+        <p:nvSpPr>
+          <p:cNvPr id="20" name="DSPIRA 3"/>
+          <p:cNvSpPr>
+            <a:spLocks noGrp="1"/>
+          </p:cNvSpPr>
+          <p:nvPr/>
+        </p:nvSpPr>
+        <p:spPr>
+          <a:xfrm>
+            <a:off x="228600" y="76200"/>
+            <a:ext cx="4762500" cy="228600"/>
+          </a:xfrm>
+          <a:prstGeom prst="rect">
+            <a:avLst/>
+          </a:prstGeom>
+          <a:noFill/>
+          <a:ln w="0">
+            <a:noFill/>
+          </a:ln>
+        </p:spPr>
         <p:txBody>
           <a:bodyPr>
-            <a:normAutofit/>
+            <a:noAutofit/>
           </a:bodyPr>
           <a:lstStyle/>
           <a:p>
             <a:pPr>
-              <a:spcAft>
-                <a:spcPts val="600"/>
-              </a:spcAft>
+              <a:defRPr sz="1200" b="1">
+                <a:solidFill>
+                  <a:srgbClr val="002855"/>
+                </a:solidFill>
+                <a:latin typeface="Arial"/>
+                <a:ea typeface="Arial"/>
+                <a:cs typeface="Arial"/>
+              </a:defRPr>
             </a:pPr>
-            <a:fld id="{4A609AEB-AA43-4F11-B5F7-17FA2DC3DBF4}" type="slidenum">
-              <a:rPr lang="en-US" smtClean="0"/>
-              <a:pPr>
-                <a:spcAft>
-                  <a:spcPts val="600"/>
-                </a:spcAft>
-              </a:pPr>
-              <a:t>5</a:t>
-            </a:fld>
-            <a:endParaRPr lang="en-US" dirty="0"/>
+            <a:r>
+              <a:rPr sz="1200" b="1">
+                <a:solidFill>
+                  <a:srgbClr val="002855"/>
+                </a:solidFill>
+                <a:latin typeface="Arial"/>
+                <a:ea typeface="Arial"/>
+                <a:cs typeface="Arial"/>
+              </a:rPr>
+              <a:t>WVU DSPIRA</a:t>
+            </a:r>
+          </a:p>
+        </p:txBody>
+      </p:sp>
+      <p:sp>
+        <p:nvSpPr>
+          <p:cNvPr id="21" name="DSPIRA 4"/>
+          <p:cNvSpPr>
+            <a:spLocks noGrp="1"/>
+          </p:cNvSpPr>
+          <p:nvPr/>
+        </p:nvSpPr>
+        <p:spPr>
+          <a:xfrm>
+            <a:off x="228600" y="7277100"/>
+            <a:ext cx="6667500" cy="228600"/>
+          </a:xfrm>
+          <a:prstGeom prst="rect">
+            <a:avLst/>
+          </a:prstGeom>
+          <a:noFill/>
+          <a:ln w="0">
+            <a:noFill/>
+          </a:ln>
+        </p:spPr>
+        <p:txBody>
+          <a:bodyPr>
+            <a:noAutofit/>
+          </a:bodyPr>
+          <a:lstStyle/>
+          <a:p>
+            <a:pPr>
+              <a:defRPr sz="900" b="0">
+                <a:solidFill>
+                  <a:srgbClr val="002855"/>
+                </a:solidFill>
+                <a:latin typeface="Arial"/>
+                <a:ea typeface="Arial"/>
+                <a:cs typeface="Arial"/>
+              </a:defRPr>
+            </a:pPr>
+            <a:r>
+              <a:rPr sz="900" b="0">
+                <a:solidFill>
+                  <a:srgbClr val="002855"/>
+                </a:solidFill>
+                <a:latin typeface="Arial"/>
+                <a:ea typeface="Arial"/>
+                <a:cs typeface="Arial"/>
+              </a:rPr>
+              <a:t>wvurail.org/dspira</a:t>
+            </a:r>
+          </a:p>
+        </p:txBody>
+      </p:sp>
+      <p:sp>
+        <p:nvSpPr>
+          <p:cNvPr id="22" name="DSPIRA 5"/>
+          <p:cNvSpPr>
+            <a:spLocks noGrp="1"/>
+          </p:cNvSpPr>
+          <p:nvPr/>
+        </p:nvSpPr>
+        <p:spPr>
+          <a:xfrm>
+            <a:off x="11191875" y="7277100"/>
+            <a:ext cx="762000" cy="228600"/>
+          </a:xfrm>
+          <a:prstGeom prst="rect">
+            <a:avLst/>
+          </a:prstGeom>
+          <a:noFill/>
+          <a:ln w="0">
+            <a:noFill/>
+          </a:ln>
+        </p:spPr>
+        <p:txBody>
+          <a:bodyPr>
+            <a:noAutofit/>
+          </a:bodyPr>
+          <a:lstStyle/>
+          <a:p>
+            <a:pPr>
+              <a:defRPr sz="900" b="0">
+                <a:solidFill>
+                  <a:srgbClr val="002855"/>
+                </a:solidFill>
+                <a:latin typeface="Arial"/>
+                <a:ea typeface="Arial"/>
+                <a:cs typeface="Arial"/>
+              </a:defRPr>
+            </a:pPr>
+            <a:r>
+              <a:rPr sz="900" b="0">
+                <a:solidFill>
+                  <a:srgbClr val="002855"/>
+                </a:solidFill>
+                <a:latin typeface="Arial"/>
+                <a:ea typeface="Arial"/>
+                <a:cs typeface="Arial"/>
+              </a:rPr>
+              <a:t>5 of 6</a:t>
+            </a:r>
           </a:p>
         </p:txBody>
       </p:sp>
@@ -5955,7 +6594,7 @@
         </p:nvSpPr>
         <p:spPr>
           <a:xfrm>
-            <a:off x="838200" y="136525"/>
+            <a:off x="838200" y="479425"/>
             <a:ext cx="10515600" cy="866107"/>
           </a:xfrm>
         </p:spPr>
@@ -6691,30 +7330,202 @@
       </mc:AlternateContent>
       <p:sp>
         <p:nvSpPr>
-          <p:cNvPr id="4" name="Slide Number Placeholder 3">
-            <a:extLst>
-              <a:ext uri="{FF2B5EF4-FFF2-40B4-BE49-F238E27FC236}">
-                <a16:creationId xmlns:a16="http://schemas.microsoft.com/office/drawing/2014/main" id="{3B564C2B-D8B3-419E-AA59-293FD91246C3}"/>
-              </a:ext>
-            </a:extLst>
-          </p:cNvPr>
-          <p:cNvSpPr>
-            <a:spLocks noGrp="1"/>
-          </p:cNvSpPr>
-          <p:nvPr>
-            <p:ph type="sldNum" sz="quarter" idx="12"/>
-          </p:nvPr>
-        </p:nvSpPr>
-        <p:spPr/>
-        <p:txBody>
-          <a:bodyPr/>
+          <p:cNvPr id="4" name="DSPIRA 1"/>
+          <p:cNvSpPr>
+            <a:spLocks noGrp="1"/>
+          </p:cNvSpPr>
+          <p:nvPr/>
+        </p:nvSpPr>
+        <p:spPr>
+          <a:xfrm>
+            <a:off x="0" y="0"/>
+            <a:ext cx="12192000" cy="342900"/>
+          </a:xfrm>
+          <a:prstGeom prst="rect">
+            <a:avLst/>
+          </a:prstGeom>
+          <a:solidFill>
+            <a:srgbClr val="FFFFFF"/>
+          </a:solidFill>
+          <a:ln w="0">
+            <a:noFill/>
+          </a:ln>
+        </p:spPr>
+      </p:sp>
+      <p:sp>
+        <p:nvSpPr>
+          <p:cNvPr id="5" name="DSPIRA 2"/>
+          <p:cNvSpPr>
+            <a:spLocks noGrp="1"/>
+          </p:cNvSpPr>
+          <p:nvPr/>
+        </p:nvSpPr>
+        <p:spPr>
+          <a:xfrm>
+            <a:off x="0" y="7200900"/>
+            <a:ext cx="12192000" cy="342900"/>
+          </a:xfrm>
+          <a:prstGeom prst="rect">
+            <a:avLst/>
+          </a:prstGeom>
+          <a:solidFill>
+            <a:srgbClr val="FFFFFF"/>
+          </a:solidFill>
+          <a:ln w="0">
+            <a:noFill/>
+          </a:ln>
+        </p:spPr>
+      </p:sp>
+      <p:sp>
+        <p:nvSpPr>
+          <p:cNvPr id="6" name="DSPIRA 3"/>
+          <p:cNvSpPr>
+            <a:spLocks noGrp="1"/>
+          </p:cNvSpPr>
+          <p:nvPr/>
+        </p:nvSpPr>
+        <p:spPr>
+          <a:xfrm>
+            <a:off x="228600" y="76200"/>
+            <a:ext cx="4762500" cy="228600"/>
+          </a:xfrm>
+          <a:prstGeom prst="rect">
+            <a:avLst/>
+          </a:prstGeom>
+          <a:noFill/>
+          <a:ln w="0">
+            <a:noFill/>
+          </a:ln>
+        </p:spPr>
+        <p:txBody>
+          <a:bodyPr>
+            <a:noAutofit/>
+          </a:bodyPr>
           <a:lstStyle/>
           <a:p>
-            <a:fld id="{4A609AEB-AA43-4F11-B5F7-17FA2DC3DBF4}" type="slidenum">
-              <a:rPr lang="en-US" smtClean="0"/>
-              <a:t>6</a:t>
-            </a:fld>
-            <a:endParaRPr lang="en-US"/>
+            <a:pPr>
+              <a:defRPr sz="1200" b="1">
+                <a:solidFill>
+                  <a:srgbClr val="002855"/>
+                </a:solidFill>
+                <a:latin typeface="Arial"/>
+                <a:ea typeface="Arial"/>
+                <a:cs typeface="Arial"/>
+              </a:defRPr>
+            </a:pPr>
+            <a:r>
+              <a:rPr sz="1200" b="1">
+                <a:solidFill>
+                  <a:srgbClr val="002855"/>
+                </a:solidFill>
+                <a:latin typeface="Arial"/>
+                <a:ea typeface="Arial"/>
+                <a:cs typeface="Arial"/>
+              </a:rPr>
+              <a:t>WVU DSPIRA</a:t>
+            </a:r>
+          </a:p>
+        </p:txBody>
+      </p:sp>
+      <p:sp>
+        <p:nvSpPr>
+          <p:cNvPr id="7" name="DSPIRA 4"/>
+          <p:cNvSpPr>
+            <a:spLocks noGrp="1"/>
+          </p:cNvSpPr>
+          <p:nvPr/>
+        </p:nvSpPr>
+        <p:spPr>
+          <a:xfrm>
+            <a:off x="228600" y="7277100"/>
+            <a:ext cx="6667500" cy="228600"/>
+          </a:xfrm>
+          <a:prstGeom prst="rect">
+            <a:avLst/>
+          </a:prstGeom>
+          <a:noFill/>
+          <a:ln w="0">
+            <a:noFill/>
+          </a:ln>
+        </p:spPr>
+        <p:txBody>
+          <a:bodyPr>
+            <a:noAutofit/>
+          </a:bodyPr>
+          <a:lstStyle/>
+          <a:p>
+            <a:pPr>
+              <a:defRPr sz="900" b="0">
+                <a:solidFill>
+                  <a:srgbClr val="002855"/>
+                </a:solidFill>
+                <a:latin typeface="Arial"/>
+                <a:ea typeface="Arial"/>
+                <a:cs typeface="Arial"/>
+              </a:defRPr>
+            </a:pPr>
+            <a:r>
+              <a:rPr sz="900" b="0">
+                <a:solidFill>
+                  <a:srgbClr val="002855"/>
+                </a:solidFill>
+                <a:latin typeface="Arial"/>
+                <a:ea typeface="Arial"/>
+                <a:cs typeface="Arial"/>
+              </a:rPr>
+              <a:t>wvurail.org/dspira</a:t>
+            </a:r>
+          </a:p>
+        </p:txBody>
+      </p:sp>
+      <p:sp>
+        <p:nvSpPr>
+          <p:cNvPr id="8" name="DSPIRA 5"/>
+          <p:cNvSpPr>
+            <a:spLocks noGrp="1"/>
+          </p:cNvSpPr>
+          <p:nvPr/>
+        </p:nvSpPr>
+        <p:spPr>
+          <a:xfrm>
+            <a:off x="11191875" y="7277100"/>
+            <a:ext cx="762000" cy="228600"/>
+          </a:xfrm>
+          <a:prstGeom prst="rect">
+            <a:avLst/>
+          </a:prstGeom>
+          <a:noFill/>
+          <a:ln w="0">
+            <a:noFill/>
+          </a:ln>
+        </p:spPr>
+        <p:txBody>
+          <a:bodyPr>
+            <a:noAutofit/>
+          </a:bodyPr>
+          <a:lstStyle/>
+          <a:p>
+            <a:pPr>
+              <a:defRPr sz="900" b="0">
+                <a:solidFill>
+                  <a:srgbClr val="002855"/>
+                </a:solidFill>
+                <a:latin typeface="Arial"/>
+                <a:ea typeface="Arial"/>
+                <a:cs typeface="Arial"/>
+              </a:defRPr>
+            </a:pPr>
+            <a:r>
+              <a:rPr sz="900" b="0">
+                <a:solidFill>
+                  <a:srgbClr val="002855"/>
+                </a:solidFill>
+                <a:latin typeface="Arial"/>
+                <a:ea typeface="Arial"/>
+                <a:cs typeface="Arial"/>
+              </a:rPr>
+              <a:t>6 of 6</a:t>
+            </a:r>
           </a:p>
         </p:txBody>
       </p:sp>
@@ -6774,7 +7585,7 @@
     </a:clrScheme>
     <a:fontScheme name="Office">
       <a:majorFont>
-        <a:latin typeface="Calibri Light" panose="020F0302020204030204"/>
+        <a:latin typeface="Arial" panose="020F0302020204030204"/>
         <a:ea typeface=""/>
         <a:cs typeface=""/>
         <a:font script="Jpan" typeface="游ゴシック Light"/>
@@ -6826,7 +7637,7 @@
         <a:font script="Tfng" typeface="Ebrima"/>
       </a:majorFont>
       <a:minorFont>
-        <a:latin typeface="Calibri" panose="020F0502020204030204"/>
+        <a:latin typeface="Arial" panose="020F0502020204030204"/>
         <a:ea typeface=""/>
         <a:cs typeface=""/>
         <a:font script="Jpan" typeface="游ゴシック"/>
@@ -7069,7 +7880,7 @@
     </a:clrScheme>
     <a:fontScheme name="Office">
       <a:majorFont>
-        <a:latin typeface="Calibri Light" panose="020F0302020204030204"/>
+        <a:latin typeface="Arial" panose="020F0302020204030204"/>
         <a:ea typeface=""/>
         <a:cs typeface=""/>
         <a:font script="Jpan" typeface="游ゴシック Light"/>
@@ -7121,7 +7932,7 @@
         <a:font script="Tfng" typeface="Ebrima"/>
       </a:majorFont>
       <a:minorFont>
-        <a:latin typeface="Calibri" panose="020F0502020204030204"/>
+        <a:latin typeface="Arial" panose="020F0502020204030204"/>
         <a:ea typeface=""/>
         <a:cs typeface=""/>
         <a:font script="Jpan" typeface="游ゴシック"/>
@@ -7319,183 +8130,4 @@
     </a:ext>
   </a:extLst>
 </a:theme>
-</file>
-
-<file path=customXml/item1.xml><?xml version="1.0" encoding="utf-8"?>
-<ct:contentTypeSchema xmlns:ct="http://schemas.microsoft.com/office/2006/metadata/contentType" xmlns:ma="http://schemas.microsoft.com/office/2006/metadata/properties/metaAttributes" ct:_="" ma:_="" ma:contentTypeName="Document" ma:contentTypeID="0x01010016C36F108F9F92488C988DDF36346911" ma:contentTypeVersion="5" ma:contentTypeDescription="Create a new document." ma:contentTypeScope="" ma:versionID="c417924321fef32731141cd966ef6f94">
-  <xsd:schema xmlns:xsd="http://www.w3.org/2001/XMLSchema" xmlns:xs="http://www.w3.org/2001/XMLSchema" xmlns:p="http://schemas.microsoft.com/office/2006/metadata/properties" xmlns:ns2="1bb24863-89de-455f-aabf-4424925aa312" targetNamespace="http://schemas.microsoft.com/office/2006/metadata/properties" ma:root="true" ma:fieldsID="a7d3b2212d350eb904df17fc79fef4f4" ns2:_="">
-    <xsd:import namespace="1bb24863-89de-455f-aabf-4424925aa312"/>
-    <xsd:element name="properties">
-      <xsd:complexType>
-        <xsd:sequence>
-          <xsd:element name="documentManagement">
-            <xsd:complexType>
-              <xsd:all>
-                <xsd:element ref="ns2:MediaServiceMetadata" minOccurs="0"/>
-                <xsd:element ref="ns2:MediaServiceFastMetadata" minOccurs="0"/>
-                <xsd:element ref="ns2:MediaServiceAutoTags" minOccurs="0"/>
-                <xsd:element ref="ns2:MediaServiceOCR" minOccurs="0"/>
-                <xsd:element ref="ns2:MediaServiceDateTaken" minOccurs="0"/>
-              </xsd:all>
-            </xsd:complexType>
-          </xsd:element>
-        </xsd:sequence>
-      </xsd:complexType>
-    </xsd:element>
-  </xsd:schema>
-  <xsd:schema xmlns:xsd="http://www.w3.org/2001/XMLSchema" xmlns:xs="http://www.w3.org/2001/XMLSchema" xmlns:dms="http://schemas.microsoft.com/office/2006/documentManagement/types" xmlns:pc="http://schemas.microsoft.com/office/infopath/2007/PartnerControls" targetNamespace="1bb24863-89de-455f-aabf-4424925aa312" elementFormDefault="qualified">
-    <xsd:import namespace="http://schemas.microsoft.com/office/2006/documentManagement/types"/>
-    <xsd:import namespace="http://schemas.microsoft.com/office/infopath/2007/PartnerControls"/>
-    <xsd:element name="MediaServiceMetadata" ma:index="8" nillable="true" ma:displayName="MediaServiceMetadata" ma:hidden="true" ma:internalName="MediaServiceMetadata" ma:readOnly="true">
-      <xsd:simpleType>
-        <xsd:restriction base="dms:Note"/>
-      </xsd:simpleType>
-    </xsd:element>
-    <xsd:element name="MediaServiceFastMetadata" ma:index="9" nillable="true" ma:displayName="MediaServiceFastMetadata" ma:hidden="true" ma:internalName="MediaServiceFastMetadata" ma:readOnly="true">
-      <xsd:simpleType>
-        <xsd:restriction base="dms:Note"/>
-      </xsd:simpleType>
-    </xsd:element>
-    <xsd:element name="MediaServiceAutoTags" ma:index="10" nillable="true" ma:displayName="MediaServiceAutoTags" ma:internalName="MediaServiceAutoTags" ma:readOnly="true">
-      <xsd:simpleType>
-        <xsd:restriction base="dms:Text"/>
-      </xsd:simpleType>
-    </xsd:element>
-    <xsd:element name="MediaServiceOCR" ma:index="11" nillable="true" ma:displayName="MediaServiceOCR" ma:internalName="MediaServiceOCR" ma:readOnly="true">
-      <xsd:simpleType>
-        <xsd:restriction base="dms:Note">
-          <xsd:maxLength value="255"/>
-        </xsd:restriction>
-      </xsd:simpleType>
-    </xsd:element>
-    <xsd:element name="MediaServiceDateTaken" ma:index="12" nillable="true" ma:displayName="MediaServiceDateTaken" ma:hidden="true" ma:internalName="MediaServiceDateTaken" ma:readOnly="true">
-      <xsd:simpleType>
-        <xsd:restriction base="dms:Text"/>
-      </xsd:simpleType>
-    </xsd:element>
-  </xsd:schema>
-  <xsd:schema xmlns="http://schemas.openxmlformats.org/package/2006/metadata/core-properties" xmlns:xsd="http://www.w3.org/2001/XMLSchema" xmlns:xsi="http://www.w3.org/2001/XMLSchema-instance" xmlns:dc="http://purl.org/dc/elements/1.1/" xmlns:dcterms="http://purl.org/dc/terms/" xmlns:odoc="http://schemas.microsoft.com/internal/obd" targetNamespace="http://schemas.openxmlformats.org/package/2006/metadata/core-properties" elementFormDefault="qualified" attributeFormDefault="unqualified" blockDefault="#all">
-    <xsd:import namespace="http://purl.org/dc/elements/1.1/" schemaLocation="http://dublincore.org/schemas/xmls/qdc/2003/04/02/dc.xsd"/>
-    <xsd:import namespace="http://purl.org/dc/terms/" schemaLocation="http://dublincore.org/schemas/xmls/qdc/2003/04/02/dcterms.xsd"/>
-    <xsd:element name="coreProperties" type="CT_coreProperties"/>
-    <xsd:complexType name="CT_coreProperties">
-      <xsd:all>
-        <xsd:element ref="dc:creator" minOccurs="0" maxOccurs="1"/>
-        <xsd:element ref="dcterms:created" minOccurs="0" maxOccurs="1"/>
-        <xsd:element ref="dc:identifier" minOccurs="0" maxOccurs="1"/>
-        <xsd:element name="contentType" minOccurs="0" maxOccurs="1" type="xsd:string" ma:index="0" ma:displayName="Content Type"/>
-        <xsd:element ref="dc:title" minOccurs="0" maxOccurs="1" ma:index="4" ma:displayName="Title"/>
-        <xsd:element ref="dc:subject" minOccurs="0" maxOccurs="1"/>
-        <xsd:element ref="dc:description" minOccurs="0" maxOccurs="1"/>
-        <xsd:element name="keywords" minOccurs="0" maxOccurs="1" type="xsd:string"/>
-        <xsd:element ref="dc:language" minOccurs="0" maxOccurs="1"/>
-        <xsd:element name="category" minOccurs="0" maxOccurs="1" type="xsd:string"/>
-        <xsd:element name="version" minOccurs="0" maxOccurs="1" type="xsd:string"/>
-        <xsd:element name="revision" minOccurs="0" maxOccurs="1" type="xsd:string">
-          <xsd:annotation>
-            <xsd:documentation>
-                        This value indicates the number of saves or revisions. The application is responsible for updating this value after each revision.
-                    </xsd:documentation>
-          </xsd:annotation>
-        </xsd:element>
-        <xsd:element name="lastModifiedBy" minOccurs="0" maxOccurs="1" type="xsd:string"/>
-        <xsd:element ref="dcterms:modified" minOccurs="0" maxOccurs="1"/>
-        <xsd:element name="contentStatus" minOccurs="0" maxOccurs="1" type="xsd:string"/>
-      </xsd:all>
-    </xsd:complexType>
-  </xsd:schema>
-  <xs:schema xmlns:pc="http://schemas.microsoft.com/office/infopath/2007/PartnerControls" xmlns:xs="http://www.w3.org/2001/XMLSchema" targetNamespace="http://schemas.microsoft.com/office/infopath/2007/PartnerControls" elementFormDefault="qualified" attributeFormDefault="unqualified">
-    <xs:element name="Person">
-      <xs:complexType>
-        <xs:sequence>
-          <xs:element ref="pc:DisplayName" minOccurs="0"/>
-          <xs:element ref="pc:AccountId" minOccurs="0"/>
-          <xs:element ref="pc:AccountType" minOccurs="0"/>
-        </xs:sequence>
-      </xs:complexType>
-    </xs:element>
-    <xs:element name="DisplayName" type="xs:string"/>
-    <xs:element name="AccountId" type="xs:string"/>
-    <xs:element name="AccountType" type="xs:string"/>
-    <xs:element name="BDCAssociatedEntity">
-      <xs:complexType>
-        <xs:sequence>
-          <xs:element ref="pc:BDCEntity" minOccurs="0" maxOccurs="unbounded"/>
-        </xs:sequence>
-        <xs:attribute ref="pc:EntityNamespace"/>
-        <xs:attribute ref="pc:EntityName"/>
-        <xs:attribute ref="pc:SystemInstanceName"/>
-        <xs:attribute ref="pc:AssociationName"/>
-      </xs:complexType>
-    </xs:element>
-    <xs:attribute name="EntityNamespace" type="xs:string"/>
-    <xs:attribute name="EntityName" type="xs:string"/>
-    <xs:attribute name="SystemInstanceName" type="xs:string"/>
-    <xs:attribute name="AssociationName" type="xs:string"/>
-    <xs:element name="BDCEntity">
-      <xs:complexType>
-        <xs:sequence>
-          <xs:element ref="pc:EntityDisplayName" minOccurs="0"/>
-          <xs:element ref="pc:EntityInstanceReference" minOccurs="0"/>
-          <xs:element ref="pc:EntityId1" minOccurs="0"/>
-          <xs:element ref="pc:EntityId2" minOccurs="0"/>
-          <xs:element ref="pc:EntityId3" minOccurs="0"/>
-          <xs:element ref="pc:EntityId4" minOccurs="0"/>
-          <xs:element ref="pc:EntityId5" minOccurs="0"/>
-        </xs:sequence>
-      </xs:complexType>
-    </xs:element>
-    <xs:element name="EntityDisplayName" type="xs:string"/>
-    <xs:element name="EntityInstanceReference" type="xs:string"/>
-    <xs:element name="EntityId1" type="xs:string"/>
-    <xs:element name="EntityId2" type="xs:string"/>
-    <xs:element name="EntityId3" type="xs:string"/>
-    <xs:element name="EntityId4" type="xs:string"/>
-    <xs:element name="EntityId5" type="xs:string"/>
-    <xs:element name="Terms">
-      <xs:complexType>
-        <xs:sequence>
-          <xs:element ref="pc:TermInfo" minOccurs="0" maxOccurs="unbounded"/>
-        </xs:sequence>
-      </xs:complexType>
-    </xs:element>
-    <xs:element name="TermInfo">
-      <xs:complexType>
-        <xs:sequence>
-          <xs:element ref="pc:TermName" minOccurs="0"/>
-          <xs:element ref="pc:TermId" minOccurs="0"/>
-        </xs:sequence>
-      </xs:complexType>
-    </xs:element>
-    <xs:element name="TermName" type="xs:string"/>
-    <xs:element name="TermId" type="xs:string"/>
-  </xs:schema>
-</ct:contentTypeSchema>
-</file>
-
-<file path=customXml/item2.xml><?xml version="1.0" encoding="utf-8"?>
-<?mso-contentType ?>
-<FormTemplates xmlns="http://schemas.microsoft.com/sharepoint/v3/contenttype/forms">
-  <Display>DocumentLibraryForm</Display>
-  <Edit>DocumentLibraryForm</Edit>
-  <New>DocumentLibraryForm</New>
-</FormTemplates>
-</file>
-
-<file path=customXml/item3.xml><?xml version="1.0" encoding="utf-8"?>
-<p:properties xmlns:p="http://schemas.microsoft.com/office/2006/metadata/properties" xmlns:xsi="http://www.w3.org/2001/XMLSchema-instance" xmlns:pc="http://schemas.microsoft.com/office/infopath/2007/PartnerControls">
-  <documentManagement/>
-</p:properties>
-</file>
-
-<file path=customXml/itemProps1.xml><?xml version="1.0" encoding="utf-8"?>
-<ds:datastoreItem xmlns:ds="http://schemas.openxmlformats.org/officeDocument/2006/customXml" ds:itemID="{9DCE3C33-DA20-4137-8780-2DFB9D124B5F}"/>
-</file>
-
-<file path=customXml/itemProps2.xml><?xml version="1.0" encoding="utf-8"?>
-<ds:datastoreItem xmlns:ds="http://schemas.openxmlformats.org/officeDocument/2006/customXml" ds:itemID="{EF52A612-AF78-47DD-B93F-797A255C919D}"/>
-</file>
-
-<file path=customXml/itemProps3.xml><?xml version="1.0" encoding="utf-8"?>
-<ds:datastoreItem xmlns:ds="http://schemas.openxmlformats.org/officeDocument/2006/customXml" ds:itemID="{4DD8559E-0254-4CDB-A1BC-0C5BFDA8332E}"/>
 </file>
--- a/assets/lessons/lectures/digital-signal-processing/mixing-2018.pptx
+++ b/assets/lessons/lectures/digital-signal-processing/mixing-2018.pptx
@@ -3840,7 +3840,7 @@
       </p:pic>
       <p:sp>
         <p:nvSpPr>
-          <p:cNvPr id="21" name="DSPIRA 1"/>
+          <p:cNvPr id="22" name="DSPIRA 2"/>
           <p:cNvSpPr>
             <a:spLocks noGrp="1"/>
           </p:cNvSpPr>
@@ -3848,7 +3848,7 @@
         </p:nvSpPr>
         <p:spPr>
           <a:xfrm>
-            <a:off x="0" y="0"/>
+            <a:off x="0" y="7200900"/>
             <a:ext cx="12192000" cy="342900"/>
           </a:xfrm>
           <a:prstGeom prst="rect">
@@ -3861,81 +3861,6 @@
             <a:noFill/>
           </a:ln>
         </p:spPr>
-      </p:sp>
-      <p:sp>
-        <p:nvSpPr>
-          <p:cNvPr id="22" name="DSPIRA 2"/>
-          <p:cNvSpPr>
-            <a:spLocks noGrp="1"/>
-          </p:cNvSpPr>
-          <p:nvPr/>
-        </p:nvSpPr>
-        <p:spPr>
-          <a:xfrm>
-            <a:off x="0" y="7200900"/>
-            <a:ext cx="12192000" cy="342900"/>
-          </a:xfrm>
-          <a:prstGeom prst="rect">
-            <a:avLst/>
-          </a:prstGeom>
-          <a:solidFill>
-            <a:srgbClr val="FFFFFF"/>
-          </a:solidFill>
-          <a:ln w="0">
-            <a:noFill/>
-          </a:ln>
-        </p:spPr>
-      </p:sp>
-      <p:sp>
-        <p:nvSpPr>
-          <p:cNvPr id="23" name="DSPIRA 3"/>
-          <p:cNvSpPr>
-            <a:spLocks noGrp="1"/>
-          </p:cNvSpPr>
-          <p:nvPr/>
-        </p:nvSpPr>
-        <p:spPr>
-          <a:xfrm>
-            <a:off x="228600" y="76200"/>
-            <a:ext cx="4762500" cy="228600"/>
-          </a:xfrm>
-          <a:prstGeom prst="rect">
-            <a:avLst/>
-          </a:prstGeom>
-          <a:noFill/>
-          <a:ln w="0">
-            <a:noFill/>
-          </a:ln>
-        </p:spPr>
-        <p:txBody>
-          <a:bodyPr>
-            <a:noAutofit/>
-          </a:bodyPr>
-          <a:lstStyle/>
-          <a:p>
-            <a:pPr>
-              <a:defRPr sz="1200" b="1">
-                <a:solidFill>
-                  <a:srgbClr val="002855"/>
-                </a:solidFill>
-                <a:latin typeface="Arial"/>
-                <a:ea typeface="Arial"/>
-                <a:cs typeface="Arial"/>
-              </a:defRPr>
-            </a:pPr>
-            <a:r>
-              <a:rPr sz="1200" b="1">
-                <a:solidFill>
-                  <a:srgbClr val="002855"/>
-                </a:solidFill>
-                <a:latin typeface="Arial"/>
-                <a:ea typeface="Arial"/>
-                <a:cs typeface="Arial"/>
-              </a:rPr>
-              <a:t>WVU DSPIRA</a:t>
-            </a:r>
-          </a:p>
-        </p:txBody>
       </p:sp>
       <p:sp>
         <p:nvSpPr>
@@ -4035,6 +3960,156 @@
                 <a:cs typeface="Arial"/>
               </a:rPr>
               <a:t>1 of 6</a:t>
+            </a:r>
+          </a:p>
+        </p:txBody>
+      </p:sp>
+      <p:sp>
+        <p:nvSpPr>
+          <p:cNvPr id="26" name="WVU DSPIRA navy band"/>
+          <p:cNvSpPr>
+            <a:spLocks noGrp="1"/>
+          </p:cNvSpPr>
+          <p:nvPr/>
+        </p:nvSpPr>
+        <p:spPr>
+          <a:xfrm>
+            <a:off x="0" y="0"/>
+            <a:ext cx="12192000" cy="323850"/>
+          </a:xfrm>
+          <a:prstGeom prst="rect">
+            <a:avLst/>
+          </a:prstGeom>
+          <a:solidFill>
+            <a:srgbClr val="002855"/>
+          </a:solidFill>
+          <a:ln w="0">
+            <a:noFill/>
+          </a:ln>
+        </p:spPr>
+      </p:sp>
+      <p:sp>
+        <p:nvSpPr>
+          <p:cNvPr id="27" name="WVU DSPIRA gold rule"/>
+          <p:cNvSpPr>
+            <a:spLocks noGrp="1"/>
+          </p:cNvSpPr>
+          <p:nvPr/>
+        </p:nvSpPr>
+        <p:spPr>
+          <a:xfrm>
+            <a:off x="0" y="323850"/>
+            <a:ext cx="12192000" cy="19050"/>
+          </a:xfrm>
+          <a:prstGeom prst="rect">
+            <a:avLst/>
+          </a:prstGeom>
+          <a:solidFill>
+            <a:srgbClr val="EEAA00"/>
+          </a:solidFill>
+          <a:ln w="0">
+            <a:noFill/>
+          </a:ln>
+        </p:spPr>
+      </p:sp>
+      <p:sp>
+        <p:nvSpPr>
+          <p:cNvPr id="28" name="WVU DSPIRA name"/>
+          <p:cNvSpPr>
+            <a:spLocks noGrp="1"/>
+          </p:cNvSpPr>
+          <p:nvPr/>
+        </p:nvSpPr>
+        <p:spPr>
+          <a:xfrm>
+            <a:off x="228600" y="19050"/>
+            <a:ext cx="2857500" cy="257175"/>
+          </a:xfrm>
+          <a:prstGeom prst="rect">
+            <a:avLst/>
+          </a:prstGeom>
+          <a:noFill/>
+          <a:ln w="0">
+            <a:noFill/>
+          </a:ln>
+        </p:spPr>
+        <p:txBody>
+          <a:bodyPr>
+            <a:noAutofit/>
+          </a:bodyPr>
+          <a:lstStyle/>
+          <a:p>
+            <a:pPr>
+              <a:defRPr sz="1600" b="1">
+                <a:solidFill>
+                  <a:srgbClr val="FFFFFF"/>
+                </a:solidFill>
+                <a:latin typeface="Arial"/>
+                <a:ea typeface="Arial"/>
+                <a:cs typeface="Arial"/>
+              </a:defRPr>
+            </a:pPr>
+            <a:r>
+              <a:rPr sz="1600" b="1">
+                <a:solidFill>
+                  <a:srgbClr val="FFFFFF"/>
+                </a:solidFill>
+                <a:latin typeface="Arial"/>
+                <a:ea typeface="Arial"/>
+                <a:cs typeface="Arial"/>
+              </a:rPr>
+              <a:t>WVU DSPIRA</a:t>
+            </a:r>
+          </a:p>
+        </p:txBody>
+      </p:sp>
+      <p:sp>
+        <p:nvSpPr>
+          <p:cNvPr id="29" name="WVU DSPIRA university"/>
+          <p:cNvSpPr>
+            <a:spLocks noGrp="1"/>
+          </p:cNvSpPr>
+          <p:nvPr/>
+        </p:nvSpPr>
+        <p:spPr>
+          <a:xfrm>
+            <a:off x="9334500" y="114300"/>
+            <a:ext cx="2628900" cy="171450"/>
+          </a:xfrm>
+          <a:prstGeom prst="rect">
+            <a:avLst/>
+          </a:prstGeom>
+          <a:noFill/>
+          <a:ln w="0">
+            <a:noFill/>
+          </a:ln>
+        </p:spPr>
+        <p:txBody>
+          <a:bodyPr>
+            <a:noAutofit/>
+          </a:bodyPr>
+          <a:lstStyle/>
+          <a:p>
+            <a:pPr algn="r">
+              <a:defRPr sz="900">
+                <a:solidFill>
+                  <a:srgbClr val="FFFFFF"/>
+                </a:solidFill>
+                <a:latin typeface="Arial"/>
+                <a:ea typeface="Arial"/>
+                <a:cs typeface="Arial"/>
+              </a:defRPr>
+            </a:pPr>
+            <a:r>
+              <a:rPr sz="900">
+                <a:solidFill>
+                  <a:srgbClr val="FFFFFF"/>
+                </a:solidFill>
+                <a:latin typeface="Arial"/>
+                <a:ea typeface="Arial"/>
+                <a:cs typeface="Arial"/>
+              </a:rPr>
+              <a:t>WEST VIRGINIA UNIVERSITY</a:t>
             </a:r>
           </a:p>
         </p:txBody>
@@ -4326,7 +4401,7 @@
       </p:pic>
       <p:sp>
         <p:nvSpPr>
-          <p:cNvPr id="15" name="DSPIRA 1"/>
+          <p:cNvPr id="16" name="DSPIRA 2"/>
           <p:cNvSpPr>
             <a:spLocks noGrp="1"/>
           </p:cNvSpPr>
@@ -4334,7 +4409,7 @@
         </p:nvSpPr>
         <p:spPr>
           <a:xfrm>
-            <a:off x="0" y="0"/>
+            <a:off x="0" y="7200900"/>
             <a:ext cx="12192000" cy="342900"/>
           </a:xfrm>
           <a:prstGeom prst="rect">
@@ -4347,81 +4422,6 @@
             <a:noFill/>
           </a:ln>
         </p:spPr>
-      </p:sp>
-      <p:sp>
-        <p:nvSpPr>
-          <p:cNvPr id="16" name="DSPIRA 2"/>
-          <p:cNvSpPr>
-            <a:spLocks noGrp="1"/>
-          </p:cNvSpPr>
-          <p:nvPr/>
-        </p:nvSpPr>
-        <p:spPr>
-          <a:xfrm>
-            <a:off x="0" y="7200900"/>
-            <a:ext cx="12192000" cy="342900"/>
-          </a:xfrm>
-          <a:prstGeom prst="rect">
-            <a:avLst/>
-          </a:prstGeom>
-          <a:solidFill>
-            <a:srgbClr val="FFFFFF"/>
-          </a:solidFill>
-          <a:ln w="0">
-            <a:noFill/>
-          </a:ln>
-        </p:spPr>
-      </p:sp>
-      <p:sp>
-        <p:nvSpPr>
-          <p:cNvPr id="17" name="DSPIRA 3"/>
-          <p:cNvSpPr>
-            <a:spLocks noGrp="1"/>
-          </p:cNvSpPr>
-          <p:nvPr/>
-        </p:nvSpPr>
-        <p:spPr>
-          <a:xfrm>
-            <a:off x="228600" y="76200"/>
-            <a:ext cx="4762500" cy="228600"/>
-          </a:xfrm>
-          <a:prstGeom prst="rect">
-            <a:avLst/>
-          </a:prstGeom>
-          <a:noFill/>
-          <a:ln w="0">
-            <a:noFill/>
-          </a:ln>
-        </p:spPr>
-        <p:txBody>
-          <a:bodyPr>
-            <a:noAutofit/>
-          </a:bodyPr>
-          <a:lstStyle/>
-          <a:p>
-            <a:pPr>
-              <a:defRPr sz="1200" b="1">
-                <a:solidFill>
-                  <a:srgbClr val="002855"/>
-                </a:solidFill>
-                <a:latin typeface="Arial"/>
-                <a:ea typeface="Arial"/>
-                <a:cs typeface="Arial"/>
-              </a:defRPr>
-            </a:pPr>
-            <a:r>
-              <a:rPr sz="1200" b="1">
-                <a:solidFill>
-                  <a:srgbClr val="002855"/>
-                </a:solidFill>
-                <a:latin typeface="Arial"/>
-                <a:ea typeface="Arial"/>
-                <a:cs typeface="Arial"/>
-              </a:rPr>
-              <a:t>WVU DSPIRA</a:t>
-            </a:r>
-          </a:p>
-        </p:txBody>
       </p:sp>
       <p:sp>
         <p:nvSpPr>
@@ -4521,6 +4521,156 @@
                 <a:cs typeface="Arial"/>
               </a:rPr>
               <a:t>2 of 6</a:t>
+            </a:r>
+          </a:p>
+        </p:txBody>
+      </p:sp>
+      <p:sp>
+        <p:nvSpPr>
+          <p:cNvPr id="20" name="WVU DSPIRA navy band"/>
+          <p:cNvSpPr>
+            <a:spLocks noGrp="1"/>
+          </p:cNvSpPr>
+          <p:nvPr/>
+        </p:nvSpPr>
+        <p:spPr>
+          <a:xfrm>
+            <a:off x="0" y="0"/>
+            <a:ext cx="12192000" cy="323850"/>
+          </a:xfrm>
+          <a:prstGeom prst="rect">
+            <a:avLst/>
+          </a:prstGeom>
+          <a:solidFill>
+            <a:srgbClr val="002855"/>
+          </a:solidFill>
+          <a:ln w="0">
+            <a:noFill/>
+          </a:ln>
+        </p:spPr>
+      </p:sp>
+      <p:sp>
+        <p:nvSpPr>
+          <p:cNvPr id="21" name="WVU DSPIRA gold rule"/>
+          <p:cNvSpPr>
+            <a:spLocks noGrp="1"/>
+          </p:cNvSpPr>
+          <p:nvPr/>
+        </p:nvSpPr>
+        <p:spPr>
+          <a:xfrm>
+            <a:off x="0" y="323850"/>
+            <a:ext cx="12192000" cy="19050"/>
+          </a:xfrm>
+          <a:prstGeom prst="rect">
+            <a:avLst/>
+          </a:prstGeom>
+          <a:solidFill>
+            <a:srgbClr val="EEAA00"/>
+          </a:solidFill>
+          <a:ln w="0">
+            <a:noFill/>
+          </a:ln>
+        </p:spPr>
+      </p:sp>
+      <p:sp>
+        <p:nvSpPr>
+          <p:cNvPr id="22" name="WVU DSPIRA name"/>
+          <p:cNvSpPr>
+            <a:spLocks noGrp="1"/>
+          </p:cNvSpPr>
+          <p:nvPr/>
+        </p:nvSpPr>
+        <p:spPr>
+          <a:xfrm>
+            <a:off x="228600" y="19050"/>
+            <a:ext cx="2857500" cy="257175"/>
+          </a:xfrm>
+          <a:prstGeom prst="rect">
+            <a:avLst/>
+          </a:prstGeom>
+          <a:noFill/>
+          <a:ln w="0">
+            <a:noFill/>
+          </a:ln>
+        </p:spPr>
+        <p:txBody>
+          <a:bodyPr>
+            <a:noAutofit/>
+          </a:bodyPr>
+          <a:lstStyle/>
+          <a:p>
+            <a:pPr>
+              <a:defRPr sz="1600" b="1">
+                <a:solidFill>
+                  <a:srgbClr val="FFFFFF"/>
+                </a:solidFill>
+                <a:latin typeface="Arial"/>
+                <a:ea typeface="Arial"/>
+                <a:cs typeface="Arial"/>
+              </a:defRPr>
+            </a:pPr>
+            <a:r>
+              <a:rPr sz="1600" b="1">
+                <a:solidFill>
+                  <a:srgbClr val="FFFFFF"/>
+                </a:solidFill>
+                <a:latin typeface="Arial"/>
+                <a:ea typeface="Arial"/>
+                <a:cs typeface="Arial"/>
+              </a:rPr>
+              <a:t>WVU DSPIRA</a:t>
+            </a:r>
+          </a:p>
+        </p:txBody>
+      </p:sp>
+      <p:sp>
+        <p:nvSpPr>
+          <p:cNvPr id="23" name="WVU DSPIRA university"/>
+          <p:cNvSpPr>
+            <a:spLocks noGrp="1"/>
+          </p:cNvSpPr>
+          <p:nvPr/>
+        </p:nvSpPr>
+        <p:spPr>
+          <a:xfrm>
+            <a:off x="9334500" y="114300"/>
+            <a:ext cx="2628900" cy="171450"/>
+          </a:xfrm>
+          <a:prstGeom prst="rect">
+            <a:avLst/>
+          </a:prstGeom>
+          <a:noFill/>
+          <a:ln w="0">
+            <a:noFill/>
+          </a:ln>
+        </p:spPr>
+        <p:txBody>
+          <a:bodyPr>
+            <a:noAutofit/>
+          </a:bodyPr>
+          <a:lstStyle/>
+          <a:p>
+            <a:pPr algn="r">
+              <a:defRPr sz="900">
+                <a:solidFill>
+                  <a:srgbClr val="FFFFFF"/>
+                </a:solidFill>
+                <a:latin typeface="Arial"/>
+                <a:ea typeface="Arial"/>
+                <a:cs typeface="Arial"/>
+              </a:defRPr>
+            </a:pPr>
+            <a:r>
+              <a:rPr sz="900">
+                <a:solidFill>
+                  <a:srgbClr val="FFFFFF"/>
+                </a:solidFill>
+                <a:latin typeface="Arial"/>
+                <a:ea typeface="Arial"/>
+                <a:cs typeface="Arial"/>
+              </a:rPr>
+              <a:t>WEST VIRGINIA UNIVERSITY</a:t>
             </a:r>
           </a:p>
         </p:txBody>
@@ -5090,7 +5240,7 @@
       </p:pic>
       <p:sp>
         <p:nvSpPr>
-          <p:cNvPr id="6" name="DSPIRA 1"/>
+          <p:cNvPr id="7" name="DSPIRA 2"/>
           <p:cNvSpPr>
             <a:spLocks noGrp="1"/>
           </p:cNvSpPr>
@@ -5098,7 +5248,7 @@
         </p:nvSpPr>
         <p:spPr>
           <a:xfrm>
-            <a:off x="0" y="0"/>
+            <a:off x="0" y="7200900"/>
             <a:ext cx="12192000" cy="342900"/>
           </a:xfrm>
           <a:prstGeom prst="rect">
@@ -5111,81 +5261,6 @@
             <a:noFill/>
           </a:ln>
         </p:spPr>
-      </p:sp>
-      <p:sp>
-        <p:nvSpPr>
-          <p:cNvPr id="7" name="DSPIRA 2"/>
-          <p:cNvSpPr>
-            <a:spLocks noGrp="1"/>
-          </p:cNvSpPr>
-          <p:nvPr/>
-        </p:nvSpPr>
-        <p:spPr>
-          <a:xfrm>
-            <a:off x="0" y="7200900"/>
-            <a:ext cx="12192000" cy="342900"/>
-          </a:xfrm>
-          <a:prstGeom prst="rect">
-            <a:avLst/>
-          </a:prstGeom>
-          <a:solidFill>
-            <a:srgbClr val="FFFFFF"/>
-          </a:solidFill>
-          <a:ln w="0">
-            <a:noFill/>
-          </a:ln>
-        </p:spPr>
-      </p:sp>
-      <p:sp>
-        <p:nvSpPr>
-          <p:cNvPr id="8" name="DSPIRA 3"/>
-          <p:cNvSpPr>
-            <a:spLocks noGrp="1"/>
-          </p:cNvSpPr>
-          <p:nvPr/>
-        </p:nvSpPr>
-        <p:spPr>
-          <a:xfrm>
-            <a:off x="228600" y="76200"/>
-            <a:ext cx="4762500" cy="228600"/>
-          </a:xfrm>
-          <a:prstGeom prst="rect">
-            <a:avLst/>
-          </a:prstGeom>
-          <a:noFill/>
-          <a:ln w="0">
-            <a:noFill/>
-          </a:ln>
-        </p:spPr>
-        <p:txBody>
-          <a:bodyPr>
-            <a:noAutofit/>
-          </a:bodyPr>
-          <a:lstStyle/>
-          <a:p>
-            <a:pPr>
-              <a:defRPr sz="1200" b="1">
-                <a:solidFill>
-                  <a:srgbClr val="002855"/>
-                </a:solidFill>
-                <a:latin typeface="Arial"/>
-                <a:ea typeface="Arial"/>
-                <a:cs typeface="Arial"/>
-              </a:defRPr>
-            </a:pPr>
-            <a:r>
-              <a:rPr sz="1200" b="1">
-                <a:solidFill>
-                  <a:srgbClr val="002855"/>
-                </a:solidFill>
-                <a:latin typeface="Arial"/>
-                <a:ea typeface="Arial"/>
-                <a:cs typeface="Arial"/>
-              </a:rPr>
-              <a:t>WVU DSPIRA</a:t>
-            </a:r>
-          </a:p>
-        </p:txBody>
       </p:sp>
       <p:sp>
         <p:nvSpPr>
@@ -5285,6 +5360,156 @@
                 <a:cs typeface="Arial"/>
               </a:rPr>
               <a:t>3 of 6</a:t>
+            </a:r>
+          </a:p>
+        </p:txBody>
+      </p:sp>
+      <p:sp>
+        <p:nvSpPr>
+          <p:cNvPr id="11" name="WVU DSPIRA navy band"/>
+          <p:cNvSpPr>
+            <a:spLocks noGrp="1"/>
+          </p:cNvSpPr>
+          <p:nvPr/>
+        </p:nvSpPr>
+        <p:spPr>
+          <a:xfrm>
+            <a:off x="0" y="0"/>
+            <a:ext cx="12192000" cy="323850"/>
+          </a:xfrm>
+          <a:prstGeom prst="rect">
+            <a:avLst/>
+          </a:prstGeom>
+          <a:solidFill>
+            <a:srgbClr val="002855"/>
+          </a:solidFill>
+          <a:ln w="0">
+            <a:noFill/>
+          </a:ln>
+        </p:spPr>
+      </p:sp>
+      <p:sp>
+        <p:nvSpPr>
+          <p:cNvPr id="12" name="WVU DSPIRA gold rule"/>
+          <p:cNvSpPr>
+            <a:spLocks noGrp="1"/>
+          </p:cNvSpPr>
+          <p:nvPr/>
+        </p:nvSpPr>
+        <p:spPr>
+          <a:xfrm>
+            <a:off x="0" y="323850"/>
+            <a:ext cx="12192000" cy="19050"/>
+          </a:xfrm>
+          <a:prstGeom prst="rect">
+            <a:avLst/>
+          </a:prstGeom>
+          <a:solidFill>
+            <a:srgbClr val="EEAA00"/>
+          </a:solidFill>
+          <a:ln w="0">
+            <a:noFill/>
+          </a:ln>
+        </p:spPr>
+      </p:sp>
+      <p:sp>
+        <p:nvSpPr>
+          <p:cNvPr id="13" name="WVU DSPIRA name"/>
+          <p:cNvSpPr>
+            <a:spLocks noGrp="1"/>
+          </p:cNvSpPr>
+          <p:nvPr/>
+        </p:nvSpPr>
+        <p:spPr>
+          <a:xfrm>
+            <a:off x="228600" y="19050"/>
+            <a:ext cx="2857500" cy="257175"/>
+          </a:xfrm>
+          <a:prstGeom prst="rect">
+            <a:avLst/>
+          </a:prstGeom>
+          <a:noFill/>
+          <a:ln w="0">
+            <a:noFill/>
+          </a:ln>
+        </p:spPr>
+        <p:txBody>
+          <a:bodyPr>
+            <a:noAutofit/>
+          </a:bodyPr>
+          <a:lstStyle/>
+          <a:p>
+            <a:pPr>
+              <a:defRPr sz="1600" b="1">
+                <a:solidFill>
+                  <a:srgbClr val="FFFFFF"/>
+                </a:solidFill>
+                <a:latin typeface="Arial"/>
+                <a:ea typeface="Arial"/>
+                <a:cs typeface="Arial"/>
+              </a:defRPr>
+            </a:pPr>
+            <a:r>
+              <a:rPr sz="1600" b="1">
+                <a:solidFill>
+                  <a:srgbClr val="FFFFFF"/>
+                </a:solidFill>
+                <a:latin typeface="Arial"/>
+                <a:ea typeface="Arial"/>
+                <a:cs typeface="Arial"/>
+              </a:rPr>
+              <a:t>WVU DSPIRA</a:t>
+            </a:r>
+          </a:p>
+        </p:txBody>
+      </p:sp>
+      <p:sp>
+        <p:nvSpPr>
+          <p:cNvPr id="14" name="WVU DSPIRA university"/>
+          <p:cNvSpPr>
+            <a:spLocks noGrp="1"/>
+          </p:cNvSpPr>
+          <p:nvPr/>
+        </p:nvSpPr>
+        <p:spPr>
+          <a:xfrm>
+            <a:off x="9334500" y="114300"/>
+            <a:ext cx="2628900" cy="171450"/>
+          </a:xfrm>
+          <a:prstGeom prst="rect">
+            <a:avLst/>
+          </a:prstGeom>
+          <a:noFill/>
+          <a:ln w="0">
+            <a:noFill/>
+          </a:ln>
+        </p:spPr>
+        <p:txBody>
+          <a:bodyPr>
+            <a:noAutofit/>
+          </a:bodyPr>
+          <a:lstStyle/>
+          <a:p>
+            <a:pPr algn="r">
+              <a:defRPr sz="900">
+                <a:solidFill>
+                  <a:srgbClr val="FFFFFF"/>
+                </a:solidFill>
+                <a:latin typeface="Arial"/>
+                <a:ea typeface="Arial"/>
+                <a:cs typeface="Arial"/>
+              </a:defRPr>
+            </a:pPr>
+            <a:r>
+              <a:rPr sz="900">
+                <a:solidFill>
+                  <a:srgbClr val="FFFFFF"/>
+                </a:solidFill>
+                <a:latin typeface="Arial"/>
+                <a:ea typeface="Arial"/>
+                <a:cs typeface="Arial"/>
+              </a:rPr>
+              <a:t>WEST VIRGINIA UNIVERSITY</a:t>
             </a:r>
           </a:p>
         </p:txBody>
@@ -5876,7 +6101,7 @@
       </p:cxnSp>
       <p:sp>
         <p:nvSpPr>
-          <p:cNvPr id="28" name="DSPIRA 1"/>
+          <p:cNvPr id="29" name="DSPIRA 2"/>
           <p:cNvSpPr>
             <a:spLocks noGrp="1"/>
           </p:cNvSpPr>
@@ -5884,7 +6109,7 @@
         </p:nvSpPr>
         <p:spPr>
           <a:xfrm>
-            <a:off x="0" y="0"/>
+            <a:off x="0" y="7200900"/>
             <a:ext cx="12192000" cy="342900"/>
           </a:xfrm>
           <a:prstGeom prst="rect">
@@ -5897,81 +6122,6 @@
             <a:noFill/>
           </a:ln>
         </p:spPr>
-      </p:sp>
-      <p:sp>
-        <p:nvSpPr>
-          <p:cNvPr id="29" name="DSPIRA 2"/>
-          <p:cNvSpPr>
-            <a:spLocks noGrp="1"/>
-          </p:cNvSpPr>
-          <p:nvPr/>
-        </p:nvSpPr>
-        <p:spPr>
-          <a:xfrm>
-            <a:off x="0" y="7200900"/>
-            <a:ext cx="12192000" cy="342900"/>
-          </a:xfrm>
-          <a:prstGeom prst="rect">
-            <a:avLst/>
-          </a:prstGeom>
-          <a:solidFill>
-            <a:srgbClr val="FFFFFF"/>
-          </a:solidFill>
-          <a:ln w="0">
-            <a:noFill/>
-          </a:ln>
-        </p:spPr>
-      </p:sp>
-      <p:sp>
-        <p:nvSpPr>
-          <p:cNvPr id="30" name="DSPIRA 3"/>
-          <p:cNvSpPr>
-            <a:spLocks noGrp="1"/>
-          </p:cNvSpPr>
-          <p:nvPr/>
-        </p:nvSpPr>
-        <p:spPr>
-          <a:xfrm>
-            <a:off x="228600" y="76200"/>
-            <a:ext cx="4762500" cy="228600"/>
-          </a:xfrm>
-          <a:prstGeom prst="rect">
-            <a:avLst/>
-          </a:prstGeom>
-          <a:noFill/>
-          <a:ln w="0">
-            <a:noFill/>
-          </a:ln>
-        </p:spPr>
-        <p:txBody>
-          <a:bodyPr>
-            <a:noAutofit/>
-          </a:bodyPr>
-          <a:lstStyle/>
-          <a:p>
-            <a:pPr>
-              <a:defRPr sz="1200" b="1">
-                <a:solidFill>
-                  <a:srgbClr val="002855"/>
-                </a:solidFill>
-                <a:latin typeface="Arial"/>
-                <a:ea typeface="Arial"/>
-                <a:cs typeface="Arial"/>
-              </a:defRPr>
-            </a:pPr>
-            <a:r>
-              <a:rPr sz="1200" b="1">
-                <a:solidFill>
-                  <a:srgbClr val="002855"/>
-                </a:solidFill>
-                <a:latin typeface="Arial"/>
-                <a:ea typeface="Arial"/>
-                <a:cs typeface="Arial"/>
-              </a:rPr>
-              <a:t>WVU DSPIRA</a:t>
-            </a:r>
-          </a:p>
-        </p:txBody>
       </p:sp>
       <p:sp>
         <p:nvSpPr>
@@ -6071,6 +6221,156 @@
                 <a:cs typeface="Arial"/>
               </a:rPr>
               <a:t>4 of 6</a:t>
+            </a:r>
+          </a:p>
+        </p:txBody>
+      </p:sp>
+      <p:sp>
+        <p:nvSpPr>
+          <p:cNvPr id="33" name="WVU DSPIRA navy band"/>
+          <p:cNvSpPr>
+            <a:spLocks noGrp="1"/>
+          </p:cNvSpPr>
+          <p:nvPr/>
+        </p:nvSpPr>
+        <p:spPr>
+          <a:xfrm>
+            <a:off x="0" y="0"/>
+            <a:ext cx="12192000" cy="323850"/>
+          </a:xfrm>
+          <a:prstGeom prst="rect">
+            <a:avLst/>
+          </a:prstGeom>
+          <a:solidFill>
+            <a:srgbClr val="002855"/>
+          </a:solidFill>
+          <a:ln w="0">
+            <a:noFill/>
+          </a:ln>
+        </p:spPr>
+      </p:sp>
+      <p:sp>
+        <p:nvSpPr>
+          <p:cNvPr id="34" name="WVU DSPIRA gold rule"/>
+          <p:cNvSpPr>
+            <a:spLocks noGrp="1"/>
+          </p:cNvSpPr>
+          <p:nvPr/>
+        </p:nvSpPr>
+        <p:spPr>
+          <a:xfrm>
+            <a:off x="0" y="323850"/>
+            <a:ext cx="12192000" cy="19050"/>
+          </a:xfrm>
+          <a:prstGeom prst="rect">
+            <a:avLst/>
+          </a:prstGeom>
+          <a:solidFill>
+            <a:srgbClr val="EEAA00"/>
+          </a:solidFill>
+          <a:ln w="0">
+            <a:noFill/>
+          </a:ln>
+        </p:spPr>
+      </p:sp>
+      <p:sp>
+        <p:nvSpPr>
+          <p:cNvPr id="35" name="WVU DSPIRA name"/>
+          <p:cNvSpPr>
+            <a:spLocks noGrp="1"/>
+          </p:cNvSpPr>
+          <p:nvPr/>
+        </p:nvSpPr>
+        <p:spPr>
+          <a:xfrm>
+            <a:off x="228600" y="19050"/>
+            <a:ext cx="2857500" cy="257175"/>
+          </a:xfrm>
+          <a:prstGeom prst="rect">
+            <a:avLst/>
+          </a:prstGeom>
+          <a:noFill/>
+          <a:ln w="0">
+            <a:noFill/>
+          </a:ln>
+        </p:spPr>
+        <p:txBody>
+          <a:bodyPr>
+            <a:noAutofit/>
+          </a:bodyPr>
+          <a:lstStyle/>
+          <a:p>
+            <a:pPr>
+              <a:defRPr sz="1600" b="1">
+                <a:solidFill>
+                  <a:srgbClr val="FFFFFF"/>
+                </a:solidFill>
+                <a:latin typeface="Arial"/>
+                <a:ea typeface="Arial"/>
+                <a:cs typeface="Arial"/>
+              </a:defRPr>
+            </a:pPr>
+            <a:r>
+              <a:rPr sz="1600" b="1">
+                <a:solidFill>
+                  <a:srgbClr val="FFFFFF"/>
+                </a:solidFill>
+                <a:latin typeface="Arial"/>
+                <a:ea typeface="Arial"/>
+                <a:cs typeface="Arial"/>
+              </a:rPr>
+              <a:t>WVU DSPIRA</a:t>
+            </a:r>
+          </a:p>
+        </p:txBody>
+      </p:sp>
+      <p:sp>
+        <p:nvSpPr>
+          <p:cNvPr id="36" name="WVU DSPIRA university"/>
+          <p:cNvSpPr>
+            <a:spLocks noGrp="1"/>
+          </p:cNvSpPr>
+          <p:nvPr/>
+        </p:nvSpPr>
+        <p:spPr>
+          <a:xfrm>
+            <a:off x="9334500" y="114300"/>
+            <a:ext cx="2628900" cy="171450"/>
+          </a:xfrm>
+          <a:prstGeom prst="rect">
+            <a:avLst/>
+          </a:prstGeom>
+          <a:noFill/>
+          <a:ln w="0">
+            <a:noFill/>
+          </a:ln>
+        </p:spPr>
+        <p:txBody>
+          <a:bodyPr>
+            <a:noAutofit/>
+          </a:bodyPr>
+          <a:lstStyle/>
+          <a:p>
+            <a:pPr algn="r">
+              <a:defRPr sz="900">
+                <a:solidFill>
+                  <a:srgbClr val="FFFFFF"/>
+                </a:solidFill>
+                <a:latin typeface="Arial"/>
+                <a:ea typeface="Arial"/>
+                <a:cs typeface="Arial"/>
+              </a:defRPr>
+            </a:pPr>
+            <a:r>
+              <a:rPr sz="900">
+                <a:solidFill>
+                  <a:srgbClr val="FFFFFF"/>
+                </a:solidFill>
+                <a:latin typeface="Arial"/>
+                <a:ea typeface="Arial"/>
+                <a:cs typeface="Arial"/>
+              </a:rPr>
+              <a:t>WEST VIRGINIA UNIVERSITY</a:t>
             </a:r>
           </a:p>
         </p:txBody>
@@ -6347,7 +6647,7 @@
       </p:pic>
       <p:sp>
         <p:nvSpPr>
-          <p:cNvPr id="18" name="DSPIRA 1"/>
+          <p:cNvPr id="19" name="DSPIRA 2"/>
           <p:cNvSpPr>
             <a:spLocks noGrp="1"/>
           </p:cNvSpPr>
@@ -6355,7 +6655,7 @@
         </p:nvSpPr>
         <p:spPr>
           <a:xfrm>
-            <a:off x="0" y="0"/>
+            <a:off x="0" y="7200900"/>
             <a:ext cx="12192000" cy="342900"/>
           </a:xfrm>
           <a:prstGeom prst="rect">
@@ -6368,81 +6668,6 @@
             <a:noFill/>
           </a:ln>
         </p:spPr>
-      </p:sp>
-      <p:sp>
-        <p:nvSpPr>
-          <p:cNvPr id="19" name="DSPIRA 2"/>
-          <p:cNvSpPr>
-            <a:spLocks noGrp="1"/>
-          </p:cNvSpPr>
-          <p:nvPr/>
-        </p:nvSpPr>
-        <p:spPr>
-          <a:xfrm>
-            <a:off x="0" y="7200900"/>
-            <a:ext cx="12192000" cy="342900"/>
-          </a:xfrm>
-          <a:prstGeom prst="rect">
-            <a:avLst/>
-          </a:prstGeom>
-          <a:solidFill>
-            <a:srgbClr val="FFFFFF"/>
-          </a:solidFill>
-          <a:ln w="0">
-            <a:noFill/>
-          </a:ln>
-        </p:spPr>
-      </p:sp>
-      <p:sp>
-        <p:nvSpPr>
-          <p:cNvPr id="20" name="DSPIRA 3"/>
-          <p:cNvSpPr>
-            <a:spLocks noGrp="1"/>
-          </p:cNvSpPr>
-          <p:nvPr/>
-        </p:nvSpPr>
-        <p:spPr>
-          <a:xfrm>
-            <a:off x="228600" y="76200"/>
-            <a:ext cx="4762500" cy="228600"/>
-          </a:xfrm>
-          <a:prstGeom prst="rect">
-            <a:avLst/>
-          </a:prstGeom>
-          <a:noFill/>
-          <a:ln w="0">
-            <a:noFill/>
-          </a:ln>
-        </p:spPr>
-        <p:txBody>
-          <a:bodyPr>
-            <a:noAutofit/>
-          </a:bodyPr>
-          <a:lstStyle/>
-          <a:p>
-            <a:pPr>
-              <a:defRPr sz="1200" b="1">
-                <a:solidFill>
-                  <a:srgbClr val="002855"/>
-                </a:solidFill>
-                <a:latin typeface="Arial"/>
-                <a:ea typeface="Arial"/>
-                <a:cs typeface="Arial"/>
-              </a:defRPr>
-            </a:pPr>
-            <a:r>
-              <a:rPr sz="1200" b="1">
-                <a:solidFill>
-                  <a:srgbClr val="002855"/>
-                </a:solidFill>
-                <a:latin typeface="Arial"/>
-                <a:ea typeface="Arial"/>
-                <a:cs typeface="Arial"/>
-              </a:rPr>
-              <a:t>WVU DSPIRA</a:t>
-            </a:r>
-          </a:p>
-        </p:txBody>
       </p:sp>
       <p:sp>
         <p:nvSpPr>
@@ -6542,6 +6767,156 @@
                 <a:cs typeface="Arial"/>
               </a:rPr>
               <a:t>5 of 6</a:t>
+            </a:r>
+          </a:p>
+        </p:txBody>
+      </p:sp>
+      <p:sp>
+        <p:nvSpPr>
+          <p:cNvPr id="23" name="WVU DSPIRA navy band"/>
+          <p:cNvSpPr>
+            <a:spLocks noGrp="1"/>
+          </p:cNvSpPr>
+          <p:nvPr/>
+        </p:nvSpPr>
+        <p:spPr>
+          <a:xfrm>
+            <a:off x="0" y="0"/>
+            <a:ext cx="12192000" cy="323850"/>
+          </a:xfrm>
+          <a:prstGeom prst="rect">
+            <a:avLst/>
+          </a:prstGeom>
+          <a:solidFill>
+            <a:srgbClr val="002855"/>
+          </a:solidFill>
+          <a:ln w="0">
+            <a:noFill/>
+          </a:ln>
+        </p:spPr>
+      </p:sp>
+      <p:sp>
+        <p:nvSpPr>
+          <p:cNvPr id="24" name="WVU DSPIRA gold rule"/>
+          <p:cNvSpPr>
+            <a:spLocks noGrp="1"/>
+          </p:cNvSpPr>
+          <p:nvPr/>
+        </p:nvSpPr>
+        <p:spPr>
+          <a:xfrm>
+            <a:off x="0" y="323850"/>
+            <a:ext cx="12192000" cy="19050"/>
+          </a:xfrm>
+          <a:prstGeom prst="rect">
+            <a:avLst/>
+          </a:prstGeom>
+          <a:solidFill>
+            <a:srgbClr val="EEAA00"/>
+          </a:solidFill>
+          <a:ln w="0">
+            <a:noFill/>
+          </a:ln>
+        </p:spPr>
+      </p:sp>
+      <p:sp>
+        <p:nvSpPr>
+          <p:cNvPr id="25" name="WVU DSPIRA name"/>
+          <p:cNvSpPr>
+            <a:spLocks noGrp="1"/>
+          </p:cNvSpPr>
+          <p:nvPr/>
+        </p:nvSpPr>
+        <p:spPr>
+          <a:xfrm>
+            <a:off x="228600" y="19050"/>
+            <a:ext cx="2857500" cy="257175"/>
+          </a:xfrm>
+          <a:prstGeom prst="rect">
+            <a:avLst/>
+          </a:prstGeom>
+          <a:noFill/>
+          <a:ln w="0">
+            <a:noFill/>
+          </a:ln>
+        </p:spPr>
+        <p:txBody>
+          <a:bodyPr>
+            <a:noAutofit/>
+          </a:bodyPr>
+          <a:lstStyle/>
+          <a:p>
+            <a:pPr>
+              <a:defRPr sz="1600" b="1">
+                <a:solidFill>
+                  <a:srgbClr val="FFFFFF"/>
+                </a:solidFill>
+                <a:latin typeface="Arial"/>
+                <a:ea typeface="Arial"/>
+                <a:cs typeface="Arial"/>
+              </a:defRPr>
+            </a:pPr>
+            <a:r>
+              <a:rPr sz="1600" b="1">
+                <a:solidFill>
+                  <a:srgbClr val="FFFFFF"/>
+                </a:solidFill>
+                <a:latin typeface="Arial"/>
+                <a:ea typeface="Arial"/>
+                <a:cs typeface="Arial"/>
+              </a:rPr>
+              <a:t>WVU DSPIRA</a:t>
+            </a:r>
+          </a:p>
+        </p:txBody>
+      </p:sp>
+      <p:sp>
+        <p:nvSpPr>
+          <p:cNvPr id="26" name="WVU DSPIRA university"/>
+          <p:cNvSpPr>
+            <a:spLocks noGrp="1"/>
+          </p:cNvSpPr>
+          <p:nvPr/>
+        </p:nvSpPr>
+        <p:spPr>
+          <a:xfrm>
+            <a:off x="9334500" y="114300"/>
+            <a:ext cx="2628900" cy="171450"/>
+          </a:xfrm>
+          <a:prstGeom prst="rect">
+            <a:avLst/>
+          </a:prstGeom>
+          <a:noFill/>
+          <a:ln w="0">
+            <a:noFill/>
+          </a:ln>
+        </p:spPr>
+        <p:txBody>
+          <a:bodyPr>
+            <a:noAutofit/>
+          </a:bodyPr>
+          <a:lstStyle/>
+          <a:p>
+            <a:pPr algn="r">
+              <a:defRPr sz="900">
+                <a:solidFill>
+                  <a:srgbClr val="FFFFFF"/>
+                </a:solidFill>
+                <a:latin typeface="Arial"/>
+                <a:ea typeface="Arial"/>
+                <a:cs typeface="Arial"/>
+              </a:defRPr>
+            </a:pPr>
+            <a:r>
+              <a:rPr sz="900">
+                <a:solidFill>
+                  <a:srgbClr val="FFFFFF"/>
+                </a:solidFill>
+                <a:latin typeface="Arial"/>
+                <a:ea typeface="Arial"/>
+                <a:cs typeface="Arial"/>
+              </a:rPr>
+              <a:t>WEST VIRGINIA UNIVERSITY</a:t>
             </a:r>
           </a:p>
         </p:txBody>
@@ -7330,7 +7705,7 @@
       </mc:AlternateContent>
       <p:sp>
         <p:nvSpPr>
-          <p:cNvPr id="4" name="DSPIRA 1"/>
+          <p:cNvPr id="5" name="DSPIRA 2"/>
           <p:cNvSpPr>
             <a:spLocks noGrp="1"/>
           </p:cNvSpPr>
@@ -7338,7 +7713,7 @@
         </p:nvSpPr>
         <p:spPr>
           <a:xfrm>
-            <a:off x="0" y="0"/>
+            <a:off x="0" y="7200900"/>
             <a:ext cx="12192000" cy="342900"/>
           </a:xfrm>
           <a:prstGeom prst="rect">
@@ -7351,81 +7726,6 @@
             <a:noFill/>
           </a:ln>
         </p:spPr>
-      </p:sp>
-      <p:sp>
-        <p:nvSpPr>
-          <p:cNvPr id="5" name="DSPIRA 2"/>
-          <p:cNvSpPr>
-            <a:spLocks noGrp="1"/>
-          </p:cNvSpPr>
-          <p:nvPr/>
-        </p:nvSpPr>
-        <p:spPr>
-          <a:xfrm>
-            <a:off x="0" y="7200900"/>
-            <a:ext cx="12192000" cy="342900"/>
-          </a:xfrm>
-          <a:prstGeom prst="rect">
-            <a:avLst/>
-          </a:prstGeom>
-          <a:solidFill>
-            <a:srgbClr val="FFFFFF"/>
-          </a:solidFill>
-          <a:ln w="0">
-            <a:noFill/>
-          </a:ln>
-        </p:spPr>
-      </p:sp>
-      <p:sp>
-        <p:nvSpPr>
-          <p:cNvPr id="6" name="DSPIRA 3"/>
-          <p:cNvSpPr>
-            <a:spLocks noGrp="1"/>
-          </p:cNvSpPr>
-          <p:nvPr/>
-        </p:nvSpPr>
-        <p:spPr>
-          <a:xfrm>
-            <a:off x="228600" y="76200"/>
-            <a:ext cx="4762500" cy="228600"/>
-          </a:xfrm>
-          <a:prstGeom prst="rect">
-            <a:avLst/>
-          </a:prstGeom>
-          <a:noFill/>
-          <a:ln w="0">
-            <a:noFill/>
-          </a:ln>
-        </p:spPr>
-        <p:txBody>
-          <a:bodyPr>
-            <a:noAutofit/>
-          </a:bodyPr>
-          <a:lstStyle/>
-          <a:p>
-            <a:pPr>
-              <a:defRPr sz="1200" b="1">
-                <a:solidFill>
-                  <a:srgbClr val="002855"/>
-                </a:solidFill>
-                <a:latin typeface="Arial"/>
-                <a:ea typeface="Arial"/>
-                <a:cs typeface="Arial"/>
-              </a:defRPr>
-            </a:pPr>
-            <a:r>
-              <a:rPr sz="1200" b="1">
-                <a:solidFill>
-                  <a:srgbClr val="002855"/>
-                </a:solidFill>
-                <a:latin typeface="Arial"/>
-                <a:ea typeface="Arial"/>
-                <a:cs typeface="Arial"/>
-              </a:rPr>
-              <a:t>WVU DSPIRA</a:t>
-            </a:r>
-          </a:p>
-        </p:txBody>
       </p:sp>
       <p:sp>
         <p:nvSpPr>
@@ -7525,6 +7825,156 @@
                 <a:cs typeface="Arial"/>
               </a:rPr>
               <a:t>6 of 6</a:t>
+            </a:r>
+          </a:p>
+        </p:txBody>
+      </p:sp>
+      <p:sp>
+        <p:nvSpPr>
+          <p:cNvPr id="9" name="WVU DSPIRA navy band"/>
+          <p:cNvSpPr>
+            <a:spLocks noGrp="1"/>
+          </p:cNvSpPr>
+          <p:nvPr/>
+        </p:nvSpPr>
+        <p:spPr>
+          <a:xfrm>
+            <a:off x="0" y="0"/>
+            <a:ext cx="12192000" cy="323850"/>
+          </a:xfrm>
+          <a:prstGeom prst="rect">
+            <a:avLst/>
+          </a:prstGeom>
+          <a:solidFill>
+            <a:srgbClr val="002855"/>
+          </a:solidFill>
+          <a:ln w="0">
+            <a:noFill/>
+          </a:ln>
+        </p:spPr>
+      </p:sp>
+      <p:sp>
+        <p:nvSpPr>
+          <p:cNvPr id="10" name="WVU DSPIRA gold rule"/>
+          <p:cNvSpPr>
+            <a:spLocks noGrp="1"/>
+          </p:cNvSpPr>
+          <p:nvPr/>
+        </p:nvSpPr>
+        <p:spPr>
+          <a:xfrm>
+            <a:off x="0" y="323850"/>
+            <a:ext cx="12192000" cy="19050"/>
+          </a:xfrm>
+          <a:prstGeom prst="rect">
+            <a:avLst/>
+          </a:prstGeom>
+          <a:solidFill>
+            <a:srgbClr val="EEAA00"/>
+          </a:solidFill>
+          <a:ln w="0">
+            <a:noFill/>
+          </a:ln>
+        </p:spPr>
+      </p:sp>
+      <p:sp>
+        <p:nvSpPr>
+          <p:cNvPr id="11" name="WVU DSPIRA name"/>
+          <p:cNvSpPr>
+            <a:spLocks noGrp="1"/>
+          </p:cNvSpPr>
+          <p:nvPr/>
+        </p:nvSpPr>
+        <p:spPr>
+          <a:xfrm>
+            <a:off x="228600" y="19050"/>
+            <a:ext cx="2857500" cy="257175"/>
+          </a:xfrm>
+          <a:prstGeom prst="rect">
+            <a:avLst/>
+          </a:prstGeom>
+          <a:noFill/>
+          <a:ln w="0">
+            <a:noFill/>
+          </a:ln>
+        </p:spPr>
+        <p:txBody>
+          <a:bodyPr>
+            <a:noAutofit/>
+          </a:bodyPr>
+          <a:lstStyle/>
+          <a:p>
+            <a:pPr>
+              <a:defRPr sz="1600" b="1">
+                <a:solidFill>
+                  <a:srgbClr val="FFFFFF"/>
+                </a:solidFill>
+                <a:latin typeface="Arial"/>
+                <a:ea typeface="Arial"/>
+                <a:cs typeface="Arial"/>
+              </a:defRPr>
+            </a:pPr>
+            <a:r>
+              <a:rPr sz="1600" b="1">
+                <a:solidFill>
+                  <a:srgbClr val="FFFFFF"/>
+                </a:solidFill>
+                <a:latin typeface="Arial"/>
+                <a:ea typeface="Arial"/>
+                <a:cs typeface="Arial"/>
+              </a:rPr>
+              <a:t>WVU DSPIRA</a:t>
+            </a:r>
+          </a:p>
+        </p:txBody>
+      </p:sp>
+      <p:sp>
+        <p:nvSpPr>
+          <p:cNvPr id="12" name="WVU DSPIRA university"/>
+          <p:cNvSpPr>
+            <a:spLocks noGrp="1"/>
+          </p:cNvSpPr>
+          <p:nvPr/>
+        </p:nvSpPr>
+        <p:spPr>
+          <a:xfrm>
+            <a:off x="9334500" y="114300"/>
+            <a:ext cx="2628900" cy="171450"/>
+          </a:xfrm>
+          <a:prstGeom prst="rect">
+            <a:avLst/>
+          </a:prstGeom>
+          <a:noFill/>
+          <a:ln w="0">
+            <a:noFill/>
+          </a:ln>
+        </p:spPr>
+        <p:txBody>
+          <a:bodyPr>
+            <a:noAutofit/>
+          </a:bodyPr>
+          <a:lstStyle/>
+          <a:p>
+            <a:pPr algn="r">
+              <a:defRPr sz="900">
+                <a:solidFill>
+                  <a:srgbClr val="FFFFFF"/>
+                </a:solidFill>
+                <a:latin typeface="Arial"/>
+                <a:ea typeface="Arial"/>
+                <a:cs typeface="Arial"/>
+              </a:defRPr>
+            </a:pPr>
+            <a:r>
+              <a:rPr sz="900">
+                <a:solidFill>
+                  <a:srgbClr val="FFFFFF"/>
+                </a:solidFill>
+                <a:latin typeface="Arial"/>
+                <a:ea typeface="Arial"/>
+                <a:cs typeface="Arial"/>
+              </a:rPr>
+              <a:t>WEST VIRGINIA UNIVERSITY</a:t>
             </a:r>
           </a:p>
         </p:txBody>

--- a/assets/lessons/lectures/digital-signal-processing/mixing-2018.pptx
+++ b/assets/lessons/lectures/digital-signal-processing/mixing-2018.pptx
@@ -2,7 +2,7 @@
 <file path=ppt/presentation.xml><?xml version="1.0" encoding="utf-8"?>
 <p:presentation xmlns:a="http://schemas.openxmlformats.org/drawingml/2006/main" xmlns:r="http://schemas.openxmlformats.org/officeDocument/2006/relationships" xmlns:p="http://schemas.openxmlformats.org/presentationml/2006/main" saveSubsetFonts="1">
   <p:sldMasterIdLst>
-    <p:sldMasterId id="2147483648" r:id="rId1"/>
+    <p:sldMasterId id="2147483648" r:id="rIdWvuMaster"/>
   </p:sldMasterIdLst>
   <p:notesMasterIdLst>
     <p:notesMasterId r:id="rId8"/>
@@ -113,6 +113,185 @@
     </a:lvl9pPr>
   </p:defaultTextStyle>
 </p:presentation>
+</file>
+
+<file path=ppt/customXml/item1.xml><?xml version="1.0" encoding="utf-8"?>
+<ct:contentTypeSchema xmlns:ct="http://schemas.microsoft.com/office/2006/metadata/contentType" xmlns:ma="http://schemas.microsoft.com/office/2006/metadata/properties/metaAttributes" ct:_="" ma:_="" ma:contentTypeName="Document" ma:contentTypeID="0x01010016C36F108F9F92488C988DDF36346911" ma:contentTypeVersion="5" ma:contentTypeDescription="Create a new document." ma:contentTypeScope="" ma:versionID="c417924321fef32731141cd966ef6f94">
+  <xsd:schema xmlns:xsd="http://www.w3.org/2001/XMLSchema" xmlns:xs="http://www.w3.org/2001/XMLSchema" xmlns:p="http://schemas.microsoft.com/office/2006/metadata/properties" xmlns:ns2="1bb24863-89de-455f-aabf-4424925aa312" targetNamespace="http://schemas.microsoft.com/office/2006/metadata/properties" ma:root="true" ma:fieldsID="a7d3b2212d350eb904df17fc79fef4f4" ns2:_="">
+    <xsd:import namespace="1bb24863-89de-455f-aabf-4424925aa312"/>
+    <xsd:element name="properties">
+      <xsd:complexType>
+        <xsd:sequence>
+          <xsd:element name="documentManagement">
+            <xsd:complexType>
+              <xsd:all>
+                <xsd:element ref="ns2:MediaServiceMetadata" minOccurs="0"/>
+                <xsd:element ref="ns2:MediaServiceFastMetadata" minOccurs="0"/>
+                <xsd:element ref="ns2:MediaServiceAutoTags" minOccurs="0"/>
+                <xsd:element ref="ns2:MediaServiceOCR" minOccurs="0"/>
+                <xsd:element ref="ns2:MediaServiceDateTaken" minOccurs="0"/>
+              </xsd:all>
+            </xsd:complexType>
+          </xsd:element>
+        </xsd:sequence>
+      </xsd:complexType>
+    </xsd:element>
+  </xsd:schema>
+  <xsd:schema xmlns:xsd="http://www.w3.org/2001/XMLSchema" xmlns:xs="http://www.w3.org/2001/XMLSchema" xmlns:dms="http://schemas.microsoft.com/office/2006/documentManagement/types" xmlns:pc="http://schemas.microsoft.com/office/infopath/2007/PartnerControls" targetNamespace="1bb24863-89de-455f-aabf-4424925aa312" elementFormDefault="qualified">
+    <xsd:import namespace="http://schemas.microsoft.com/office/2006/documentManagement/types"/>
+    <xsd:import namespace="http://schemas.microsoft.com/office/infopath/2007/PartnerControls"/>
+    <xsd:element name="MediaServiceMetadata" ma:index="8" nillable="true" ma:displayName="MediaServiceMetadata" ma:hidden="true" ma:internalName="MediaServiceMetadata" ma:readOnly="true">
+      <xsd:simpleType>
+        <xsd:restriction base="dms:Note"/>
+      </xsd:simpleType>
+    </xsd:element>
+    <xsd:element name="MediaServiceFastMetadata" ma:index="9" nillable="true" ma:displayName="MediaServiceFastMetadata" ma:hidden="true" ma:internalName="MediaServiceFastMetadata" ma:readOnly="true">
+      <xsd:simpleType>
+        <xsd:restriction base="dms:Note"/>
+      </xsd:simpleType>
+    </xsd:element>
+    <xsd:element name="MediaServiceAutoTags" ma:index="10" nillable="true" ma:displayName="MediaServiceAutoTags" ma:internalName="MediaServiceAutoTags" ma:readOnly="true">
+      <xsd:simpleType>
+        <xsd:restriction base="dms:Text"/>
+      </xsd:simpleType>
+    </xsd:element>
+    <xsd:element name="MediaServiceOCR" ma:index="11" nillable="true" ma:displayName="MediaServiceOCR" ma:internalName="MediaServiceOCR" ma:readOnly="true">
+      <xsd:simpleType>
+        <xsd:restriction base="dms:Note">
+          <xsd:maxLength value="255"/>
+        </xsd:restriction>
+      </xsd:simpleType>
+    </xsd:element>
+    <xsd:element name="MediaServiceDateTaken" ma:index="12" nillable="true" ma:displayName="MediaServiceDateTaken" ma:hidden="true" ma:internalName="MediaServiceDateTaken" ma:readOnly="true">
+      <xsd:simpleType>
+        <xsd:restriction base="dms:Text"/>
+      </xsd:simpleType>
+    </xsd:element>
+  </xsd:schema>
+  <xsd:schema xmlns="http://schemas.openxmlformats.org/package/2006/metadata/core-properties" xmlns:xsd="http://www.w3.org/2001/XMLSchema" xmlns:xsi="http://www.w3.org/2001/XMLSchema-instance" xmlns:dc="http://purl.org/dc/elements/1.1/" xmlns:dcterms="http://purl.org/dc/terms/" xmlns:odoc="http://schemas.microsoft.com/internal/obd" targetNamespace="http://schemas.openxmlformats.org/package/2006/metadata/core-properties" elementFormDefault="qualified" attributeFormDefault="unqualified" blockDefault="#all">
+    <xsd:import namespace="http://purl.org/dc/elements/1.1/" schemaLocation="http://dublincore.org/schemas/xmls/qdc/2003/04/02/dc.xsd"/>
+    <xsd:import namespace="http://purl.org/dc/terms/" schemaLocation="http://dublincore.org/schemas/xmls/qdc/2003/04/02/dcterms.xsd"/>
+    <xsd:element name="coreProperties" type="CT_coreProperties"/>
+    <xsd:complexType name="CT_coreProperties">
+      <xsd:all>
+        <xsd:element ref="dc:creator" minOccurs="0" maxOccurs="1"/>
+        <xsd:element ref="dcterms:created" minOccurs="0" maxOccurs="1"/>
+        <xsd:element ref="dc:identifier" minOccurs="0" maxOccurs="1"/>
+        <xsd:element name="contentType" minOccurs="0" maxOccurs="1" type="xsd:string" ma:index="0" ma:displayName="Content Type"/>
+        <xsd:element ref="dc:title" minOccurs="0" maxOccurs="1" ma:index="4" ma:displayName="Title"/>
+        <xsd:element ref="dc:subject" minOccurs="0" maxOccurs="1"/>
+        <xsd:element ref="dc:description" minOccurs="0" maxOccurs="1"/>
+        <xsd:element name="keywords" minOccurs="0" maxOccurs="1" type="xsd:string"/>
+        <xsd:element ref="dc:language" minOccurs="0" maxOccurs="1"/>
+        <xsd:element name="category" minOccurs="0" maxOccurs="1" type="xsd:string"/>
+        <xsd:element name="version" minOccurs="0" maxOccurs="1" type="xsd:string"/>
+        <xsd:element name="revision" minOccurs="0" maxOccurs="1" type="xsd:string">
+          <xsd:annotation>
+            <xsd:documentation>
+                        This value indicates the number of saves or revisions. The application is responsible for updating this value after each revision.
+                    </xsd:documentation>
+          </xsd:annotation>
+        </xsd:element>
+        <xsd:element name="lastModifiedBy" minOccurs="0" maxOccurs="1" type="xsd:string"/>
+        <xsd:element ref="dcterms:modified" minOccurs="0" maxOccurs="1"/>
+        <xsd:element name="contentStatus" minOccurs="0" maxOccurs="1" type="xsd:string"/>
+      </xsd:all>
+    </xsd:complexType>
+  </xsd:schema>
+  <xs:schema xmlns:pc="http://schemas.microsoft.com/office/infopath/2007/PartnerControls" xmlns:xs="http://www.w3.org/2001/XMLSchema" targetNamespace="http://schemas.microsoft.com/office/infopath/2007/PartnerControls" elementFormDefault="qualified" attributeFormDefault="unqualified">
+    <xs:element name="Person">
+      <xs:complexType>
+        <xs:sequence>
+          <xs:element ref="pc:DisplayName" minOccurs="0"/>
+          <xs:element ref="pc:AccountId" minOccurs="0"/>
+          <xs:element ref="pc:AccountType" minOccurs="0"/>
+        </xs:sequence>
+      </xs:complexType>
+    </xs:element>
+    <xs:element name="DisplayName" type="xs:string"/>
+    <xs:element name="AccountId" type="xs:string"/>
+    <xs:element name="AccountType" type="xs:string"/>
+    <xs:element name="BDCAssociatedEntity">
+      <xs:complexType>
+        <xs:sequence>
+          <xs:element ref="pc:BDCEntity" minOccurs="0" maxOccurs="unbounded"/>
+        </xs:sequence>
+        <xs:attribute ref="pc:EntityNamespace"/>
+        <xs:attribute ref="pc:EntityName"/>
+        <xs:attribute ref="pc:SystemInstanceName"/>
+        <xs:attribute ref="pc:AssociationName"/>
+      </xs:complexType>
+    </xs:element>
+    <xs:attribute name="EntityNamespace" type="xs:string"/>
+    <xs:attribute name="EntityName" type="xs:string"/>
+    <xs:attribute name="SystemInstanceName" type="xs:string"/>
+    <xs:attribute name="AssociationName" type="xs:string"/>
+    <xs:element name="BDCEntity">
+      <xs:complexType>
+        <xs:sequence>
+          <xs:element ref="pc:EntityDisplayName" minOccurs="0"/>
+          <xs:element ref="pc:EntityInstanceReference" minOccurs="0"/>
+          <xs:element ref="pc:EntityId1" minOccurs="0"/>
+          <xs:element ref="pc:EntityId2" minOccurs="0"/>
+          <xs:element ref="pc:EntityId3" minOccurs="0"/>
+          <xs:element ref="pc:EntityId4" minOccurs="0"/>
+          <xs:element ref="pc:EntityId5" minOccurs="0"/>
+        </xs:sequence>
+      </xs:complexType>
+    </xs:element>
+    <xs:element name="EntityDisplayName" type="xs:string"/>
+    <xs:element name="EntityInstanceReference" type="xs:string"/>
+    <xs:element name="EntityId1" type="xs:string"/>
+    <xs:element name="EntityId2" type="xs:string"/>
+    <xs:element name="EntityId3" type="xs:string"/>
+    <xs:element name="EntityId4" type="xs:string"/>
+    <xs:element name="EntityId5" type="xs:string"/>
+    <xs:element name="Terms">
+      <xs:complexType>
+        <xs:sequence>
+          <xs:element ref="pc:TermInfo" minOccurs="0" maxOccurs="unbounded"/>
+        </xs:sequence>
+      </xs:complexType>
+    </xs:element>
+    <xs:element name="TermInfo">
+      <xs:complexType>
+        <xs:sequence>
+          <xs:element ref="pc:TermName" minOccurs="0"/>
+          <xs:element ref="pc:TermId" minOccurs="0"/>
+        </xs:sequence>
+      </xs:complexType>
+    </xs:element>
+    <xs:element name="TermName" type="xs:string"/>
+    <xs:element name="TermId" type="xs:string"/>
+  </xs:schema>
+</ct:contentTypeSchema>
+</file>
+
+<file path=ppt/customXml/item2.xml><?xml version="1.0" encoding="utf-8"?>
+<?mso-contentType ?>
+<FormTemplates xmlns="http://schemas.microsoft.com/sharepoint/v3/contenttype/forms">
+  <Display>DocumentLibraryForm</Display>
+  <Edit>DocumentLibraryForm</Edit>
+  <New>DocumentLibraryForm</New>
+</FormTemplates>
+</file>
+
+<file path=ppt/customXml/item3.xml><?xml version="1.0" encoding="utf-8"?>
+<p:properties xmlns:p="http://schemas.microsoft.com/office/2006/metadata/properties" xmlns:xsi="http://www.w3.org/2001/XMLSchema-instance" xmlns:pc="http://schemas.microsoft.com/office/infopath/2007/PartnerControls">
+  <documentManagement/>
+</p:properties>
+</file>
+
+<file path=ppt/customXml/itemProps1.xml><?xml version="1.0" encoding="utf-8"?>
+<ds:datastoreItem xmlns:ds="http://schemas.openxmlformats.org/officeDocument/2006/customXml" ds:itemID="{9DCE3C33-DA20-4137-8780-2DFB9D124B5F}"/>
+</file>
+
+<file path=ppt/customXml/itemProps2.xml><?xml version="1.0" encoding="utf-8"?>
+<ds:datastoreItem xmlns:ds="http://schemas.openxmlformats.org/officeDocument/2006/customXml" ds:itemID="{EF52A612-AF78-47DD-B93F-797A255C919D}"/>
+</file>
+
+<file path=ppt/customXml/itemProps3.xml><?xml version="1.0" encoding="utf-8"?>
+<ds:datastoreItem xmlns:ds="http://schemas.openxmlformats.org/officeDocument/2006/customXml" ds:itemID="{4DD8559E-0254-4CDB-A1BC-0C5BFDA8332E}"/>
 </file>
 
 <file path=ppt/notesMasters/notesMaster1.xml><?xml version="1.0" encoding="utf-8"?>
@@ -465,8 +644,8 @@
 </file>
 
 <file path=ppt/slideLayouts/slideLayout1.xml><?xml version="1.0" encoding="utf-8"?>
-<p:sldLayout xmlns:a="http://schemas.openxmlformats.org/drawingml/2006/main" xmlns:r="http://schemas.openxmlformats.org/officeDocument/2006/relationships" xmlns:p="http://schemas.openxmlformats.org/presentationml/2006/main" type="title" preserve="1">
-  <p:cSld name="Title Slide">
+<p:sldLayout xmlns:a="http://schemas.openxmlformats.org/drawingml/2006/main" xmlns:r="http://schemas.openxmlformats.org/officeDocument/2006/relationships" xmlns:p="http://schemas.openxmlformats.org/presentationml/2006/main" preserve="1">
+  <p:cSld name="Lesson title">
     <p:spTree>
       <p:nvGrpSpPr>
         <p:cNvPr id="1" name=""/>
@@ -483,10 +662,10 @@
       </p:grpSpPr>
       <p:sp>
         <p:nvSpPr>
-          <p:cNvPr id="2" name="Title 1">
+          <p:cNvPr id="4" name="Lesson title title 0">
             <a:extLst>
               <a:ext uri="{FF2B5EF4-FFF2-40B4-BE49-F238E27FC236}">
-                <a16:creationId xmlns:a16="http://schemas.microsoft.com/office/drawing/2014/main" id="{AEC69E39-3745-4048-BD21-7F0E3E17FF7C}"/>
+                <a16:creationId xmlns:a16="http://schemas.microsoft.com/office/drawing/2014/main" id="{D0D053A8-BBDF-4114-AC0C-F41E42B0FC02}"/>
               </a:ext>
             </a:extLst>
           </p:cNvPr>
@@ -494,36 +673,149 @@
             <a:spLocks noGrp="1"/>
           </p:cNvSpPr>
           <p:nvPr>
-            <p:ph type="ctrTitle"/>
+            <p:ph type="title"/>
           </p:nvPr>
         </p:nvSpPr>
         <p:spPr>
           <a:xfrm>
-            <a:off x="1524000" y="1122363"/>
-            <a:ext cx="9144000" cy="2387600"/>
+            <a:off x="609600" y="1695450"/>
+            <a:ext cx="10972800" cy="1333500"/>
           </a:xfrm>
+          <a:prstGeom prst="rect">
+            <a:avLst/>
+          </a:prstGeom>
+          <a:noFill/>
+          <a:ln w="0">
+            <a:noFill/>
+          </a:ln>
         </p:spPr>
         <p:txBody>
-          <a:bodyPr anchor="b"/>
+          <a:bodyPr lIns="0" tIns="0" rIns="0" bIns="0">
+            <a:noAutofit/>
+          </a:bodyPr>
           <a:lstStyle>
-            <a:lvl1pPr algn="ctr">
-              <a:defRPr sz="6000"/>
+            <a:lvl1pPr>
+              <a:defRPr sz="4350" b="1">
+                <a:solidFill>
+                  <a:srgbClr val="002855"/>
+                </a:solidFill>
+                <a:latin typeface="Arial"/>
+                <a:ea typeface="Arial"/>
+                <a:cs typeface="Arial"/>
+              </a:defRPr>
             </a:lvl1pPr>
+            <a:lvl2pPr>
+              <a:defRPr sz="4350" b="1">
+                <a:solidFill>
+                  <a:srgbClr val="002855"/>
+                </a:solidFill>
+                <a:latin typeface="Arial"/>
+                <a:ea typeface="Arial"/>
+                <a:cs typeface="Arial"/>
+              </a:defRPr>
+            </a:lvl2pPr>
+            <a:lvl3pPr>
+              <a:defRPr sz="4350" b="1">
+                <a:solidFill>
+                  <a:srgbClr val="002855"/>
+                </a:solidFill>
+                <a:latin typeface="Arial"/>
+                <a:ea typeface="Arial"/>
+                <a:cs typeface="Arial"/>
+              </a:defRPr>
+            </a:lvl3pPr>
+            <a:lvl4pPr>
+              <a:defRPr sz="4350" b="1">
+                <a:solidFill>
+                  <a:srgbClr val="002855"/>
+                </a:solidFill>
+                <a:latin typeface="Arial"/>
+                <a:ea typeface="Arial"/>
+                <a:cs typeface="Arial"/>
+              </a:defRPr>
+            </a:lvl4pPr>
+            <a:lvl5pPr>
+              <a:defRPr sz="4350" b="1">
+                <a:solidFill>
+                  <a:srgbClr val="002855"/>
+                </a:solidFill>
+                <a:latin typeface="Arial"/>
+                <a:ea typeface="Arial"/>
+                <a:cs typeface="Arial"/>
+              </a:defRPr>
+            </a:lvl5pPr>
+            <a:lvl6pPr>
+              <a:defRPr sz="4350" b="1">
+                <a:solidFill>
+                  <a:srgbClr val="002855"/>
+                </a:solidFill>
+                <a:latin typeface="Arial"/>
+                <a:ea typeface="Arial"/>
+                <a:cs typeface="Arial"/>
+              </a:defRPr>
+            </a:lvl6pPr>
+            <a:lvl7pPr>
+              <a:defRPr sz="4350" b="1">
+                <a:solidFill>
+                  <a:srgbClr val="002855"/>
+                </a:solidFill>
+                <a:latin typeface="Arial"/>
+                <a:ea typeface="Arial"/>
+                <a:cs typeface="Arial"/>
+              </a:defRPr>
+            </a:lvl7pPr>
+            <a:lvl8pPr>
+              <a:defRPr sz="4350" b="1">
+                <a:solidFill>
+                  <a:srgbClr val="002855"/>
+                </a:solidFill>
+                <a:latin typeface="Arial"/>
+                <a:ea typeface="Arial"/>
+                <a:cs typeface="Arial"/>
+              </a:defRPr>
+            </a:lvl8pPr>
+            <a:lvl9pPr>
+              <a:defRPr sz="4350" b="1">
+                <a:solidFill>
+                  <a:srgbClr val="002855"/>
+                </a:solidFill>
+                <a:latin typeface="Arial"/>
+                <a:ea typeface="Arial"/>
+                <a:cs typeface="Arial"/>
+              </a:defRPr>
+            </a:lvl9pPr>
           </a:lstStyle>
           <a:p>
+            <a:pPr>
+              <a:defRPr sz="4350" b="1">
+                <a:solidFill>
+                  <a:srgbClr val="002855"/>
+                </a:solidFill>
+                <a:latin typeface="Arial"/>
+                <a:ea typeface="Arial"/>
+                <a:cs typeface="Arial"/>
+              </a:defRPr>
+            </a:pPr>
             <a:r>
-              <a:rPr lang="en-US"/>
-              <a:t>Click to edit Master title style</a:t>
+              <a:rPr sz="4350" b="1">
+                <a:solidFill>
+                  <a:srgbClr val="002855"/>
+                </a:solidFill>
+                <a:latin typeface="Arial"/>
+                <a:ea typeface="Arial"/>
+                <a:cs typeface="Arial"/>
+              </a:rPr>
+              <a:t>[Lesson title]</a:t>
             </a:r>
           </a:p>
         </p:txBody>
       </p:sp>
       <p:sp>
         <p:nvSpPr>
-          <p:cNvPr id="3" name="Subtitle 2">
+          <p:cNvPr id="2" name="Lesson title subtitle 1">
             <a:extLst>
               <a:ext uri="{FF2B5EF4-FFF2-40B4-BE49-F238E27FC236}">
-                <a16:creationId xmlns:a16="http://schemas.microsoft.com/office/drawing/2014/main" id="{06118908-F689-4D1F-B713-2BD3AD6F251B}"/>
+                <a16:creationId xmlns:a16="http://schemas.microsoft.com/office/drawing/2014/main" id="{ACBDC2AF-F434-4371-8E2A-17CCF7344C50}"/>
               </a:ext>
             </a:extLst>
           </p:cNvPr>
@@ -536,64 +828,144 @@
         </p:nvSpPr>
         <p:spPr>
           <a:xfrm>
-            <a:off x="1524000" y="3602038"/>
-            <a:ext cx="9144000" cy="1655762"/>
+            <a:off x="609600" y="3219450"/>
+            <a:ext cx="10668000" cy="857250"/>
           </a:xfrm>
+          <a:prstGeom prst="rect">
+            <a:avLst/>
+          </a:prstGeom>
+          <a:noFill/>
+          <a:ln w="0">
+            <a:noFill/>
+          </a:ln>
         </p:spPr>
         <p:txBody>
-          <a:bodyPr/>
+          <a:bodyPr lIns="0" tIns="0" rIns="0" bIns="0">
+            <a:noAutofit/>
+          </a:bodyPr>
           <a:lstStyle>
-            <a:lvl1pPr marL="0" indent="0" algn="ctr">
-              <a:buNone/>
-              <a:defRPr sz="2400"/>
+            <a:lvl1pPr>
+              <a:defRPr sz="2250" b="0">
+                <a:solidFill>
+                  <a:srgbClr val="222222"/>
+                </a:solidFill>
+                <a:latin typeface="Arial"/>
+                <a:ea typeface="Arial"/>
+                <a:cs typeface="Arial"/>
+              </a:defRPr>
             </a:lvl1pPr>
-            <a:lvl2pPr marL="457200" indent="0" algn="ctr">
-              <a:buNone/>
-              <a:defRPr sz="2000"/>
+            <a:lvl2pPr>
+              <a:defRPr sz="2250" b="0">
+                <a:solidFill>
+                  <a:srgbClr val="222222"/>
+                </a:solidFill>
+                <a:latin typeface="Arial"/>
+                <a:ea typeface="Arial"/>
+                <a:cs typeface="Arial"/>
+              </a:defRPr>
             </a:lvl2pPr>
-            <a:lvl3pPr marL="914400" indent="0" algn="ctr">
-              <a:buNone/>
-              <a:defRPr sz="1800"/>
+            <a:lvl3pPr>
+              <a:defRPr sz="2250" b="0">
+                <a:solidFill>
+                  <a:srgbClr val="222222"/>
+                </a:solidFill>
+                <a:latin typeface="Arial"/>
+                <a:ea typeface="Arial"/>
+                <a:cs typeface="Arial"/>
+              </a:defRPr>
             </a:lvl3pPr>
-            <a:lvl4pPr marL="1371600" indent="0" algn="ctr">
-              <a:buNone/>
-              <a:defRPr sz="1600"/>
+            <a:lvl4pPr>
+              <a:defRPr sz="2250" b="0">
+                <a:solidFill>
+                  <a:srgbClr val="222222"/>
+                </a:solidFill>
+                <a:latin typeface="Arial"/>
+                <a:ea typeface="Arial"/>
+                <a:cs typeface="Arial"/>
+              </a:defRPr>
             </a:lvl4pPr>
-            <a:lvl5pPr marL="1828800" indent="0" algn="ctr">
-              <a:buNone/>
-              <a:defRPr sz="1600"/>
+            <a:lvl5pPr>
+              <a:defRPr sz="2250" b="0">
+                <a:solidFill>
+                  <a:srgbClr val="222222"/>
+                </a:solidFill>
+                <a:latin typeface="Arial"/>
+                <a:ea typeface="Arial"/>
+                <a:cs typeface="Arial"/>
+              </a:defRPr>
             </a:lvl5pPr>
-            <a:lvl6pPr marL="2286000" indent="0" algn="ctr">
-              <a:buNone/>
-              <a:defRPr sz="1600"/>
+            <a:lvl6pPr>
+              <a:defRPr sz="2250" b="0">
+                <a:solidFill>
+                  <a:srgbClr val="222222"/>
+                </a:solidFill>
+                <a:latin typeface="Arial"/>
+                <a:ea typeface="Arial"/>
+                <a:cs typeface="Arial"/>
+              </a:defRPr>
             </a:lvl6pPr>
-            <a:lvl7pPr marL="2743200" indent="0" algn="ctr">
-              <a:buNone/>
-              <a:defRPr sz="1600"/>
+            <a:lvl7pPr>
+              <a:defRPr sz="2250" b="0">
+                <a:solidFill>
+                  <a:srgbClr val="222222"/>
+                </a:solidFill>
+                <a:latin typeface="Arial"/>
+                <a:ea typeface="Arial"/>
+                <a:cs typeface="Arial"/>
+              </a:defRPr>
             </a:lvl7pPr>
-            <a:lvl8pPr marL="3200400" indent="0" algn="ctr">
-              <a:buNone/>
-              <a:defRPr sz="1600"/>
+            <a:lvl8pPr>
+              <a:defRPr sz="2250" b="0">
+                <a:solidFill>
+                  <a:srgbClr val="222222"/>
+                </a:solidFill>
+                <a:latin typeface="Arial"/>
+                <a:ea typeface="Arial"/>
+                <a:cs typeface="Arial"/>
+              </a:defRPr>
             </a:lvl8pPr>
-            <a:lvl9pPr marL="3657600" indent="0" algn="ctr">
-              <a:buNone/>
-              <a:defRPr sz="1600"/>
+            <a:lvl9pPr>
+              <a:defRPr sz="2250" b="0">
+                <a:solidFill>
+                  <a:srgbClr val="222222"/>
+                </a:solidFill>
+                <a:latin typeface="Arial"/>
+                <a:ea typeface="Arial"/>
+                <a:cs typeface="Arial"/>
+              </a:defRPr>
             </a:lvl9pPr>
           </a:lstStyle>
           <a:p>
+            <a:pPr>
+              <a:defRPr sz="2250" b="0">
+                <a:solidFill>
+                  <a:srgbClr val="222222"/>
+                </a:solidFill>
+                <a:latin typeface="Arial"/>
+                <a:ea typeface="Arial"/>
+                <a:cs typeface="Arial"/>
+              </a:defRPr>
+            </a:pPr>
             <a:r>
-              <a:rPr lang="en-US"/>
-              <a:t>Click to edit Master subtitle style</a:t>
+              <a:rPr sz="2250" b="0">
+                <a:solidFill>
+                  <a:srgbClr val="222222"/>
+                </a:solidFill>
+                <a:latin typeface="Arial"/>
+                <a:ea typeface="Arial"/>
+                <a:cs typeface="Arial"/>
+              </a:rPr>
+              <a:t>[A short description of the investigation]</a:t>
             </a:r>
           </a:p>
         </p:txBody>
       </p:sp>
       <p:sp>
         <p:nvSpPr>
-          <p:cNvPr id="4" name="Date Placeholder 3">
+          <p:cNvPr id="3" name="Lesson title body 2">
             <a:extLst>
               <a:ext uri="{FF2B5EF4-FFF2-40B4-BE49-F238E27FC236}">
-                <a16:creationId xmlns:a16="http://schemas.microsoft.com/office/drawing/2014/main" id="{1264ED12-A86D-41D2-A844-1C613571D190}"/>
+                <a16:creationId xmlns:a16="http://schemas.microsoft.com/office/drawing/2014/main" id="{D8956F49-2416-4C96-921B-614B43DC6BB2}"/>
               </a:ext>
             </a:extLst>
           </p:cNvPr>
@@ -601,82 +973,167 @@
             <a:spLocks noGrp="1"/>
           </p:cNvSpPr>
           <p:nvPr>
-            <p:ph type="dt" sz="half" idx="10"/>
+            <p:ph type="body" idx="2"/>
           </p:nvPr>
         </p:nvSpPr>
-        <p:spPr/>
+        <p:spPr>
+          <a:xfrm>
+            <a:off x="609600" y="4591050"/>
+            <a:ext cx="10572750" cy="1028700"/>
+          </a:xfrm>
+          <a:prstGeom prst="rect">
+            <a:avLst/>
+          </a:prstGeom>
+          <a:noFill/>
+          <a:ln w="0">
+            <a:noFill/>
+          </a:ln>
+        </p:spPr>
         <p:txBody>
-          <a:bodyPr/>
-          <a:lstStyle/>
+          <a:bodyPr lIns="0" tIns="0" rIns="0" bIns="0">
+            <a:noAutofit/>
+          </a:bodyPr>
+          <a:lstStyle>
+            <a:lvl1pPr>
+              <a:defRPr sz="1800" b="0">
+                <a:solidFill>
+                  <a:srgbClr val="222222"/>
+                </a:solidFill>
+                <a:latin typeface="Arial"/>
+                <a:ea typeface="Arial"/>
+                <a:cs typeface="Arial"/>
+              </a:defRPr>
+            </a:lvl1pPr>
+            <a:lvl2pPr>
+              <a:defRPr sz="1800" b="0">
+                <a:solidFill>
+                  <a:srgbClr val="222222"/>
+                </a:solidFill>
+                <a:latin typeface="Arial"/>
+                <a:ea typeface="Arial"/>
+                <a:cs typeface="Arial"/>
+              </a:defRPr>
+            </a:lvl2pPr>
+            <a:lvl3pPr>
+              <a:defRPr sz="1800" b="0">
+                <a:solidFill>
+                  <a:srgbClr val="222222"/>
+                </a:solidFill>
+                <a:latin typeface="Arial"/>
+                <a:ea typeface="Arial"/>
+                <a:cs typeface="Arial"/>
+              </a:defRPr>
+            </a:lvl3pPr>
+            <a:lvl4pPr>
+              <a:defRPr sz="1800" b="0">
+                <a:solidFill>
+                  <a:srgbClr val="222222"/>
+                </a:solidFill>
+                <a:latin typeface="Arial"/>
+                <a:ea typeface="Arial"/>
+                <a:cs typeface="Arial"/>
+              </a:defRPr>
+            </a:lvl4pPr>
+            <a:lvl5pPr>
+              <a:defRPr sz="1800" b="0">
+                <a:solidFill>
+                  <a:srgbClr val="222222"/>
+                </a:solidFill>
+                <a:latin typeface="Arial"/>
+                <a:ea typeface="Arial"/>
+                <a:cs typeface="Arial"/>
+              </a:defRPr>
+            </a:lvl5pPr>
+            <a:lvl6pPr>
+              <a:defRPr sz="1800" b="0">
+                <a:solidFill>
+                  <a:srgbClr val="222222"/>
+                </a:solidFill>
+                <a:latin typeface="Arial"/>
+                <a:ea typeface="Arial"/>
+                <a:cs typeface="Arial"/>
+              </a:defRPr>
+            </a:lvl6pPr>
+            <a:lvl7pPr>
+              <a:defRPr sz="1800" b="0">
+                <a:solidFill>
+                  <a:srgbClr val="222222"/>
+                </a:solidFill>
+                <a:latin typeface="Arial"/>
+                <a:ea typeface="Arial"/>
+                <a:cs typeface="Arial"/>
+              </a:defRPr>
+            </a:lvl7pPr>
+            <a:lvl8pPr>
+              <a:defRPr sz="1800" b="0">
+                <a:solidFill>
+                  <a:srgbClr val="222222"/>
+                </a:solidFill>
+                <a:latin typeface="Arial"/>
+                <a:ea typeface="Arial"/>
+                <a:cs typeface="Arial"/>
+              </a:defRPr>
+            </a:lvl8pPr>
+            <a:lvl9pPr>
+              <a:defRPr sz="1800" b="0">
+                <a:solidFill>
+                  <a:srgbClr val="222222"/>
+                </a:solidFill>
+                <a:latin typeface="Arial"/>
+                <a:ea typeface="Arial"/>
+                <a:cs typeface="Arial"/>
+              </a:defRPr>
+            </a:lvl9pPr>
+          </a:lstStyle>
           <a:p>
-            <a:fld id="{35160D8D-075B-4C11-802B-C83E0A3CFA7A}" type="datetime1">
-              <a:rPr lang="en-US" smtClean="0"/>
-              <a:t>7/11/2018</a:t>
-            </a:fld>
-            <a:endParaRPr lang="en-US"/>
+            <a:pPr>
+              <a:defRPr sz="1800" b="0">
+                <a:solidFill>
+                  <a:srgbClr val="222222"/>
+                </a:solidFill>
+                <a:latin typeface="Arial"/>
+                <a:ea typeface="Arial"/>
+                <a:cs typeface="Arial"/>
+              </a:defRPr>
+            </a:pPr>
+            <a:r>
+              <a:rPr sz="1800" b="0">
+                <a:solidFill>
+                  <a:srgbClr val="222222"/>
+                </a:solidFill>
+                <a:latin typeface="Arial"/>
+                <a:ea typeface="Arial"/>
+                <a:cs typeface="Arial"/>
+              </a:rPr>
+              <a:t>[Teacher or school]</a:t>
+            </a:r>
           </a:p>
-        </p:txBody>
-      </p:sp>
-      <p:sp>
-        <p:nvSpPr>
-          <p:cNvPr id="5" name="Footer Placeholder 4">
-            <a:extLst>
-              <a:ext uri="{FF2B5EF4-FFF2-40B4-BE49-F238E27FC236}">
-                <a16:creationId xmlns:a16="http://schemas.microsoft.com/office/drawing/2014/main" id="{09D67A4F-2D0E-4BC8-AC35-2BFFA8CB0841}"/>
-              </a:ext>
-            </a:extLst>
-          </p:cNvPr>
-          <p:cNvSpPr>
-            <a:spLocks noGrp="1"/>
-          </p:cNvSpPr>
-          <p:nvPr>
-            <p:ph type="ftr" sz="quarter" idx="11"/>
-          </p:nvPr>
-        </p:nvSpPr>
-        <p:spPr/>
-        <p:txBody>
-          <a:bodyPr/>
-          <a:lstStyle/>
           <a:p>
-            <a:endParaRPr lang="en-US"/>
-          </a:p>
-        </p:txBody>
-      </p:sp>
-      <p:sp>
-        <p:nvSpPr>
-          <p:cNvPr id="6" name="Slide Number Placeholder 5">
-            <a:extLst>
-              <a:ext uri="{FF2B5EF4-FFF2-40B4-BE49-F238E27FC236}">
-                <a16:creationId xmlns:a16="http://schemas.microsoft.com/office/drawing/2014/main" id="{9204156B-9C3C-4C2B-AF94-73CABB38CDE5}"/>
-              </a:ext>
-            </a:extLst>
-          </p:cNvPr>
-          <p:cNvSpPr>
-            <a:spLocks noGrp="1"/>
-          </p:cNvSpPr>
-          <p:nvPr>
-            <p:ph type="sldNum" sz="quarter" idx="12"/>
-          </p:nvPr>
-        </p:nvSpPr>
-        <p:spPr/>
-        <p:txBody>
-          <a:bodyPr/>
-          <a:lstStyle/>
-          <a:p>
-            <a:fld id="{4A609AEB-AA43-4F11-B5F7-17FA2DC3DBF4}" type="slidenum">
-              <a:rPr lang="en-US" smtClean="0"/>
-              <a:t>‹#›</a:t>
-            </a:fld>
-            <a:endParaRPr lang="en-US"/>
+            <a:pPr>
+              <a:defRPr sz="1800" b="0">
+                <a:solidFill>
+                  <a:srgbClr val="222222"/>
+                </a:solidFill>
+                <a:latin typeface="Arial"/>
+                <a:ea typeface="Arial"/>
+                <a:cs typeface="Arial"/>
+              </a:defRPr>
+            </a:pPr>
+            <a:r>
+              <a:rPr sz="1800" b="0">
+                <a:solidFill>
+                  <a:srgbClr val="222222"/>
+                </a:solidFill>
+                <a:latin typeface="Arial"/>
+                <a:ea typeface="Arial"/>
+                <a:cs typeface="Arial"/>
+              </a:rPr>
+              <a:t>[Course / grade level]   [Date]</a:t>
+            </a:r>
           </a:p>
         </p:txBody>
       </p:sp>
     </p:spTree>
-    <p:extLst>
-      <p:ext uri="{BB962C8B-B14F-4D97-AF65-F5344CB8AC3E}">
-        <p14:creationId xmlns:p14="http://schemas.microsoft.com/office/powerpoint/2010/main" val="2360444801"/>
-      </p:ext>
-    </p:extLst>
   </p:cSld>
   <p:clrMapOvr>
     <a:masterClrMapping/>
@@ -684,9 +1141,9 @@
 </p:sldLayout>
 </file>
 
-<file path=ppt/slideLayouts/slideLayout10.xml><?xml version="1.0" encoding="utf-8"?>
-<p:sldLayout xmlns:a="http://schemas.openxmlformats.org/drawingml/2006/main" xmlns:r="http://schemas.openxmlformats.org/officeDocument/2006/relationships" xmlns:p="http://schemas.openxmlformats.org/presentationml/2006/main" type="vertTx" preserve="1">
-  <p:cSld name="Title and Vertical Text">
+<file path=ppt/slideLayouts/slideLayout2.xml><?xml version="1.0" encoding="utf-8"?>
+<p:sldLayout xmlns:a="http://schemas.openxmlformats.org/drawingml/2006/main" xmlns:r="http://schemas.openxmlformats.org/officeDocument/2006/relationships" xmlns:p="http://schemas.openxmlformats.org/presentationml/2006/main" preserve="1">
+  <p:cSld name="Question and goals">
     <p:spTree>
       <p:nvGrpSpPr>
         <p:cNvPr id="1" name=""/>
@@ -703,10 +1160,10 @@
       </p:grpSpPr>
       <p:sp>
         <p:nvSpPr>
-          <p:cNvPr id="2" name="Title 1">
+          <p:cNvPr id="4" name="Question and goals title 0">
             <a:extLst>
               <a:ext uri="{FF2B5EF4-FFF2-40B4-BE49-F238E27FC236}">
-                <a16:creationId xmlns:a16="http://schemas.microsoft.com/office/drawing/2014/main" id="{FD4993E1-9CE8-4C1A-8FA7-A9DDA8EC446E}"/>
+                <a16:creationId xmlns:a16="http://schemas.microsoft.com/office/drawing/2014/main" id="{D08231EE-6C7C-42AD-8215-BCBB995F24BD}"/>
               </a:ext>
             </a:extLst>
           </p:cNvPr>
@@ -717,24 +1174,146 @@
             <p:ph type="title"/>
           </p:nvPr>
         </p:nvSpPr>
-        <p:spPr/>
+        <p:spPr>
+          <a:xfrm>
+            <a:off x="609600" y="971550"/>
+            <a:ext cx="10972800" cy="876300"/>
+          </a:xfrm>
+          <a:prstGeom prst="rect">
+            <a:avLst/>
+          </a:prstGeom>
+          <a:noFill/>
+          <a:ln w="0">
+            <a:noFill/>
+          </a:ln>
+        </p:spPr>
         <p:txBody>
-          <a:bodyPr/>
-          <a:lstStyle/>
+          <a:bodyPr lIns="0" tIns="0" rIns="0" bIns="0">
+            <a:noAutofit/>
+          </a:bodyPr>
+          <a:lstStyle>
+            <a:lvl1pPr>
+              <a:defRPr sz="3300" b="1">
+                <a:solidFill>
+                  <a:srgbClr val="002855"/>
+                </a:solidFill>
+                <a:latin typeface="Arial"/>
+                <a:ea typeface="Arial"/>
+                <a:cs typeface="Arial"/>
+              </a:defRPr>
+            </a:lvl1pPr>
+            <a:lvl2pPr>
+              <a:defRPr sz="3300" b="1">
+                <a:solidFill>
+                  <a:srgbClr val="002855"/>
+                </a:solidFill>
+                <a:latin typeface="Arial"/>
+                <a:ea typeface="Arial"/>
+                <a:cs typeface="Arial"/>
+              </a:defRPr>
+            </a:lvl2pPr>
+            <a:lvl3pPr>
+              <a:defRPr sz="3300" b="1">
+                <a:solidFill>
+                  <a:srgbClr val="002855"/>
+                </a:solidFill>
+                <a:latin typeface="Arial"/>
+                <a:ea typeface="Arial"/>
+                <a:cs typeface="Arial"/>
+              </a:defRPr>
+            </a:lvl3pPr>
+            <a:lvl4pPr>
+              <a:defRPr sz="3300" b="1">
+                <a:solidFill>
+                  <a:srgbClr val="002855"/>
+                </a:solidFill>
+                <a:latin typeface="Arial"/>
+                <a:ea typeface="Arial"/>
+                <a:cs typeface="Arial"/>
+              </a:defRPr>
+            </a:lvl4pPr>
+            <a:lvl5pPr>
+              <a:defRPr sz="3300" b="1">
+                <a:solidFill>
+                  <a:srgbClr val="002855"/>
+                </a:solidFill>
+                <a:latin typeface="Arial"/>
+                <a:ea typeface="Arial"/>
+                <a:cs typeface="Arial"/>
+              </a:defRPr>
+            </a:lvl5pPr>
+            <a:lvl6pPr>
+              <a:defRPr sz="3300" b="1">
+                <a:solidFill>
+                  <a:srgbClr val="002855"/>
+                </a:solidFill>
+                <a:latin typeface="Arial"/>
+                <a:ea typeface="Arial"/>
+                <a:cs typeface="Arial"/>
+              </a:defRPr>
+            </a:lvl6pPr>
+            <a:lvl7pPr>
+              <a:defRPr sz="3300" b="1">
+                <a:solidFill>
+                  <a:srgbClr val="002855"/>
+                </a:solidFill>
+                <a:latin typeface="Arial"/>
+                <a:ea typeface="Arial"/>
+                <a:cs typeface="Arial"/>
+              </a:defRPr>
+            </a:lvl7pPr>
+            <a:lvl8pPr>
+              <a:defRPr sz="3300" b="1">
+                <a:solidFill>
+                  <a:srgbClr val="002855"/>
+                </a:solidFill>
+                <a:latin typeface="Arial"/>
+                <a:ea typeface="Arial"/>
+                <a:cs typeface="Arial"/>
+              </a:defRPr>
+            </a:lvl8pPr>
+            <a:lvl9pPr>
+              <a:defRPr sz="3300" b="1">
+                <a:solidFill>
+                  <a:srgbClr val="002855"/>
+                </a:solidFill>
+                <a:latin typeface="Arial"/>
+                <a:ea typeface="Arial"/>
+                <a:cs typeface="Arial"/>
+              </a:defRPr>
+            </a:lvl9pPr>
+          </a:lstStyle>
           <a:p>
+            <a:pPr>
+              <a:defRPr sz="3300" b="1">
+                <a:solidFill>
+                  <a:srgbClr val="002855"/>
+                </a:solidFill>
+                <a:latin typeface="Arial"/>
+                <a:ea typeface="Arial"/>
+                <a:cs typeface="Arial"/>
+              </a:defRPr>
+            </a:pPr>
             <a:r>
-              <a:rPr lang="en-US"/>
-              <a:t>Click to edit Master title style</a:t>
+              <a:rPr sz="3300" b="1">
+                <a:solidFill>
+                  <a:srgbClr val="002855"/>
+                </a:solidFill>
+                <a:latin typeface="Arial"/>
+                <a:ea typeface="Arial"/>
+                <a:cs typeface="Arial"/>
+              </a:rPr>
+              <a:t>Our investigation</a:t>
             </a:r>
           </a:p>
         </p:txBody>
       </p:sp>
       <p:sp>
         <p:nvSpPr>
-          <p:cNvPr id="3" name="Vertical Text Placeholder 2">
+          <p:cNvPr id="2" name="Question and goals body 1">
             <a:extLst>
               <a:ext uri="{FF2B5EF4-FFF2-40B4-BE49-F238E27FC236}">
-                <a16:creationId xmlns:a16="http://schemas.microsoft.com/office/drawing/2014/main" id="{15DE52C1-4B3E-4D42-B927-B7E7067544A0}"/>
+                <a16:creationId xmlns:a16="http://schemas.microsoft.com/office/drawing/2014/main" id="{5A4E4205-F64E-4654-BD6B-D20017501888}"/>
               </a:ext>
             </a:extLst>
           </p:cNvPr>
@@ -742,56 +1321,182 @@
             <a:spLocks noGrp="1"/>
           </p:cNvSpPr>
           <p:nvPr>
-            <p:ph type="body" orient="vert" idx="1"/>
+            <p:ph type="body" idx="1"/>
           </p:nvPr>
         </p:nvSpPr>
-        <p:spPr/>
+        <p:spPr>
+          <a:xfrm>
+            <a:off x="609600" y="2133600"/>
+            <a:ext cx="5162550" cy="3448050"/>
+          </a:xfrm>
+          <a:prstGeom prst="rect">
+            <a:avLst/>
+          </a:prstGeom>
+          <a:noFill/>
+          <a:ln w="0">
+            <a:noFill/>
+          </a:ln>
+        </p:spPr>
         <p:txBody>
-          <a:bodyPr vert="eaVert"/>
-          <a:lstStyle/>
+          <a:bodyPr lIns="0" tIns="0" rIns="0" bIns="0">
+            <a:noAutofit/>
+          </a:bodyPr>
+          <a:lstStyle>
+            <a:lvl1pPr>
+              <a:defRPr sz="2400" b="0">
+                <a:solidFill>
+                  <a:srgbClr val="222222"/>
+                </a:solidFill>
+                <a:latin typeface="Arial"/>
+                <a:ea typeface="Arial"/>
+                <a:cs typeface="Arial"/>
+              </a:defRPr>
+            </a:lvl1pPr>
+            <a:lvl2pPr>
+              <a:defRPr sz="2400" b="0">
+                <a:solidFill>
+                  <a:srgbClr val="222222"/>
+                </a:solidFill>
+                <a:latin typeface="Arial"/>
+                <a:ea typeface="Arial"/>
+                <a:cs typeface="Arial"/>
+              </a:defRPr>
+            </a:lvl2pPr>
+            <a:lvl3pPr>
+              <a:defRPr sz="2400" b="0">
+                <a:solidFill>
+                  <a:srgbClr val="222222"/>
+                </a:solidFill>
+                <a:latin typeface="Arial"/>
+                <a:ea typeface="Arial"/>
+                <a:cs typeface="Arial"/>
+              </a:defRPr>
+            </a:lvl3pPr>
+            <a:lvl4pPr>
+              <a:defRPr sz="2400" b="0">
+                <a:solidFill>
+                  <a:srgbClr val="222222"/>
+                </a:solidFill>
+                <a:latin typeface="Arial"/>
+                <a:ea typeface="Arial"/>
+                <a:cs typeface="Arial"/>
+              </a:defRPr>
+            </a:lvl4pPr>
+            <a:lvl5pPr>
+              <a:defRPr sz="2400" b="0">
+                <a:solidFill>
+                  <a:srgbClr val="222222"/>
+                </a:solidFill>
+                <a:latin typeface="Arial"/>
+                <a:ea typeface="Arial"/>
+                <a:cs typeface="Arial"/>
+              </a:defRPr>
+            </a:lvl5pPr>
+            <a:lvl6pPr>
+              <a:defRPr sz="2400" b="0">
+                <a:solidFill>
+                  <a:srgbClr val="222222"/>
+                </a:solidFill>
+                <a:latin typeface="Arial"/>
+                <a:ea typeface="Arial"/>
+                <a:cs typeface="Arial"/>
+              </a:defRPr>
+            </a:lvl6pPr>
+            <a:lvl7pPr>
+              <a:defRPr sz="2400" b="0">
+                <a:solidFill>
+                  <a:srgbClr val="222222"/>
+                </a:solidFill>
+                <a:latin typeface="Arial"/>
+                <a:ea typeface="Arial"/>
+                <a:cs typeface="Arial"/>
+              </a:defRPr>
+            </a:lvl7pPr>
+            <a:lvl8pPr>
+              <a:defRPr sz="2400" b="0">
+                <a:solidFill>
+                  <a:srgbClr val="222222"/>
+                </a:solidFill>
+                <a:latin typeface="Arial"/>
+                <a:ea typeface="Arial"/>
+                <a:cs typeface="Arial"/>
+              </a:defRPr>
+            </a:lvl8pPr>
+            <a:lvl9pPr>
+              <a:defRPr sz="2400" b="0">
+                <a:solidFill>
+                  <a:srgbClr val="222222"/>
+                </a:solidFill>
+                <a:latin typeface="Arial"/>
+                <a:ea typeface="Arial"/>
+                <a:cs typeface="Arial"/>
+              </a:defRPr>
+            </a:lvl9pPr>
+          </a:lstStyle>
           <a:p>
-            <a:pPr lvl="0"/>
+            <a:pPr>
+              <a:defRPr sz="2400" b="0">
+                <a:solidFill>
+                  <a:srgbClr val="222222"/>
+                </a:solidFill>
+                <a:latin typeface="Arial"/>
+                <a:ea typeface="Arial"/>
+                <a:cs typeface="Arial"/>
+              </a:defRPr>
+            </a:pPr>
             <a:r>
-              <a:rPr lang="en-US"/>
-              <a:t>Edit Master text styles</a:t>
+              <a:rPr sz="2400" b="0">
+                <a:solidFill>
+                  <a:srgbClr val="222222"/>
+                </a:solidFill>
+                <a:latin typeface="Arial"/>
+                <a:ea typeface="Arial"/>
+                <a:cs typeface="Arial"/>
+              </a:rPr>
+              <a:t>Essential question</a:t>
             </a:r>
           </a:p>
           <a:p>
-            <a:pPr lvl="1"/>
-            <a:r>
-              <a:rPr lang="en-US"/>
-              <a:t>Second level</a:t>
-            </a:r>
+            <a:endParaRPr sz="2400" b="0">
+              <a:solidFill>
+                <a:srgbClr val="222222"/>
+              </a:solidFill>
+              <a:latin typeface="Arial"/>
+              <a:ea typeface="Arial"/>
+              <a:cs typeface="Arial"/>
+            </a:endParaRPr>
           </a:p>
           <a:p>
-            <a:pPr lvl="2"/>
+            <a:pPr>
+              <a:defRPr sz="2400" b="0">
+                <a:solidFill>
+                  <a:srgbClr val="222222"/>
+                </a:solidFill>
+                <a:latin typeface="Arial"/>
+                <a:ea typeface="Arial"/>
+                <a:cs typeface="Arial"/>
+              </a:defRPr>
+            </a:pPr>
             <a:r>
-              <a:rPr lang="en-US"/>
-              <a:t>Third level</a:t>
-            </a:r>
-          </a:p>
-          <a:p>
-            <a:pPr lvl="3"/>
-            <a:r>
-              <a:rPr lang="en-US"/>
-              <a:t>Fourth level</a:t>
-            </a:r>
-          </a:p>
-          <a:p>
-            <a:pPr lvl="4"/>
-            <a:r>
-              <a:rPr lang="en-US"/>
-              <a:t>Fifth level</a:t>
+              <a:rPr sz="2400" b="0">
+                <a:solidFill>
+                  <a:srgbClr val="222222"/>
+                </a:solidFill>
+                <a:latin typeface="Arial"/>
+                <a:ea typeface="Arial"/>
+                <a:cs typeface="Arial"/>
+              </a:rPr>
+              <a:t>[What will students investigate?]</a:t>
             </a:r>
           </a:p>
         </p:txBody>
       </p:sp>
       <p:sp>
         <p:nvSpPr>
-          <p:cNvPr id="4" name="Date Placeholder 3">
+          <p:cNvPr id="3" name="Question and goals body 2">
             <a:extLst>
               <a:ext uri="{FF2B5EF4-FFF2-40B4-BE49-F238E27FC236}">
-                <a16:creationId xmlns:a16="http://schemas.microsoft.com/office/drawing/2014/main" id="{A1847E75-70B7-4C54-967B-019F3C12ED36}"/>
+                <a16:creationId xmlns:a16="http://schemas.microsoft.com/office/drawing/2014/main" id="{BF9EAF2D-1060-4815-9524-5F06F4856FB7}"/>
               </a:ext>
             </a:extLst>
           </p:cNvPr>
@@ -799,82 +1504,177 @@
             <a:spLocks noGrp="1"/>
           </p:cNvSpPr>
           <p:nvPr>
-            <p:ph type="dt" sz="half" idx="10"/>
+            <p:ph type="body" idx="2"/>
           </p:nvPr>
         </p:nvSpPr>
-        <p:spPr/>
+        <p:spPr>
+          <a:xfrm>
+            <a:off x="6419850" y="2133600"/>
+            <a:ext cx="5162550" cy="3448050"/>
+          </a:xfrm>
+          <a:prstGeom prst="rect">
+            <a:avLst/>
+          </a:prstGeom>
+          <a:noFill/>
+          <a:ln w="0">
+            <a:noFill/>
+          </a:ln>
+        </p:spPr>
         <p:txBody>
-          <a:bodyPr/>
-          <a:lstStyle/>
+          <a:bodyPr lIns="0" tIns="0" rIns="0" bIns="0">
+            <a:noAutofit/>
+          </a:bodyPr>
+          <a:lstStyle>
+            <a:lvl1pPr>
+              <a:defRPr sz="2400" b="0">
+                <a:solidFill>
+                  <a:srgbClr val="222222"/>
+                </a:solidFill>
+                <a:latin typeface="Arial"/>
+                <a:ea typeface="Arial"/>
+                <a:cs typeface="Arial"/>
+              </a:defRPr>
+            </a:lvl1pPr>
+            <a:lvl2pPr>
+              <a:defRPr sz="2400" b="0">
+                <a:solidFill>
+                  <a:srgbClr val="222222"/>
+                </a:solidFill>
+                <a:latin typeface="Arial"/>
+                <a:ea typeface="Arial"/>
+                <a:cs typeface="Arial"/>
+              </a:defRPr>
+            </a:lvl2pPr>
+            <a:lvl3pPr>
+              <a:defRPr sz="2400" b="0">
+                <a:solidFill>
+                  <a:srgbClr val="222222"/>
+                </a:solidFill>
+                <a:latin typeface="Arial"/>
+                <a:ea typeface="Arial"/>
+                <a:cs typeface="Arial"/>
+              </a:defRPr>
+            </a:lvl3pPr>
+            <a:lvl4pPr>
+              <a:defRPr sz="2400" b="0">
+                <a:solidFill>
+                  <a:srgbClr val="222222"/>
+                </a:solidFill>
+                <a:latin typeface="Arial"/>
+                <a:ea typeface="Arial"/>
+                <a:cs typeface="Arial"/>
+              </a:defRPr>
+            </a:lvl4pPr>
+            <a:lvl5pPr>
+              <a:defRPr sz="2400" b="0">
+                <a:solidFill>
+                  <a:srgbClr val="222222"/>
+                </a:solidFill>
+                <a:latin typeface="Arial"/>
+                <a:ea typeface="Arial"/>
+                <a:cs typeface="Arial"/>
+              </a:defRPr>
+            </a:lvl5pPr>
+            <a:lvl6pPr>
+              <a:defRPr sz="2400" b="0">
+                <a:solidFill>
+                  <a:srgbClr val="222222"/>
+                </a:solidFill>
+                <a:latin typeface="Arial"/>
+                <a:ea typeface="Arial"/>
+                <a:cs typeface="Arial"/>
+              </a:defRPr>
+            </a:lvl6pPr>
+            <a:lvl7pPr>
+              <a:defRPr sz="2400" b="0">
+                <a:solidFill>
+                  <a:srgbClr val="222222"/>
+                </a:solidFill>
+                <a:latin typeface="Arial"/>
+                <a:ea typeface="Arial"/>
+                <a:cs typeface="Arial"/>
+              </a:defRPr>
+            </a:lvl7pPr>
+            <a:lvl8pPr>
+              <a:defRPr sz="2400" b="0">
+                <a:solidFill>
+                  <a:srgbClr val="222222"/>
+                </a:solidFill>
+                <a:latin typeface="Arial"/>
+                <a:ea typeface="Arial"/>
+                <a:cs typeface="Arial"/>
+              </a:defRPr>
+            </a:lvl8pPr>
+            <a:lvl9pPr>
+              <a:defRPr sz="2400" b="0">
+                <a:solidFill>
+                  <a:srgbClr val="222222"/>
+                </a:solidFill>
+                <a:latin typeface="Arial"/>
+                <a:ea typeface="Arial"/>
+                <a:cs typeface="Arial"/>
+              </a:defRPr>
+            </a:lvl9pPr>
+          </a:lstStyle>
           <a:p>
-            <a:fld id="{D3CC9075-BEA6-41C8-90AF-B6FFE5CA15CC}" type="datetime1">
-              <a:rPr lang="en-US" smtClean="0"/>
-              <a:t>7/11/2018</a:t>
-            </a:fld>
-            <a:endParaRPr lang="en-US"/>
+            <a:pPr>
+              <a:defRPr sz="2400" b="0">
+                <a:solidFill>
+                  <a:srgbClr val="222222"/>
+                </a:solidFill>
+                <a:latin typeface="Arial"/>
+                <a:ea typeface="Arial"/>
+                <a:cs typeface="Arial"/>
+              </a:defRPr>
+            </a:pPr>
+            <a:r>
+              <a:rPr sz="2400" b="0">
+                <a:solidFill>
+                  <a:srgbClr val="222222"/>
+                </a:solidFill>
+                <a:latin typeface="Arial"/>
+                <a:ea typeface="Arial"/>
+                <a:cs typeface="Arial"/>
+              </a:rPr>
+              <a:t>Learning goals</a:t>
+            </a:r>
           </a:p>
-        </p:txBody>
-      </p:sp>
-      <p:sp>
-        <p:nvSpPr>
-          <p:cNvPr id="5" name="Footer Placeholder 4">
-            <a:extLst>
-              <a:ext uri="{FF2B5EF4-FFF2-40B4-BE49-F238E27FC236}">
-                <a16:creationId xmlns:a16="http://schemas.microsoft.com/office/drawing/2014/main" id="{C25D1836-2CA2-401C-933A-00E3329ECC5D}"/>
-              </a:ext>
-            </a:extLst>
-          </p:cNvPr>
-          <p:cNvSpPr>
-            <a:spLocks noGrp="1"/>
-          </p:cNvSpPr>
-          <p:nvPr>
-            <p:ph type="ftr" sz="quarter" idx="11"/>
-          </p:nvPr>
-        </p:nvSpPr>
-        <p:spPr/>
-        <p:txBody>
-          <a:bodyPr/>
-          <a:lstStyle/>
           <a:p>
-            <a:endParaRPr lang="en-US"/>
+            <a:endParaRPr sz="2400" b="0">
+              <a:solidFill>
+                <a:srgbClr val="222222"/>
+              </a:solidFill>
+              <a:latin typeface="Arial"/>
+              <a:ea typeface="Arial"/>
+              <a:cs typeface="Arial"/>
+            </a:endParaRPr>
           </a:p>
-        </p:txBody>
-      </p:sp>
-      <p:sp>
-        <p:nvSpPr>
-          <p:cNvPr id="6" name="Slide Number Placeholder 5">
-            <a:extLst>
-              <a:ext uri="{FF2B5EF4-FFF2-40B4-BE49-F238E27FC236}">
-                <a16:creationId xmlns:a16="http://schemas.microsoft.com/office/drawing/2014/main" id="{6A9228E3-237E-4F6B-ADC2-263474A903CD}"/>
-              </a:ext>
-            </a:extLst>
-          </p:cNvPr>
-          <p:cNvSpPr>
-            <a:spLocks noGrp="1"/>
-          </p:cNvSpPr>
-          <p:nvPr>
-            <p:ph type="sldNum" sz="quarter" idx="12"/>
-          </p:nvPr>
-        </p:nvSpPr>
-        <p:spPr/>
-        <p:txBody>
-          <a:bodyPr/>
-          <a:lstStyle/>
           <a:p>
-            <a:fld id="{4A609AEB-AA43-4F11-B5F7-17FA2DC3DBF4}" type="slidenum">
-              <a:rPr lang="en-US" smtClean="0"/>
-              <a:t>‹#›</a:t>
-            </a:fld>
-            <a:endParaRPr lang="en-US"/>
+            <a:pPr>
+              <a:defRPr sz="2400" b="0">
+                <a:solidFill>
+                  <a:srgbClr val="222222"/>
+                </a:solidFill>
+                <a:latin typeface="Arial"/>
+                <a:ea typeface="Arial"/>
+                <a:cs typeface="Arial"/>
+              </a:defRPr>
+            </a:pPr>
+            <a:r>
+              <a:rPr sz="2400" b="0">
+                <a:solidFill>
+                  <a:srgbClr val="222222"/>
+                </a:solidFill>
+                <a:latin typeface="Arial"/>
+                <a:ea typeface="Arial"/>
+                <a:cs typeface="Arial"/>
+              </a:rPr>
+              <a:t>[What will students be able to explain or do?]</a:t>
+            </a:r>
           </a:p>
         </p:txBody>
       </p:sp>
     </p:spTree>
-    <p:extLst>
-      <p:ext uri="{BB962C8B-B14F-4D97-AF65-F5344CB8AC3E}">
-        <p14:creationId xmlns:p14="http://schemas.microsoft.com/office/powerpoint/2010/main" val="2313136206"/>
-      </p:ext>
-    </p:extLst>
   </p:cSld>
   <p:clrMapOvr>
     <a:masterClrMapping/>
@@ -882,9 +1682,9 @@
 </p:sldLayout>
 </file>
 
-<file path=ppt/slideLayouts/slideLayout11.xml><?xml version="1.0" encoding="utf-8"?>
-<p:sldLayout xmlns:a="http://schemas.openxmlformats.org/drawingml/2006/main" xmlns:r="http://schemas.openxmlformats.org/officeDocument/2006/relationships" xmlns:p="http://schemas.openxmlformats.org/presentationml/2006/main" type="vertTitleAndTx" preserve="1">
-  <p:cSld name="Vertical Title and Text">
+<file path=ppt/slideLayouts/slideLayout3.xml><?xml version="1.0" encoding="utf-8"?>
+<p:sldLayout xmlns:a="http://schemas.openxmlformats.org/drawingml/2006/main" xmlns:r="http://schemas.openxmlformats.org/officeDocument/2006/relationships" xmlns:p="http://schemas.openxmlformats.org/presentationml/2006/main" preserve="1">
+  <p:cSld name="Explanation and figure">
     <p:spTree>
       <p:nvGrpSpPr>
         <p:cNvPr id="1" name=""/>
@@ -901,10 +1701,10 @@
       </p:grpSpPr>
       <p:sp>
         <p:nvSpPr>
-          <p:cNvPr id="2" name="Vertical Title 1">
+          <p:cNvPr id="5" name="Explanation and figure title 0">
             <a:extLst>
               <a:ext uri="{FF2B5EF4-FFF2-40B4-BE49-F238E27FC236}">
-                <a16:creationId xmlns:a16="http://schemas.microsoft.com/office/drawing/2014/main" id="{F9B12956-3139-480B-928F-CDCFD42C36AE}"/>
+                <a16:creationId xmlns:a16="http://schemas.microsoft.com/office/drawing/2014/main" id="{C54DEB96-2C44-49CE-960C-EEA88B04E1F2}"/>
               </a:ext>
             </a:extLst>
           </p:cNvPr>
@@ -912,32 +1712,149 @@
             <a:spLocks noGrp="1"/>
           </p:cNvSpPr>
           <p:nvPr>
-            <p:ph type="title" orient="vert"/>
+            <p:ph type="title"/>
           </p:nvPr>
         </p:nvSpPr>
         <p:spPr>
           <a:xfrm>
-            <a:off x="8724900" y="365125"/>
-            <a:ext cx="2628900" cy="5811838"/>
+            <a:off x="609600" y="971550"/>
+            <a:ext cx="10972800" cy="876300"/>
           </a:xfrm>
+          <a:prstGeom prst="rect">
+            <a:avLst/>
+          </a:prstGeom>
+          <a:noFill/>
+          <a:ln w="0">
+            <a:noFill/>
+          </a:ln>
         </p:spPr>
         <p:txBody>
-          <a:bodyPr vert="eaVert"/>
-          <a:lstStyle/>
+          <a:bodyPr lIns="0" tIns="0" rIns="0" bIns="0">
+            <a:noAutofit/>
+          </a:bodyPr>
+          <a:lstStyle>
+            <a:lvl1pPr>
+              <a:defRPr sz="3300" b="1">
+                <a:solidFill>
+                  <a:srgbClr val="002855"/>
+                </a:solidFill>
+                <a:latin typeface="Arial"/>
+                <a:ea typeface="Arial"/>
+                <a:cs typeface="Arial"/>
+              </a:defRPr>
+            </a:lvl1pPr>
+            <a:lvl2pPr>
+              <a:defRPr sz="3300" b="1">
+                <a:solidFill>
+                  <a:srgbClr val="002855"/>
+                </a:solidFill>
+                <a:latin typeface="Arial"/>
+                <a:ea typeface="Arial"/>
+                <a:cs typeface="Arial"/>
+              </a:defRPr>
+            </a:lvl2pPr>
+            <a:lvl3pPr>
+              <a:defRPr sz="3300" b="1">
+                <a:solidFill>
+                  <a:srgbClr val="002855"/>
+                </a:solidFill>
+                <a:latin typeface="Arial"/>
+                <a:ea typeface="Arial"/>
+                <a:cs typeface="Arial"/>
+              </a:defRPr>
+            </a:lvl3pPr>
+            <a:lvl4pPr>
+              <a:defRPr sz="3300" b="1">
+                <a:solidFill>
+                  <a:srgbClr val="002855"/>
+                </a:solidFill>
+                <a:latin typeface="Arial"/>
+                <a:ea typeface="Arial"/>
+                <a:cs typeface="Arial"/>
+              </a:defRPr>
+            </a:lvl4pPr>
+            <a:lvl5pPr>
+              <a:defRPr sz="3300" b="1">
+                <a:solidFill>
+                  <a:srgbClr val="002855"/>
+                </a:solidFill>
+                <a:latin typeface="Arial"/>
+                <a:ea typeface="Arial"/>
+                <a:cs typeface="Arial"/>
+              </a:defRPr>
+            </a:lvl5pPr>
+            <a:lvl6pPr>
+              <a:defRPr sz="3300" b="1">
+                <a:solidFill>
+                  <a:srgbClr val="002855"/>
+                </a:solidFill>
+                <a:latin typeface="Arial"/>
+                <a:ea typeface="Arial"/>
+                <a:cs typeface="Arial"/>
+              </a:defRPr>
+            </a:lvl6pPr>
+            <a:lvl7pPr>
+              <a:defRPr sz="3300" b="1">
+                <a:solidFill>
+                  <a:srgbClr val="002855"/>
+                </a:solidFill>
+                <a:latin typeface="Arial"/>
+                <a:ea typeface="Arial"/>
+                <a:cs typeface="Arial"/>
+              </a:defRPr>
+            </a:lvl7pPr>
+            <a:lvl8pPr>
+              <a:defRPr sz="3300" b="1">
+                <a:solidFill>
+                  <a:srgbClr val="002855"/>
+                </a:solidFill>
+                <a:latin typeface="Arial"/>
+                <a:ea typeface="Arial"/>
+                <a:cs typeface="Arial"/>
+              </a:defRPr>
+            </a:lvl8pPr>
+            <a:lvl9pPr>
+              <a:defRPr sz="3300" b="1">
+                <a:solidFill>
+                  <a:srgbClr val="002855"/>
+                </a:solidFill>
+                <a:latin typeface="Arial"/>
+                <a:ea typeface="Arial"/>
+                <a:cs typeface="Arial"/>
+              </a:defRPr>
+            </a:lvl9pPr>
+          </a:lstStyle>
           <a:p>
+            <a:pPr>
+              <a:defRPr sz="3300" b="1">
+                <a:solidFill>
+                  <a:srgbClr val="002855"/>
+                </a:solidFill>
+                <a:latin typeface="Arial"/>
+                <a:ea typeface="Arial"/>
+                <a:cs typeface="Arial"/>
+              </a:defRPr>
+            </a:pPr>
             <a:r>
-              <a:rPr lang="en-US"/>
-              <a:t>Click to edit Master title style</a:t>
+              <a:rPr sz="3300" b="1">
+                <a:solidFill>
+                  <a:srgbClr val="002855"/>
+                </a:solidFill>
+                <a:latin typeface="Arial"/>
+                <a:ea typeface="Arial"/>
+                <a:cs typeface="Arial"/>
+              </a:rPr>
+              <a:t>[Key idea]</a:t>
             </a:r>
           </a:p>
         </p:txBody>
       </p:sp>
       <p:sp>
         <p:nvSpPr>
-          <p:cNvPr id="3" name="Vertical Text Placeholder 2">
+          <p:cNvPr id="2" name="Explanation and figure body 1">
             <a:extLst>
               <a:ext uri="{FF2B5EF4-FFF2-40B4-BE49-F238E27FC236}">
-                <a16:creationId xmlns:a16="http://schemas.microsoft.com/office/drawing/2014/main" id="{D454D0A9-9120-44D3-ABA5-FCDA4BCCB8DB}"/>
+                <a16:creationId xmlns:a16="http://schemas.microsoft.com/office/drawing/2014/main" id="{74965947-62A8-4AED-A214-D22E1DB50EDF}"/>
               </a:ext>
             </a:extLst>
           </p:cNvPr>
@@ -945,61 +1862,182 @@
             <a:spLocks noGrp="1"/>
           </p:cNvSpPr>
           <p:nvPr>
-            <p:ph type="body" orient="vert" idx="1"/>
+            <p:ph type="body" idx="1"/>
           </p:nvPr>
         </p:nvSpPr>
         <p:spPr>
           <a:xfrm>
-            <a:off x="838200" y="365125"/>
-            <a:ext cx="7734300" cy="5811838"/>
+            <a:off x="609600" y="2105025"/>
+            <a:ext cx="4524375" cy="3400425"/>
           </a:xfrm>
+          <a:prstGeom prst="rect">
+            <a:avLst/>
+          </a:prstGeom>
+          <a:noFill/>
+          <a:ln w="0">
+            <a:noFill/>
+          </a:ln>
         </p:spPr>
         <p:txBody>
-          <a:bodyPr vert="eaVert"/>
-          <a:lstStyle/>
+          <a:bodyPr lIns="0" tIns="0" rIns="0" bIns="0">
+            <a:noAutofit/>
+          </a:bodyPr>
+          <a:lstStyle>
+            <a:lvl1pPr>
+              <a:defRPr sz="2400" b="0">
+                <a:solidFill>
+                  <a:srgbClr val="222222"/>
+                </a:solidFill>
+                <a:latin typeface="Arial"/>
+                <a:ea typeface="Arial"/>
+                <a:cs typeface="Arial"/>
+              </a:defRPr>
+            </a:lvl1pPr>
+            <a:lvl2pPr>
+              <a:defRPr sz="2400" b="0">
+                <a:solidFill>
+                  <a:srgbClr val="222222"/>
+                </a:solidFill>
+                <a:latin typeface="Arial"/>
+                <a:ea typeface="Arial"/>
+                <a:cs typeface="Arial"/>
+              </a:defRPr>
+            </a:lvl2pPr>
+            <a:lvl3pPr>
+              <a:defRPr sz="2400" b="0">
+                <a:solidFill>
+                  <a:srgbClr val="222222"/>
+                </a:solidFill>
+                <a:latin typeface="Arial"/>
+                <a:ea typeface="Arial"/>
+                <a:cs typeface="Arial"/>
+              </a:defRPr>
+            </a:lvl3pPr>
+            <a:lvl4pPr>
+              <a:defRPr sz="2400" b="0">
+                <a:solidFill>
+                  <a:srgbClr val="222222"/>
+                </a:solidFill>
+                <a:latin typeface="Arial"/>
+                <a:ea typeface="Arial"/>
+                <a:cs typeface="Arial"/>
+              </a:defRPr>
+            </a:lvl4pPr>
+            <a:lvl5pPr>
+              <a:defRPr sz="2400" b="0">
+                <a:solidFill>
+                  <a:srgbClr val="222222"/>
+                </a:solidFill>
+                <a:latin typeface="Arial"/>
+                <a:ea typeface="Arial"/>
+                <a:cs typeface="Arial"/>
+              </a:defRPr>
+            </a:lvl5pPr>
+            <a:lvl6pPr>
+              <a:defRPr sz="2400" b="0">
+                <a:solidFill>
+                  <a:srgbClr val="222222"/>
+                </a:solidFill>
+                <a:latin typeface="Arial"/>
+                <a:ea typeface="Arial"/>
+                <a:cs typeface="Arial"/>
+              </a:defRPr>
+            </a:lvl6pPr>
+            <a:lvl7pPr>
+              <a:defRPr sz="2400" b="0">
+                <a:solidFill>
+                  <a:srgbClr val="222222"/>
+                </a:solidFill>
+                <a:latin typeface="Arial"/>
+                <a:ea typeface="Arial"/>
+                <a:cs typeface="Arial"/>
+              </a:defRPr>
+            </a:lvl7pPr>
+            <a:lvl8pPr>
+              <a:defRPr sz="2400" b="0">
+                <a:solidFill>
+                  <a:srgbClr val="222222"/>
+                </a:solidFill>
+                <a:latin typeface="Arial"/>
+                <a:ea typeface="Arial"/>
+                <a:cs typeface="Arial"/>
+              </a:defRPr>
+            </a:lvl8pPr>
+            <a:lvl9pPr>
+              <a:defRPr sz="2400" b="0">
+                <a:solidFill>
+                  <a:srgbClr val="222222"/>
+                </a:solidFill>
+                <a:latin typeface="Arial"/>
+                <a:ea typeface="Arial"/>
+                <a:cs typeface="Arial"/>
+              </a:defRPr>
+            </a:lvl9pPr>
+          </a:lstStyle>
           <a:p>
-            <a:pPr lvl="0"/>
+            <a:pPr>
+              <a:defRPr sz="2400" b="0">
+                <a:solidFill>
+                  <a:srgbClr val="222222"/>
+                </a:solidFill>
+                <a:latin typeface="Arial"/>
+                <a:ea typeface="Arial"/>
+                <a:cs typeface="Arial"/>
+              </a:defRPr>
+            </a:pPr>
             <a:r>
-              <a:rPr lang="en-US"/>
-              <a:t>Edit Master text styles</a:t>
+              <a:rPr sz="2400" b="0">
+                <a:solidFill>
+                  <a:srgbClr val="222222"/>
+                </a:solidFill>
+                <a:latin typeface="Arial"/>
+                <a:ea typeface="Arial"/>
+                <a:cs typeface="Arial"/>
+              </a:rPr>
+              <a:t>[Explain the main idea.]</a:t>
             </a:r>
           </a:p>
           <a:p>
-            <a:pPr lvl="1"/>
-            <a:r>
-              <a:rPr lang="en-US"/>
-              <a:t>Second level</a:t>
-            </a:r>
+            <a:endParaRPr sz="2400" b="0">
+              <a:solidFill>
+                <a:srgbClr val="222222"/>
+              </a:solidFill>
+              <a:latin typeface="Arial"/>
+              <a:ea typeface="Arial"/>
+              <a:cs typeface="Arial"/>
+            </a:endParaRPr>
           </a:p>
           <a:p>
-            <a:pPr lvl="2"/>
+            <a:pPr>
+              <a:defRPr sz="2400" b="0">
+                <a:solidFill>
+                  <a:srgbClr val="222222"/>
+                </a:solidFill>
+                <a:latin typeface="Arial"/>
+                <a:ea typeface="Arial"/>
+                <a:cs typeface="Arial"/>
+              </a:defRPr>
+            </a:pPr>
             <a:r>
-              <a:rPr lang="en-US"/>
-              <a:t>Third level</a:t>
-            </a:r>
-          </a:p>
-          <a:p>
-            <a:pPr lvl="3"/>
-            <a:r>
-              <a:rPr lang="en-US"/>
-              <a:t>Fourth level</a:t>
-            </a:r>
-          </a:p>
-          <a:p>
-            <a:pPr lvl="4"/>
-            <a:r>
-              <a:rPr lang="en-US"/>
-              <a:t>Fifth level</a:t>
+              <a:rPr sz="2400" b="0">
+                <a:solidFill>
+                  <a:srgbClr val="222222"/>
+                </a:solidFill>
+                <a:latin typeface="Arial"/>
+                <a:ea typeface="Arial"/>
+                <a:cs typeface="Arial"/>
+              </a:rPr>
+              <a:t>[Define a new term or connect it to prior learning.]</a:t>
             </a:r>
           </a:p>
         </p:txBody>
       </p:sp>
       <p:sp>
         <p:nvSpPr>
-          <p:cNvPr id="4" name="Date Placeholder 3">
+          <p:cNvPr id="3" name="Explanation and figure content 2">
             <a:extLst>
               <a:ext uri="{FF2B5EF4-FFF2-40B4-BE49-F238E27FC236}">
-                <a16:creationId xmlns:a16="http://schemas.microsoft.com/office/drawing/2014/main" id="{E1D00CED-B339-4112-A478-3C25532799D1}"/>
+                <a16:creationId xmlns:a16="http://schemas.microsoft.com/office/drawing/2014/main" id="{93F0CF8A-0D56-484D-8008-C069FB2AFB4E}"/>
               </a:ext>
             </a:extLst>
           </p:cNvPr>
@@ -1007,28 +2045,149 @@
             <a:spLocks noGrp="1"/>
           </p:cNvSpPr>
           <p:nvPr>
-            <p:ph type="dt" sz="half" idx="10"/>
+            <p:ph idx="2"/>
           </p:nvPr>
         </p:nvSpPr>
-        <p:spPr/>
+        <p:spPr>
+          <a:xfrm>
+            <a:off x="5591175" y="2114550"/>
+            <a:ext cx="5991225" cy="3124200"/>
+          </a:xfrm>
+          <a:prstGeom prst="rect">
+            <a:avLst/>
+          </a:prstGeom>
+          <a:noFill/>
+          <a:ln w="0">
+            <a:noFill/>
+          </a:ln>
+        </p:spPr>
         <p:txBody>
-          <a:bodyPr/>
-          <a:lstStyle/>
+          <a:bodyPr lIns="0" tIns="0" rIns="0" bIns="0">
+            <a:noAutofit/>
+          </a:bodyPr>
+          <a:lstStyle>
+            <a:lvl1pPr>
+              <a:defRPr sz="2100" b="0">
+                <a:solidFill>
+                  <a:srgbClr val="222222"/>
+                </a:solidFill>
+                <a:latin typeface="Arial"/>
+                <a:ea typeface="Arial"/>
+                <a:cs typeface="Arial"/>
+              </a:defRPr>
+            </a:lvl1pPr>
+            <a:lvl2pPr>
+              <a:defRPr sz="2100" b="0">
+                <a:solidFill>
+                  <a:srgbClr val="222222"/>
+                </a:solidFill>
+                <a:latin typeface="Arial"/>
+                <a:ea typeface="Arial"/>
+                <a:cs typeface="Arial"/>
+              </a:defRPr>
+            </a:lvl2pPr>
+            <a:lvl3pPr>
+              <a:defRPr sz="2100" b="0">
+                <a:solidFill>
+                  <a:srgbClr val="222222"/>
+                </a:solidFill>
+                <a:latin typeface="Arial"/>
+                <a:ea typeface="Arial"/>
+                <a:cs typeface="Arial"/>
+              </a:defRPr>
+            </a:lvl3pPr>
+            <a:lvl4pPr>
+              <a:defRPr sz="2100" b="0">
+                <a:solidFill>
+                  <a:srgbClr val="222222"/>
+                </a:solidFill>
+                <a:latin typeface="Arial"/>
+                <a:ea typeface="Arial"/>
+                <a:cs typeface="Arial"/>
+              </a:defRPr>
+            </a:lvl4pPr>
+            <a:lvl5pPr>
+              <a:defRPr sz="2100" b="0">
+                <a:solidFill>
+                  <a:srgbClr val="222222"/>
+                </a:solidFill>
+                <a:latin typeface="Arial"/>
+                <a:ea typeface="Arial"/>
+                <a:cs typeface="Arial"/>
+              </a:defRPr>
+            </a:lvl5pPr>
+            <a:lvl6pPr>
+              <a:defRPr sz="2100" b="0">
+                <a:solidFill>
+                  <a:srgbClr val="222222"/>
+                </a:solidFill>
+                <a:latin typeface="Arial"/>
+                <a:ea typeface="Arial"/>
+                <a:cs typeface="Arial"/>
+              </a:defRPr>
+            </a:lvl6pPr>
+            <a:lvl7pPr>
+              <a:defRPr sz="2100" b="0">
+                <a:solidFill>
+                  <a:srgbClr val="222222"/>
+                </a:solidFill>
+                <a:latin typeface="Arial"/>
+                <a:ea typeface="Arial"/>
+                <a:cs typeface="Arial"/>
+              </a:defRPr>
+            </a:lvl7pPr>
+            <a:lvl8pPr>
+              <a:defRPr sz="2100" b="0">
+                <a:solidFill>
+                  <a:srgbClr val="222222"/>
+                </a:solidFill>
+                <a:latin typeface="Arial"/>
+                <a:ea typeface="Arial"/>
+                <a:cs typeface="Arial"/>
+              </a:defRPr>
+            </a:lvl8pPr>
+            <a:lvl9pPr>
+              <a:defRPr sz="2100" b="0">
+                <a:solidFill>
+                  <a:srgbClr val="222222"/>
+                </a:solidFill>
+                <a:latin typeface="Arial"/>
+                <a:ea typeface="Arial"/>
+                <a:cs typeface="Arial"/>
+              </a:defRPr>
+            </a:lvl9pPr>
+          </a:lstStyle>
           <a:p>
-            <a:fld id="{4E04AD9F-BBF2-4E56-9D13-7E4AA22117F5}" type="datetime1">
-              <a:rPr lang="en-US" smtClean="0"/>
-              <a:t>7/11/2018</a:t>
-            </a:fld>
-            <a:endParaRPr lang="en-US"/>
+            <a:pPr>
+              <a:defRPr sz="2100" b="0">
+                <a:solidFill>
+                  <a:srgbClr val="222222"/>
+                </a:solidFill>
+                <a:latin typeface="Arial"/>
+                <a:ea typeface="Arial"/>
+                <a:cs typeface="Arial"/>
+              </a:defRPr>
+            </a:pPr>
+            <a:r>
+              <a:rPr sz="2100" b="0">
+                <a:solidFill>
+                  <a:srgbClr val="222222"/>
+                </a:solidFill>
+                <a:latin typeface="Arial"/>
+                <a:ea typeface="Arial"/>
+                <a:cs typeface="Arial"/>
+              </a:rPr>
+              <a:t>[Insert a figure or diagram]</a:t>
+            </a:r>
           </a:p>
         </p:txBody>
       </p:sp>
       <p:sp>
         <p:nvSpPr>
-          <p:cNvPr id="5" name="Footer Placeholder 4">
+          <p:cNvPr id="4" name="Explanation and figure body 3">
             <a:extLst>
               <a:ext uri="{FF2B5EF4-FFF2-40B4-BE49-F238E27FC236}">
-                <a16:creationId xmlns:a16="http://schemas.microsoft.com/office/drawing/2014/main" id="{9E417BD4-16E2-4377-A05D-024EC18B8EA4}"/>
+                <a16:creationId xmlns:a16="http://schemas.microsoft.com/office/drawing/2014/main" id="{B76FA5E4-B6C8-43B1-871F-4C2029154E84}"/>
               </a:ext>
             </a:extLst>
           </p:cNvPr>
@@ -1036,53 +2195,144 @@
             <a:spLocks noGrp="1"/>
           </p:cNvSpPr>
           <p:nvPr>
-            <p:ph type="ftr" sz="quarter" idx="11"/>
+            <p:ph type="body" idx="3"/>
           </p:nvPr>
         </p:nvSpPr>
-        <p:spPr/>
+        <p:spPr>
+          <a:xfrm>
+            <a:off x="5591175" y="5353050"/>
+            <a:ext cx="5991225" cy="542925"/>
+          </a:xfrm>
+          <a:prstGeom prst="rect">
+            <a:avLst/>
+          </a:prstGeom>
+          <a:noFill/>
+          <a:ln w="0">
+            <a:noFill/>
+          </a:ln>
+        </p:spPr>
         <p:txBody>
-          <a:bodyPr/>
-          <a:lstStyle/>
+          <a:bodyPr lIns="0" tIns="0" rIns="0" bIns="0">
+            <a:noAutofit/>
+          </a:bodyPr>
+          <a:lstStyle>
+            <a:lvl1pPr>
+              <a:defRPr sz="1500" b="0">
+                <a:solidFill>
+                  <a:srgbClr val="222222"/>
+                </a:solidFill>
+                <a:latin typeface="Arial"/>
+                <a:ea typeface="Arial"/>
+                <a:cs typeface="Arial"/>
+              </a:defRPr>
+            </a:lvl1pPr>
+            <a:lvl2pPr>
+              <a:defRPr sz="1500" b="0">
+                <a:solidFill>
+                  <a:srgbClr val="222222"/>
+                </a:solidFill>
+                <a:latin typeface="Arial"/>
+                <a:ea typeface="Arial"/>
+                <a:cs typeface="Arial"/>
+              </a:defRPr>
+            </a:lvl2pPr>
+            <a:lvl3pPr>
+              <a:defRPr sz="1500" b="0">
+                <a:solidFill>
+                  <a:srgbClr val="222222"/>
+                </a:solidFill>
+                <a:latin typeface="Arial"/>
+                <a:ea typeface="Arial"/>
+                <a:cs typeface="Arial"/>
+              </a:defRPr>
+            </a:lvl3pPr>
+            <a:lvl4pPr>
+              <a:defRPr sz="1500" b="0">
+                <a:solidFill>
+                  <a:srgbClr val="222222"/>
+                </a:solidFill>
+                <a:latin typeface="Arial"/>
+                <a:ea typeface="Arial"/>
+                <a:cs typeface="Arial"/>
+              </a:defRPr>
+            </a:lvl4pPr>
+            <a:lvl5pPr>
+              <a:defRPr sz="1500" b="0">
+                <a:solidFill>
+                  <a:srgbClr val="222222"/>
+                </a:solidFill>
+                <a:latin typeface="Arial"/>
+                <a:ea typeface="Arial"/>
+                <a:cs typeface="Arial"/>
+              </a:defRPr>
+            </a:lvl5pPr>
+            <a:lvl6pPr>
+              <a:defRPr sz="1500" b="0">
+                <a:solidFill>
+                  <a:srgbClr val="222222"/>
+                </a:solidFill>
+                <a:latin typeface="Arial"/>
+                <a:ea typeface="Arial"/>
+                <a:cs typeface="Arial"/>
+              </a:defRPr>
+            </a:lvl6pPr>
+            <a:lvl7pPr>
+              <a:defRPr sz="1500" b="0">
+                <a:solidFill>
+                  <a:srgbClr val="222222"/>
+                </a:solidFill>
+                <a:latin typeface="Arial"/>
+                <a:ea typeface="Arial"/>
+                <a:cs typeface="Arial"/>
+              </a:defRPr>
+            </a:lvl7pPr>
+            <a:lvl8pPr>
+              <a:defRPr sz="1500" b="0">
+                <a:solidFill>
+                  <a:srgbClr val="222222"/>
+                </a:solidFill>
+                <a:latin typeface="Arial"/>
+                <a:ea typeface="Arial"/>
+                <a:cs typeface="Arial"/>
+              </a:defRPr>
+            </a:lvl8pPr>
+            <a:lvl9pPr>
+              <a:defRPr sz="1500" b="0">
+                <a:solidFill>
+                  <a:srgbClr val="222222"/>
+                </a:solidFill>
+                <a:latin typeface="Arial"/>
+                <a:ea typeface="Arial"/>
+                <a:cs typeface="Arial"/>
+              </a:defRPr>
+            </a:lvl9pPr>
+          </a:lstStyle>
           <a:p>
-            <a:endParaRPr lang="en-US"/>
-          </a:p>
-        </p:txBody>
-      </p:sp>
-      <p:sp>
-        <p:nvSpPr>
-          <p:cNvPr id="6" name="Slide Number Placeholder 5">
-            <a:extLst>
-              <a:ext uri="{FF2B5EF4-FFF2-40B4-BE49-F238E27FC236}">
-                <a16:creationId xmlns:a16="http://schemas.microsoft.com/office/drawing/2014/main" id="{1F38B704-A5BD-482C-B261-3A36037BA6CB}"/>
-              </a:ext>
-            </a:extLst>
-          </p:cNvPr>
-          <p:cNvSpPr>
-            <a:spLocks noGrp="1"/>
-          </p:cNvSpPr>
-          <p:nvPr>
-            <p:ph type="sldNum" sz="quarter" idx="12"/>
-          </p:nvPr>
-        </p:nvSpPr>
-        <p:spPr/>
-        <p:txBody>
-          <a:bodyPr/>
-          <a:lstStyle/>
-          <a:p>
-            <a:fld id="{4A609AEB-AA43-4F11-B5F7-17FA2DC3DBF4}" type="slidenum">
-              <a:rPr lang="en-US" smtClean="0"/>
-              <a:t>‹#›</a:t>
-            </a:fld>
-            <a:endParaRPr lang="en-US"/>
+            <a:pPr>
+              <a:defRPr sz="1500" b="0">
+                <a:solidFill>
+                  <a:srgbClr val="222222"/>
+                </a:solidFill>
+                <a:latin typeface="Arial"/>
+                <a:ea typeface="Arial"/>
+                <a:cs typeface="Arial"/>
+              </a:defRPr>
+            </a:pPr>
+            <a:r>
+              <a:rPr sz="1500" b="0">
+                <a:solidFill>
+                  <a:srgbClr val="222222"/>
+                </a:solidFill>
+                <a:latin typeface="Arial"/>
+                <a:ea typeface="Arial"/>
+                <a:cs typeface="Arial"/>
+              </a:rPr>
+              <a:t>[Figure caption and source credit]</a:t>
+            </a:r>
           </a:p>
         </p:txBody>
       </p:sp>
     </p:spTree>
-    <p:extLst>
-      <p:ext uri="{BB962C8B-B14F-4D97-AF65-F5344CB8AC3E}">
-        <p14:creationId xmlns:p14="http://schemas.microsoft.com/office/powerpoint/2010/main" val="3866659110"/>
-      </p:ext>
-    </p:extLst>
   </p:cSld>
   <p:clrMapOvr>
     <a:masterClrMapping/>
@@ -1090,9 +2340,9 @@
 </p:sldLayout>
 </file>
 
-<file path=ppt/slideLayouts/slideLayout2.xml><?xml version="1.0" encoding="utf-8"?>
-<p:sldLayout xmlns:a="http://schemas.openxmlformats.org/drawingml/2006/main" xmlns:r="http://schemas.openxmlformats.org/officeDocument/2006/relationships" xmlns:p="http://schemas.openxmlformats.org/presentationml/2006/main" type="obj" preserve="1">
-  <p:cSld name="Title and Content">
+<file path=ppt/slideLayouts/slideLayout4.xml><?xml version="1.0" encoding="utf-8"?>
+<p:sldLayout xmlns:a="http://schemas.openxmlformats.org/drawingml/2006/main" xmlns:r="http://schemas.openxmlformats.org/officeDocument/2006/relationships" xmlns:p="http://schemas.openxmlformats.org/presentationml/2006/main" preserve="1">
+  <p:cSld name="Activity steps">
     <p:spTree>
       <p:nvGrpSpPr>
         <p:cNvPr id="1" name=""/>
@@ -1109,10 +2359,10 @@
       </p:grpSpPr>
       <p:sp>
         <p:nvSpPr>
-          <p:cNvPr id="2" name="Title 1">
+          <p:cNvPr id="4" name="Activity steps title 0">
             <a:extLst>
               <a:ext uri="{FF2B5EF4-FFF2-40B4-BE49-F238E27FC236}">
-                <a16:creationId xmlns:a16="http://schemas.microsoft.com/office/drawing/2014/main" id="{952C3D8F-E7CA-47BF-93B3-05B6E232AE36}"/>
+                <a16:creationId xmlns:a16="http://schemas.microsoft.com/office/drawing/2014/main" id="{4A75A923-A588-498D-8C3D-05C7B27BD60D}"/>
               </a:ext>
             </a:extLst>
           </p:cNvPr>
@@ -1123,24 +2373,146 @@
             <p:ph type="title"/>
           </p:nvPr>
         </p:nvSpPr>
-        <p:spPr/>
+        <p:spPr>
+          <a:xfrm>
+            <a:off x="609600" y="971550"/>
+            <a:ext cx="10972800" cy="876300"/>
+          </a:xfrm>
+          <a:prstGeom prst="rect">
+            <a:avLst/>
+          </a:prstGeom>
+          <a:noFill/>
+          <a:ln w="0">
+            <a:noFill/>
+          </a:ln>
+        </p:spPr>
         <p:txBody>
-          <a:bodyPr/>
-          <a:lstStyle/>
+          <a:bodyPr lIns="0" tIns="0" rIns="0" bIns="0">
+            <a:noAutofit/>
+          </a:bodyPr>
+          <a:lstStyle>
+            <a:lvl1pPr>
+              <a:defRPr sz="3300" b="1">
+                <a:solidFill>
+                  <a:srgbClr val="002855"/>
+                </a:solidFill>
+                <a:latin typeface="Arial"/>
+                <a:ea typeface="Arial"/>
+                <a:cs typeface="Arial"/>
+              </a:defRPr>
+            </a:lvl1pPr>
+            <a:lvl2pPr>
+              <a:defRPr sz="3300" b="1">
+                <a:solidFill>
+                  <a:srgbClr val="002855"/>
+                </a:solidFill>
+                <a:latin typeface="Arial"/>
+                <a:ea typeface="Arial"/>
+                <a:cs typeface="Arial"/>
+              </a:defRPr>
+            </a:lvl2pPr>
+            <a:lvl3pPr>
+              <a:defRPr sz="3300" b="1">
+                <a:solidFill>
+                  <a:srgbClr val="002855"/>
+                </a:solidFill>
+                <a:latin typeface="Arial"/>
+                <a:ea typeface="Arial"/>
+                <a:cs typeface="Arial"/>
+              </a:defRPr>
+            </a:lvl3pPr>
+            <a:lvl4pPr>
+              <a:defRPr sz="3300" b="1">
+                <a:solidFill>
+                  <a:srgbClr val="002855"/>
+                </a:solidFill>
+                <a:latin typeface="Arial"/>
+                <a:ea typeface="Arial"/>
+                <a:cs typeface="Arial"/>
+              </a:defRPr>
+            </a:lvl4pPr>
+            <a:lvl5pPr>
+              <a:defRPr sz="3300" b="1">
+                <a:solidFill>
+                  <a:srgbClr val="002855"/>
+                </a:solidFill>
+                <a:latin typeface="Arial"/>
+                <a:ea typeface="Arial"/>
+                <a:cs typeface="Arial"/>
+              </a:defRPr>
+            </a:lvl5pPr>
+            <a:lvl6pPr>
+              <a:defRPr sz="3300" b="1">
+                <a:solidFill>
+                  <a:srgbClr val="002855"/>
+                </a:solidFill>
+                <a:latin typeface="Arial"/>
+                <a:ea typeface="Arial"/>
+                <a:cs typeface="Arial"/>
+              </a:defRPr>
+            </a:lvl6pPr>
+            <a:lvl7pPr>
+              <a:defRPr sz="3300" b="1">
+                <a:solidFill>
+                  <a:srgbClr val="002855"/>
+                </a:solidFill>
+                <a:latin typeface="Arial"/>
+                <a:ea typeface="Arial"/>
+                <a:cs typeface="Arial"/>
+              </a:defRPr>
+            </a:lvl7pPr>
+            <a:lvl8pPr>
+              <a:defRPr sz="3300" b="1">
+                <a:solidFill>
+                  <a:srgbClr val="002855"/>
+                </a:solidFill>
+                <a:latin typeface="Arial"/>
+                <a:ea typeface="Arial"/>
+                <a:cs typeface="Arial"/>
+              </a:defRPr>
+            </a:lvl8pPr>
+            <a:lvl9pPr>
+              <a:defRPr sz="3300" b="1">
+                <a:solidFill>
+                  <a:srgbClr val="002855"/>
+                </a:solidFill>
+                <a:latin typeface="Arial"/>
+                <a:ea typeface="Arial"/>
+                <a:cs typeface="Arial"/>
+              </a:defRPr>
+            </a:lvl9pPr>
+          </a:lstStyle>
           <a:p>
+            <a:pPr>
+              <a:defRPr sz="3300" b="1">
+                <a:solidFill>
+                  <a:srgbClr val="002855"/>
+                </a:solidFill>
+                <a:latin typeface="Arial"/>
+                <a:ea typeface="Arial"/>
+                <a:cs typeface="Arial"/>
+              </a:defRPr>
+            </a:pPr>
             <a:r>
-              <a:rPr lang="en-US"/>
-              <a:t>Click to edit Master title style</a:t>
+              <a:rPr sz="3300" b="1">
+                <a:solidFill>
+                  <a:srgbClr val="002855"/>
+                </a:solidFill>
+                <a:latin typeface="Arial"/>
+                <a:ea typeface="Arial"/>
+                <a:cs typeface="Arial"/>
+              </a:rPr>
+              <a:t>[Activity title]</a:t>
             </a:r>
           </a:p>
         </p:txBody>
       </p:sp>
       <p:sp>
         <p:nvSpPr>
-          <p:cNvPr id="3" name="Content Placeholder 2">
+          <p:cNvPr id="2" name="Activity steps body 1">
             <a:extLst>
               <a:ext uri="{FF2B5EF4-FFF2-40B4-BE49-F238E27FC236}">
-                <a16:creationId xmlns:a16="http://schemas.microsoft.com/office/drawing/2014/main" id="{05B6B734-B1D7-463C-AE7F-B82114087547}"/>
+                <a16:creationId xmlns:a16="http://schemas.microsoft.com/office/drawing/2014/main" id="{F15A3904-D261-4581-891D-0D974E46F6EB}"/>
               </a:ext>
             </a:extLst>
           </p:cNvPr>
@@ -1148,56 +2520,215 @@
             <a:spLocks noGrp="1"/>
           </p:cNvSpPr>
           <p:nvPr>
-            <p:ph idx="1"/>
+            <p:ph type="body" idx="1"/>
           </p:nvPr>
         </p:nvSpPr>
-        <p:spPr/>
+        <p:spPr>
+          <a:xfrm>
+            <a:off x="609600" y="2124075"/>
+            <a:ext cx="10972800" cy="3333750"/>
+          </a:xfrm>
+          <a:prstGeom prst="rect">
+            <a:avLst/>
+          </a:prstGeom>
+          <a:noFill/>
+          <a:ln w="0">
+            <a:noFill/>
+          </a:ln>
+        </p:spPr>
         <p:txBody>
-          <a:bodyPr/>
-          <a:lstStyle/>
+          <a:bodyPr lIns="0" tIns="0" rIns="0" bIns="0">
+            <a:noAutofit/>
+          </a:bodyPr>
+          <a:lstStyle>
+            <a:lvl1pPr>
+              <a:defRPr sz="2400" b="0">
+                <a:solidFill>
+                  <a:srgbClr val="222222"/>
+                </a:solidFill>
+                <a:latin typeface="Arial"/>
+                <a:ea typeface="Arial"/>
+                <a:cs typeface="Arial"/>
+              </a:defRPr>
+            </a:lvl1pPr>
+            <a:lvl2pPr>
+              <a:defRPr sz="2400" b="0">
+                <a:solidFill>
+                  <a:srgbClr val="222222"/>
+                </a:solidFill>
+                <a:latin typeface="Arial"/>
+                <a:ea typeface="Arial"/>
+                <a:cs typeface="Arial"/>
+              </a:defRPr>
+            </a:lvl2pPr>
+            <a:lvl3pPr>
+              <a:defRPr sz="2400" b="0">
+                <a:solidFill>
+                  <a:srgbClr val="222222"/>
+                </a:solidFill>
+                <a:latin typeface="Arial"/>
+                <a:ea typeface="Arial"/>
+                <a:cs typeface="Arial"/>
+              </a:defRPr>
+            </a:lvl3pPr>
+            <a:lvl4pPr>
+              <a:defRPr sz="2400" b="0">
+                <a:solidFill>
+                  <a:srgbClr val="222222"/>
+                </a:solidFill>
+                <a:latin typeface="Arial"/>
+                <a:ea typeface="Arial"/>
+                <a:cs typeface="Arial"/>
+              </a:defRPr>
+            </a:lvl4pPr>
+            <a:lvl5pPr>
+              <a:defRPr sz="2400" b="0">
+                <a:solidFill>
+                  <a:srgbClr val="222222"/>
+                </a:solidFill>
+                <a:latin typeface="Arial"/>
+                <a:ea typeface="Arial"/>
+                <a:cs typeface="Arial"/>
+              </a:defRPr>
+            </a:lvl5pPr>
+            <a:lvl6pPr>
+              <a:defRPr sz="2400" b="0">
+                <a:solidFill>
+                  <a:srgbClr val="222222"/>
+                </a:solidFill>
+                <a:latin typeface="Arial"/>
+                <a:ea typeface="Arial"/>
+                <a:cs typeface="Arial"/>
+              </a:defRPr>
+            </a:lvl6pPr>
+            <a:lvl7pPr>
+              <a:defRPr sz="2400" b="0">
+                <a:solidFill>
+                  <a:srgbClr val="222222"/>
+                </a:solidFill>
+                <a:latin typeface="Arial"/>
+                <a:ea typeface="Arial"/>
+                <a:cs typeface="Arial"/>
+              </a:defRPr>
+            </a:lvl7pPr>
+            <a:lvl8pPr>
+              <a:defRPr sz="2400" b="0">
+                <a:solidFill>
+                  <a:srgbClr val="222222"/>
+                </a:solidFill>
+                <a:latin typeface="Arial"/>
+                <a:ea typeface="Arial"/>
+                <a:cs typeface="Arial"/>
+              </a:defRPr>
+            </a:lvl8pPr>
+            <a:lvl9pPr>
+              <a:defRPr sz="2400" b="0">
+                <a:solidFill>
+                  <a:srgbClr val="222222"/>
+                </a:solidFill>
+                <a:latin typeface="Arial"/>
+                <a:ea typeface="Arial"/>
+                <a:cs typeface="Arial"/>
+              </a:defRPr>
+            </a:lvl9pPr>
+          </a:lstStyle>
           <a:p>
-            <a:pPr lvl="0"/>
+            <a:pPr>
+              <a:defRPr sz="2400" b="0">
+                <a:solidFill>
+                  <a:srgbClr val="222222"/>
+                </a:solidFill>
+                <a:latin typeface="Arial"/>
+                <a:ea typeface="Arial"/>
+                <a:cs typeface="Arial"/>
+              </a:defRPr>
+            </a:pPr>
             <a:r>
-              <a:rPr lang="en-US"/>
-              <a:t>Edit Master text styles</a:t>
+              <a:rPr sz="2400" b="0">
+                <a:solidFill>
+                  <a:srgbClr val="222222"/>
+                </a:solidFill>
+                <a:latin typeface="Arial"/>
+                <a:ea typeface="Arial"/>
+                <a:cs typeface="Arial"/>
+              </a:rPr>
+              <a:t>[Describe the setup.]</a:t>
             </a:r>
           </a:p>
           <a:p>
-            <a:pPr lvl="1"/>
+            <a:endParaRPr sz="2400" b="0">
+              <a:solidFill>
+                <a:srgbClr val="222222"/>
+              </a:solidFill>
+              <a:latin typeface="Arial"/>
+              <a:ea typeface="Arial"/>
+              <a:cs typeface="Arial"/>
+            </a:endParaRPr>
+          </a:p>
+          <a:p>
+            <a:pPr>
+              <a:defRPr sz="2400" b="0">
+                <a:solidFill>
+                  <a:srgbClr val="222222"/>
+                </a:solidFill>
+                <a:latin typeface="Arial"/>
+                <a:ea typeface="Arial"/>
+                <a:cs typeface="Arial"/>
+              </a:defRPr>
+            </a:pPr>
             <a:r>
-              <a:rPr lang="en-US"/>
-              <a:t>Second level</a:t>
+              <a:rPr sz="2400" b="0">
+                <a:solidFill>
+                  <a:srgbClr val="222222"/>
+                </a:solidFill>
+                <a:latin typeface="Arial"/>
+                <a:ea typeface="Arial"/>
+                <a:cs typeface="Arial"/>
+              </a:rPr>
+              <a:t>[Describe the measurement and units.]</a:t>
             </a:r>
           </a:p>
           <a:p>
-            <a:pPr lvl="2"/>
-            <a:r>
-              <a:rPr lang="en-US"/>
-              <a:t>Third level</a:t>
-            </a:r>
+            <a:endParaRPr sz="2400" b="0">
+              <a:solidFill>
+                <a:srgbClr val="222222"/>
+              </a:solidFill>
+              <a:latin typeface="Arial"/>
+              <a:ea typeface="Arial"/>
+              <a:cs typeface="Arial"/>
+            </a:endParaRPr>
           </a:p>
           <a:p>
-            <a:pPr lvl="3"/>
+            <a:pPr>
+              <a:defRPr sz="2400" b="0">
+                <a:solidFill>
+                  <a:srgbClr val="222222"/>
+                </a:solidFill>
+                <a:latin typeface="Arial"/>
+                <a:ea typeface="Arial"/>
+                <a:cs typeface="Arial"/>
+              </a:defRPr>
+            </a:pPr>
             <a:r>
-              <a:rPr lang="en-US"/>
-              <a:t>Fourth level</a:t>
-            </a:r>
-          </a:p>
-          <a:p>
-            <a:pPr lvl="4"/>
-            <a:r>
-              <a:rPr lang="en-US"/>
-              <a:t>Fifth level</a:t>
+              <a:rPr sz="2400" b="0">
+                <a:solidFill>
+                  <a:srgbClr val="222222"/>
+                </a:solidFill>
+                <a:latin typeface="Arial"/>
+                <a:ea typeface="Arial"/>
+                <a:cs typeface="Arial"/>
+              </a:rPr>
+              <a:t>[Explain how to record the result.]</a:t>
             </a:r>
           </a:p>
         </p:txBody>
       </p:sp>
       <p:sp>
         <p:nvSpPr>
-          <p:cNvPr id="4" name="Date Placeholder 3">
+          <p:cNvPr id="3" name="Activity steps body 2">
             <a:extLst>
               <a:ext uri="{FF2B5EF4-FFF2-40B4-BE49-F238E27FC236}">
-                <a16:creationId xmlns:a16="http://schemas.microsoft.com/office/drawing/2014/main" id="{8A113D4B-64D5-46B9-B15D-D11A612E78CB}"/>
+                <a16:creationId xmlns:a16="http://schemas.microsoft.com/office/drawing/2014/main" id="{332D626C-8C62-4762-8A19-77DFBBDD378F}"/>
               </a:ext>
             </a:extLst>
           </p:cNvPr>
@@ -1205,82 +2736,144 @@
             <a:spLocks noGrp="1"/>
           </p:cNvSpPr>
           <p:nvPr>
-            <p:ph type="dt" sz="half" idx="10"/>
+            <p:ph type="body" idx="2"/>
           </p:nvPr>
         </p:nvSpPr>
-        <p:spPr/>
+        <p:spPr>
+          <a:xfrm>
+            <a:off x="609600" y="5581650"/>
+            <a:ext cx="10972800" cy="447675"/>
+          </a:xfrm>
+          <a:prstGeom prst="rect">
+            <a:avLst/>
+          </a:prstGeom>
+          <a:noFill/>
+          <a:ln w="0">
+            <a:noFill/>
+          </a:ln>
+        </p:spPr>
         <p:txBody>
-          <a:bodyPr/>
-          <a:lstStyle/>
+          <a:bodyPr lIns="0" tIns="0" rIns="0" bIns="0">
+            <a:noAutofit/>
+          </a:bodyPr>
+          <a:lstStyle>
+            <a:lvl1pPr>
+              <a:defRPr sz="1650" b="0">
+                <a:solidFill>
+                  <a:srgbClr val="222222"/>
+                </a:solidFill>
+                <a:latin typeface="Arial"/>
+                <a:ea typeface="Arial"/>
+                <a:cs typeface="Arial"/>
+              </a:defRPr>
+            </a:lvl1pPr>
+            <a:lvl2pPr>
+              <a:defRPr sz="1650" b="0">
+                <a:solidFill>
+                  <a:srgbClr val="222222"/>
+                </a:solidFill>
+                <a:latin typeface="Arial"/>
+                <a:ea typeface="Arial"/>
+                <a:cs typeface="Arial"/>
+              </a:defRPr>
+            </a:lvl2pPr>
+            <a:lvl3pPr>
+              <a:defRPr sz="1650" b="0">
+                <a:solidFill>
+                  <a:srgbClr val="222222"/>
+                </a:solidFill>
+                <a:latin typeface="Arial"/>
+                <a:ea typeface="Arial"/>
+                <a:cs typeface="Arial"/>
+              </a:defRPr>
+            </a:lvl3pPr>
+            <a:lvl4pPr>
+              <a:defRPr sz="1650" b="0">
+                <a:solidFill>
+                  <a:srgbClr val="222222"/>
+                </a:solidFill>
+                <a:latin typeface="Arial"/>
+                <a:ea typeface="Arial"/>
+                <a:cs typeface="Arial"/>
+              </a:defRPr>
+            </a:lvl4pPr>
+            <a:lvl5pPr>
+              <a:defRPr sz="1650" b="0">
+                <a:solidFill>
+                  <a:srgbClr val="222222"/>
+                </a:solidFill>
+                <a:latin typeface="Arial"/>
+                <a:ea typeface="Arial"/>
+                <a:cs typeface="Arial"/>
+              </a:defRPr>
+            </a:lvl5pPr>
+            <a:lvl6pPr>
+              <a:defRPr sz="1650" b="0">
+                <a:solidFill>
+                  <a:srgbClr val="222222"/>
+                </a:solidFill>
+                <a:latin typeface="Arial"/>
+                <a:ea typeface="Arial"/>
+                <a:cs typeface="Arial"/>
+              </a:defRPr>
+            </a:lvl6pPr>
+            <a:lvl7pPr>
+              <a:defRPr sz="1650" b="0">
+                <a:solidFill>
+                  <a:srgbClr val="222222"/>
+                </a:solidFill>
+                <a:latin typeface="Arial"/>
+                <a:ea typeface="Arial"/>
+                <a:cs typeface="Arial"/>
+              </a:defRPr>
+            </a:lvl7pPr>
+            <a:lvl8pPr>
+              <a:defRPr sz="1650" b="0">
+                <a:solidFill>
+                  <a:srgbClr val="222222"/>
+                </a:solidFill>
+                <a:latin typeface="Arial"/>
+                <a:ea typeface="Arial"/>
+                <a:cs typeface="Arial"/>
+              </a:defRPr>
+            </a:lvl8pPr>
+            <a:lvl9pPr>
+              <a:defRPr sz="1650" b="0">
+                <a:solidFill>
+                  <a:srgbClr val="222222"/>
+                </a:solidFill>
+                <a:latin typeface="Arial"/>
+                <a:ea typeface="Arial"/>
+                <a:cs typeface="Arial"/>
+              </a:defRPr>
+            </a:lvl9pPr>
+          </a:lstStyle>
           <a:p>
-            <a:fld id="{789149DF-550C-4AE5-8E4C-9787E3236087}" type="datetime1">
-              <a:rPr lang="en-US" smtClean="0"/>
-              <a:t>7/11/2018</a:t>
-            </a:fld>
-            <a:endParaRPr lang="en-US"/>
-          </a:p>
-        </p:txBody>
-      </p:sp>
-      <p:sp>
-        <p:nvSpPr>
-          <p:cNvPr id="5" name="Footer Placeholder 4">
-            <a:extLst>
-              <a:ext uri="{FF2B5EF4-FFF2-40B4-BE49-F238E27FC236}">
-                <a16:creationId xmlns:a16="http://schemas.microsoft.com/office/drawing/2014/main" id="{EB5D80D2-4245-424B-BCBF-7DE0DFB441BA}"/>
-              </a:ext>
-            </a:extLst>
-          </p:cNvPr>
-          <p:cNvSpPr>
-            <a:spLocks noGrp="1"/>
-          </p:cNvSpPr>
-          <p:nvPr>
-            <p:ph type="ftr" sz="quarter" idx="11"/>
-          </p:nvPr>
-        </p:nvSpPr>
-        <p:spPr/>
-        <p:txBody>
-          <a:bodyPr/>
-          <a:lstStyle/>
-          <a:p>
-            <a:endParaRPr lang="en-US"/>
-          </a:p>
-        </p:txBody>
-      </p:sp>
-      <p:sp>
-        <p:nvSpPr>
-          <p:cNvPr id="6" name="Slide Number Placeholder 5">
-            <a:extLst>
-              <a:ext uri="{FF2B5EF4-FFF2-40B4-BE49-F238E27FC236}">
-                <a16:creationId xmlns:a16="http://schemas.microsoft.com/office/drawing/2014/main" id="{805FCF8C-5F0F-4042-A702-FF77831509C1}"/>
-              </a:ext>
-            </a:extLst>
-          </p:cNvPr>
-          <p:cNvSpPr>
-            <a:spLocks noGrp="1"/>
-          </p:cNvSpPr>
-          <p:nvPr>
-            <p:ph type="sldNum" sz="quarter" idx="12"/>
-          </p:nvPr>
-        </p:nvSpPr>
-        <p:spPr/>
-        <p:txBody>
-          <a:bodyPr/>
-          <a:lstStyle/>
-          <a:p>
-            <a:fld id="{4A609AEB-AA43-4F11-B5F7-17FA2DC3DBF4}" type="slidenum">
-              <a:rPr lang="en-US" smtClean="0"/>
-              <a:t>‹#›</a:t>
-            </a:fld>
-            <a:endParaRPr lang="en-US"/>
+            <a:pPr>
+              <a:defRPr sz="1650" b="0">
+                <a:solidFill>
+                  <a:srgbClr val="222222"/>
+                </a:solidFill>
+                <a:latin typeface="Arial"/>
+                <a:ea typeface="Arial"/>
+                <a:cs typeface="Arial"/>
+              </a:defRPr>
+            </a:pPr>
+            <a:r>
+              <a:rPr sz="1650" b="0">
+                <a:solidFill>
+                  <a:srgbClr val="222222"/>
+                </a:solidFill>
+                <a:latin typeface="Arial"/>
+                <a:ea typeface="Arial"/>
+                <a:cs typeface="Arial"/>
+              </a:rPr>
+              <a:t>[Add relevant safety or supervision instructions.]</a:t>
+            </a:r>
           </a:p>
         </p:txBody>
       </p:sp>
     </p:spTree>
-    <p:extLst>
-      <p:ext uri="{BB962C8B-B14F-4D97-AF65-F5344CB8AC3E}">
-        <p14:creationId xmlns:p14="http://schemas.microsoft.com/office/powerpoint/2010/main" val="1362436839"/>
-      </p:ext>
-    </p:extLst>
   </p:cSld>
   <p:clrMapOvr>
     <a:masterClrMapping/>
@@ -1288,9 +2881,9 @@
 </p:sldLayout>
 </file>
 
-<file path=ppt/slideLayouts/slideLayout3.xml><?xml version="1.0" encoding="utf-8"?>
-<p:sldLayout xmlns:a="http://schemas.openxmlformats.org/drawingml/2006/main" xmlns:r="http://schemas.openxmlformats.org/officeDocument/2006/relationships" xmlns:p="http://schemas.openxmlformats.org/presentationml/2006/main" type="secHead" preserve="1">
-  <p:cSld name="Section Header">
+<file path=ppt/slideLayouts/slideLayout5.xml><?xml version="1.0" encoding="utf-8"?>
+<p:sldLayout xmlns:a="http://schemas.openxmlformats.org/drawingml/2006/main" xmlns:r="http://schemas.openxmlformats.org/officeDocument/2006/relationships" xmlns:p="http://schemas.openxmlformats.org/presentationml/2006/main" preserve="1">
+  <p:cSld name="Data or visual">
     <p:spTree>
       <p:nvGrpSpPr>
         <p:cNvPr id="1" name=""/>
@@ -1307,10 +2900,10 @@
       </p:grpSpPr>
       <p:sp>
         <p:nvSpPr>
-          <p:cNvPr id="2" name="Title 1">
+          <p:cNvPr id="4" name="Data or visual title 0">
             <a:extLst>
               <a:ext uri="{FF2B5EF4-FFF2-40B4-BE49-F238E27FC236}">
-                <a16:creationId xmlns:a16="http://schemas.microsoft.com/office/drawing/2014/main" id="{0F5D9DFC-7BF8-4A4C-BA87-180D0D97F3D0}"/>
+                <a16:creationId xmlns:a16="http://schemas.microsoft.com/office/drawing/2014/main" id="{33E7DC27-A5F9-47F9-A216-713460D598EB}"/>
               </a:ext>
             </a:extLst>
           </p:cNvPr>
@@ -1323,31 +2916,144 @@
         </p:nvSpPr>
         <p:spPr>
           <a:xfrm>
-            <a:off x="831850" y="1709738"/>
-            <a:ext cx="10515600" cy="2852737"/>
+            <a:off x="609600" y="971550"/>
+            <a:ext cx="10972800" cy="876300"/>
           </a:xfrm>
+          <a:prstGeom prst="rect">
+            <a:avLst/>
+          </a:prstGeom>
+          <a:noFill/>
+          <a:ln w="0">
+            <a:noFill/>
+          </a:ln>
         </p:spPr>
         <p:txBody>
-          <a:bodyPr anchor="b"/>
+          <a:bodyPr lIns="0" tIns="0" rIns="0" bIns="0">
+            <a:noAutofit/>
+          </a:bodyPr>
           <a:lstStyle>
             <a:lvl1pPr>
-              <a:defRPr sz="6000"/>
+              <a:defRPr sz="3300" b="1">
+                <a:solidFill>
+                  <a:srgbClr val="002855"/>
+                </a:solidFill>
+                <a:latin typeface="Arial"/>
+                <a:ea typeface="Arial"/>
+                <a:cs typeface="Arial"/>
+              </a:defRPr>
             </a:lvl1pPr>
+            <a:lvl2pPr>
+              <a:defRPr sz="3300" b="1">
+                <a:solidFill>
+                  <a:srgbClr val="002855"/>
+                </a:solidFill>
+                <a:latin typeface="Arial"/>
+                <a:ea typeface="Arial"/>
+                <a:cs typeface="Arial"/>
+              </a:defRPr>
+            </a:lvl2pPr>
+            <a:lvl3pPr>
+              <a:defRPr sz="3300" b="1">
+                <a:solidFill>
+                  <a:srgbClr val="002855"/>
+                </a:solidFill>
+                <a:latin typeface="Arial"/>
+                <a:ea typeface="Arial"/>
+                <a:cs typeface="Arial"/>
+              </a:defRPr>
+            </a:lvl3pPr>
+            <a:lvl4pPr>
+              <a:defRPr sz="3300" b="1">
+                <a:solidFill>
+                  <a:srgbClr val="002855"/>
+                </a:solidFill>
+                <a:latin typeface="Arial"/>
+                <a:ea typeface="Arial"/>
+                <a:cs typeface="Arial"/>
+              </a:defRPr>
+            </a:lvl4pPr>
+            <a:lvl5pPr>
+              <a:defRPr sz="3300" b="1">
+                <a:solidFill>
+                  <a:srgbClr val="002855"/>
+                </a:solidFill>
+                <a:latin typeface="Arial"/>
+                <a:ea typeface="Arial"/>
+                <a:cs typeface="Arial"/>
+              </a:defRPr>
+            </a:lvl5pPr>
+            <a:lvl6pPr>
+              <a:defRPr sz="3300" b="1">
+                <a:solidFill>
+                  <a:srgbClr val="002855"/>
+                </a:solidFill>
+                <a:latin typeface="Arial"/>
+                <a:ea typeface="Arial"/>
+                <a:cs typeface="Arial"/>
+              </a:defRPr>
+            </a:lvl6pPr>
+            <a:lvl7pPr>
+              <a:defRPr sz="3300" b="1">
+                <a:solidFill>
+                  <a:srgbClr val="002855"/>
+                </a:solidFill>
+                <a:latin typeface="Arial"/>
+                <a:ea typeface="Arial"/>
+                <a:cs typeface="Arial"/>
+              </a:defRPr>
+            </a:lvl7pPr>
+            <a:lvl8pPr>
+              <a:defRPr sz="3300" b="1">
+                <a:solidFill>
+                  <a:srgbClr val="002855"/>
+                </a:solidFill>
+                <a:latin typeface="Arial"/>
+                <a:ea typeface="Arial"/>
+                <a:cs typeface="Arial"/>
+              </a:defRPr>
+            </a:lvl8pPr>
+            <a:lvl9pPr>
+              <a:defRPr sz="3300" b="1">
+                <a:solidFill>
+                  <a:srgbClr val="002855"/>
+                </a:solidFill>
+                <a:latin typeface="Arial"/>
+                <a:ea typeface="Arial"/>
+                <a:cs typeface="Arial"/>
+              </a:defRPr>
+            </a:lvl9pPr>
           </a:lstStyle>
           <a:p>
+            <a:pPr>
+              <a:defRPr sz="3300" b="1">
+                <a:solidFill>
+                  <a:srgbClr val="002855"/>
+                </a:solidFill>
+                <a:latin typeface="Arial"/>
+                <a:ea typeface="Arial"/>
+                <a:cs typeface="Arial"/>
+              </a:defRPr>
+            </a:pPr>
             <a:r>
-              <a:rPr lang="en-US"/>
-              <a:t>Click to edit Master title style</a:t>
+              <a:rPr sz="3300" b="1">
+                <a:solidFill>
+                  <a:srgbClr val="002855"/>
+                </a:solidFill>
+                <a:latin typeface="Arial"/>
+                <a:ea typeface="Arial"/>
+                <a:cs typeface="Arial"/>
+              </a:rPr>
+              <a:t>[Observation or result]</a:t>
             </a:r>
           </a:p>
         </p:txBody>
       </p:sp>
       <p:sp>
         <p:nvSpPr>
-          <p:cNvPr id="3" name="Text Placeholder 2">
+          <p:cNvPr id="2" name="Data or visual content 1">
             <a:extLst>
               <a:ext uri="{FF2B5EF4-FFF2-40B4-BE49-F238E27FC236}">
-                <a16:creationId xmlns:a16="http://schemas.microsoft.com/office/drawing/2014/main" id="{4A5381FF-325F-4BA5-B65C-3F48E7906995}"/>
+                <a16:creationId xmlns:a16="http://schemas.microsoft.com/office/drawing/2014/main" id="{3A617E8B-975F-4DBD-9A97-0A174C276730}"/>
               </a:ext>
             </a:extLst>
           </p:cNvPr>
@@ -1355,124 +3061,149 @@
             <a:spLocks noGrp="1"/>
           </p:cNvSpPr>
           <p:nvPr>
-            <p:ph type="body" idx="1"/>
+            <p:ph idx="1"/>
           </p:nvPr>
         </p:nvSpPr>
         <p:spPr>
           <a:xfrm>
-            <a:off x="831850" y="4589463"/>
-            <a:ext cx="10515600" cy="1500187"/>
+            <a:off x="609600" y="2095500"/>
+            <a:ext cx="10972800" cy="3219450"/>
           </a:xfrm>
+          <a:prstGeom prst="rect">
+            <a:avLst/>
+          </a:prstGeom>
+          <a:noFill/>
+          <a:ln w="0">
+            <a:noFill/>
+          </a:ln>
         </p:spPr>
         <p:txBody>
-          <a:bodyPr/>
+          <a:bodyPr lIns="0" tIns="0" rIns="0" bIns="0">
+            <a:noAutofit/>
+          </a:bodyPr>
           <a:lstStyle>
-            <a:lvl1pPr marL="0" indent="0">
-              <a:buNone/>
-              <a:defRPr sz="2400">
-                <a:solidFill>
-                  <a:schemeClr val="tx1">
-                    <a:tint val="75000"/>
-                  </a:schemeClr>
-                </a:solidFill>
+            <a:lvl1pPr>
+              <a:defRPr sz="2250" b="0">
+                <a:solidFill>
+                  <a:srgbClr val="222222"/>
+                </a:solidFill>
+                <a:latin typeface="Arial"/>
+                <a:ea typeface="Arial"/>
+                <a:cs typeface="Arial"/>
               </a:defRPr>
             </a:lvl1pPr>
-            <a:lvl2pPr marL="457200" indent="0">
-              <a:buNone/>
-              <a:defRPr sz="2000">
-                <a:solidFill>
-                  <a:schemeClr val="tx1">
-                    <a:tint val="75000"/>
-                  </a:schemeClr>
-                </a:solidFill>
+            <a:lvl2pPr>
+              <a:defRPr sz="2250" b="0">
+                <a:solidFill>
+                  <a:srgbClr val="222222"/>
+                </a:solidFill>
+                <a:latin typeface="Arial"/>
+                <a:ea typeface="Arial"/>
+                <a:cs typeface="Arial"/>
               </a:defRPr>
             </a:lvl2pPr>
-            <a:lvl3pPr marL="914400" indent="0">
-              <a:buNone/>
-              <a:defRPr sz="1800">
-                <a:solidFill>
-                  <a:schemeClr val="tx1">
-                    <a:tint val="75000"/>
-                  </a:schemeClr>
-                </a:solidFill>
+            <a:lvl3pPr>
+              <a:defRPr sz="2250" b="0">
+                <a:solidFill>
+                  <a:srgbClr val="222222"/>
+                </a:solidFill>
+                <a:latin typeface="Arial"/>
+                <a:ea typeface="Arial"/>
+                <a:cs typeface="Arial"/>
               </a:defRPr>
             </a:lvl3pPr>
-            <a:lvl4pPr marL="1371600" indent="0">
-              <a:buNone/>
-              <a:defRPr sz="1600">
-                <a:solidFill>
-                  <a:schemeClr val="tx1">
-                    <a:tint val="75000"/>
-                  </a:schemeClr>
-                </a:solidFill>
+            <a:lvl4pPr>
+              <a:defRPr sz="2250" b="0">
+                <a:solidFill>
+                  <a:srgbClr val="222222"/>
+                </a:solidFill>
+                <a:latin typeface="Arial"/>
+                <a:ea typeface="Arial"/>
+                <a:cs typeface="Arial"/>
               </a:defRPr>
             </a:lvl4pPr>
-            <a:lvl5pPr marL="1828800" indent="0">
-              <a:buNone/>
-              <a:defRPr sz="1600">
-                <a:solidFill>
-                  <a:schemeClr val="tx1">
-                    <a:tint val="75000"/>
-                  </a:schemeClr>
-                </a:solidFill>
+            <a:lvl5pPr>
+              <a:defRPr sz="2250" b="0">
+                <a:solidFill>
+                  <a:srgbClr val="222222"/>
+                </a:solidFill>
+                <a:latin typeface="Arial"/>
+                <a:ea typeface="Arial"/>
+                <a:cs typeface="Arial"/>
               </a:defRPr>
             </a:lvl5pPr>
-            <a:lvl6pPr marL="2286000" indent="0">
-              <a:buNone/>
-              <a:defRPr sz="1600">
-                <a:solidFill>
-                  <a:schemeClr val="tx1">
-                    <a:tint val="75000"/>
-                  </a:schemeClr>
-                </a:solidFill>
+            <a:lvl6pPr>
+              <a:defRPr sz="2250" b="0">
+                <a:solidFill>
+                  <a:srgbClr val="222222"/>
+                </a:solidFill>
+                <a:latin typeface="Arial"/>
+                <a:ea typeface="Arial"/>
+                <a:cs typeface="Arial"/>
               </a:defRPr>
             </a:lvl6pPr>
-            <a:lvl7pPr marL="2743200" indent="0">
-              <a:buNone/>
-              <a:defRPr sz="1600">
-                <a:solidFill>
-                  <a:schemeClr val="tx1">
-                    <a:tint val="75000"/>
-                  </a:schemeClr>
-                </a:solidFill>
+            <a:lvl7pPr>
+              <a:defRPr sz="2250" b="0">
+                <a:solidFill>
+                  <a:srgbClr val="222222"/>
+                </a:solidFill>
+                <a:latin typeface="Arial"/>
+                <a:ea typeface="Arial"/>
+                <a:cs typeface="Arial"/>
               </a:defRPr>
             </a:lvl7pPr>
-            <a:lvl8pPr marL="3200400" indent="0">
-              <a:buNone/>
-              <a:defRPr sz="1600">
-                <a:solidFill>
-                  <a:schemeClr val="tx1">
-                    <a:tint val="75000"/>
-                  </a:schemeClr>
-                </a:solidFill>
+            <a:lvl8pPr>
+              <a:defRPr sz="2250" b="0">
+                <a:solidFill>
+                  <a:srgbClr val="222222"/>
+                </a:solidFill>
+                <a:latin typeface="Arial"/>
+                <a:ea typeface="Arial"/>
+                <a:cs typeface="Arial"/>
               </a:defRPr>
             </a:lvl8pPr>
-            <a:lvl9pPr marL="3657600" indent="0">
-              <a:buNone/>
-              <a:defRPr sz="1600">
-                <a:solidFill>
-                  <a:schemeClr val="tx1">
-                    <a:tint val="75000"/>
-                  </a:schemeClr>
-                </a:solidFill>
+            <a:lvl9pPr>
+              <a:defRPr sz="2250" b="0">
+                <a:solidFill>
+                  <a:srgbClr val="222222"/>
+                </a:solidFill>
+                <a:latin typeface="Arial"/>
+                <a:ea typeface="Arial"/>
+                <a:cs typeface="Arial"/>
               </a:defRPr>
             </a:lvl9pPr>
           </a:lstStyle>
           <a:p>
-            <a:pPr lvl="0"/>
+            <a:pPr>
+              <a:defRPr sz="2250" b="0">
+                <a:solidFill>
+                  <a:srgbClr val="222222"/>
+                </a:solidFill>
+                <a:latin typeface="Arial"/>
+                <a:ea typeface="Arial"/>
+                <a:cs typeface="Arial"/>
+              </a:defRPr>
+            </a:pPr>
             <a:r>
-              <a:rPr lang="en-US"/>
-              <a:t>Edit Master text styles</a:t>
+              <a:rPr sz="2250" b="0">
+                <a:solidFill>
+                  <a:srgbClr val="222222"/>
+                </a:solidFill>
+                <a:latin typeface="Arial"/>
+                <a:ea typeface="Arial"/>
+                <a:cs typeface="Arial"/>
+              </a:rPr>
+              <a:t>[Insert a graph, table, or image]</a:t>
             </a:r>
           </a:p>
         </p:txBody>
       </p:sp>
       <p:sp>
         <p:nvSpPr>
-          <p:cNvPr id="4" name="Date Placeholder 3">
+          <p:cNvPr id="3" name="Data or visual body 2">
             <a:extLst>
               <a:ext uri="{FF2B5EF4-FFF2-40B4-BE49-F238E27FC236}">
-                <a16:creationId xmlns:a16="http://schemas.microsoft.com/office/drawing/2014/main" id="{5C0F785C-D26F-4E49-92ED-8D161BACBBC2}"/>
+                <a16:creationId xmlns:a16="http://schemas.microsoft.com/office/drawing/2014/main" id="{DFE3AC5B-7812-46A8-BB38-963FC170FFF5}"/>
               </a:ext>
             </a:extLst>
           </p:cNvPr>
@@ -1480,82 +3211,144 @@
             <a:spLocks noGrp="1"/>
           </p:cNvSpPr>
           <p:nvPr>
-            <p:ph type="dt" sz="half" idx="10"/>
+            <p:ph type="body" idx="2"/>
           </p:nvPr>
         </p:nvSpPr>
-        <p:spPr/>
+        <p:spPr>
+          <a:xfrm>
+            <a:off x="609600" y="5457825"/>
+            <a:ext cx="10972800" cy="571500"/>
+          </a:xfrm>
+          <a:prstGeom prst="rect">
+            <a:avLst/>
+          </a:prstGeom>
+          <a:noFill/>
+          <a:ln w="0">
+            <a:noFill/>
+          </a:ln>
+        </p:spPr>
         <p:txBody>
-          <a:bodyPr/>
-          <a:lstStyle/>
+          <a:bodyPr lIns="0" tIns="0" rIns="0" bIns="0">
+            <a:noAutofit/>
+          </a:bodyPr>
+          <a:lstStyle>
+            <a:lvl1pPr>
+              <a:defRPr sz="1650" b="0">
+                <a:solidFill>
+                  <a:srgbClr val="222222"/>
+                </a:solidFill>
+                <a:latin typeface="Arial"/>
+                <a:ea typeface="Arial"/>
+                <a:cs typeface="Arial"/>
+              </a:defRPr>
+            </a:lvl1pPr>
+            <a:lvl2pPr>
+              <a:defRPr sz="1650" b="0">
+                <a:solidFill>
+                  <a:srgbClr val="222222"/>
+                </a:solidFill>
+                <a:latin typeface="Arial"/>
+                <a:ea typeface="Arial"/>
+                <a:cs typeface="Arial"/>
+              </a:defRPr>
+            </a:lvl2pPr>
+            <a:lvl3pPr>
+              <a:defRPr sz="1650" b="0">
+                <a:solidFill>
+                  <a:srgbClr val="222222"/>
+                </a:solidFill>
+                <a:latin typeface="Arial"/>
+                <a:ea typeface="Arial"/>
+                <a:cs typeface="Arial"/>
+              </a:defRPr>
+            </a:lvl3pPr>
+            <a:lvl4pPr>
+              <a:defRPr sz="1650" b="0">
+                <a:solidFill>
+                  <a:srgbClr val="222222"/>
+                </a:solidFill>
+                <a:latin typeface="Arial"/>
+                <a:ea typeface="Arial"/>
+                <a:cs typeface="Arial"/>
+              </a:defRPr>
+            </a:lvl4pPr>
+            <a:lvl5pPr>
+              <a:defRPr sz="1650" b="0">
+                <a:solidFill>
+                  <a:srgbClr val="222222"/>
+                </a:solidFill>
+                <a:latin typeface="Arial"/>
+                <a:ea typeface="Arial"/>
+                <a:cs typeface="Arial"/>
+              </a:defRPr>
+            </a:lvl5pPr>
+            <a:lvl6pPr>
+              <a:defRPr sz="1650" b="0">
+                <a:solidFill>
+                  <a:srgbClr val="222222"/>
+                </a:solidFill>
+                <a:latin typeface="Arial"/>
+                <a:ea typeface="Arial"/>
+                <a:cs typeface="Arial"/>
+              </a:defRPr>
+            </a:lvl6pPr>
+            <a:lvl7pPr>
+              <a:defRPr sz="1650" b="0">
+                <a:solidFill>
+                  <a:srgbClr val="222222"/>
+                </a:solidFill>
+                <a:latin typeface="Arial"/>
+                <a:ea typeface="Arial"/>
+                <a:cs typeface="Arial"/>
+              </a:defRPr>
+            </a:lvl7pPr>
+            <a:lvl8pPr>
+              <a:defRPr sz="1650" b="0">
+                <a:solidFill>
+                  <a:srgbClr val="222222"/>
+                </a:solidFill>
+                <a:latin typeface="Arial"/>
+                <a:ea typeface="Arial"/>
+                <a:cs typeface="Arial"/>
+              </a:defRPr>
+            </a:lvl8pPr>
+            <a:lvl9pPr>
+              <a:defRPr sz="1650" b="0">
+                <a:solidFill>
+                  <a:srgbClr val="222222"/>
+                </a:solidFill>
+                <a:latin typeface="Arial"/>
+                <a:ea typeface="Arial"/>
+                <a:cs typeface="Arial"/>
+              </a:defRPr>
+            </a:lvl9pPr>
+          </a:lstStyle>
           <a:p>
-            <a:fld id="{FA824D22-931B-4AC8-85E2-F9DE01595FF3}" type="datetime1">
-              <a:rPr lang="en-US" smtClean="0"/>
-              <a:t>7/11/2018</a:t>
-            </a:fld>
-            <a:endParaRPr lang="en-US"/>
-          </a:p>
-        </p:txBody>
-      </p:sp>
-      <p:sp>
-        <p:nvSpPr>
-          <p:cNvPr id="5" name="Footer Placeholder 4">
-            <a:extLst>
-              <a:ext uri="{FF2B5EF4-FFF2-40B4-BE49-F238E27FC236}">
-                <a16:creationId xmlns:a16="http://schemas.microsoft.com/office/drawing/2014/main" id="{C846D4B2-6E89-4494-AD80-5BF0C47346DB}"/>
-              </a:ext>
-            </a:extLst>
-          </p:cNvPr>
-          <p:cNvSpPr>
-            <a:spLocks noGrp="1"/>
-          </p:cNvSpPr>
-          <p:nvPr>
-            <p:ph type="ftr" sz="quarter" idx="11"/>
-          </p:nvPr>
-        </p:nvSpPr>
-        <p:spPr/>
-        <p:txBody>
-          <a:bodyPr/>
-          <a:lstStyle/>
-          <a:p>
-            <a:endParaRPr lang="en-US"/>
-          </a:p>
-        </p:txBody>
-      </p:sp>
-      <p:sp>
-        <p:nvSpPr>
-          <p:cNvPr id="6" name="Slide Number Placeholder 5">
-            <a:extLst>
-              <a:ext uri="{FF2B5EF4-FFF2-40B4-BE49-F238E27FC236}">
-                <a16:creationId xmlns:a16="http://schemas.microsoft.com/office/drawing/2014/main" id="{62C23A76-5C57-44B5-9C83-AA163080D29C}"/>
-              </a:ext>
-            </a:extLst>
-          </p:cNvPr>
-          <p:cNvSpPr>
-            <a:spLocks noGrp="1"/>
-          </p:cNvSpPr>
-          <p:nvPr>
-            <p:ph type="sldNum" sz="quarter" idx="12"/>
-          </p:nvPr>
-        </p:nvSpPr>
-        <p:spPr/>
-        <p:txBody>
-          <a:bodyPr/>
-          <a:lstStyle/>
-          <a:p>
-            <a:fld id="{4A609AEB-AA43-4F11-B5F7-17FA2DC3DBF4}" type="slidenum">
-              <a:rPr lang="en-US" smtClean="0"/>
-              <a:t>‹#›</a:t>
-            </a:fld>
-            <a:endParaRPr lang="en-US"/>
+            <a:pPr>
+              <a:defRPr sz="1650" b="0">
+                <a:solidFill>
+                  <a:srgbClr val="222222"/>
+                </a:solidFill>
+                <a:latin typeface="Arial"/>
+                <a:ea typeface="Arial"/>
+                <a:cs typeface="Arial"/>
+              </a:defRPr>
+            </a:pPr>
+            <a:r>
+              <a:rPr sz="1650" b="0">
+                <a:solidFill>
+                  <a:srgbClr val="222222"/>
+                </a:solidFill>
+                <a:latin typeface="Arial"/>
+                <a:ea typeface="Arial"/>
+                <a:cs typeface="Arial"/>
+              </a:rPr>
+              <a:t>[Describe the evidence. Include units, a caption, and source credits.]</a:t>
+            </a:r>
           </a:p>
         </p:txBody>
       </p:sp>
     </p:spTree>
-    <p:extLst>
-      <p:ext uri="{BB962C8B-B14F-4D97-AF65-F5344CB8AC3E}">
-        <p14:creationId xmlns:p14="http://schemas.microsoft.com/office/powerpoint/2010/main" val="1331099785"/>
-      </p:ext>
-    </p:extLst>
   </p:cSld>
   <p:clrMapOvr>
     <a:masterClrMapping/>
@@ -1563,9 +3356,9 @@
 </p:sldLayout>
 </file>
 
-<file path=ppt/slideLayouts/slideLayout4.xml><?xml version="1.0" encoding="utf-8"?>
-<p:sldLayout xmlns:a="http://schemas.openxmlformats.org/drawingml/2006/main" xmlns:r="http://schemas.openxmlformats.org/officeDocument/2006/relationships" xmlns:p="http://schemas.openxmlformats.org/presentationml/2006/main" type="twoObj" preserve="1">
-  <p:cSld name="Two Content">
+<file path=ppt/slideLayouts/slideLayout6.xml><?xml version="1.0" encoding="utf-8"?>
+<p:sldLayout xmlns:a="http://schemas.openxmlformats.org/drawingml/2006/main" xmlns:r="http://schemas.openxmlformats.org/officeDocument/2006/relationships" xmlns:p="http://schemas.openxmlformats.org/presentationml/2006/main" preserve="1">
+  <p:cSld name="Discussion and reflection">
     <p:spTree>
       <p:nvGrpSpPr>
         <p:cNvPr id="1" name=""/>
@@ -1582,275 +3375,10 @@
       </p:grpSpPr>
       <p:sp>
         <p:nvSpPr>
-          <p:cNvPr id="2" name="Title 1">
+          <p:cNvPr id="3" name="Discussion and reflection title 0">
             <a:extLst>
               <a:ext uri="{FF2B5EF4-FFF2-40B4-BE49-F238E27FC236}">
-                <a16:creationId xmlns:a16="http://schemas.microsoft.com/office/drawing/2014/main" id="{ACD6CAAA-2756-4396-BB96-A79CCE8DCC24}"/>
-              </a:ext>
-            </a:extLst>
-          </p:cNvPr>
-          <p:cNvSpPr>
-            <a:spLocks noGrp="1"/>
-          </p:cNvSpPr>
-          <p:nvPr>
-            <p:ph type="title"/>
-          </p:nvPr>
-        </p:nvSpPr>
-        <p:spPr/>
-        <p:txBody>
-          <a:bodyPr/>
-          <a:lstStyle/>
-          <a:p>
-            <a:r>
-              <a:rPr lang="en-US"/>
-              <a:t>Click to edit Master title style</a:t>
-            </a:r>
-          </a:p>
-        </p:txBody>
-      </p:sp>
-      <p:sp>
-        <p:nvSpPr>
-          <p:cNvPr id="3" name="Content Placeholder 2">
-            <a:extLst>
-              <a:ext uri="{FF2B5EF4-FFF2-40B4-BE49-F238E27FC236}">
-                <a16:creationId xmlns:a16="http://schemas.microsoft.com/office/drawing/2014/main" id="{E8EA4FA7-8839-4CD6-8A76-D4077F01C9B4}"/>
-              </a:ext>
-            </a:extLst>
-          </p:cNvPr>
-          <p:cNvSpPr>
-            <a:spLocks noGrp="1"/>
-          </p:cNvSpPr>
-          <p:nvPr>
-            <p:ph sz="half" idx="1"/>
-          </p:nvPr>
-        </p:nvSpPr>
-        <p:spPr>
-          <a:xfrm>
-            <a:off x="838200" y="1825625"/>
-            <a:ext cx="5181600" cy="4351338"/>
-          </a:xfrm>
-        </p:spPr>
-        <p:txBody>
-          <a:bodyPr/>
-          <a:lstStyle/>
-          <a:p>
-            <a:pPr lvl="0"/>
-            <a:r>
-              <a:rPr lang="en-US"/>
-              <a:t>Edit Master text styles</a:t>
-            </a:r>
-          </a:p>
-          <a:p>
-            <a:pPr lvl="1"/>
-            <a:r>
-              <a:rPr lang="en-US"/>
-              <a:t>Second level</a:t>
-            </a:r>
-          </a:p>
-          <a:p>
-            <a:pPr lvl="2"/>
-            <a:r>
-              <a:rPr lang="en-US"/>
-              <a:t>Third level</a:t>
-            </a:r>
-          </a:p>
-          <a:p>
-            <a:pPr lvl="3"/>
-            <a:r>
-              <a:rPr lang="en-US"/>
-              <a:t>Fourth level</a:t>
-            </a:r>
-          </a:p>
-          <a:p>
-            <a:pPr lvl="4"/>
-            <a:r>
-              <a:rPr lang="en-US"/>
-              <a:t>Fifth level</a:t>
-            </a:r>
-          </a:p>
-        </p:txBody>
-      </p:sp>
-      <p:sp>
-        <p:nvSpPr>
-          <p:cNvPr id="4" name="Content Placeholder 3">
-            <a:extLst>
-              <a:ext uri="{FF2B5EF4-FFF2-40B4-BE49-F238E27FC236}">
-                <a16:creationId xmlns:a16="http://schemas.microsoft.com/office/drawing/2014/main" id="{C1D20341-715C-4CE7-B5C4-264E92086122}"/>
-              </a:ext>
-            </a:extLst>
-          </p:cNvPr>
-          <p:cNvSpPr>
-            <a:spLocks noGrp="1"/>
-          </p:cNvSpPr>
-          <p:nvPr>
-            <p:ph sz="half" idx="2"/>
-          </p:nvPr>
-        </p:nvSpPr>
-        <p:spPr>
-          <a:xfrm>
-            <a:off x="6172200" y="1825625"/>
-            <a:ext cx="5181600" cy="4351338"/>
-          </a:xfrm>
-        </p:spPr>
-        <p:txBody>
-          <a:bodyPr/>
-          <a:lstStyle/>
-          <a:p>
-            <a:pPr lvl="0"/>
-            <a:r>
-              <a:rPr lang="en-US"/>
-              <a:t>Edit Master text styles</a:t>
-            </a:r>
-          </a:p>
-          <a:p>
-            <a:pPr lvl="1"/>
-            <a:r>
-              <a:rPr lang="en-US"/>
-              <a:t>Second level</a:t>
-            </a:r>
-          </a:p>
-          <a:p>
-            <a:pPr lvl="2"/>
-            <a:r>
-              <a:rPr lang="en-US"/>
-              <a:t>Third level</a:t>
-            </a:r>
-          </a:p>
-          <a:p>
-            <a:pPr lvl="3"/>
-            <a:r>
-              <a:rPr lang="en-US"/>
-              <a:t>Fourth level</a:t>
-            </a:r>
-          </a:p>
-          <a:p>
-            <a:pPr lvl="4"/>
-            <a:r>
-              <a:rPr lang="en-US"/>
-              <a:t>Fifth level</a:t>
-            </a:r>
-          </a:p>
-        </p:txBody>
-      </p:sp>
-      <p:sp>
-        <p:nvSpPr>
-          <p:cNvPr id="5" name="Date Placeholder 4">
-            <a:extLst>
-              <a:ext uri="{FF2B5EF4-FFF2-40B4-BE49-F238E27FC236}">
-                <a16:creationId xmlns:a16="http://schemas.microsoft.com/office/drawing/2014/main" id="{5989E327-9538-42B8-B2E6-867B4FED11DC}"/>
-              </a:ext>
-            </a:extLst>
-          </p:cNvPr>
-          <p:cNvSpPr>
-            <a:spLocks noGrp="1"/>
-          </p:cNvSpPr>
-          <p:nvPr>
-            <p:ph type="dt" sz="half" idx="10"/>
-          </p:nvPr>
-        </p:nvSpPr>
-        <p:spPr/>
-        <p:txBody>
-          <a:bodyPr/>
-          <a:lstStyle/>
-          <a:p>
-            <a:fld id="{4D6286AB-4DF9-4212-A7E1-5EA93AA7DD2A}" type="datetime1">
-              <a:rPr lang="en-US" smtClean="0"/>
-              <a:t>7/11/2018</a:t>
-            </a:fld>
-            <a:endParaRPr lang="en-US"/>
-          </a:p>
-        </p:txBody>
-      </p:sp>
-      <p:sp>
-        <p:nvSpPr>
-          <p:cNvPr id="6" name="Footer Placeholder 5">
-            <a:extLst>
-              <a:ext uri="{FF2B5EF4-FFF2-40B4-BE49-F238E27FC236}">
-                <a16:creationId xmlns:a16="http://schemas.microsoft.com/office/drawing/2014/main" id="{C9B39E2B-77BF-44C7-ADC3-0DEEDD958A54}"/>
-              </a:ext>
-            </a:extLst>
-          </p:cNvPr>
-          <p:cNvSpPr>
-            <a:spLocks noGrp="1"/>
-          </p:cNvSpPr>
-          <p:nvPr>
-            <p:ph type="ftr" sz="quarter" idx="11"/>
-          </p:nvPr>
-        </p:nvSpPr>
-        <p:spPr/>
-        <p:txBody>
-          <a:bodyPr/>
-          <a:lstStyle/>
-          <a:p>
-            <a:endParaRPr lang="en-US"/>
-          </a:p>
-        </p:txBody>
-      </p:sp>
-      <p:sp>
-        <p:nvSpPr>
-          <p:cNvPr id="7" name="Slide Number Placeholder 6">
-            <a:extLst>
-              <a:ext uri="{FF2B5EF4-FFF2-40B4-BE49-F238E27FC236}">
-                <a16:creationId xmlns:a16="http://schemas.microsoft.com/office/drawing/2014/main" id="{17FA61DC-1169-4285-8C79-466F006ABD77}"/>
-              </a:ext>
-            </a:extLst>
-          </p:cNvPr>
-          <p:cNvSpPr>
-            <a:spLocks noGrp="1"/>
-          </p:cNvSpPr>
-          <p:nvPr>
-            <p:ph type="sldNum" sz="quarter" idx="12"/>
-          </p:nvPr>
-        </p:nvSpPr>
-        <p:spPr/>
-        <p:txBody>
-          <a:bodyPr/>
-          <a:lstStyle/>
-          <a:p>
-            <a:fld id="{4A609AEB-AA43-4F11-B5F7-17FA2DC3DBF4}" type="slidenum">
-              <a:rPr lang="en-US" smtClean="0"/>
-              <a:t>‹#›</a:t>
-            </a:fld>
-            <a:endParaRPr lang="en-US"/>
-          </a:p>
-        </p:txBody>
-      </p:sp>
-    </p:spTree>
-    <p:extLst>
-      <p:ext uri="{BB962C8B-B14F-4D97-AF65-F5344CB8AC3E}">
-        <p14:creationId xmlns:p14="http://schemas.microsoft.com/office/powerpoint/2010/main" val="1146930912"/>
-      </p:ext>
-    </p:extLst>
-  </p:cSld>
-  <p:clrMapOvr>
-    <a:masterClrMapping/>
-  </p:clrMapOvr>
-</p:sldLayout>
-</file>
-
-<file path=ppt/slideLayouts/slideLayout5.xml><?xml version="1.0" encoding="utf-8"?>
-<p:sldLayout xmlns:a="http://schemas.openxmlformats.org/drawingml/2006/main" xmlns:r="http://schemas.openxmlformats.org/officeDocument/2006/relationships" xmlns:p="http://schemas.openxmlformats.org/presentationml/2006/main" type="twoTxTwoObj" preserve="1">
-  <p:cSld name="Comparison">
-    <p:spTree>
-      <p:nvGrpSpPr>
-        <p:cNvPr id="1" name=""/>
-        <p:cNvGrpSpPr/>
-        <p:nvPr/>
-      </p:nvGrpSpPr>
-      <p:grpSpPr>
-        <a:xfrm>
-          <a:off x="0" y="0"/>
-          <a:ext cx="0" cy="0"/>
-          <a:chOff x="0" y="0"/>
-          <a:chExt cx="0" cy="0"/>
-        </a:xfrm>
-      </p:grpSpPr>
-      <p:sp>
-        <p:nvSpPr>
-          <p:cNvPr id="2" name="Title 1">
-            <a:extLst>
-              <a:ext uri="{FF2B5EF4-FFF2-40B4-BE49-F238E27FC236}">
-                <a16:creationId xmlns:a16="http://schemas.microsoft.com/office/drawing/2014/main" id="{A8F81DDC-AA51-45A5-8B93-03C3EBC94836}"/>
+                <a16:creationId xmlns:a16="http://schemas.microsoft.com/office/drawing/2014/main" id="{1A0C5B13-4DC7-4BB2-8032-5A841983256D}"/>
               </a:ext>
             </a:extLst>
           </p:cNvPr>
@@ -1863,27 +3391,144 @@
         </p:nvSpPr>
         <p:spPr>
           <a:xfrm>
-            <a:off x="839788" y="365125"/>
-            <a:ext cx="10515600" cy="1325563"/>
+            <a:off x="609600" y="971550"/>
+            <a:ext cx="10972800" cy="876300"/>
           </a:xfrm>
+          <a:prstGeom prst="rect">
+            <a:avLst/>
+          </a:prstGeom>
+          <a:noFill/>
+          <a:ln w="0">
+            <a:noFill/>
+          </a:ln>
         </p:spPr>
         <p:txBody>
-          <a:bodyPr/>
-          <a:lstStyle/>
+          <a:bodyPr lIns="0" tIns="0" rIns="0" bIns="0">
+            <a:noAutofit/>
+          </a:bodyPr>
+          <a:lstStyle>
+            <a:lvl1pPr>
+              <a:defRPr sz="3300" b="1">
+                <a:solidFill>
+                  <a:srgbClr val="002855"/>
+                </a:solidFill>
+                <a:latin typeface="Arial"/>
+                <a:ea typeface="Arial"/>
+                <a:cs typeface="Arial"/>
+              </a:defRPr>
+            </a:lvl1pPr>
+            <a:lvl2pPr>
+              <a:defRPr sz="3300" b="1">
+                <a:solidFill>
+                  <a:srgbClr val="002855"/>
+                </a:solidFill>
+                <a:latin typeface="Arial"/>
+                <a:ea typeface="Arial"/>
+                <a:cs typeface="Arial"/>
+              </a:defRPr>
+            </a:lvl2pPr>
+            <a:lvl3pPr>
+              <a:defRPr sz="3300" b="1">
+                <a:solidFill>
+                  <a:srgbClr val="002855"/>
+                </a:solidFill>
+                <a:latin typeface="Arial"/>
+                <a:ea typeface="Arial"/>
+                <a:cs typeface="Arial"/>
+              </a:defRPr>
+            </a:lvl3pPr>
+            <a:lvl4pPr>
+              <a:defRPr sz="3300" b="1">
+                <a:solidFill>
+                  <a:srgbClr val="002855"/>
+                </a:solidFill>
+                <a:latin typeface="Arial"/>
+                <a:ea typeface="Arial"/>
+                <a:cs typeface="Arial"/>
+              </a:defRPr>
+            </a:lvl4pPr>
+            <a:lvl5pPr>
+              <a:defRPr sz="3300" b="1">
+                <a:solidFill>
+                  <a:srgbClr val="002855"/>
+                </a:solidFill>
+                <a:latin typeface="Arial"/>
+                <a:ea typeface="Arial"/>
+                <a:cs typeface="Arial"/>
+              </a:defRPr>
+            </a:lvl5pPr>
+            <a:lvl6pPr>
+              <a:defRPr sz="3300" b="1">
+                <a:solidFill>
+                  <a:srgbClr val="002855"/>
+                </a:solidFill>
+                <a:latin typeface="Arial"/>
+                <a:ea typeface="Arial"/>
+                <a:cs typeface="Arial"/>
+              </a:defRPr>
+            </a:lvl6pPr>
+            <a:lvl7pPr>
+              <a:defRPr sz="3300" b="1">
+                <a:solidFill>
+                  <a:srgbClr val="002855"/>
+                </a:solidFill>
+                <a:latin typeface="Arial"/>
+                <a:ea typeface="Arial"/>
+                <a:cs typeface="Arial"/>
+              </a:defRPr>
+            </a:lvl7pPr>
+            <a:lvl8pPr>
+              <a:defRPr sz="3300" b="1">
+                <a:solidFill>
+                  <a:srgbClr val="002855"/>
+                </a:solidFill>
+                <a:latin typeface="Arial"/>
+                <a:ea typeface="Arial"/>
+                <a:cs typeface="Arial"/>
+              </a:defRPr>
+            </a:lvl8pPr>
+            <a:lvl9pPr>
+              <a:defRPr sz="3300" b="1">
+                <a:solidFill>
+                  <a:srgbClr val="002855"/>
+                </a:solidFill>
+                <a:latin typeface="Arial"/>
+                <a:ea typeface="Arial"/>
+                <a:cs typeface="Arial"/>
+              </a:defRPr>
+            </a:lvl9pPr>
+          </a:lstStyle>
           <a:p>
+            <a:pPr>
+              <a:defRPr sz="3300" b="1">
+                <a:solidFill>
+                  <a:srgbClr val="002855"/>
+                </a:solidFill>
+                <a:latin typeface="Arial"/>
+                <a:ea typeface="Arial"/>
+                <a:cs typeface="Arial"/>
+              </a:defRPr>
+            </a:pPr>
             <a:r>
-              <a:rPr lang="en-US"/>
-              <a:t>Click to edit Master title style</a:t>
+              <a:rPr sz="3300" b="1">
+                <a:solidFill>
+                  <a:srgbClr val="002855"/>
+                </a:solidFill>
+                <a:latin typeface="Arial"/>
+                <a:ea typeface="Arial"/>
+                <a:cs typeface="Arial"/>
+              </a:rPr>
+              <a:t>What did we learn?</a:t>
             </a:r>
           </a:p>
         </p:txBody>
       </p:sp>
       <p:sp>
         <p:nvSpPr>
-          <p:cNvPr id="3" name="Text Placeholder 2">
+          <p:cNvPr id="2" name="Discussion and reflection body 1">
             <a:extLst>
               <a:ext uri="{FF2B5EF4-FFF2-40B4-BE49-F238E27FC236}">
-                <a16:creationId xmlns:a16="http://schemas.microsoft.com/office/drawing/2014/main" id="{DAB8C797-0D8F-451E-9AE3-27F11BAAC24C}"/>
+                <a16:creationId xmlns:a16="http://schemas.microsoft.com/office/drawing/2014/main" id="{73737ED5-7D24-4242-A1DB-9FC8EF99D382}"/>
               </a:ext>
             </a:extLst>
           </p:cNvPr>
@@ -1896,1196 +3541,205 @@
         </p:nvSpPr>
         <p:spPr>
           <a:xfrm>
-            <a:off x="839788" y="1681163"/>
-            <a:ext cx="5157787" cy="823912"/>
+            <a:off x="609600" y="2124075"/>
+            <a:ext cx="10972800" cy="3467100"/>
           </a:xfrm>
+          <a:prstGeom prst="rect">
+            <a:avLst/>
+          </a:prstGeom>
+          <a:noFill/>
+          <a:ln w="0">
+            <a:noFill/>
+          </a:ln>
         </p:spPr>
         <p:txBody>
-          <a:bodyPr anchor="b"/>
+          <a:bodyPr lIns="0" tIns="0" rIns="0" bIns="0">
+            <a:noAutofit/>
+          </a:bodyPr>
           <a:lstStyle>
-            <a:lvl1pPr marL="0" indent="0">
-              <a:buNone/>
-              <a:defRPr sz="2400" b="1"/>
+            <a:lvl1pPr>
+              <a:defRPr sz="2400" b="0">
+                <a:solidFill>
+                  <a:srgbClr val="222222"/>
+                </a:solidFill>
+                <a:latin typeface="Arial"/>
+                <a:ea typeface="Arial"/>
+                <a:cs typeface="Arial"/>
+              </a:defRPr>
             </a:lvl1pPr>
-            <a:lvl2pPr marL="457200" indent="0">
-              <a:buNone/>
-              <a:defRPr sz="2000" b="1"/>
+            <a:lvl2pPr>
+              <a:defRPr sz="2400" b="0">
+                <a:solidFill>
+                  <a:srgbClr val="222222"/>
+                </a:solidFill>
+                <a:latin typeface="Arial"/>
+                <a:ea typeface="Arial"/>
+                <a:cs typeface="Arial"/>
+              </a:defRPr>
             </a:lvl2pPr>
-            <a:lvl3pPr marL="914400" indent="0">
-              <a:buNone/>
-              <a:defRPr sz="1800" b="1"/>
+            <a:lvl3pPr>
+              <a:defRPr sz="2400" b="0">
+                <a:solidFill>
+                  <a:srgbClr val="222222"/>
+                </a:solidFill>
+                <a:latin typeface="Arial"/>
+                <a:ea typeface="Arial"/>
+                <a:cs typeface="Arial"/>
+              </a:defRPr>
             </a:lvl3pPr>
-            <a:lvl4pPr marL="1371600" indent="0">
-              <a:buNone/>
-              <a:defRPr sz="1600" b="1"/>
+            <a:lvl4pPr>
+              <a:defRPr sz="2400" b="0">
+                <a:solidFill>
+                  <a:srgbClr val="222222"/>
+                </a:solidFill>
+                <a:latin typeface="Arial"/>
+                <a:ea typeface="Arial"/>
+                <a:cs typeface="Arial"/>
+              </a:defRPr>
             </a:lvl4pPr>
-            <a:lvl5pPr marL="1828800" indent="0">
-              <a:buNone/>
-              <a:defRPr sz="1600" b="1"/>
+            <a:lvl5pPr>
+              <a:defRPr sz="2400" b="0">
+                <a:solidFill>
+                  <a:srgbClr val="222222"/>
+                </a:solidFill>
+                <a:latin typeface="Arial"/>
+                <a:ea typeface="Arial"/>
+                <a:cs typeface="Arial"/>
+              </a:defRPr>
             </a:lvl5pPr>
-            <a:lvl6pPr marL="2286000" indent="0">
-              <a:buNone/>
-              <a:defRPr sz="1600" b="1"/>
+            <a:lvl6pPr>
+              <a:defRPr sz="2400" b="0">
+                <a:solidFill>
+                  <a:srgbClr val="222222"/>
+                </a:solidFill>
+                <a:latin typeface="Arial"/>
+                <a:ea typeface="Arial"/>
+                <a:cs typeface="Arial"/>
+              </a:defRPr>
             </a:lvl6pPr>
-            <a:lvl7pPr marL="2743200" indent="0">
-              <a:buNone/>
-              <a:defRPr sz="1600" b="1"/>
+            <a:lvl7pPr>
+              <a:defRPr sz="2400" b="0">
+                <a:solidFill>
+                  <a:srgbClr val="222222"/>
+                </a:solidFill>
+                <a:latin typeface="Arial"/>
+                <a:ea typeface="Arial"/>
+                <a:cs typeface="Arial"/>
+              </a:defRPr>
             </a:lvl7pPr>
-            <a:lvl8pPr marL="3200400" indent="0">
-              <a:buNone/>
-              <a:defRPr sz="1600" b="1"/>
+            <a:lvl8pPr>
+              <a:defRPr sz="2400" b="0">
+                <a:solidFill>
+                  <a:srgbClr val="222222"/>
+                </a:solidFill>
+                <a:latin typeface="Arial"/>
+                <a:ea typeface="Arial"/>
+                <a:cs typeface="Arial"/>
+              </a:defRPr>
             </a:lvl8pPr>
-            <a:lvl9pPr marL="3657600" indent="0">
-              <a:buNone/>
-              <a:defRPr sz="1600" b="1"/>
+            <a:lvl9pPr>
+              <a:defRPr sz="2400" b="0">
+                <a:solidFill>
+                  <a:srgbClr val="222222"/>
+                </a:solidFill>
+                <a:latin typeface="Arial"/>
+                <a:ea typeface="Arial"/>
+                <a:cs typeface="Arial"/>
+              </a:defRPr>
             </a:lvl9pPr>
           </a:lstStyle>
           <a:p>
-            <a:pPr lvl="0"/>
+            <a:pPr>
+              <a:defRPr sz="2400" b="0">
+                <a:solidFill>
+                  <a:srgbClr val="222222"/>
+                </a:solidFill>
+                <a:latin typeface="Arial"/>
+                <a:ea typeface="Arial"/>
+                <a:cs typeface="Arial"/>
+              </a:defRPr>
+            </a:pPr>
             <a:r>
-              <a:rPr lang="en-US"/>
-              <a:t>Edit Master text styles</a:t>
+              <a:rPr sz="2400" b="0">
+                <a:solidFill>
+                  <a:srgbClr val="222222"/>
+                </a:solidFill>
+                <a:latin typeface="Arial"/>
+                <a:ea typeface="Arial"/>
+                <a:cs typeface="Arial"/>
+              </a:rPr>
+              <a:t>[What pattern do the results show?]</a:t>
+            </a:r>
+          </a:p>
+          <a:p>
+            <a:endParaRPr sz="2400" b="0">
+              <a:solidFill>
+                <a:srgbClr val="222222"/>
+              </a:solidFill>
+              <a:latin typeface="Arial"/>
+              <a:ea typeface="Arial"/>
+              <a:cs typeface="Arial"/>
+            </a:endParaRPr>
+          </a:p>
+          <a:p>
+            <a:pPr>
+              <a:defRPr sz="2400" b="0">
+                <a:solidFill>
+                  <a:srgbClr val="222222"/>
+                </a:solidFill>
+                <a:latin typeface="Arial"/>
+                <a:ea typeface="Arial"/>
+                <a:cs typeface="Arial"/>
+              </a:defRPr>
+            </a:pPr>
+            <a:r>
+              <a:rPr sz="2400" b="0">
+                <a:solidFill>
+                  <a:srgbClr val="222222"/>
+                </a:solidFill>
+                <a:latin typeface="Arial"/>
+                <a:ea typeface="Arial"/>
+                <a:cs typeface="Arial"/>
+              </a:rPr>
+              <a:t>[What evidence supports your explanation?]</a:t>
+            </a:r>
+          </a:p>
+          <a:p>
+            <a:endParaRPr sz="2400" b="0">
+              <a:solidFill>
+                <a:srgbClr val="222222"/>
+              </a:solidFill>
+              <a:latin typeface="Arial"/>
+              <a:ea typeface="Arial"/>
+              <a:cs typeface="Arial"/>
+            </a:endParaRPr>
+          </a:p>
+          <a:p>
+            <a:pPr>
+              <a:defRPr sz="2400" b="0">
+                <a:solidFill>
+                  <a:srgbClr val="222222"/>
+                </a:solidFill>
+                <a:latin typeface="Arial"/>
+                <a:ea typeface="Arial"/>
+                <a:cs typeface="Arial"/>
+              </a:defRPr>
+            </a:pPr>
+            <a:r>
+              <a:rPr sz="2400" b="0">
+                <a:solidFill>
+                  <a:srgbClr val="222222"/>
+                </a:solidFill>
+                <a:latin typeface="Arial"/>
+                <a:ea typeface="Arial"/>
+                <a:cs typeface="Arial"/>
+              </a:rPr>
+              <a:t>[What would you investigate next?]</a:t>
             </a:r>
           </a:p>
         </p:txBody>
       </p:sp>
-      <p:sp>
-        <p:nvSpPr>
-          <p:cNvPr id="4" name="Content Placeholder 3">
-            <a:extLst>
-              <a:ext uri="{FF2B5EF4-FFF2-40B4-BE49-F238E27FC236}">
-                <a16:creationId xmlns:a16="http://schemas.microsoft.com/office/drawing/2014/main" id="{DD29C517-A3B0-4771-B7DA-903CBF5BD262}"/>
-              </a:ext>
-            </a:extLst>
-          </p:cNvPr>
-          <p:cNvSpPr>
-            <a:spLocks noGrp="1"/>
-          </p:cNvSpPr>
-          <p:nvPr>
-            <p:ph sz="half" idx="2"/>
-          </p:nvPr>
-        </p:nvSpPr>
-        <p:spPr>
-          <a:xfrm>
-            <a:off x="839788" y="2505075"/>
-            <a:ext cx="5157787" cy="3684588"/>
-          </a:xfrm>
-        </p:spPr>
-        <p:txBody>
-          <a:bodyPr/>
-          <a:lstStyle/>
-          <a:p>
-            <a:pPr lvl="0"/>
-            <a:r>
-              <a:rPr lang="en-US"/>
-              <a:t>Edit Master text styles</a:t>
-            </a:r>
-          </a:p>
-          <a:p>
-            <a:pPr lvl="1"/>
-            <a:r>
-              <a:rPr lang="en-US"/>
-              <a:t>Second level</a:t>
-            </a:r>
-          </a:p>
-          <a:p>
-            <a:pPr lvl="2"/>
-            <a:r>
-              <a:rPr lang="en-US"/>
-              <a:t>Third level</a:t>
-            </a:r>
-          </a:p>
-          <a:p>
-            <a:pPr lvl="3"/>
-            <a:r>
-              <a:rPr lang="en-US"/>
-              <a:t>Fourth level</a:t>
-            </a:r>
-          </a:p>
-          <a:p>
-            <a:pPr lvl="4"/>
-            <a:r>
-              <a:rPr lang="en-US"/>
-              <a:t>Fifth level</a:t>
-            </a:r>
-          </a:p>
-        </p:txBody>
-      </p:sp>
-      <p:sp>
-        <p:nvSpPr>
-          <p:cNvPr id="5" name="Text Placeholder 4">
-            <a:extLst>
-              <a:ext uri="{FF2B5EF4-FFF2-40B4-BE49-F238E27FC236}">
-                <a16:creationId xmlns:a16="http://schemas.microsoft.com/office/drawing/2014/main" id="{3F85C8FA-9F4F-410C-9226-649DBDB1803E}"/>
-              </a:ext>
-            </a:extLst>
-          </p:cNvPr>
-          <p:cNvSpPr>
-            <a:spLocks noGrp="1"/>
-          </p:cNvSpPr>
-          <p:nvPr>
-            <p:ph type="body" sz="quarter" idx="3"/>
-          </p:nvPr>
-        </p:nvSpPr>
-        <p:spPr>
-          <a:xfrm>
-            <a:off x="6172200" y="1681163"/>
-            <a:ext cx="5183188" cy="823912"/>
-          </a:xfrm>
-        </p:spPr>
-        <p:txBody>
-          <a:bodyPr anchor="b"/>
-          <a:lstStyle>
-            <a:lvl1pPr marL="0" indent="0">
-              <a:buNone/>
-              <a:defRPr sz="2400" b="1"/>
-            </a:lvl1pPr>
-            <a:lvl2pPr marL="457200" indent="0">
-              <a:buNone/>
-              <a:defRPr sz="2000" b="1"/>
-            </a:lvl2pPr>
-            <a:lvl3pPr marL="914400" indent="0">
-              <a:buNone/>
-              <a:defRPr sz="1800" b="1"/>
-            </a:lvl3pPr>
-            <a:lvl4pPr marL="1371600" indent="0">
-              <a:buNone/>
-              <a:defRPr sz="1600" b="1"/>
-            </a:lvl4pPr>
-            <a:lvl5pPr marL="1828800" indent="0">
-              <a:buNone/>
-              <a:defRPr sz="1600" b="1"/>
-            </a:lvl5pPr>
-            <a:lvl6pPr marL="2286000" indent="0">
-              <a:buNone/>
-              <a:defRPr sz="1600" b="1"/>
-            </a:lvl6pPr>
-            <a:lvl7pPr marL="2743200" indent="0">
-              <a:buNone/>
-              <a:defRPr sz="1600" b="1"/>
-            </a:lvl7pPr>
-            <a:lvl8pPr marL="3200400" indent="0">
-              <a:buNone/>
-              <a:defRPr sz="1600" b="1"/>
-            </a:lvl8pPr>
-            <a:lvl9pPr marL="3657600" indent="0">
-              <a:buNone/>
-              <a:defRPr sz="1600" b="1"/>
-            </a:lvl9pPr>
-          </a:lstStyle>
-          <a:p>
-            <a:pPr lvl="0"/>
-            <a:r>
-              <a:rPr lang="en-US"/>
-              <a:t>Edit Master text styles</a:t>
-            </a:r>
-          </a:p>
-        </p:txBody>
-      </p:sp>
-      <p:sp>
-        <p:nvSpPr>
-          <p:cNvPr id="6" name="Content Placeholder 5">
-            <a:extLst>
-              <a:ext uri="{FF2B5EF4-FFF2-40B4-BE49-F238E27FC236}">
-                <a16:creationId xmlns:a16="http://schemas.microsoft.com/office/drawing/2014/main" id="{2A44F2B6-11A5-4ACC-91AC-E52ECE13F8E8}"/>
-              </a:ext>
-            </a:extLst>
-          </p:cNvPr>
-          <p:cNvSpPr>
-            <a:spLocks noGrp="1"/>
-          </p:cNvSpPr>
-          <p:nvPr>
-            <p:ph sz="quarter" idx="4"/>
-          </p:nvPr>
-        </p:nvSpPr>
-        <p:spPr>
-          <a:xfrm>
-            <a:off x="6172200" y="2505075"/>
-            <a:ext cx="5183188" cy="3684588"/>
-          </a:xfrm>
-        </p:spPr>
-        <p:txBody>
-          <a:bodyPr/>
-          <a:lstStyle/>
-          <a:p>
-            <a:pPr lvl="0"/>
-            <a:r>
-              <a:rPr lang="en-US"/>
-              <a:t>Edit Master text styles</a:t>
-            </a:r>
-          </a:p>
-          <a:p>
-            <a:pPr lvl="1"/>
-            <a:r>
-              <a:rPr lang="en-US"/>
-              <a:t>Second level</a:t>
-            </a:r>
-          </a:p>
-          <a:p>
-            <a:pPr lvl="2"/>
-            <a:r>
-              <a:rPr lang="en-US"/>
-              <a:t>Third level</a:t>
-            </a:r>
-          </a:p>
-          <a:p>
-            <a:pPr lvl="3"/>
-            <a:r>
-              <a:rPr lang="en-US"/>
-              <a:t>Fourth level</a:t>
-            </a:r>
-          </a:p>
-          <a:p>
-            <a:pPr lvl="4"/>
-            <a:r>
-              <a:rPr lang="en-US"/>
-              <a:t>Fifth level</a:t>
-            </a:r>
-          </a:p>
-        </p:txBody>
-      </p:sp>
-      <p:sp>
-        <p:nvSpPr>
-          <p:cNvPr id="7" name="Date Placeholder 6">
-            <a:extLst>
-              <a:ext uri="{FF2B5EF4-FFF2-40B4-BE49-F238E27FC236}">
-                <a16:creationId xmlns:a16="http://schemas.microsoft.com/office/drawing/2014/main" id="{C48F7FC9-6214-4344-8D1C-C9C4E672D07C}"/>
-              </a:ext>
-            </a:extLst>
-          </p:cNvPr>
-          <p:cNvSpPr>
-            <a:spLocks noGrp="1"/>
-          </p:cNvSpPr>
-          <p:nvPr>
-            <p:ph type="dt" sz="half" idx="10"/>
-          </p:nvPr>
-        </p:nvSpPr>
-        <p:spPr/>
-        <p:txBody>
-          <a:bodyPr/>
-          <a:lstStyle/>
-          <a:p>
-            <a:fld id="{FDBEBEE2-7BD1-4DCF-ACA3-F43E88D3F5C8}" type="datetime1">
-              <a:rPr lang="en-US" smtClean="0"/>
-              <a:t>7/11/2018</a:t>
-            </a:fld>
-            <a:endParaRPr lang="en-US"/>
-          </a:p>
-        </p:txBody>
-      </p:sp>
-      <p:sp>
-        <p:nvSpPr>
-          <p:cNvPr id="8" name="Footer Placeholder 7">
-            <a:extLst>
-              <a:ext uri="{FF2B5EF4-FFF2-40B4-BE49-F238E27FC236}">
-                <a16:creationId xmlns:a16="http://schemas.microsoft.com/office/drawing/2014/main" id="{41FA6458-85F5-4D7F-9009-E6AB91439292}"/>
-              </a:ext>
-            </a:extLst>
-          </p:cNvPr>
-          <p:cNvSpPr>
-            <a:spLocks noGrp="1"/>
-          </p:cNvSpPr>
-          <p:nvPr>
-            <p:ph type="ftr" sz="quarter" idx="11"/>
-          </p:nvPr>
-        </p:nvSpPr>
-        <p:spPr/>
-        <p:txBody>
-          <a:bodyPr/>
-          <a:lstStyle/>
-          <a:p>
-            <a:endParaRPr lang="en-US"/>
-          </a:p>
-        </p:txBody>
-      </p:sp>
-      <p:sp>
-        <p:nvSpPr>
-          <p:cNvPr id="9" name="Slide Number Placeholder 8">
-            <a:extLst>
-              <a:ext uri="{FF2B5EF4-FFF2-40B4-BE49-F238E27FC236}">
-                <a16:creationId xmlns:a16="http://schemas.microsoft.com/office/drawing/2014/main" id="{A67B7171-6F26-4A68-A4FF-F3C6DC10113D}"/>
-              </a:ext>
-            </a:extLst>
-          </p:cNvPr>
-          <p:cNvSpPr>
-            <a:spLocks noGrp="1"/>
-          </p:cNvSpPr>
-          <p:nvPr>
-            <p:ph type="sldNum" sz="quarter" idx="12"/>
-          </p:nvPr>
-        </p:nvSpPr>
-        <p:spPr/>
-        <p:txBody>
-          <a:bodyPr/>
-          <a:lstStyle/>
-          <a:p>
-            <a:fld id="{4A609AEB-AA43-4F11-B5F7-17FA2DC3DBF4}" type="slidenum">
-              <a:rPr lang="en-US" smtClean="0"/>
-              <a:t>‹#›</a:t>
-            </a:fld>
-            <a:endParaRPr lang="en-US"/>
-          </a:p>
-        </p:txBody>
-      </p:sp>
     </p:spTree>
-    <p:extLst>
-      <p:ext uri="{BB962C8B-B14F-4D97-AF65-F5344CB8AC3E}">
-        <p14:creationId xmlns:p14="http://schemas.microsoft.com/office/powerpoint/2010/main" val="2860024072"/>
-      </p:ext>
-    </p:extLst>
-  </p:cSld>
-  <p:clrMapOvr>
-    <a:masterClrMapping/>
-  </p:clrMapOvr>
-</p:sldLayout>
-</file>
-
-<file path=ppt/slideLayouts/slideLayout6.xml><?xml version="1.0" encoding="utf-8"?>
-<p:sldLayout xmlns:a="http://schemas.openxmlformats.org/drawingml/2006/main" xmlns:r="http://schemas.openxmlformats.org/officeDocument/2006/relationships" xmlns:p="http://schemas.openxmlformats.org/presentationml/2006/main" type="titleOnly" preserve="1">
-  <p:cSld name="Title Only">
-    <p:spTree>
-      <p:nvGrpSpPr>
-        <p:cNvPr id="1" name=""/>
-        <p:cNvGrpSpPr/>
-        <p:nvPr/>
-      </p:nvGrpSpPr>
-      <p:grpSpPr>
-        <a:xfrm>
-          <a:off x="0" y="0"/>
-          <a:ext cx="0" cy="0"/>
-          <a:chOff x="0" y="0"/>
-          <a:chExt cx="0" cy="0"/>
-        </a:xfrm>
-      </p:grpSpPr>
-      <p:sp>
-        <p:nvSpPr>
-          <p:cNvPr id="2" name="Title 1">
-            <a:extLst>
-              <a:ext uri="{FF2B5EF4-FFF2-40B4-BE49-F238E27FC236}">
-                <a16:creationId xmlns:a16="http://schemas.microsoft.com/office/drawing/2014/main" id="{727EB39A-6D20-4B28-9909-26A1583660E2}"/>
-              </a:ext>
-            </a:extLst>
-          </p:cNvPr>
-          <p:cNvSpPr>
-            <a:spLocks noGrp="1"/>
-          </p:cNvSpPr>
-          <p:nvPr>
-            <p:ph type="title"/>
-          </p:nvPr>
-        </p:nvSpPr>
-        <p:spPr/>
-        <p:txBody>
-          <a:bodyPr/>
-          <a:lstStyle/>
-          <a:p>
-            <a:r>
-              <a:rPr lang="en-US"/>
-              <a:t>Click to edit Master title style</a:t>
-            </a:r>
-          </a:p>
-        </p:txBody>
-      </p:sp>
-      <p:sp>
-        <p:nvSpPr>
-          <p:cNvPr id="3" name="Date Placeholder 2">
-            <a:extLst>
-              <a:ext uri="{FF2B5EF4-FFF2-40B4-BE49-F238E27FC236}">
-                <a16:creationId xmlns:a16="http://schemas.microsoft.com/office/drawing/2014/main" id="{E068DC55-A279-4AE9-AA75-71257015091C}"/>
-              </a:ext>
-            </a:extLst>
-          </p:cNvPr>
-          <p:cNvSpPr>
-            <a:spLocks noGrp="1"/>
-          </p:cNvSpPr>
-          <p:nvPr>
-            <p:ph type="dt" sz="half" idx="10"/>
-          </p:nvPr>
-        </p:nvSpPr>
-        <p:spPr/>
-        <p:txBody>
-          <a:bodyPr/>
-          <a:lstStyle/>
-          <a:p>
-            <a:fld id="{0521A9F5-9A2E-4A0D-A0E4-CDAE472A3387}" type="datetime1">
-              <a:rPr lang="en-US" smtClean="0"/>
-              <a:t>7/11/2018</a:t>
-            </a:fld>
-            <a:endParaRPr lang="en-US"/>
-          </a:p>
-        </p:txBody>
-      </p:sp>
-      <p:sp>
-        <p:nvSpPr>
-          <p:cNvPr id="4" name="Footer Placeholder 3">
-            <a:extLst>
-              <a:ext uri="{FF2B5EF4-FFF2-40B4-BE49-F238E27FC236}">
-                <a16:creationId xmlns:a16="http://schemas.microsoft.com/office/drawing/2014/main" id="{5D08144E-5C57-4567-93F0-99CC457719EA}"/>
-              </a:ext>
-            </a:extLst>
-          </p:cNvPr>
-          <p:cNvSpPr>
-            <a:spLocks noGrp="1"/>
-          </p:cNvSpPr>
-          <p:nvPr>
-            <p:ph type="ftr" sz="quarter" idx="11"/>
-          </p:nvPr>
-        </p:nvSpPr>
-        <p:spPr/>
-        <p:txBody>
-          <a:bodyPr/>
-          <a:lstStyle/>
-          <a:p>
-            <a:endParaRPr lang="en-US"/>
-          </a:p>
-        </p:txBody>
-      </p:sp>
-      <p:sp>
-        <p:nvSpPr>
-          <p:cNvPr id="5" name="Slide Number Placeholder 4">
-            <a:extLst>
-              <a:ext uri="{FF2B5EF4-FFF2-40B4-BE49-F238E27FC236}">
-                <a16:creationId xmlns:a16="http://schemas.microsoft.com/office/drawing/2014/main" id="{931844B3-38EA-46B1-9B16-7C34E23B980F}"/>
-              </a:ext>
-            </a:extLst>
-          </p:cNvPr>
-          <p:cNvSpPr>
-            <a:spLocks noGrp="1"/>
-          </p:cNvSpPr>
-          <p:nvPr>
-            <p:ph type="sldNum" sz="quarter" idx="12"/>
-          </p:nvPr>
-        </p:nvSpPr>
-        <p:spPr/>
-        <p:txBody>
-          <a:bodyPr/>
-          <a:lstStyle/>
-          <a:p>
-            <a:fld id="{4A609AEB-AA43-4F11-B5F7-17FA2DC3DBF4}" type="slidenum">
-              <a:rPr lang="en-US" smtClean="0"/>
-              <a:t>‹#›</a:t>
-            </a:fld>
-            <a:endParaRPr lang="en-US"/>
-          </a:p>
-        </p:txBody>
-      </p:sp>
-    </p:spTree>
-    <p:extLst>
-      <p:ext uri="{BB962C8B-B14F-4D97-AF65-F5344CB8AC3E}">
-        <p14:creationId xmlns:p14="http://schemas.microsoft.com/office/powerpoint/2010/main" val="2879855159"/>
-      </p:ext>
-    </p:extLst>
-  </p:cSld>
-  <p:clrMapOvr>
-    <a:masterClrMapping/>
-  </p:clrMapOvr>
-</p:sldLayout>
-</file>
-
-<file path=ppt/slideLayouts/slideLayout7.xml><?xml version="1.0" encoding="utf-8"?>
-<p:sldLayout xmlns:a="http://schemas.openxmlformats.org/drawingml/2006/main" xmlns:r="http://schemas.openxmlformats.org/officeDocument/2006/relationships" xmlns:p="http://schemas.openxmlformats.org/presentationml/2006/main" type="blank" preserve="1">
-  <p:cSld name="Blank">
-    <p:spTree>
-      <p:nvGrpSpPr>
-        <p:cNvPr id="1" name=""/>
-        <p:cNvGrpSpPr/>
-        <p:nvPr/>
-      </p:nvGrpSpPr>
-      <p:grpSpPr>
-        <a:xfrm>
-          <a:off x="0" y="0"/>
-          <a:ext cx="0" cy="0"/>
-          <a:chOff x="0" y="0"/>
-          <a:chExt cx="0" cy="0"/>
-        </a:xfrm>
-      </p:grpSpPr>
-      <p:sp>
-        <p:nvSpPr>
-          <p:cNvPr id="2" name="Date Placeholder 1">
-            <a:extLst>
-              <a:ext uri="{FF2B5EF4-FFF2-40B4-BE49-F238E27FC236}">
-                <a16:creationId xmlns:a16="http://schemas.microsoft.com/office/drawing/2014/main" id="{1E577A1E-E3DF-467A-AF74-E781C2AD4E94}"/>
-              </a:ext>
-            </a:extLst>
-          </p:cNvPr>
-          <p:cNvSpPr>
-            <a:spLocks noGrp="1"/>
-          </p:cNvSpPr>
-          <p:nvPr>
-            <p:ph type="dt" sz="half" idx="10"/>
-          </p:nvPr>
-        </p:nvSpPr>
-        <p:spPr/>
-        <p:txBody>
-          <a:bodyPr/>
-          <a:lstStyle/>
-          <a:p>
-            <a:fld id="{0BACFB5D-EF54-41AD-B904-FAF8AC56F48E}" type="datetime1">
-              <a:rPr lang="en-US" smtClean="0"/>
-              <a:t>7/11/2018</a:t>
-            </a:fld>
-            <a:endParaRPr lang="en-US"/>
-          </a:p>
-        </p:txBody>
-      </p:sp>
-      <p:sp>
-        <p:nvSpPr>
-          <p:cNvPr id="3" name="Footer Placeholder 2">
-            <a:extLst>
-              <a:ext uri="{FF2B5EF4-FFF2-40B4-BE49-F238E27FC236}">
-                <a16:creationId xmlns:a16="http://schemas.microsoft.com/office/drawing/2014/main" id="{E40B7076-2726-49D6-95FF-84101A7478EB}"/>
-              </a:ext>
-            </a:extLst>
-          </p:cNvPr>
-          <p:cNvSpPr>
-            <a:spLocks noGrp="1"/>
-          </p:cNvSpPr>
-          <p:nvPr>
-            <p:ph type="ftr" sz="quarter" idx="11"/>
-          </p:nvPr>
-        </p:nvSpPr>
-        <p:spPr/>
-        <p:txBody>
-          <a:bodyPr/>
-          <a:lstStyle/>
-          <a:p>
-            <a:endParaRPr lang="en-US"/>
-          </a:p>
-        </p:txBody>
-      </p:sp>
-      <p:sp>
-        <p:nvSpPr>
-          <p:cNvPr id="4" name="Slide Number Placeholder 3">
-            <a:extLst>
-              <a:ext uri="{FF2B5EF4-FFF2-40B4-BE49-F238E27FC236}">
-                <a16:creationId xmlns:a16="http://schemas.microsoft.com/office/drawing/2014/main" id="{F4FBAC04-EE29-4BA7-8DB3-599F7F533070}"/>
-              </a:ext>
-            </a:extLst>
-          </p:cNvPr>
-          <p:cNvSpPr>
-            <a:spLocks noGrp="1"/>
-          </p:cNvSpPr>
-          <p:nvPr>
-            <p:ph type="sldNum" sz="quarter" idx="12"/>
-          </p:nvPr>
-        </p:nvSpPr>
-        <p:spPr/>
-        <p:txBody>
-          <a:bodyPr/>
-          <a:lstStyle/>
-          <a:p>
-            <a:fld id="{4A609AEB-AA43-4F11-B5F7-17FA2DC3DBF4}" type="slidenum">
-              <a:rPr lang="en-US" smtClean="0"/>
-              <a:t>‹#›</a:t>
-            </a:fld>
-            <a:endParaRPr lang="en-US"/>
-          </a:p>
-        </p:txBody>
-      </p:sp>
-    </p:spTree>
-    <p:extLst>
-      <p:ext uri="{BB962C8B-B14F-4D97-AF65-F5344CB8AC3E}">
-        <p14:creationId xmlns:p14="http://schemas.microsoft.com/office/powerpoint/2010/main" val="2767177365"/>
-      </p:ext>
-    </p:extLst>
-  </p:cSld>
-  <p:clrMapOvr>
-    <a:masterClrMapping/>
-  </p:clrMapOvr>
-</p:sldLayout>
-</file>
-
-<file path=ppt/slideLayouts/slideLayout8.xml><?xml version="1.0" encoding="utf-8"?>
-<p:sldLayout xmlns:a="http://schemas.openxmlformats.org/drawingml/2006/main" xmlns:r="http://schemas.openxmlformats.org/officeDocument/2006/relationships" xmlns:p="http://schemas.openxmlformats.org/presentationml/2006/main" type="objTx" preserve="1">
-  <p:cSld name="Content with Caption">
-    <p:spTree>
-      <p:nvGrpSpPr>
-        <p:cNvPr id="1" name=""/>
-        <p:cNvGrpSpPr/>
-        <p:nvPr/>
-      </p:nvGrpSpPr>
-      <p:grpSpPr>
-        <a:xfrm>
-          <a:off x="0" y="0"/>
-          <a:ext cx="0" cy="0"/>
-          <a:chOff x="0" y="0"/>
-          <a:chExt cx="0" cy="0"/>
-        </a:xfrm>
-      </p:grpSpPr>
-      <p:sp>
-        <p:nvSpPr>
-          <p:cNvPr id="2" name="Title 1">
-            <a:extLst>
-              <a:ext uri="{FF2B5EF4-FFF2-40B4-BE49-F238E27FC236}">
-                <a16:creationId xmlns:a16="http://schemas.microsoft.com/office/drawing/2014/main" id="{9062023E-ED63-44FE-A6BE-043E94CDB83B}"/>
-              </a:ext>
-            </a:extLst>
-          </p:cNvPr>
-          <p:cNvSpPr>
-            <a:spLocks noGrp="1"/>
-          </p:cNvSpPr>
-          <p:nvPr>
-            <p:ph type="title"/>
-          </p:nvPr>
-        </p:nvSpPr>
-        <p:spPr>
-          <a:xfrm>
-            <a:off x="839788" y="457200"/>
-            <a:ext cx="3932237" cy="1600200"/>
-          </a:xfrm>
-        </p:spPr>
-        <p:txBody>
-          <a:bodyPr anchor="b"/>
-          <a:lstStyle>
-            <a:lvl1pPr>
-              <a:defRPr sz="3200"/>
-            </a:lvl1pPr>
-          </a:lstStyle>
-          <a:p>
-            <a:r>
-              <a:rPr lang="en-US"/>
-              <a:t>Click to edit Master title style</a:t>
-            </a:r>
-          </a:p>
-        </p:txBody>
-      </p:sp>
-      <p:sp>
-        <p:nvSpPr>
-          <p:cNvPr id="3" name="Content Placeholder 2">
-            <a:extLst>
-              <a:ext uri="{FF2B5EF4-FFF2-40B4-BE49-F238E27FC236}">
-                <a16:creationId xmlns:a16="http://schemas.microsoft.com/office/drawing/2014/main" id="{909C7CE4-5779-4481-9F53-B3030AB7ACE4}"/>
-              </a:ext>
-            </a:extLst>
-          </p:cNvPr>
-          <p:cNvSpPr>
-            <a:spLocks noGrp="1"/>
-          </p:cNvSpPr>
-          <p:nvPr>
-            <p:ph idx="1"/>
-          </p:nvPr>
-        </p:nvSpPr>
-        <p:spPr>
-          <a:xfrm>
-            <a:off x="5183188" y="987425"/>
-            <a:ext cx="6172200" cy="4873625"/>
-          </a:xfrm>
-        </p:spPr>
-        <p:txBody>
-          <a:bodyPr/>
-          <a:lstStyle>
-            <a:lvl1pPr>
-              <a:defRPr sz="3200"/>
-            </a:lvl1pPr>
-            <a:lvl2pPr>
-              <a:defRPr sz="2800"/>
-            </a:lvl2pPr>
-            <a:lvl3pPr>
-              <a:defRPr sz="2400"/>
-            </a:lvl3pPr>
-            <a:lvl4pPr>
-              <a:defRPr sz="2000"/>
-            </a:lvl4pPr>
-            <a:lvl5pPr>
-              <a:defRPr sz="2000"/>
-            </a:lvl5pPr>
-            <a:lvl6pPr>
-              <a:defRPr sz="2000"/>
-            </a:lvl6pPr>
-            <a:lvl7pPr>
-              <a:defRPr sz="2000"/>
-            </a:lvl7pPr>
-            <a:lvl8pPr>
-              <a:defRPr sz="2000"/>
-            </a:lvl8pPr>
-            <a:lvl9pPr>
-              <a:defRPr sz="2000"/>
-            </a:lvl9pPr>
-          </a:lstStyle>
-          <a:p>
-            <a:pPr lvl="0"/>
-            <a:r>
-              <a:rPr lang="en-US"/>
-              <a:t>Edit Master text styles</a:t>
-            </a:r>
-          </a:p>
-          <a:p>
-            <a:pPr lvl="1"/>
-            <a:r>
-              <a:rPr lang="en-US"/>
-              <a:t>Second level</a:t>
-            </a:r>
-          </a:p>
-          <a:p>
-            <a:pPr lvl="2"/>
-            <a:r>
-              <a:rPr lang="en-US"/>
-              <a:t>Third level</a:t>
-            </a:r>
-          </a:p>
-          <a:p>
-            <a:pPr lvl="3"/>
-            <a:r>
-              <a:rPr lang="en-US"/>
-              <a:t>Fourth level</a:t>
-            </a:r>
-          </a:p>
-          <a:p>
-            <a:pPr lvl="4"/>
-            <a:r>
-              <a:rPr lang="en-US"/>
-              <a:t>Fifth level</a:t>
-            </a:r>
-          </a:p>
-        </p:txBody>
-      </p:sp>
-      <p:sp>
-        <p:nvSpPr>
-          <p:cNvPr id="4" name="Text Placeholder 3">
-            <a:extLst>
-              <a:ext uri="{FF2B5EF4-FFF2-40B4-BE49-F238E27FC236}">
-                <a16:creationId xmlns:a16="http://schemas.microsoft.com/office/drawing/2014/main" id="{68D4C846-28DF-482C-9979-00B95F6770C7}"/>
-              </a:ext>
-            </a:extLst>
-          </p:cNvPr>
-          <p:cNvSpPr>
-            <a:spLocks noGrp="1"/>
-          </p:cNvSpPr>
-          <p:nvPr>
-            <p:ph type="body" sz="half" idx="2"/>
-          </p:nvPr>
-        </p:nvSpPr>
-        <p:spPr>
-          <a:xfrm>
-            <a:off x="839788" y="2057400"/>
-            <a:ext cx="3932237" cy="3811588"/>
-          </a:xfrm>
-        </p:spPr>
-        <p:txBody>
-          <a:bodyPr/>
-          <a:lstStyle>
-            <a:lvl1pPr marL="0" indent="0">
-              <a:buNone/>
-              <a:defRPr sz="1600"/>
-            </a:lvl1pPr>
-            <a:lvl2pPr marL="457200" indent="0">
-              <a:buNone/>
-              <a:defRPr sz="1400"/>
-            </a:lvl2pPr>
-            <a:lvl3pPr marL="914400" indent="0">
-              <a:buNone/>
-              <a:defRPr sz="1200"/>
-            </a:lvl3pPr>
-            <a:lvl4pPr marL="1371600" indent="0">
-              <a:buNone/>
-              <a:defRPr sz="1000"/>
-            </a:lvl4pPr>
-            <a:lvl5pPr marL="1828800" indent="0">
-              <a:buNone/>
-              <a:defRPr sz="1000"/>
-            </a:lvl5pPr>
-            <a:lvl6pPr marL="2286000" indent="0">
-              <a:buNone/>
-              <a:defRPr sz="1000"/>
-            </a:lvl6pPr>
-            <a:lvl7pPr marL="2743200" indent="0">
-              <a:buNone/>
-              <a:defRPr sz="1000"/>
-            </a:lvl7pPr>
-            <a:lvl8pPr marL="3200400" indent="0">
-              <a:buNone/>
-              <a:defRPr sz="1000"/>
-            </a:lvl8pPr>
-            <a:lvl9pPr marL="3657600" indent="0">
-              <a:buNone/>
-              <a:defRPr sz="1000"/>
-            </a:lvl9pPr>
-          </a:lstStyle>
-          <a:p>
-            <a:pPr lvl="0"/>
-            <a:r>
-              <a:rPr lang="en-US"/>
-              <a:t>Edit Master text styles</a:t>
-            </a:r>
-          </a:p>
-        </p:txBody>
-      </p:sp>
-      <p:sp>
-        <p:nvSpPr>
-          <p:cNvPr id="5" name="Date Placeholder 4">
-            <a:extLst>
-              <a:ext uri="{FF2B5EF4-FFF2-40B4-BE49-F238E27FC236}">
-                <a16:creationId xmlns:a16="http://schemas.microsoft.com/office/drawing/2014/main" id="{FB71DF86-F948-4353-AE29-FC755297F10E}"/>
-              </a:ext>
-            </a:extLst>
-          </p:cNvPr>
-          <p:cNvSpPr>
-            <a:spLocks noGrp="1"/>
-          </p:cNvSpPr>
-          <p:nvPr>
-            <p:ph type="dt" sz="half" idx="10"/>
-          </p:nvPr>
-        </p:nvSpPr>
-        <p:spPr/>
-        <p:txBody>
-          <a:bodyPr/>
-          <a:lstStyle/>
-          <a:p>
-            <a:fld id="{A618EAB8-8374-4DE9-BAF7-85289176D288}" type="datetime1">
-              <a:rPr lang="en-US" smtClean="0"/>
-              <a:t>7/11/2018</a:t>
-            </a:fld>
-            <a:endParaRPr lang="en-US"/>
-          </a:p>
-        </p:txBody>
-      </p:sp>
-      <p:sp>
-        <p:nvSpPr>
-          <p:cNvPr id="6" name="Footer Placeholder 5">
-            <a:extLst>
-              <a:ext uri="{FF2B5EF4-FFF2-40B4-BE49-F238E27FC236}">
-                <a16:creationId xmlns:a16="http://schemas.microsoft.com/office/drawing/2014/main" id="{6E712643-1C7B-43C2-BBA4-FD5550F9A156}"/>
-              </a:ext>
-            </a:extLst>
-          </p:cNvPr>
-          <p:cNvSpPr>
-            <a:spLocks noGrp="1"/>
-          </p:cNvSpPr>
-          <p:nvPr>
-            <p:ph type="ftr" sz="quarter" idx="11"/>
-          </p:nvPr>
-        </p:nvSpPr>
-        <p:spPr/>
-        <p:txBody>
-          <a:bodyPr/>
-          <a:lstStyle/>
-          <a:p>
-            <a:endParaRPr lang="en-US"/>
-          </a:p>
-        </p:txBody>
-      </p:sp>
-      <p:sp>
-        <p:nvSpPr>
-          <p:cNvPr id="7" name="Slide Number Placeholder 6">
-            <a:extLst>
-              <a:ext uri="{FF2B5EF4-FFF2-40B4-BE49-F238E27FC236}">
-                <a16:creationId xmlns:a16="http://schemas.microsoft.com/office/drawing/2014/main" id="{82016D7F-D125-4E83-A94B-170F9FBF88BF}"/>
-              </a:ext>
-            </a:extLst>
-          </p:cNvPr>
-          <p:cNvSpPr>
-            <a:spLocks noGrp="1"/>
-          </p:cNvSpPr>
-          <p:nvPr>
-            <p:ph type="sldNum" sz="quarter" idx="12"/>
-          </p:nvPr>
-        </p:nvSpPr>
-        <p:spPr/>
-        <p:txBody>
-          <a:bodyPr/>
-          <a:lstStyle/>
-          <a:p>
-            <a:fld id="{4A609AEB-AA43-4F11-B5F7-17FA2DC3DBF4}" type="slidenum">
-              <a:rPr lang="en-US" smtClean="0"/>
-              <a:t>‹#›</a:t>
-            </a:fld>
-            <a:endParaRPr lang="en-US"/>
-          </a:p>
-        </p:txBody>
-      </p:sp>
-    </p:spTree>
-    <p:extLst>
-      <p:ext uri="{BB962C8B-B14F-4D97-AF65-F5344CB8AC3E}">
-        <p14:creationId xmlns:p14="http://schemas.microsoft.com/office/powerpoint/2010/main" val="1982412525"/>
-      </p:ext>
-    </p:extLst>
-  </p:cSld>
-  <p:clrMapOvr>
-    <a:masterClrMapping/>
-  </p:clrMapOvr>
-</p:sldLayout>
-</file>
-
-<file path=ppt/slideLayouts/slideLayout9.xml><?xml version="1.0" encoding="utf-8"?>
-<p:sldLayout xmlns:a="http://schemas.openxmlformats.org/drawingml/2006/main" xmlns:r="http://schemas.openxmlformats.org/officeDocument/2006/relationships" xmlns:p="http://schemas.openxmlformats.org/presentationml/2006/main" type="picTx" preserve="1">
-  <p:cSld name="Picture with Caption">
-    <p:spTree>
-      <p:nvGrpSpPr>
-        <p:cNvPr id="1" name=""/>
-        <p:cNvGrpSpPr/>
-        <p:nvPr/>
-      </p:nvGrpSpPr>
-      <p:grpSpPr>
-        <a:xfrm>
-          <a:off x="0" y="0"/>
-          <a:ext cx="0" cy="0"/>
-          <a:chOff x="0" y="0"/>
-          <a:chExt cx="0" cy="0"/>
-        </a:xfrm>
-      </p:grpSpPr>
-      <p:sp>
-        <p:nvSpPr>
-          <p:cNvPr id="2" name="Title 1">
-            <a:extLst>
-              <a:ext uri="{FF2B5EF4-FFF2-40B4-BE49-F238E27FC236}">
-                <a16:creationId xmlns:a16="http://schemas.microsoft.com/office/drawing/2014/main" id="{425F26F8-E410-4A03-A060-A7142E18C53B}"/>
-              </a:ext>
-            </a:extLst>
-          </p:cNvPr>
-          <p:cNvSpPr>
-            <a:spLocks noGrp="1"/>
-          </p:cNvSpPr>
-          <p:nvPr>
-            <p:ph type="title"/>
-          </p:nvPr>
-        </p:nvSpPr>
-        <p:spPr>
-          <a:xfrm>
-            <a:off x="839788" y="457200"/>
-            <a:ext cx="3932237" cy="1600200"/>
-          </a:xfrm>
-        </p:spPr>
-        <p:txBody>
-          <a:bodyPr anchor="b"/>
-          <a:lstStyle>
-            <a:lvl1pPr>
-              <a:defRPr sz="3200"/>
-            </a:lvl1pPr>
-          </a:lstStyle>
-          <a:p>
-            <a:r>
-              <a:rPr lang="en-US"/>
-              <a:t>Click to edit Master title style</a:t>
-            </a:r>
-          </a:p>
-        </p:txBody>
-      </p:sp>
-      <p:sp>
-        <p:nvSpPr>
-          <p:cNvPr id="3" name="Picture Placeholder 2">
-            <a:extLst>
-              <a:ext uri="{FF2B5EF4-FFF2-40B4-BE49-F238E27FC236}">
-                <a16:creationId xmlns:a16="http://schemas.microsoft.com/office/drawing/2014/main" id="{A4A847D7-3B50-41AC-AEE7-C08F4DF906AD}"/>
-              </a:ext>
-            </a:extLst>
-          </p:cNvPr>
-          <p:cNvSpPr>
-            <a:spLocks noGrp="1"/>
-          </p:cNvSpPr>
-          <p:nvPr>
-            <p:ph type="pic" idx="1"/>
-          </p:nvPr>
-        </p:nvSpPr>
-        <p:spPr>
-          <a:xfrm>
-            <a:off x="5183188" y="987425"/>
-            <a:ext cx="6172200" cy="4873625"/>
-          </a:xfrm>
-        </p:spPr>
-        <p:txBody>
-          <a:bodyPr/>
-          <a:lstStyle>
-            <a:lvl1pPr marL="0" indent="0">
-              <a:buNone/>
-              <a:defRPr sz="3200"/>
-            </a:lvl1pPr>
-            <a:lvl2pPr marL="457200" indent="0">
-              <a:buNone/>
-              <a:defRPr sz="2800"/>
-            </a:lvl2pPr>
-            <a:lvl3pPr marL="914400" indent="0">
-              <a:buNone/>
-              <a:defRPr sz="2400"/>
-            </a:lvl3pPr>
-            <a:lvl4pPr marL="1371600" indent="0">
-              <a:buNone/>
-              <a:defRPr sz="2000"/>
-            </a:lvl4pPr>
-            <a:lvl5pPr marL="1828800" indent="0">
-              <a:buNone/>
-              <a:defRPr sz="2000"/>
-            </a:lvl5pPr>
-            <a:lvl6pPr marL="2286000" indent="0">
-              <a:buNone/>
-              <a:defRPr sz="2000"/>
-            </a:lvl6pPr>
-            <a:lvl7pPr marL="2743200" indent="0">
-              <a:buNone/>
-              <a:defRPr sz="2000"/>
-            </a:lvl7pPr>
-            <a:lvl8pPr marL="3200400" indent="0">
-              <a:buNone/>
-              <a:defRPr sz="2000"/>
-            </a:lvl8pPr>
-            <a:lvl9pPr marL="3657600" indent="0">
-              <a:buNone/>
-              <a:defRPr sz="2000"/>
-            </a:lvl9pPr>
-          </a:lstStyle>
-          <a:p>
-            <a:endParaRPr lang="en-US"/>
-          </a:p>
-        </p:txBody>
-      </p:sp>
-      <p:sp>
-        <p:nvSpPr>
-          <p:cNvPr id="4" name="Text Placeholder 3">
-            <a:extLst>
-              <a:ext uri="{FF2B5EF4-FFF2-40B4-BE49-F238E27FC236}">
-                <a16:creationId xmlns:a16="http://schemas.microsoft.com/office/drawing/2014/main" id="{486B3B23-5CDC-4028-A421-1E0B977E4223}"/>
-              </a:ext>
-            </a:extLst>
-          </p:cNvPr>
-          <p:cNvSpPr>
-            <a:spLocks noGrp="1"/>
-          </p:cNvSpPr>
-          <p:nvPr>
-            <p:ph type="body" sz="half" idx="2"/>
-          </p:nvPr>
-        </p:nvSpPr>
-        <p:spPr>
-          <a:xfrm>
-            <a:off x="839788" y="2057400"/>
-            <a:ext cx="3932237" cy="3811588"/>
-          </a:xfrm>
-        </p:spPr>
-        <p:txBody>
-          <a:bodyPr/>
-          <a:lstStyle>
-            <a:lvl1pPr marL="0" indent="0">
-              <a:buNone/>
-              <a:defRPr sz="1600"/>
-            </a:lvl1pPr>
-            <a:lvl2pPr marL="457200" indent="0">
-              <a:buNone/>
-              <a:defRPr sz="1400"/>
-            </a:lvl2pPr>
-            <a:lvl3pPr marL="914400" indent="0">
-              <a:buNone/>
-              <a:defRPr sz="1200"/>
-            </a:lvl3pPr>
-            <a:lvl4pPr marL="1371600" indent="0">
-              <a:buNone/>
-              <a:defRPr sz="1000"/>
-            </a:lvl4pPr>
-            <a:lvl5pPr marL="1828800" indent="0">
-              <a:buNone/>
-              <a:defRPr sz="1000"/>
-            </a:lvl5pPr>
-            <a:lvl6pPr marL="2286000" indent="0">
-              <a:buNone/>
-              <a:defRPr sz="1000"/>
-            </a:lvl6pPr>
-            <a:lvl7pPr marL="2743200" indent="0">
-              <a:buNone/>
-              <a:defRPr sz="1000"/>
-            </a:lvl7pPr>
-            <a:lvl8pPr marL="3200400" indent="0">
-              <a:buNone/>
-              <a:defRPr sz="1000"/>
-            </a:lvl8pPr>
-            <a:lvl9pPr marL="3657600" indent="0">
-              <a:buNone/>
-              <a:defRPr sz="1000"/>
-            </a:lvl9pPr>
-          </a:lstStyle>
-          <a:p>
-            <a:pPr lvl="0"/>
-            <a:r>
-              <a:rPr lang="en-US"/>
-              <a:t>Edit Master text styles</a:t>
-            </a:r>
-          </a:p>
-        </p:txBody>
-      </p:sp>
-      <p:sp>
-        <p:nvSpPr>
-          <p:cNvPr id="5" name="Date Placeholder 4">
-            <a:extLst>
-              <a:ext uri="{FF2B5EF4-FFF2-40B4-BE49-F238E27FC236}">
-                <a16:creationId xmlns:a16="http://schemas.microsoft.com/office/drawing/2014/main" id="{0591AFB5-E6E0-4BBC-BE89-2F6561DAE8A7}"/>
-              </a:ext>
-            </a:extLst>
-          </p:cNvPr>
-          <p:cNvSpPr>
-            <a:spLocks noGrp="1"/>
-          </p:cNvSpPr>
-          <p:nvPr>
-            <p:ph type="dt" sz="half" idx="10"/>
-          </p:nvPr>
-        </p:nvSpPr>
-        <p:spPr/>
-        <p:txBody>
-          <a:bodyPr/>
-          <a:lstStyle/>
-          <a:p>
-            <a:fld id="{C1D112B1-9D8F-4BFC-A707-35D03684B2CB}" type="datetime1">
-              <a:rPr lang="en-US" smtClean="0"/>
-              <a:t>7/11/2018</a:t>
-            </a:fld>
-            <a:endParaRPr lang="en-US"/>
-          </a:p>
-        </p:txBody>
-      </p:sp>
-      <p:sp>
-        <p:nvSpPr>
-          <p:cNvPr id="6" name="Footer Placeholder 5">
-            <a:extLst>
-              <a:ext uri="{FF2B5EF4-FFF2-40B4-BE49-F238E27FC236}">
-                <a16:creationId xmlns:a16="http://schemas.microsoft.com/office/drawing/2014/main" id="{8CC96EB3-EDA8-4597-8A91-B59B9EAB3B3A}"/>
-              </a:ext>
-            </a:extLst>
-          </p:cNvPr>
-          <p:cNvSpPr>
-            <a:spLocks noGrp="1"/>
-          </p:cNvSpPr>
-          <p:nvPr>
-            <p:ph type="ftr" sz="quarter" idx="11"/>
-          </p:nvPr>
-        </p:nvSpPr>
-        <p:spPr/>
-        <p:txBody>
-          <a:bodyPr/>
-          <a:lstStyle/>
-          <a:p>
-            <a:endParaRPr lang="en-US"/>
-          </a:p>
-        </p:txBody>
-      </p:sp>
-      <p:sp>
-        <p:nvSpPr>
-          <p:cNvPr id="7" name="Slide Number Placeholder 6">
-            <a:extLst>
-              <a:ext uri="{FF2B5EF4-FFF2-40B4-BE49-F238E27FC236}">
-                <a16:creationId xmlns:a16="http://schemas.microsoft.com/office/drawing/2014/main" id="{3E256C97-6DB1-4673-B8CB-D030E00D1F27}"/>
-              </a:ext>
-            </a:extLst>
-          </p:cNvPr>
-          <p:cNvSpPr>
-            <a:spLocks noGrp="1"/>
-          </p:cNvSpPr>
-          <p:nvPr>
-            <p:ph type="sldNum" sz="quarter" idx="12"/>
-          </p:nvPr>
-        </p:nvSpPr>
-        <p:spPr/>
-        <p:txBody>
-          <a:bodyPr/>
-          <a:lstStyle/>
-          <a:p>
-            <a:fld id="{4A609AEB-AA43-4F11-B5F7-17FA2DC3DBF4}" type="slidenum">
-              <a:rPr lang="en-US" smtClean="0"/>
-              <a:t>‹#›</a:t>
-            </a:fld>
-            <a:endParaRPr lang="en-US"/>
-          </a:p>
-        </p:txBody>
-      </p:sp>
-    </p:spTree>
-    <p:extLst>
-      <p:ext uri="{BB962C8B-B14F-4D97-AF65-F5344CB8AC3E}">
-        <p14:creationId xmlns:p14="http://schemas.microsoft.com/office/powerpoint/2010/main" val="1653958388"/>
-      </p:ext>
-    </p:extLst>
   </p:cSld>
   <p:clrMapOvr>
     <a:masterClrMapping/>
@@ -3095,11 +3749,14 @@
 
 <file path=ppt/slideMasters/slideMaster1.xml><?xml version="1.0" encoding="utf-8"?>
 <p:sldMaster xmlns:a="http://schemas.openxmlformats.org/drawingml/2006/main" xmlns:r="http://schemas.openxmlformats.org/officeDocument/2006/relationships" xmlns:p="http://schemas.openxmlformats.org/presentationml/2006/main">
-  <p:cSld>
+  <p:cSld name="WVU DSPIRA">
     <p:bg>
-      <p:bgRef idx="1001">
-        <a:schemeClr val="bg1"/>
-      </p:bgRef>
+      <p:bgPr>
+        <a:solidFill>
+          <a:srgbClr val="FFFFFF"/>
+        </a:solidFill>
+        <a:effectLst/>
+      </p:bgPr>
     </p:bg>
     <p:spTree>
       <p:nvGrpSpPr>
@@ -3117,268 +3774,311 @@
       </p:grpSpPr>
       <p:sp>
         <p:nvSpPr>
-          <p:cNvPr id="2" name="Title Placeholder 1">
+          <p:cNvPr id="7" name="WVU navy banner">
             <a:extLst>
               <a:ext uri="{FF2B5EF4-FFF2-40B4-BE49-F238E27FC236}">
-                <a16:creationId xmlns:a16="http://schemas.microsoft.com/office/drawing/2014/main" id="{E7E191BB-ED63-4541-97E8-BEE79ECAF9E8}"/>
+                <a16:creationId xmlns:a16="http://schemas.microsoft.com/office/drawing/2014/main" id="{6D4F5CCA-FF43-4F29-8399-ACE93C08BCE7}"/>
               </a:ext>
             </a:extLst>
           </p:cNvPr>
           <p:cNvSpPr>
             <a:spLocks noGrp="1"/>
           </p:cNvSpPr>
-          <p:nvPr>
-            <p:ph type="title"/>
-          </p:nvPr>
+          <p:nvPr/>
         </p:nvSpPr>
         <p:spPr>
           <a:xfrm>
-            <a:off x="838200" y="365125"/>
-            <a:ext cx="10515600" cy="1325563"/>
+            <a:off x="0" y="0"/>
+            <a:ext cx="12192000" cy="552450"/>
           </a:xfrm>
           <a:prstGeom prst="rect">
             <a:avLst/>
           </a:prstGeom>
+          <a:solidFill>
+            <a:srgbClr val="002855"/>
+          </a:solidFill>
+          <a:ln w="0">
+            <a:noFill/>
+          </a:ln>
+        </p:spPr>
+      </p:sp>
+      <p:sp>
+        <p:nvSpPr>
+          <p:cNvPr id="2" name="WVU gold rule">
+            <a:extLst>
+              <a:ext uri="{FF2B5EF4-FFF2-40B4-BE49-F238E27FC236}">
+                <a16:creationId xmlns:a16="http://schemas.microsoft.com/office/drawing/2014/main" id="{B7F9BFBD-7E36-451D-96E5-BC2ED296FC2E}"/>
+              </a:ext>
+            </a:extLst>
+          </p:cNvPr>
+          <p:cNvSpPr>
+            <a:spLocks noGrp="1"/>
+          </p:cNvSpPr>
+          <p:nvPr/>
+        </p:nvSpPr>
+        <p:spPr>
+          <a:xfrm>
+            <a:off x="0" y="552450"/>
+            <a:ext cx="12192000" cy="38100"/>
+          </a:xfrm>
+          <a:prstGeom prst="rect">
+            <a:avLst/>
+          </a:prstGeom>
+          <a:solidFill>
+            <a:srgbClr val="EEAA00"/>
+          </a:solidFill>
+          <a:ln w="0">
+            <a:noFill/>
+          </a:ln>
+        </p:spPr>
+      </p:sp>
+      <p:sp>
+        <p:nvSpPr>
+          <p:cNvPr id="3" name="WVU DSPIRA brand">
+            <a:extLst>
+              <a:ext uri="{FF2B5EF4-FFF2-40B4-BE49-F238E27FC236}">
+                <a16:creationId xmlns:a16="http://schemas.microsoft.com/office/drawing/2014/main" id="{81DC7FEE-6B94-4036-9AF5-8A342A05842A}"/>
+              </a:ext>
+            </a:extLst>
+          </p:cNvPr>
+          <p:cNvSpPr>
+            <a:spLocks noGrp="1"/>
+          </p:cNvSpPr>
+          <p:nvPr/>
+        </p:nvSpPr>
+        <p:spPr>
+          <a:xfrm>
+            <a:off x="457200" y="76200"/>
+            <a:ext cx="3810000" cy="400050"/>
+          </a:xfrm>
+          <a:prstGeom prst="rect">
+            <a:avLst/>
+          </a:prstGeom>
+          <a:noFill/>
+          <a:ln w="0">
+            <a:noFill/>
+          </a:ln>
         </p:spPr>
         <p:txBody>
-          <a:bodyPr vert="horz" lIns="91440" tIns="45720" rIns="91440" bIns="45720" rtlCol="0" anchor="ctr">
-            <a:normAutofit/>
+          <a:bodyPr lIns="0" tIns="0" rIns="0" bIns="0">
+            <a:noAutofit/>
           </a:bodyPr>
           <a:lstStyle/>
           <a:p>
+            <a:pPr algn="l">
+              <a:defRPr sz="2100" b="1">
+                <a:solidFill>
+                  <a:srgbClr val="FFFFFF"/>
+                </a:solidFill>
+                <a:latin typeface="Arial"/>
+                <a:ea typeface="Arial"/>
+                <a:cs typeface="Arial"/>
+              </a:defRPr>
+            </a:pPr>
             <a:r>
-              <a:rPr lang="en-US"/>
-              <a:t>Click to edit Master title style</a:t>
+              <a:rPr sz="2100" b="1">
+                <a:solidFill>
+                  <a:srgbClr val="FFFFFF"/>
+                </a:solidFill>
+                <a:latin typeface="Arial"/>
+                <a:ea typeface="Arial"/>
+                <a:cs typeface="Arial"/>
+              </a:rPr>
+              <a:t>WVU DSPIRA</a:t>
             </a:r>
           </a:p>
         </p:txBody>
       </p:sp>
       <p:sp>
         <p:nvSpPr>
-          <p:cNvPr id="3" name="Text Placeholder 2">
+          <p:cNvPr id="4" name="University name">
             <a:extLst>
               <a:ext uri="{FF2B5EF4-FFF2-40B4-BE49-F238E27FC236}">
-                <a16:creationId xmlns:a16="http://schemas.microsoft.com/office/drawing/2014/main" id="{0497406A-0C73-4529-8A3D-59D2C44D17D9}"/>
+                <a16:creationId xmlns:a16="http://schemas.microsoft.com/office/drawing/2014/main" id="{86DE04A2-939A-456D-B0E1-0BD64EC5EF56}"/>
               </a:ext>
             </a:extLst>
           </p:cNvPr>
           <p:cNvSpPr>
             <a:spLocks noGrp="1"/>
           </p:cNvSpPr>
-          <p:nvPr>
-            <p:ph type="body" idx="1"/>
-          </p:nvPr>
+          <p:nvPr/>
         </p:nvSpPr>
         <p:spPr>
           <a:xfrm>
-            <a:off x="838200" y="1825625"/>
-            <a:ext cx="10515600" cy="4351338"/>
+            <a:off x="7715250" y="161925"/>
+            <a:ext cx="4019550" cy="304800"/>
           </a:xfrm>
           <a:prstGeom prst="rect">
             <a:avLst/>
           </a:prstGeom>
+          <a:noFill/>
+          <a:ln w="0">
+            <a:noFill/>
+          </a:ln>
         </p:spPr>
         <p:txBody>
-          <a:bodyPr vert="horz" lIns="91440" tIns="45720" rIns="91440" bIns="45720" rtlCol="0">
-            <a:normAutofit/>
+          <a:bodyPr lIns="0" tIns="0" rIns="0" bIns="0">
+            <a:noAutofit/>
           </a:bodyPr>
           <a:lstStyle/>
           <a:p>
-            <a:pPr lvl="0"/>
+            <a:pPr algn="r">
+              <a:defRPr sz="1350" b="0">
+                <a:solidFill>
+                  <a:srgbClr val="FFFFFF"/>
+                </a:solidFill>
+                <a:latin typeface="Arial"/>
+                <a:ea typeface="Arial"/>
+                <a:cs typeface="Arial"/>
+              </a:defRPr>
+            </a:pPr>
             <a:r>
-              <a:rPr lang="en-US"/>
-              <a:t>Edit Master text styles</a:t>
-            </a:r>
-          </a:p>
-          <a:p>
-            <a:pPr lvl="1"/>
-            <a:r>
-              <a:rPr lang="en-US"/>
-              <a:t>Second level</a:t>
-            </a:r>
-          </a:p>
-          <a:p>
-            <a:pPr lvl="2"/>
-            <a:r>
-              <a:rPr lang="en-US"/>
-              <a:t>Third level</a:t>
-            </a:r>
-          </a:p>
-          <a:p>
-            <a:pPr lvl="3"/>
-            <a:r>
-              <a:rPr lang="en-US"/>
-              <a:t>Fourth level</a:t>
-            </a:r>
-          </a:p>
-          <a:p>
-            <a:pPr lvl="4"/>
-            <a:r>
-              <a:rPr lang="en-US"/>
-              <a:t>Fifth level</a:t>
+              <a:rPr sz="1350" b="0">
+                <a:solidFill>
+                  <a:srgbClr val="FFFFFF"/>
+                </a:solidFill>
+                <a:latin typeface="Arial"/>
+                <a:ea typeface="Arial"/>
+                <a:cs typeface="Arial"/>
+              </a:rPr>
+              <a:t>WEST VIRGINIA UNIVERSITY</a:t>
             </a:r>
           </a:p>
         </p:txBody>
       </p:sp>
       <p:sp>
         <p:nvSpPr>
-          <p:cNvPr id="4" name="Date Placeholder 3">
+          <p:cNvPr id="5" name="Website">
             <a:extLst>
               <a:ext uri="{FF2B5EF4-FFF2-40B4-BE49-F238E27FC236}">
-                <a16:creationId xmlns:a16="http://schemas.microsoft.com/office/drawing/2014/main" id="{3A24E65C-07B0-4AFA-AB0D-46F78D396733}"/>
+                <a16:creationId xmlns:a16="http://schemas.microsoft.com/office/drawing/2014/main" id="{1895C86C-2B15-4605-AD65-E205FDC66179}"/>
               </a:ext>
             </a:extLst>
           </p:cNvPr>
           <p:cNvSpPr>
             <a:spLocks noGrp="1"/>
           </p:cNvSpPr>
-          <p:nvPr>
-            <p:ph type="dt" sz="half" idx="2"/>
-          </p:nvPr>
+          <p:nvPr/>
         </p:nvSpPr>
         <p:spPr>
           <a:xfrm>
-            <a:off x="838200" y="6356350"/>
-            <a:ext cx="2743200" cy="365125"/>
+            <a:off x="457200" y="6372225"/>
+            <a:ext cx="4095750" cy="285750"/>
           </a:xfrm>
           <a:prstGeom prst="rect">
             <a:avLst/>
           </a:prstGeom>
+          <a:noFill/>
+          <a:ln w="0">
+            <a:noFill/>
+          </a:ln>
         </p:spPr>
         <p:txBody>
-          <a:bodyPr vert="horz" lIns="91440" tIns="45720" rIns="91440" bIns="45720" rtlCol="0" anchor="ctr"/>
-          <a:lstStyle>
-            <a:lvl1pPr algn="l">
-              <a:defRPr sz="1200">
-                <a:solidFill>
-                  <a:schemeClr val="tx1">
-                    <a:tint val="75000"/>
-                  </a:schemeClr>
-                </a:solidFill>
-              </a:defRPr>
-            </a:lvl1pPr>
-          </a:lstStyle>
+          <a:bodyPr lIns="0" tIns="0" rIns="0" bIns="0">
+            <a:noAutofit/>
+          </a:bodyPr>
+          <a:lstStyle/>
           <a:p>
-            <a:fld id="{23D2AA0B-8EBA-449A-A177-8B12438CBDB6}" type="datetime1">
-              <a:rPr lang="en-US" smtClean="0"/>
-              <a:t>7/11/2018</a:t>
-            </a:fld>
-            <a:endParaRPr lang="en-US"/>
+            <a:pPr algn="l">
+              <a:defRPr sz="1200" b="0">
+                <a:solidFill>
+                  <a:srgbClr val="454545"/>
+                </a:solidFill>
+                <a:latin typeface="Arial"/>
+                <a:ea typeface="Arial"/>
+                <a:cs typeface="Arial"/>
+              </a:defRPr>
+            </a:pPr>
+            <a:r>
+              <a:rPr sz="1200" b="0">
+                <a:solidFill>
+                  <a:srgbClr val="454545"/>
+                </a:solidFill>
+                <a:latin typeface="Arial"/>
+                <a:ea typeface="Arial"/>
+                <a:cs typeface="Arial"/>
+              </a:rPr>
+              <a:t>wvurail.org/dspira</a:t>
+            </a:r>
           </a:p>
         </p:txBody>
       </p:sp>
       <p:sp>
         <p:nvSpPr>
-          <p:cNvPr id="5" name="Footer Placeholder 4">
+          <p:cNvPr id="6" name="Automatic slide number">
             <a:extLst>
               <a:ext uri="{FF2B5EF4-FFF2-40B4-BE49-F238E27FC236}">
-                <a16:creationId xmlns:a16="http://schemas.microsoft.com/office/drawing/2014/main" id="{7FBF106F-8F94-4371-A2D1-AB0404C430B4}"/>
+                <a16:creationId xmlns:a16="http://schemas.microsoft.com/office/drawing/2014/main" id="{4AD0E30E-B026-44BD-ABE4-8BF1D7897EFE}"/>
               </a:ext>
             </a:extLst>
           </p:cNvPr>
           <p:cNvSpPr>
             <a:spLocks noGrp="1"/>
           </p:cNvSpPr>
-          <p:nvPr>
-            <p:ph type="ftr" sz="quarter" idx="3"/>
-          </p:nvPr>
+          <p:nvPr/>
         </p:nvSpPr>
         <p:spPr>
           <a:xfrm>
-            <a:off x="4038600" y="6356350"/>
-            <a:ext cx="4114800" cy="365125"/>
+            <a:off x="10953750" y="6372225"/>
+            <a:ext cx="781050" cy="285750"/>
           </a:xfrm>
           <a:prstGeom prst="rect">
             <a:avLst/>
           </a:prstGeom>
+          <a:noFill/>
+          <a:ln w="0">
+            <a:noFill/>
+          </a:ln>
         </p:spPr>
         <p:txBody>
-          <a:bodyPr vert="horz" lIns="91440" tIns="45720" rIns="91440" bIns="45720" rtlCol="0" anchor="ctr"/>
-          <a:lstStyle>
-            <a:lvl1pPr algn="ctr">
-              <a:defRPr sz="1200">
-                <a:solidFill>
-                  <a:schemeClr val="tx1">
-                    <a:tint val="75000"/>
-                  </a:schemeClr>
-                </a:solidFill>
-              </a:defRPr>
-            </a:lvl1pPr>
-          </a:lstStyle>
+          <a:bodyPr lIns="0" tIns="0" rIns="0" bIns="0">
+            <a:noAutofit/>
+          </a:bodyPr>
+          <a:lstStyle/>
           <a:p>
-            <a:endParaRPr lang="en-US"/>
-          </a:p>
-        </p:txBody>
-      </p:sp>
-      <p:sp>
-        <p:nvSpPr>
-          <p:cNvPr id="6" name="Slide Number Placeholder 5">
-            <a:extLst>
-              <a:ext uri="{FF2B5EF4-FFF2-40B4-BE49-F238E27FC236}">
-                <a16:creationId xmlns:a16="http://schemas.microsoft.com/office/drawing/2014/main" id="{47440732-2CEF-4468-A12F-B9E7D8AB22EA}"/>
-              </a:ext>
-            </a:extLst>
-          </p:cNvPr>
-          <p:cNvSpPr>
-            <a:spLocks noGrp="1"/>
-          </p:cNvSpPr>
-          <p:nvPr>
-            <p:ph type="sldNum" sz="quarter" idx="4"/>
-          </p:nvPr>
-        </p:nvSpPr>
-        <p:spPr>
-          <a:xfrm>
-            <a:off x="8610600" y="6356350"/>
-            <a:ext cx="2743200" cy="365125"/>
-          </a:xfrm>
-          <a:prstGeom prst="rect">
-            <a:avLst/>
-          </a:prstGeom>
-        </p:spPr>
-        <p:txBody>
-          <a:bodyPr vert="horz" lIns="91440" tIns="45720" rIns="91440" bIns="45720" rtlCol="0" anchor="ctr"/>
-          <a:lstStyle>
-            <a:lvl1pPr algn="r">
-              <a:defRPr sz="1200">
-                <a:solidFill>
-                  <a:schemeClr val="tx1">
-                    <a:tint val="75000"/>
-                  </a:schemeClr>
-                </a:solidFill>
-              </a:defRPr>
-            </a:lvl1pPr>
-          </a:lstStyle>
-          <a:p>
-            <a:fld id="{4A609AEB-AA43-4F11-B5F7-17FA2DC3DBF4}" type="slidenum">
-              <a:rPr lang="en-US" smtClean="0"/>
+            <a:pPr algn="r">
+              <a:defRPr sz="1200" b="0">
+                <a:solidFill>
+                  <a:srgbClr val="454545"/>
+                </a:solidFill>
+                <a:latin typeface="Arial"/>
+                <a:ea typeface="Arial"/>
+                <a:cs typeface="Arial"/>
+              </a:defRPr>
+            </a:pPr>
+            <a:fld id="{018D423B-F0A3-4876-8334-4B6CD5BE88A3}" type="slidenum">
+              <a:rPr sz="1200" b="0">
+                <a:solidFill>
+                  <a:srgbClr val="454545"/>
+                </a:solidFill>
+                <a:latin typeface="Arial"/>
+                <a:ea typeface="Arial"/>
+                <a:cs typeface="Arial"/>
+              </a:rPr>
               <a:t>‹#›</a:t>
             </a:fld>
-            <a:endParaRPr lang="en-US"/>
+            <a:endParaRPr sz="1200" b="0">
+              <a:solidFill>
+                <a:srgbClr val="454545"/>
+              </a:solidFill>
+              <a:latin typeface="Arial"/>
+              <a:ea typeface="Arial"/>
+              <a:cs typeface="Arial"/>
+            </a:endParaRPr>
           </a:p>
         </p:txBody>
       </p:sp>
     </p:spTree>
-    <p:extLst>
-      <p:ext uri="{BB962C8B-B14F-4D97-AF65-F5344CB8AC3E}">
-        <p14:creationId xmlns:p14="http://schemas.microsoft.com/office/powerpoint/2010/main" val="4124100472"/>
-      </p:ext>
-    </p:extLst>
   </p:cSld>
   <p:clrMap bg1="lt1" tx1="dk1" bg2="lt2" tx2="dk2" accent1="accent1" accent2="accent2" accent3="accent3" accent4="accent4" accent5="accent5" accent6="accent6" hlink="hlink" folHlink="folHlink"/>
   <p:sldLayoutIdLst>
-    <p:sldLayoutId id="2147483649" r:id="rId1"/>
-    <p:sldLayoutId id="2147483650" r:id="rId2"/>
-    <p:sldLayoutId id="2147483651" r:id="rId3"/>
-    <p:sldLayoutId id="2147483652" r:id="rId4"/>
-    <p:sldLayoutId id="2147483653" r:id="rId5"/>
-    <p:sldLayoutId id="2147483654" r:id="rId6"/>
-    <p:sldLayoutId id="2147483655" r:id="rId7"/>
-    <p:sldLayoutId id="2147483656" r:id="rId8"/>
-    <p:sldLayoutId id="2147483657" r:id="rId9"/>
-    <p:sldLayoutId id="2147483658" r:id="rId10"/>
-    <p:sldLayoutId id="2147483659" r:id="rId11"/>
+    <p:sldLayoutId id="2147483651" r:id="rId1"/>
+    <p:sldLayoutId id="2147483652" r:id="rId2"/>
+    <p:sldLayoutId id="2147483653" r:id="rId3"/>
+    <p:sldLayoutId id="2147483654" r:id="rId4"/>
+    <p:sldLayoutId id="2147483655" r:id="rId5"/>
+    <p:sldLayoutId id="2147483656" r:id="rId6"/>
   </p:sldLayoutIdLst>
-  <p:hf hdr="0" ftr="0" dt="0"/>
   <p:txStyles>
     <p:titleStyle>
       <a:lvl1pPr algn="l" defTabSz="914400" rtl="0" eaLnBrk="1" latinLnBrk="0" hangingPunct="1">
@@ -3663,16 +4363,8 @@
 </file>
 
 <file path=ppt/slides/slide1.xml><?xml version="1.0" encoding="utf-8"?>
-<p:sld xmlns:a="http://schemas.openxmlformats.org/drawingml/2006/main" xmlns:r="http://schemas.openxmlformats.org/officeDocument/2006/relationships" xmlns:p="http://schemas.openxmlformats.org/presentationml/2006/main">
+<p:sld xmlns:a="http://schemas.openxmlformats.org/drawingml/2006/main" xmlns:r="http://schemas.openxmlformats.org/officeDocument/2006/relationships" xmlns:p="http://schemas.openxmlformats.org/presentationml/2006/main" showMasterSp="1">
   <p:cSld>
-    <p:bg>
-      <p:bgPr>
-        <a:solidFill>
-          <a:schemeClr val="bg1"/>
-        </a:solidFill>
-        <a:effectLst/>
-      </p:bgPr>
-    </p:bg>
     <p:spTree>
       <p:nvGrpSpPr>
         <p:cNvPr id="1" name=""/>
@@ -3689,79 +4381,10 @@
       </p:grpSpPr>
       <p:sp>
         <p:nvSpPr>
-          <p:cNvPr id="20" name="Rectangle 19">
+          <p:cNvPr id="107" name="WVU lesson title">
             <a:extLst>
               <a:ext uri="{FF2B5EF4-FFF2-40B4-BE49-F238E27FC236}">
-                <a16:creationId xmlns:a16="http://schemas.microsoft.com/office/drawing/2014/main" id="{F64F6814-96D5-4463-898E-405CC0C40147}"/>
-              </a:ext>
-              <a:ext uri="{C183D7F6-B498-43B3-948B-1728B52AA6E4}">
-                <adec:decorative xmlns:adec="http://schemas.microsoft.com/office/drawing/2017/decorative" val="1"/>
-              </a:ext>
-            </a:extLst>
-          </p:cNvPr>
-          <p:cNvSpPr>
-            <a:spLocks noGrp="1" noRot="1" noChangeAspect="1" noMove="1" noResize="1" noEditPoints="1" noAdjustHandles="1" noChangeArrowheads="1" noChangeShapeType="1" noTextEdit="1"/>
-          </p:cNvSpPr>
-          <p:nvPr>
-            <p:extLst>
-              <p:ext uri="{386F3935-93C4-4BCD-93E2-E3B085C9AB24}">
-                <p16:designElem xmlns:p16="http://schemas.microsoft.com/office/powerpoint/2015/main" val="1"/>
-              </p:ext>
-            </p:extLst>
-          </p:nvPr>
-        </p:nvSpPr>
-        <p:spPr bwMode="ltGray">
-          <a:xfrm>
-            <a:off x="336883" y="321176"/>
-            <a:ext cx="7174247" cy="5896743"/>
-          </a:xfrm>
-          <a:prstGeom prst="rect">
-            <a:avLst/>
-          </a:prstGeom>
-          <a:solidFill>
-            <a:schemeClr val="tx1">
-              <a:alpha val="15000"/>
-            </a:schemeClr>
-          </a:solidFill>
-          <a:ln w="127000" cap="sq" cmpd="thinThick">
-            <a:solidFill>
-              <a:schemeClr val="tx1">
-                <a:alpha val="10000"/>
-              </a:schemeClr>
-            </a:solidFill>
-          </a:ln>
-        </p:spPr>
-        <p:style>
-          <a:lnRef idx="2">
-            <a:schemeClr val="accent1">
-              <a:shade val="50000"/>
-            </a:schemeClr>
-          </a:lnRef>
-          <a:fillRef idx="1">
-            <a:schemeClr val="accent1"/>
-          </a:fillRef>
-          <a:effectRef idx="0">
-            <a:schemeClr val="accent1"/>
-          </a:effectRef>
-          <a:fontRef idx="minor">
-            <a:schemeClr val="lt1"/>
-          </a:fontRef>
-        </p:style>
-        <p:txBody>
-          <a:bodyPr rtlCol="0" anchor="ctr"/>
-          <a:lstStyle/>
-          <a:p>
-            <a:pPr algn="ctr"/>
-            <a:endParaRPr lang="en-US"/>
-          </a:p>
-        </p:txBody>
-      </p:sp>
-      <p:sp>
-        <p:nvSpPr>
-          <p:cNvPr id="2" name="Title 1">
-            <a:extLst>
-              <a:ext uri="{FF2B5EF4-FFF2-40B4-BE49-F238E27FC236}">
-                <a16:creationId xmlns:a16="http://schemas.microsoft.com/office/drawing/2014/main" id="{A089C09A-327C-4A43-AB84-DBC79B874F3F}"/>
+                <a16:creationId xmlns:a16="http://schemas.microsoft.com/office/drawing/2014/main" id="{33E7DC27-A5F9-47F9-A216-713460D598EB}"/>
               </a:ext>
             </a:extLst>
           </p:cNvPr>
@@ -3774,18 +4397,121 @@
         </p:nvSpPr>
         <p:spPr>
           <a:xfrm>
-            <a:off x="821516" y="640263"/>
-            <a:ext cx="6204984" cy="1344975"/>
+            <a:off x="609600" y="971550"/>
+            <a:ext cx="10972800" cy="876300"/>
           </a:xfrm>
+          <a:prstGeom prst="rect">
+            <a:avLst/>
+          </a:prstGeom>
+          <a:noFill/>
+          <a:ln w="0">
+            <a:noFill/>
+          </a:ln>
         </p:spPr>
         <p:txBody>
-          <a:bodyPr>
-            <a:normAutofit/>
+          <a:bodyPr lIns="0" tIns="0" rIns="0" bIns="0">
+            <a:noAutofit/>
           </a:bodyPr>
-          <a:lstStyle/>
+          <a:lstStyle>
+            <a:lvl1pPr>
+              <a:defRPr sz="3300" b="1">
+                <a:solidFill>
+                  <a:srgbClr val="002855"/>
+                </a:solidFill>
+                <a:latin typeface="Arial"/>
+                <a:ea typeface="Arial"/>
+                <a:cs typeface="Arial"/>
+              </a:defRPr>
+            </a:lvl1pPr>
+            <a:lvl2pPr>
+              <a:defRPr sz="3300" b="1">
+                <a:solidFill>
+                  <a:srgbClr val="002855"/>
+                </a:solidFill>
+                <a:latin typeface="Arial"/>
+                <a:ea typeface="Arial"/>
+                <a:cs typeface="Arial"/>
+              </a:defRPr>
+            </a:lvl2pPr>
+            <a:lvl3pPr>
+              <a:defRPr sz="3300" b="1">
+                <a:solidFill>
+                  <a:srgbClr val="002855"/>
+                </a:solidFill>
+                <a:latin typeface="Arial"/>
+                <a:ea typeface="Arial"/>
+                <a:cs typeface="Arial"/>
+              </a:defRPr>
+            </a:lvl3pPr>
+            <a:lvl4pPr>
+              <a:defRPr sz="3300" b="1">
+                <a:solidFill>
+                  <a:srgbClr val="002855"/>
+                </a:solidFill>
+                <a:latin typeface="Arial"/>
+                <a:ea typeface="Arial"/>
+                <a:cs typeface="Arial"/>
+              </a:defRPr>
+            </a:lvl4pPr>
+            <a:lvl5pPr>
+              <a:defRPr sz="3300" b="1">
+                <a:solidFill>
+                  <a:srgbClr val="002855"/>
+                </a:solidFill>
+                <a:latin typeface="Arial"/>
+                <a:ea typeface="Arial"/>
+                <a:cs typeface="Arial"/>
+              </a:defRPr>
+            </a:lvl5pPr>
+            <a:lvl6pPr>
+              <a:defRPr sz="3300" b="1">
+                <a:solidFill>
+                  <a:srgbClr val="002855"/>
+                </a:solidFill>
+                <a:latin typeface="Arial"/>
+                <a:ea typeface="Arial"/>
+                <a:cs typeface="Arial"/>
+              </a:defRPr>
+            </a:lvl6pPr>
+            <a:lvl7pPr>
+              <a:defRPr sz="3300" b="1">
+                <a:solidFill>
+                  <a:srgbClr val="002855"/>
+                </a:solidFill>
+                <a:latin typeface="Arial"/>
+                <a:ea typeface="Arial"/>
+                <a:cs typeface="Arial"/>
+              </a:defRPr>
+            </a:lvl7pPr>
+            <a:lvl8pPr>
+              <a:defRPr sz="3300" b="1">
+                <a:solidFill>
+                  <a:srgbClr val="002855"/>
+                </a:solidFill>
+                <a:latin typeface="Arial"/>
+                <a:ea typeface="Arial"/>
+                <a:cs typeface="Arial"/>
+              </a:defRPr>
+            </a:lvl8pPr>
+            <a:lvl9pPr>
+              <a:defRPr sz="3300" b="1">
+                <a:solidFill>
+                  <a:srgbClr val="002855"/>
+                </a:solidFill>
+                <a:latin typeface="Arial"/>
+                <a:ea typeface="Arial"/>
+                <a:cs typeface="Arial"/>
+              </a:defRPr>
+            </a:lvl9pPr>
+          </a:lstStyle>
           <a:p>
             <a:r>
-              <a:rPr lang="en-US" sz="4000"/>
+              <a:rPr lang="en-US" sz="3300" b="1">
+                <a:solidFill>
+                  <a:srgbClr val="002855"/>
+                </a:solidFill>
+                <a:latin typeface="Arial"/>
+              </a:rPr>
               <a:t>Mixing = modulation</a:t>
             </a:r>
           </a:p>
@@ -3805,36 +4531,45 @@
               <p:cNvSpPr>
                 <a:spLocks noGrp="1"/>
               </p:cNvSpPr>
-              <p:nvPr>
-                <p:ph idx="1"/>
-              </p:nvPr>
+              <p:nvPr/>
             </p:nvSpPr>
             <p:spPr>
               <a:xfrm>
-                <a:off x="821515" y="2121762"/>
-                <a:ext cx="6204984" cy="3626917"/>
+                <a:off x="609600" y="2095500"/>
+                <a:ext cx="6096000" cy="4064000"/>
               </a:xfrm>
             </p:spPr>
             <p:txBody>
-              <a:bodyPr>
-                <a:normAutofit/>
+              <a:bodyPr anchor="t" lIns="0" rIns="0">
+                <a:noAutofit/>
               </a:bodyPr>
               <a:lstStyle/>
               <a:p>
                 <a:r>
-                  <a:rPr lang="en-US" sz="2200"/>
+                  <a:rPr lang="en-US" sz="2200">
+                    <a:solidFill>
+                      <a:srgbClr val="000000"/>
+                    </a:solidFill>
+                  </a:rPr>
                   <a:t>A low pass signal (described by low frequencies) such as voice and video cannot be sent from New York to Seattle. </a:t>
                 </a:r>
               </a:p>
               <a:p>
                 <a:r>
-                  <a:rPr lang="en-US" sz="2200"/>
+                  <a:rPr lang="en-US" sz="2200">
+                    <a:solidFill>
+                      <a:srgbClr val="000000"/>
+                    </a:solidFill>
+                  </a:rPr>
                   <a:t>In fact, voice loses power </a:t>
                 </a:r>
                 <a14:m>
                   <m:oMath xmlns:m="http://schemas.openxmlformats.org/officeDocument/2006/math">
                     <m:r>
                       <a:rPr lang="en-US" sz="2200" i="1">
+                        <a:solidFill>
+                          <a:srgbClr val="000000"/>
+                        </a:solidFill>
                         <a:latin typeface="Cambria Math" panose="02040503050406030204" pitchFamily="18" charset="0"/>
                         <a:ea typeface="Cambria Math" panose="02040503050406030204" pitchFamily="18" charset="0"/>
                       </a:rPr>
@@ -3844,6 +4579,9 @@
                       <m:fPr>
                         <m:ctrlPr>
                           <a:rPr lang="en-US" sz="2200" i="1">
+                            <a:solidFill>
+                              <a:srgbClr val="000000"/>
+                            </a:solidFill>
                             <a:latin typeface="Cambria Math" panose="02040503050406030204" pitchFamily="18" charset="0"/>
                             <a:ea typeface="Cambria Math" panose="02040503050406030204" pitchFamily="18" charset="0"/>
                           </a:rPr>
@@ -3852,6 +4590,9 @@
                       <m:num>
                         <m:r>
                           <a:rPr lang="en-US" sz="2200" b="0" i="1">
+                            <a:solidFill>
+                              <a:srgbClr val="000000"/>
+                            </a:solidFill>
                             <a:latin typeface="Cambria Math" panose="02040503050406030204" pitchFamily="18" charset="0"/>
                             <a:ea typeface="Cambria Math" panose="02040503050406030204" pitchFamily="18" charset="0"/>
                           </a:rPr>
@@ -3863,6 +4604,9 @@
                           <m:sSupPr>
                             <m:ctrlPr>
                               <a:rPr lang="en-US" sz="2200" i="1">
+                                <a:solidFill>
+                                  <a:srgbClr val="000000"/>
+                                </a:solidFill>
                                 <a:latin typeface="Cambria Math" panose="02040503050406030204" pitchFamily="18" charset="0"/>
                                 <a:ea typeface="Cambria Math" panose="02040503050406030204" pitchFamily="18" charset="0"/>
                               </a:rPr>
@@ -3871,6 +4615,9 @@
                           <m:e>
                             <m:r>
                               <a:rPr lang="en-US" sz="2200" b="0" i="1">
+                                <a:solidFill>
+                                  <a:srgbClr val="000000"/>
+                                </a:solidFill>
                                 <a:latin typeface="Cambria Math" panose="02040503050406030204" pitchFamily="18" charset="0"/>
                                 <a:ea typeface="Cambria Math" panose="02040503050406030204" pitchFamily="18" charset="0"/>
                               </a:rPr>
@@ -3880,6 +4627,9 @@
                           <m:sup>
                             <m:r>
                               <a:rPr lang="en-US" sz="2200" b="0" i="1">
+                                <a:solidFill>
+                                  <a:srgbClr val="000000"/>
+                                </a:solidFill>
                                 <a:latin typeface="Cambria Math" panose="02040503050406030204" pitchFamily="18" charset="0"/>
                                 <a:ea typeface="Cambria Math" panose="02040503050406030204" pitchFamily="18" charset="0"/>
                               </a:rPr>
@@ -3892,19 +4642,31 @@
                   </m:oMath>
                 </a14:m>
                 <a:r>
-                  <a:rPr lang="en-US" sz="2200"/>
+                  <a:rPr lang="en-US" sz="2200">
+                    <a:solidFill>
+                      <a:srgbClr val="000000"/>
+                    </a:solidFill>
+                  </a:rPr>
                   <a:t> (you cannot hear me speaking if you are 30 meters away)</a:t>
                 </a:r>
               </a:p>
               <a:p>
                 <a:r>
-                  <a:rPr lang="en-US" sz="2200"/>
+                  <a:rPr lang="en-US" sz="2200">
+                    <a:solidFill>
+                      <a:srgbClr val="000000"/>
+                    </a:solidFill>
+                  </a:rPr>
                   <a:t>The fact that voice dissipates indicates that the environment (air) is resistant to low frequencies. </a:t>
                 </a:r>
               </a:p>
               <a:p>
                 <a:r>
-                  <a:rPr lang="en-US" sz="2200"/>
+                  <a:rPr lang="en-US" sz="2200">
+                    <a:solidFill>
+                      <a:srgbClr val="000000"/>
+                    </a:solidFill>
+                  </a:rPr>
                   <a:t>We can transmit voice as is, but we will need an antenna of size 10-100 km.  </a:t>
                 </a:r>
               </a:p>
@@ -3924,14 +4686,12 @@
               <p:cNvSpPr>
                 <a:spLocks noGrp="1" noRot="1" noChangeAspect="1" noMove="1" noResize="1" noEditPoints="1" noAdjustHandles="1" noChangeArrowheads="1" noChangeShapeType="1" noTextEdit="1"/>
               </p:cNvSpPr>
-              <p:nvPr>
-                <p:ph idx="1"/>
-              </p:nvPr>
+              <p:nvPr/>
             </p:nvSpPr>
             <p:spPr>
               <a:xfrm>
-                <a:off x="821515" y="2121762"/>
-                <a:ext cx="6204984" cy="3626917"/>
+                <a:off x="2297240" y="3107513"/>
+                <a:ext cx="4266116" cy="1816312"/>
               </a:xfrm>
               <a:blipFill>
                 <a:blip r:embed="rId2"/>
@@ -3945,7 +4705,10 @@
               <a:lstStyle/>
               <a:p>
                 <a:r>
-                  <a:rPr lang="en-US">
+                  <a:rPr lang="en-US" sz="2200">
+                    <a:solidFill>
+                      <a:srgbClr val="000000"/>
+                    </a:solidFill>
                     <a:noFill/>
                   </a:rPr>
                   <a:t> </a:t>
@@ -3982,8 +4745,8 @@
         </p:blipFill>
         <p:spPr>
           <a:xfrm>
-            <a:off x="7829551" y="306909"/>
-            <a:ext cx="4042409" cy="2286000"/>
+            <a:off x="7115479" y="2095500"/>
+            <a:ext cx="2779280" cy="1571695"/>
           </a:xfrm>
           <a:prstGeom prst="rect">
             <a:avLst/>
@@ -4017,60 +4780,14 @@
         </p:blipFill>
         <p:spPr>
           <a:xfrm>
-            <a:off x="7829551" y="2828925"/>
-            <a:ext cx="4042410" cy="3388994"/>
+            <a:off x="7115479" y="3829463"/>
+            <a:ext cx="2779281" cy="2330037"/>
           </a:xfrm>
           <a:prstGeom prst="rect">
             <a:avLst/>
           </a:prstGeom>
         </p:spPr>
       </p:pic>
-      <p:sp>
-        <p:nvSpPr>
-          <p:cNvPr id="8" name="Slide Number Placeholder 7">
-            <a:extLst>
-              <a:ext uri="{FF2B5EF4-FFF2-40B4-BE49-F238E27FC236}">
-                <a16:creationId xmlns:a16="http://schemas.microsoft.com/office/drawing/2014/main" id="{728C9CC5-5B04-4C9B-A2CB-69DB47B44884}"/>
-              </a:ext>
-            </a:extLst>
-          </p:cNvPr>
-          <p:cNvSpPr>
-            <a:spLocks noGrp="1"/>
-          </p:cNvSpPr>
-          <p:nvPr>
-            <p:ph type="sldNum" sz="quarter" idx="12"/>
-          </p:nvPr>
-        </p:nvSpPr>
-        <p:spPr>
-          <a:xfrm>
-            <a:off x="8610600" y="6356350"/>
-            <a:ext cx="2743200" cy="365125"/>
-          </a:xfrm>
-        </p:spPr>
-        <p:txBody>
-          <a:bodyPr>
-            <a:normAutofit/>
-          </a:bodyPr>
-          <a:lstStyle/>
-          <a:p>
-            <a:pPr>
-              <a:spcAft>
-                <a:spcPts val="600"/>
-              </a:spcAft>
-            </a:pPr>
-            <a:fld id="{4A609AEB-AA43-4F11-B5F7-17FA2DC3DBF4}" type="slidenum">
-              <a:rPr lang="en-US" smtClean="0"/>
-              <a:pPr>
-                <a:spcAft>
-                  <a:spcPts val="600"/>
-                </a:spcAft>
-              </a:pPr>
-              <a:t>1</a:t>
-            </a:fld>
-            <a:endParaRPr lang="en-US"/>
-          </a:p>
-        </p:txBody>
-      </p:sp>
     </p:spTree>
     <p:extLst>
       <p:ext uri="{BB962C8B-B14F-4D97-AF65-F5344CB8AC3E}">
@@ -4085,16 +4802,8 @@
 </file>
 
 <file path=ppt/slides/slide2.xml><?xml version="1.0" encoding="utf-8"?>
-<p:sld xmlns:a="http://schemas.openxmlformats.org/drawingml/2006/main" xmlns:r="http://schemas.openxmlformats.org/officeDocument/2006/relationships" xmlns:p="http://schemas.openxmlformats.org/presentationml/2006/main">
+<p:sld xmlns:a="http://schemas.openxmlformats.org/drawingml/2006/main" xmlns:r="http://schemas.openxmlformats.org/officeDocument/2006/relationships" xmlns:p="http://schemas.openxmlformats.org/presentationml/2006/main" showMasterSp="1">
   <p:cSld>
-    <p:bg>
-      <p:bgPr>
-        <a:solidFill>
-          <a:schemeClr val="bg1"/>
-        </a:solidFill>
-        <a:effectLst/>
-      </p:bgPr>
-    </p:bg>
     <p:spTree>
       <p:nvGrpSpPr>
         <p:cNvPr id="1" name=""/>
@@ -4111,10 +4820,10 @@
       </p:grpSpPr>
       <p:sp>
         <p:nvSpPr>
-          <p:cNvPr id="2" name="Title 1">
+          <p:cNvPr id="114" name="WVU lesson title">
             <a:extLst>
               <a:ext uri="{FF2B5EF4-FFF2-40B4-BE49-F238E27FC236}">
-                <a16:creationId xmlns:a16="http://schemas.microsoft.com/office/drawing/2014/main" id="{DE1F1506-3592-4AE7-B278-73AE3A9C2D6E}"/>
+                <a16:creationId xmlns:a16="http://schemas.microsoft.com/office/drawing/2014/main" id="{33E7DC27-A5F9-47F9-A216-713460D598EB}"/>
               </a:ext>
             </a:extLst>
           </p:cNvPr>
@@ -4127,76 +4836,126 @@
         </p:nvSpPr>
         <p:spPr>
           <a:xfrm>
-            <a:off x="655320" y="365125"/>
-            <a:ext cx="5120114" cy="1692794"/>
+            <a:off x="609600" y="971550"/>
+            <a:ext cx="10972800" cy="876300"/>
           </a:xfrm>
+          <a:prstGeom prst="rect">
+            <a:avLst/>
+          </a:prstGeom>
+          <a:noFill/>
+          <a:ln w="0">
+            <a:noFill/>
+          </a:ln>
         </p:spPr>
         <p:txBody>
-          <a:bodyPr>
-            <a:normAutofit/>
+          <a:bodyPr lIns="0" tIns="0" rIns="0" bIns="0">
+            <a:noAutofit/>
           </a:bodyPr>
-          <a:lstStyle/>
+          <a:lstStyle>
+            <a:lvl1pPr>
+              <a:defRPr sz="3300" b="1">
+                <a:solidFill>
+                  <a:srgbClr val="002855"/>
+                </a:solidFill>
+                <a:latin typeface="Arial"/>
+                <a:ea typeface="Arial"/>
+                <a:cs typeface="Arial"/>
+              </a:defRPr>
+            </a:lvl1pPr>
+            <a:lvl2pPr>
+              <a:defRPr sz="3300" b="1">
+                <a:solidFill>
+                  <a:srgbClr val="002855"/>
+                </a:solidFill>
+                <a:latin typeface="Arial"/>
+                <a:ea typeface="Arial"/>
+                <a:cs typeface="Arial"/>
+              </a:defRPr>
+            </a:lvl2pPr>
+            <a:lvl3pPr>
+              <a:defRPr sz="3300" b="1">
+                <a:solidFill>
+                  <a:srgbClr val="002855"/>
+                </a:solidFill>
+                <a:latin typeface="Arial"/>
+                <a:ea typeface="Arial"/>
+                <a:cs typeface="Arial"/>
+              </a:defRPr>
+            </a:lvl3pPr>
+            <a:lvl4pPr>
+              <a:defRPr sz="3300" b="1">
+                <a:solidFill>
+                  <a:srgbClr val="002855"/>
+                </a:solidFill>
+                <a:latin typeface="Arial"/>
+                <a:ea typeface="Arial"/>
+                <a:cs typeface="Arial"/>
+              </a:defRPr>
+            </a:lvl4pPr>
+            <a:lvl5pPr>
+              <a:defRPr sz="3300" b="1">
+                <a:solidFill>
+                  <a:srgbClr val="002855"/>
+                </a:solidFill>
+                <a:latin typeface="Arial"/>
+                <a:ea typeface="Arial"/>
+                <a:cs typeface="Arial"/>
+              </a:defRPr>
+            </a:lvl5pPr>
+            <a:lvl6pPr>
+              <a:defRPr sz="3300" b="1">
+                <a:solidFill>
+                  <a:srgbClr val="002855"/>
+                </a:solidFill>
+                <a:latin typeface="Arial"/>
+                <a:ea typeface="Arial"/>
+                <a:cs typeface="Arial"/>
+              </a:defRPr>
+            </a:lvl6pPr>
+            <a:lvl7pPr>
+              <a:defRPr sz="3300" b="1">
+                <a:solidFill>
+                  <a:srgbClr val="002855"/>
+                </a:solidFill>
+                <a:latin typeface="Arial"/>
+                <a:ea typeface="Arial"/>
+                <a:cs typeface="Arial"/>
+              </a:defRPr>
+            </a:lvl7pPr>
+            <a:lvl8pPr>
+              <a:defRPr sz="3300" b="1">
+                <a:solidFill>
+                  <a:srgbClr val="002855"/>
+                </a:solidFill>
+                <a:latin typeface="Arial"/>
+                <a:ea typeface="Arial"/>
+                <a:cs typeface="Arial"/>
+              </a:defRPr>
+            </a:lvl8pPr>
+            <a:lvl9pPr>
+              <a:defRPr sz="3300" b="1">
+                <a:solidFill>
+                  <a:srgbClr val="002855"/>
+                </a:solidFill>
+                <a:latin typeface="Arial"/>
+                <a:ea typeface="Arial"/>
+                <a:cs typeface="Arial"/>
+              </a:defRPr>
+            </a:lvl9pPr>
+          </a:lstStyle>
           <a:p>
             <a:r>
-              <a:rPr lang="en-US" dirty="0"/>
+              <a:rPr lang="en-US" sz="3300" b="1">
+                <a:solidFill>
+                  <a:srgbClr val="002855"/>
+                </a:solidFill>
+                <a:latin typeface="Arial"/>
+              </a:rPr>
               <a:t>How to overcome the resistance of the air?</a:t>
             </a:r>
           </a:p>
         </p:txBody>
       </p:sp>
-      <p:cxnSp>
-        <p:nvCxnSpPr>
-          <p:cNvPr id="14" name="Straight Arrow Connector 13">
-            <a:extLst>
-              <a:ext uri="{FF2B5EF4-FFF2-40B4-BE49-F238E27FC236}">
-                <a16:creationId xmlns:a16="http://schemas.microsoft.com/office/drawing/2014/main" id="{E4A809D5-3600-46D4-A466-67F2349A54FB}"/>
-              </a:ext>
-              <a:ext uri="{C183D7F6-B498-43B3-948B-1728B52AA6E4}">
-                <adec:decorative xmlns:adec="http://schemas.microsoft.com/office/drawing/2017/decorative" val="1"/>
-              </a:ext>
-            </a:extLst>
-          </p:cNvPr>
-          <p:cNvCxnSpPr>
-            <a:cxnSpLocks noGrp="1" noRot="1" noChangeAspect="1" noMove="1" noResize="1" noEditPoints="1" noAdjustHandles="1" noChangeArrowheads="1" noChangeShapeType="1"/>
-          </p:cNvCxnSpPr>
-          <p:nvPr>
-            <p:extLst>
-              <p:ext uri="{386F3935-93C4-4BCD-93E2-E3B085C9AB24}">
-                <p16:designElem xmlns:p16="http://schemas.microsoft.com/office/powerpoint/2015/main" val="1"/>
-              </p:ext>
-            </p:extLst>
-          </p:nvPr>
-        </p:nvCxnSpPr>
-        <p:spPr>
-          <a:xfrm>
-            <a:off x="655320" y="2316480"/>
-            <a:ext cx="4572000" cy="0"/>
-          </a:xfrm>
-          <a:prstGeom prst="straightConnector1">
-            <a:avLst/>
-          </a:prstGeom>
-          <a:ln w="19050" cap="sq">
-            <a:solidFill>
-              <a:schemeClr val="tx1"/>
-            </a:solidFill>
-            <a:tailEnd type="none"/>
-          </a:ln>
-        </p:spPr>
-        <p:style>
-          <a:lnRef idx="1">
-            <a:schemeClr val="accent1"/>
-          </a:lnRef>
-          <a:fillRef idx="0">
-            <a:schemeClr val="accent1"/>
-          </a:fillRef>
-          <a:effectRef idx="0">
-            <a:schemeClr val="accent1"/>
-          </a:effectRef>
-          <a:fontRef idx="minor">
-            <a:schemeClr val="tx1"/>
-          </a:fontRef>
-        </p:style>
-      </p:cxnSp>
       <p:sp>
         <p:nvSpPr>
           <p:cNvPr id="3" name="Content Placeholder 2">
@@ -4209,42 +4968,88 @@
           <p:cNvSpPr>
             <a:spLocks noGrp="1"/>
           </p:cNvSpPr>
-          <p:nvPr>
-            <p:ph idx="1"/>
-          </p:nvPr>
+          <p:nvPr/>
         </p:nvSpPr>
         <p:spPr>
           <a:xfrm>
-            <a:off x="655322" y="2575034"/>
-            <a:ext cx="4687860" cy="3462228"/>
+            <a:off x="609600" y="2095500"/>
+            <a:ext cx="4699000" cy="4064000"/>
           </a:xfrm>
         </p:spPr>
         <p:txBody>
-          <a:bodyPr>
-            <a:normAutofit/>
+          <a:bodyPr lIns="0" rIns="0" tIns="0" bIns="0" anchor="t">
+            <a:noAutofit/>
           </a:bodyPr>
           <a:lstStyle/>
           <a:p>
+            <a:pPr>
+              <a:defRPr sz="2200">
+                <a:solidFill>
+                  <a:srgbClr val="000000"/>
+                </a:solidFill>
+                <a:latin typeface="Arial"/>
+              </a:defRPr>
+            </a:pPr>
             <a:r>
-              <a:rPr lang="en-US" sz="2400" dirty="0"/>
+              <a:rPr lang="en-US" sz="2200" dirty="0">
+                <a:solidFill>
+                  <a:srgbClr val="000000"/>
+                </a:solidFill>
+              </a:rPr>
               <a:t>Air (channel) acts as a band pass filter. </a:t>
             </a:r>
           </a:p>
           <a:p>
+            <a:pPr>
+              <a:defRPr sz="2200">
+                <a:solidFill>
+                  <a:srgbClr val="000000"/>
+                </a:solidFill>
+                <a:latin typeface="Arial"/>
+              </a:defRPr>
+            </a:pPr>
             <a:r>
-              <a:rPr lang="en-US" sz="2400" dirty="0"/>
+              <a:rPr lang="en-US" sz="2200" dirty="0">
+                <a:solidFill>
+                  <a:srgbClr val="000000"/>
+                </a:solidFill>
+              </a:rPr>
               <a:t>Voice, video, etc. are low pass signals.  </a:t>
             </a:r>
           </a:p>
           <a:p>
+            <a:pPr>
+              <a:defRPr sz="2200">
+                <a:solidFill>
+                  <a:srgbClr val="000000"/>
+                </a:solidFill>
+                <a:latin typeface="Arial"/>
+              </a:defRPr>
+            </a:pPr>
             <a:r>
-              <a:rPr lang="en-US" sz="2400" dirty="0"/>
+              <a:rPr lang="en-US" sz="2200" dirty="0">
+                <a:solidFill>
+                  <a:srgbClr val="000000"/>
+                </a:solidFill>
+              </a:rPr>
               <a:t>To pass voice over channel, we need to translate voice to medium frequency. </a:t>
             </a:r>
           </a:p>
           <a:p>
+            <a:pPr>
+              <a:defRPr sz="2200">
+                <a:solidFill>
+                  <a:srgbClr val="000000"/>
+                </a:solidFill>
+                <a:latin typeface="Arial"/>
+              </a:defRPr>
+            </a:pPr>
             <a:r>
-              <a:rPr lang="en-US" sz="2400" dirty="0"/>
+              <a:rPr lang="en-US" sz="2200" dirty="0">
+                <a:solidFill>
+                  <a:srgbClr val="000000"/>
+                </a:solidFill>
+              </a:rPr>
               <a:t>This is done through modulation (mixing). </a:t>
             </a:r>
           </a:p>
@@ -4277,8 +5082,8 @@
         </p:blipFill>
         <p:spPr>
           <a:xfrm>
-            <a:off x="5878849" y="10"/>
-            <a:ext cx="6313150" cy="6857987"/>
+            <a:off x="5773149" y="2095500"/>
+            <a:ext cx="3741133" cy="4064000"/>
           </a:xfrm>
           <a:custGeom>
             <a:avLst/>
@@ -4356,35 +5161,6 @@
           </a:custGeom>
         </p:spPr>
       </p:pic>
-      <p:sp>
-        <p:nvSpPr>
-          <p:cNvPr id="10" name="Slide Number Placeholder 9">
-            <a:extLst>
-              <a:ext uri="{FF2B5EF4-FFF2-40B4-BE49-F238E27FC236}">
-                <a16:creationId xmlns:a16="http://schemas.microsoft.com/office/drawing/2014/main" id="{E4A5DFB3-AB98-478B-A59D-974E87443940}"/>
-              </a:ext>
-            </a:extLst>
-          </p:cNvPr>
-          <p:cNvSpPr>
-            <a:spLocks noGrp="1"/>
-          </p:cNvSpPr>
-          <p:nvPr>
-            <p:ph type="sldNum" sz="quarter" idx="12"/>
-          </p:nvPr>
-        </p:nvSpPr>
-        <p:spPr/>
-        <p:txBody>
-          <a:bodyPr/>
-          <a:lstStyle/>
-          <a:p>
-            <a:fld id="{4A609AEB-AA43-4F11-B5F7-17FA2DC3DBF4}" type="slidenum">
-              <a:rPr lang="en-US" smtClean="0"/>
-              <a:t>2</a:t>
-            </a:fld>
-            <a:endParaRPr lang="en-US"/>
-          </a:p>
-        </p:txBody>
-      </p:sp>
     </p:spTree>
     <p:extLst>
       <p:ext uri="{BB962C8B-B14F-4D97-AF65-F5344CB8AC3E}">
@@ -4399,7 +5175,7 @@
 </file>
 
 <file path=ppt/slides/slide3.xml><?xml version="1.0" encoding="utf-8"?>
-<p:sld xmlns:a="http://schemas.openxmlformats.org/drawingml/2006/main" xmlns:r="http://schemas.openxmlformats.org/officeDocument/2006/relationships" xmlns:p="http://schemas.openxmlformats.org/presentationml/2006/main">
+<p:sld xmlns:a="http://schemas.openxmlformats.org/drawingml/2006/main" xmlns:r="http://schemas.openxmlformats.org/officeDocument/2006/relationships" xmlns:p="http://schemas.openxmlformats.org/presentationml/2006/main" showMasterSp="1">
   <p:cSld>
     <p:spTree>
       <p:nvGrpSpPr>
@@ -4417,10 +5193,10 @@
       </p:grpSpPr>
       <p:sp>
         <p:nvSpPr>
-          <p:cNvPr id="2" name="Title 1">
+          <p:cNvPr id="105" name="WVU lesson title">
             <a:extLst>
               <a:ext uri="{FF2B5EF4-FFF2-40B4-BE49-F238E27FC236}">
-                <a16:creationId xmlns:a16="http://schemas.microsoft.com/office/drawing/2014/main" id="{9850F6F7-BC51-4E7B-9463-8FDB7DBAFD03}"/>
+                <a16:creationId xmlns:a16="http://schemas.microsoft.com/office/drawing/2014/main" id="{33E7DC27-A5F9-47F9-A216-713460D598EB}"/>
               </a:ext>
             </a:extLst>
           </p:cNvPr>
@@ -4431,13 +5207,123 @@
             <p:ph type="title"/>
           </p:nvPr>
         </p:nvSpPr>
-        <p:spPr/>
+        <p:spPr>
+          <a:xfrm>
+            <a:off x="609600" y="971550"/>
+            <a:ext cx="10972800" cy="876300"/>
+          </a:xfrm>
+          <a:prstGeom prst="rect">
+            <a:avLst/>
+          </a:prstGeom>
+          <a:noFill/>
+          <a:ln w="0">
+            <a:noFill/>
+          </a:ln>
+        </p:spPr>
         <p:txBody>
-          <a:bodyPr/>
-          <a:lstStyle/>
+          <a:bodyPr lIns="0" tIns="0" rIns="0" bIns="0">
+            <a:noAutofit/>
+          </a:bodyPr>
+          <a:lstStyle>
+            <a:lvl1pPr>
+              <a:defRPr sz="3300" b="1">
+                <a:solidFill>
+                  <a:srgbClr val="002855"/>
+                </a:solidFill>
+                <a:latin typeface="Arial"/>
+                <a:ea typeface="Arial"/>
+                <a:cs typeface="Arial"/>
+              </a:defRPr>
+            </a:lvl1pPr>
+            <a:lvl2pPr>
+              <a:defRPr sz="3300" b="1">
+                <a:solidFill>
+                  <a:srgbClr val="002855"/>
+                </a:solidFill>
+                <a:latin typeface="Arial"/>
+                <a:ea typeface="Arial"/>
+                <a:cs typeface="Arial"/>
+              </a:defRPr>
+            </a:lvl2pPr>
+            <a:lvl3pPr>
+              <a:defRPr sz="3300" b="1">
+                <a:solidFill>
+                  <a:srgbClr val="002855"/>
+                </a:solidFill>
+                <a:latin typeface="Arial"/>
+                <a:ea typeface="Arial"/>
+                <a:cs typeface="Arial"/>
+              </a:defRPr>
+            </a:lvl3pPr>
+            <a:lvl4pPr>
+              <a:defRPr sz="3300" b="1">
+                <a:solidFill>
+                  <a:srgbClr val="002855"/>
+                </a:solidFill>
+                <a:latin typeface="Arial"/>
+                <a:ea typeface="Arial"/>
+                <a:cs typeface="Arial"/>
+              </a:defRPr>
+            </a:lvl4pPr>
+            <a:lvl5pPr>
+              <a:defRPr sz="3300" b="1">
+                <a:solidFill>
+                  <a:srgbClr val="002855"/>
+                </a:solidFill>
+                <a:latin typeface="Arial"/>
+                <a:ea typeface="Arial"/>
+                <a:cs typeface="Arial"/>
+              </a:defRPr>
+            </a:lvl5pPr>
+            <a:lvl6pPr>
+              <a:defRPr sz="3300" b="1">
+                <a:solidFill>
+                  <a:srgbClr val="002855"/>
+                </a:solidFill>
+                <a:latin typeface="Arial"/>
+                <a:ea typeface="Arial"/>
+                <a:cs typeface="Arial"/>
+              </a:defRPr>
+            </a:lvl6pPr>
+            <a:lvl7pPr>
+              <a:defRPr sz="3300" b="1">
+                <a:solidFill>
+                  <a:srgbClr val="002855"/>
+                </a:solidFill>
+                <a:latin typeface="Arial"/>
+                <a:ea typeface="Arial"/>
+                <a:cs typeface="Arial"/>
+              </a:defRPr>
+            </a:lvl7pPr>
+            <a:lvl8pPr>
+              <a:defRPr sz="3300" b="1">
+                <a:solidFill>
+                  <a:srgbClr val="002855"/>
+                </a:solidFill>
+                <a:latin typeface="Arial"/>
+                <a:ea typeface="Arial"/>
+                <a:cs typeface="Arial"/>
+              </a:defRPr>
+            </a:lvl8pPr>
+            <a:lvl9pPr>
+              <a:defRPr sz="3300" b="1">
+                <a:solidFill>
+                  <a:srgbClr val="002855"/>
+                </a:solidFill>
+                <a:latin typeface="Arial"/>
+                <a:ea typeface="Arial"/>
+                <a:cs typeface="Arial"/>
+              </a:defRPr>
+            </a:lvl9pPr>
+          </a:lstStyle>
           <a:p>
             <a:r>
-              <a:rPr lang="en-US" dirty="0"/>
+              <a:rPr lang="en-US" sz="3300" b="1">
+                <a:solidFill>
+                  <a:srgbClr val="002855"/>
+                </a:solidFill>
+                <a:latin typeface="Arial"/>
+              </a:rPr>
               <a:t>How do we do this?</a:t>
             </a:r>
           </a:p>
@@ -4455,22 +5341,23 @@
           <p:cNvSpPr>
             <a:spLocks noGrp="1"/>
           </p:cNvSpPr>
-          <p:nvPr>
-            <p:ph sz="half" idx="1"/>
-          </p:nvPr>
+          <p:nvPr/>
         </p:nvSpPr>
         <p:spPr>
           <a:xfrm>
-            <a:off x="838200" y="1825625"/>
+            <a:off x="969264" y="2095500"/>
             <a:ext cx="5181600" cy="487807"/>
           </a:xfrm>
         </p:spPr>
         <p:txBody>
-          <a:bodyPr/>
+          <a:bodyPr lIns="0" rIns="0" tIns="0" bIns="0"/>
           <a:lstStyle/>
           <a:p>
             <a:pPr marL="0" indent="0">
               <a:buNone/>
+              <a:defRPr sz="2240">
+                <a:latin typeface="Arial"/>
+              </a:defRPr>
             </a:pPr>
             <a:r>
               <a:rPr lang="en-US" dirty="0"/>
@@ -4478,9 +5365,19 @@
             </a:r>
           </a:p>
           <a:p>
+            <a:pPr>
+              <a:defRPr sz="2240">
+                <a:latin typeface="Arial"/>
+              </a:defRPr>
+            </a:pPr>
             <a:endParaRPr lang="en-US" dirty="0"/>
           </a:p>
           <a:p>
+            <a:pPr>
+              <a:defRPr sz="2240">
+                <a:latin typeface="Arial"/>
+              </a:defRPr>
+            </a:pPr>
             <a:endParaRPr lang="en-US" dirty="0"/>
           </a:p>
         </p:txBody>
@@ -4499,14 +5396,12 @@
               <p:cNvSpPr>
                 <a:spLocks noGrp="1"/>
               </p:cNvSpPr>
-              <p:nvPr>
-                <p:ph sz="half" idx="2"/>
-              </p:nvPr>
+              <p:nvPr/>
             </p:nvSpPr>
             <p:spPr>
               <a:xfrm>
-                <a:off x="886968" y="3808983"/>
-                <a:ext cx="10204704" cy="2683892"/>
+                <a:off x="1018032" y="3735958"/>
+                <a:ext cx="10204704" cy="2286699"/>
               </a:xfrm>
             </p:spPr>
             <p:txBody>
@@ -4887,14 +5782,12 @@
               <p:cNvSpPr>
                 <a:spLocks noGrp="1" noRot="1" noChangeAspect="1" noMove="1" noResize="1" noEditPoints="1" noAdjustHandles="1" noChangeArrowheads="1" noChangeShapeType="1" noTextEdit="1"/>
               </p:cNvSpPr>
-              <p:nvPr>
-                <p:ph sz="half" idx="2"/>
-              </p:nvPr>
+              <p:nvPr/>
             </p:nvSpPr>
             <p:spPr>
               <a:xfrm>
-                <a:off x="886968" y="3808983"/>
-                <a:ext cx="10204704" cy="2683892"/>
+                <a:off x="1018032" y="3735958"/>
+                <a:ext cx="10204704" cy="2286699"/>
               </a:xfrm>
               <a:blipFill>
                 <a:blip r:embed="rId2"/>
@@ -4940,7 +5833,7 @@
         </p:blipFill>
         <p:spPr>
           <a:xfrm>
-            <a:off x="3266363" y="1825625"/>
+            <a:off x="3397427" y="2095500"/>
             <a:ext cx="7341770" cy="1746400"/>
           </a:xfrm>
           <a:prstGeom prst="rect">
@@ -4948,35 +5841,6 @@
           </a:prstGeom>
         </p:spPr>
       </p:pic>
-      <p:sp>
-        <p:nvSpPr>
-          <p:cNvPr id="6" name="Slide Number Placeholder 5">
-            <a:extLst>
-              <a:ext uri="{FF2B5EF4-FFF2-40B4-BE49-F238E27FC236}">
-                <a16:creationId xmlns:a16="http://schemas.microsoft.com/office/drawing/2014/main" id="{290D69AA-1907-41AE-B8C2-689FB4EB84EF}"/>
-              </a:ext>
-            </a:extLst>
-          </p:cNvPr>
-          <p:cNvSpPr>
-            <a:spLocks noGrp="1"/>
-          </p:cNvSpPr>
-          <p:nvPr>
-            <p:ph type="sldNum" sz="quarter" idx="12"/>
-          </p:nvPr>
-        </p:nvSpPr>
-        <p:spPr/>
-        <p:txBody>
-          <a:bodyPr/>
-          <a:lstStyle/>
-          <a:p>
-            <a:fld id="{4A609AEB-AA43-4F11-B5F7-17FA2DC3DBF4}" type="slidenum">
-              <a:rPr lang="en-US" smtClean="0"/>
-              <a:t>3</a:t>
-            </a:fld>
-            <a:endParaRPr lang="en-US"/>
-          </a:p>
-        </p:txBody>
-      </p:sp>
     </p:spTree>
     <p:extLst>
       <p:ext uri="{BB962C8B-B14F-4D97-AF65-F5344CB8AC3E}">
@@ -4991,16 +5855,8 @@
 </file>
 
 <file path=ppt/slides/slide4.xml><?xml version="1.0" encoding="utf-8"?>
-<p:sld xmlns:a="http://schemas.openxmlformats.org/drawingml/2006/main" xmlns:r="http://schemas.openxmlformats.org/officeDocument/2006/relationships" xmlns:p="http://schemas.openxmlformats.org/presentationml/2006/main">
+<p:sld xmlns:a="http://schemas.openxmlformats.org/drawingml/2006/main" xmlns:r="http://schemas.openxmlformats.org/officeDocument/2006/relationships" xmlns:p="http://schemas.openxmlformats.org/presentationml/2006/main" showMasterSp="1">
   <p:cSld>
-    <p:bg>
-      <p:bgPr>
-        <a:solidFill>
-          <a:schemeClr val="bg1"/>
-        </a:solidFill>
-        <a:effectLst/>
-      </p:bgPr>
-    </p:bg>
     <p:spTree>
       <p:nvGrpSpPr>
         <p:cNvPr id="1" name=""/>
@@ -5017,105 +5873,10 @@
       </p:grpSpPr>
       <p:sp>
         <p:nvSpPr>
-          <p:cNvPr id="25" name="Rectangle 24">
+          <p:cNvPr id="127" name="WVU lesson title">
             <a:extLst>
               <a:ext uri="{FF2B5EF4-FFF2-40B4-BE49-F238E27FC236}">
-                <a16:creationId xmlns:a16="http://schemas.microsoft.com/office/drawing/2014/main" id="{B0792D4F-247E-46FE-85FC-881DEFA41D94}"/>
-              </a:ext>
-              <a:ext uri="{C183D7F6-B498-43B3-948B-1728B52AA6E4}">
-                <adec:decorative xmlns:adec="http://schemas.microsoft.com/office/drawing/2017/decorative" val="1"/>
-              </a:ext>
-            </a:extLst>
-          </p:cNvPr>
-          <p:cNvSpPr>
-            <a:spLocks noGrp="1" noRot="1" noChangeAspect="1" noMove="1" noResize="1" noEditPoints="1" noAdjustHandles="1" noChangeArrowheads="1" noChangeShapeType="1" noTextEdit="1"/>
-          </p:cNvSpPr>
-          <p:nvPr>
-            <p:extLst>
-              <p:ext uri="{386F3935-93C4-4BCD-93E2-E3B085C9AB24}">
-                <p16:designElem xmlns:p16="http://schemas.microsoft.com/office/powerpoint/2015/main" val="1"/>
-              </p:ext>
-            </p:extLst>
-          </p:nvPr>
-        </p:nvSpPr>
-        <p:spPr>
-          <a:xfrm>
-            <a:off x="0" y="4572457"/>
-            <a:ext cx="12188952" cy="2285543"/>
-          </a:xfrm>
-          <a:prstGeom prst="rect">
-            <a:avLst/>
-          </a:prstGeom>
-          <a:solidFill>
-            <a:schemeClr val="tx1">
-              <a:lumMod val="75000"/>
-              <a:lumOff val="25000"/>
-            </a:schemeClr>
-          </a:solidFill>
-          <a:ln>
-            <a:noFill/>
-          </a:ln>
-        </p:spPr>
-        <p:style>
-          <a:lnRef idx="2">
-            <a:schemeClr val="accent1">
-              <a:shade val="50000"/>
-            </a:schemeClr>
-          </a:lnRef>
-          <a:fillRef idx="1">
-            <a:schemeClr val="accent1"/>
-          </a:fillRef>
-          <a:effectRef idx="0">
-            <a:schemeClr val="accent1"/>
-          </a:effectRef>
-          <a:fontRef idx="minor">
-            <a:schemeClr val="lt1"/>
-          </a:fontRef>
-        </p:style>
-        <p:txBody>
-          <a:bodyPr rtlCol="0" anchor="ctr"/>
-          <a:lstStyle/>
-          <a:p>
-            <a:pPr marL="0" marR="0" lvl="0" indent="0" algn="ctr" defTabSz="914400" rtl="0" eaLnBrk="1" fontAlgn="auto" latinLnBrk="0" hangingPunct="1">
-              <a:lnSpc>
-                <a:spcPct val="100000"/>
-              </a:lnSpc>
-              <a:spcBef>
-                <a:spcPts val="0"/>
-              </a:spcBef>
-              <a:spcAft>
-                <a:spcPts val="0"/>
-              </a:spcAft>
-              <a:buClrTx/>
-              <a:buSzTx/>
-              <a:buFontTx/>
-              <a:buNone/>
-              <a:tabLst/>
-              <a:defRPr/>
-            </a:pPr>
-            <a:endParaRPr kumimoji="0" lang="en-US" sz="1800" b="0" i="0" u="none" strike="noStrike" kern="1200" cap="none" spc="0" normalizeH="0" baseline="0" noProof="0">
-              <a:ln>
-                <a:noFill/>
-              </a:ln>
-              <a:solidFill>
-                <a:prstClr val="white"/>
-              </a:solidFill>
-              <a:effectLst/>
-              <a:uLnTx/>
-              <a:uFillTx/>
-              <a:latin typeface="Tw Cen MT" panose="020B0602020104020603"/>
-              <a:ea typeface="+mn-ea"/>
-              <a:cs typeface="+mn-cs"/>
-            </a:endParaRPr>
-          </a:p>
-        </p:txBody>
-      </p:sp>
-      <p:sp>
-        <p:nvSpPr>
-          <p:cNvPr id="2" name="Title 1">
-            <a:extLst>
-              <a:ext uri="{FF2B5EF4-FFF2-40B4-BE49-F238E27FC236}">
-                <a16:creationId xmlns:a16="http://schemas.microsoft.com/office/drawing/2014/main" id="{33E73056-A60E-41AA-999C-43BBE20D0CEC}"/>
+                <a16:creationId xmlns:a16="http://schemas.microsoft.com/office/drawing/2014/main" id="{33E7DC27-A5F9-47F9-A216-713460D598EB}"/>
               </a:ext>
             </a:extLst>
           </p:cNvPr>
@@ -5128,27 +5889,122 @@
         </p:nvSpPr>
         <p:spPr>
           <a:xfrm>
-            <a:off x="634276" y="4892358"/>
-            <a:ext cx="3766272" cy="1325563"/>
+            <a:off x="609600" y="971550"/>
+            <a:ext cx="10972800" cy="876300"/>
           </a:xfrm>
+          <a:prstGeom prst="rect">
+            <a:avLst/>
+          </a:prstGeom>
+          <a:noFill/>
+          <a:ln w="0">
+            <a:noFill/>
+          </a:ln>
         </p:spPr>
         <p:txBody>
-          <a:bodyPr vert="horz" lIns="91440" tIns="45720" rIns="91440" bIns="45720" rtlCol="0" anchor="ctr">
-            <a:normAutofit/>
+          <a:bodyPr lIns="0" tIns="0" rIns="0" bIns="0">
+            <a:noAutofit/>
           </a:bodyPr>
-          <a:lstStyle/>
+          <a:lstStyle>
+            <a:lvl1pPr>
+              <a:defRPr sz="3300" b="1">
+                <a:solidFill>
+                  <a:srgbClr val="002855"/>
+                </a:solidFill>
+                <a:latin typeface="Arial"/>
+                <a:ea typeface="Arial"/>
+                <a:cs typeface="Arial"/>
+              </a:defRPr>
+            </a:lvl1pPr>
+            <a:lvl2pPr>
+              <a:defRPr sz="3300" b="1">
+                <a:solidFill>
+                  <a:srgbClr val="002855"/>
+                </a:solidFill>
+                <a:latin typeface="Arial"/>
+                <a:ea typeface="Arial"/>
+                <a:cs typeface="Arial"/>
+              </a:defRPr>
+            </a:lvl2pPr>
+            <a:lvl3pPr>
+              <a:defRPr sz="3300" b="1">
+                <a:solidFill>
+                  <a:srgbClr val="002855"/>
+                </a:solidFill>
+                <a:latin typeface="Arial"/>
+                <a:ea typeface="Arial"/>
+                <a:cs typeface="Arial"/>
+              </a:defRPr>
+            </a:lvl3pPr>
+            <a:lvl4pPr>
+              <a:defRPr sz="3300" b="1">
+                <a:solidFill>
+                  <a:srgbClr val="002855"/>
+                </a:solidFill>
+                <a:latin typeface="Arial"/>
+                <a:ea typeface="Arial"/>
+                <a:cs typeface="Arial"/>
+              </a:defRPr>
+            </a:lvl4pPr>
+            <a:lvl5pPr>
+              <a:defRPr sz="3300" b="1">
+                <a:solidFill>
+                  <a:srgbClr val="002855"/>
+                </a:solidFill>
+                <a:latin typeface="Arial"/>
+                <a:ea typeface="Arial"/>
+                <a:cs typeface="Arial"/>
+              </a:defRPr>
+            </a:lvl5pPr>
+            <a:lvl6pPr>
+              <a:defRPr sz="3300" b="1">
+                <a:solidFill>
+                  <a:srgbClr val="002855"/>
+                </a:solidFill>
+                <a:latin typeface="Arial"/>
+                <a:ea typeface="Arial"/>
+                <a:cs typeface="Arial"/>
+              </a:defRPr>
+            </a:lvl6pPr>
+            <a:lvl7pPr>
+              <a:defRPr sz="3300" b="1">
+                <a:solidFill>
+                  <a:srgbClr val="002855"/>
+                </a:solidFill>
+                <a:latin typeface="Arial"/>
+                <a:ea typeface="Arial"/>
+                <a:cs typeface="Arial"/>
+              </a:defRPr>
+            </a:lvl7pPr>
+            <a:lvl8pPr>
+              <a:defRPr sz="3300" b="1">
+                <a:solidFill>
+                  <a:srgbClr val="002855"/>
+                </a:solidFill>
+                <a:latin typeface="Arial"/>
+                <a:ea typeface="Arial"/>
+                <a:cs typeface="Arial"/>
+              </a:defRPr>
+            </a:lvl8pPr>
+            <a:lvl9pPr>
+              <a:defRPr sz="3300" b="1">
+                <a:solidFill>
+                  <a:srgbClr val="002855"/>
+                </a:solidFill>
+                <a:latin typeface="Arial"/>
+                <a:ea typeface="Arial"/>
+                <a:cs typeface="Arial"/>
+              </a:defRPr>
+            </a:lvl9pPr>
+          </a:lstStyle>
           <a:p>
-            <a:pPr algn="r"/>
             <a:r>
-              <a:rPr lang="en-US" sz="2400" kern="1200">
-                <a:solidFill>
-                  <a:schemeClr val="bg1"/>
-                </a:solidFill>
-                <a:latin typeface="+mj-lt"/>
-                <a:ea typeface="+mj-ea"/>
-                <a:cs typeface="+mj-cs"/>
+              <a:rPr lang="en-US" sz="3300" b="1">
+                <a:solidFill>
+                  <a:srgbClr val="002855"/>
+                </a:solidFill>
+                <a:latin typeface="Arial"/>
               </a:rPr>
-              <a:t>Demodulation (how to extract voice from modulated signal?) </a:t>
+              <a:t>Demodulation (how to extract voice from modulated signal?)</a:t>
             </a:r>
           </a:p>
         </p:txBody>
@@ -5167,14 +6023,12 @@
               <p:cNvSpPr>
                 <a:spLocks noGrp="1"/>
               </p:cNvSpPr>
-              <p:nvPr>
-                <p:ph sz="half" idx="1"/>
-              </p:nvPr>
+              <p:nvPr/>
             </p:nvSpPr>
             <p:spPr>
               <a:xfrm>
-                <a:off x="4878784" y="4824249"/>
-                <a:ext cx="6673136" cy="1461780"/>
+                <a:off x="4973139" y="4965589"/>
+                <a:ext cx="5203910" cy="1068971"/>
               </a:xfrm>
             </p:spPr>
             <p:txBody>
@@ -5184,9 +6038,9 @@
               <a:lstStyle/>
               <a:p>
                 <a:r>
-                  <a:rPr lang="en-US" sz="1700">
+                  <a:rPr lang="en-US" sz="1061">
                     <a:solidFill>
-                      <a:schemeClr val="bg1"/>
+                      <a:srgbClr val="000000"/>
                     </a:solidFill>
                   </a:rPr>
                   <a:t>Multiply the modulated signal by the same cosine function. </a:t>
@@ -5199,9 +6053,9 @@
                     <m:sSub>
                       <m:sSubPr>
                         <m:ctrlPr>
-                          <a:rPr lang="en-US" sz="1700" i="1">
+                          <a:rPr lang="en-US" sz="1061" i="1">
                             <a:solidFill>
-                              <a:schemeClr val="bg1"/>
+                              <a:srgbClr val="000000"/>
                             </a:solidFill>
                             <a:latin typeface="Cambria Math" panose="02040503050406030204" pitchFamily="18" charset="0"/>
                           </a:rPr>
@@ -5209,9 +6063,9 @@
                       </m:sSubPr>
                       <m:e>
                         <m:r>
-                          <a:rPr lang="en-US" sz="1700" b="0" i="1">
+                          <a:rPr lang="en-US" sz="1061" b="0" i="1">
                             <a:solidFill>
-                              <a:schemeClr val="bg1"/>
+                              <a:srgbClr val="000000"/>
                             </a:solidFill>
                             <a:latin typeface="Cambria Math" panose="02040503050406030204" pitchFamily="18" charset="0"/>
                           </a:rPr>
@@ -5220,9 +6074,9 @@
                       </m:e>
                       <m:sub>
                         <m:r>
-                          <a:rPr lang="en-US" sz="1700" b="0" i="1">
+                          <a:rPr lang="en-US" sz="1061" b="0" i="1">
                             <a:solidFill>
-                              <a:schemeClr val="bg1"/>
+                              <a:srgbClr val="000000"/>
                             </a:solidFill>
                             <a:latin typeface="Cambria Math" panose="02040503050406030204" pitchFamily="18" charset="0"/>
                           </a:rPr>
@@ -5231,27 +6085,27 @@
                       </m:sub>
                     </m:sSub>
                     <m:r>
-                      <a:rPr lang="en-US" sz="1700" b="0" i="1">
+                      <a:rPr lang="en-US" sz="1061" b="0" i="1">
                         <a:solidFill>
-                          <a:schemeClr val="bg1"/>
+                          <a:srgbClr val="000000"/>
                         </a:solidFill>
                         <a:latin typeface="Cambria Math" panose="02040503050406030204" pitchFamily="18" charset="0"/>
                       </a:rPr>
                       <m:t>(</m:t>
                     </m:r>
                     <m:r>
-                      <a:rPr lang="en-US" sz="1700" b="0" i="1">
+                      <a:rPr lang="en-US" sz="1061" b="0" i="1">
                         <a:solidFill>
-                          <a:schemeClr val="bg1"/>
+                          <a:srgbClr val="000000"/>
                         </a:solidFill>
                         <a:latin typeface="Cambria Math" panose="02040503050406030204" pitchFamily="18" charset="0"/>
                       </a:rPr>
                       <m:t>𝑡</m:t>
                     </m:r>
                     <m:r>
-                      <a:rPr lang="en-US" sz="1700" b="0" i="1">
+                      <a:rPr lang="en-US" sz="1061" b="0" i="1">
                         <a:solidFill>
-                          <a:schemeClr val="bg1"/>
+                          <a:srgbClr val="000000"/>
                         </a:solidFill>
                         <a:latin typeface="Cambria Math" panose="02040503050406030204" pitchFamily="18" charset="0"/>
                       </a:rPr>
@@ -5261,27 +6115,27 @@
                       <m:rPr>
                         <m:sty m:val="p"/>
                       </m:rPr>
-                      <a:rPr lang="en-US" sz="1700" b="0" i="0">
+                      <a:rPr lang="en-US" sz="1061" b="0" i="0">
                         <a:solidFill>
-                          <a:schemeClr val="bg1"/>
+                          <a:srgbClr val="000000"/>
                         </a:solidFill>
                         <a:latin typeface="Cambria Math" panose="02040503050406030204" pitchFamily="18" charset="0"/>
                       </a:rPr>
                       <m:t>cos</m:t>
                     </m:r>
                     <m:r>
-                      <a:rPr lang="en-US" sz="1700" b="0" i="1">
+                      <a:rPr lang="en-US" sz="1061" b="0" i="1">
                         <a:solidFill>
-                          <a:schemeClr val="bg1"/>
+                          <a:srgbClr val="000000"/>
                         </a:solidFill>
                         <a:latin typeface="Cambria Math" panose="02040503050406030204" pitchFamily="18" charset="0"/>
                       </a:rPr>
                       <m:t>⁡(2</m:t>
                     </m:r>
                     <m:r>
-                      <a:rPr lang="en-US" sz="1700" b="0" i="1">
+                      <a:rPr lang="en-US" sz="1061" b="0" i="1">
                         <a:solidFill>
-                          <a:schemeClr val="bg1"/>
+                          <a:srgbClr val="000000"/>
                         </a:solidFill>
                         <a:latin typeface="Cambria Math" panose="02040503050406030204" pitchFamily="18" charset="0"/>
                       </a:rPr>
@@ -5290,9 +6144,9 @@
                     <m:sSub>
                       <m:sSubPr>
                         <m:ctrlPr>
-                          <a:rPr lang="en-US" sz="1700" b="0" i="1">
+                          <a:rPr lang="en-US" sz="1061" b="0" i="1">
                             <a:solidFill>
-                              <a:schemeClr val="bg1"/>
+                              <a:srgbClr val="000000"/>
                             </a:solidFill>
                             <a:latin typeface="Cambria Math" panose="02040503050406030204" pitchFamily="18" charset="0"/>
                           </a:rPr>
@@ -5300,9 +6154,9 @@
                       </m:sSubPr>
                       <m:e>
                         <m:r>
-                          <a:rPr lang="en-US" sz="1700" b="0" i="1">
+                          <a:rPr lang="en-US" sz="1061" b="0" i="1">
                             <a:solidFill>
-                              <a:schemeClr val="bg1"/>
+                              <a:srgbClr val="000000"/>
                             </a:solidFill>
                             <a:latin typeface="Cambria Math" panose="02040503050406030204" pitchFamily="18" charset="0"/>
                           </a:rPr>
@@ -5311,9 +6165,9 @@
                       </m:e>
                       <m:sub>
                         <m:r>
-                          <a:rPr lang="en-US" sz="1700" b="0" i="1">
+                          <a:rPr lang="en-US" sz="1061" b="0" i="1">
                             <a:solidFill>
-                              <a:schemeClr val="bg1"/>
+                              <a:srgbClr val="000000"/>
                             </a:solidFill>
                             <a:latin typeface="Cambria Math" panose="02040503050406030204" pitchFamily="18" charset="0"/>
                           </a:rPr>
@@ -5322,18 +6176,18 @@
                       </m:sub>
                     </m:sSub>
                     <m:r>
-                      <a:rPr lang="en-US" sz="1700" b="0" i="1">
+                      <a:rPr lang="en-US" sz="1061" b="0" i="1">
                         <a:solidFill>
-                          <a:schemeClr val="bg1"/>
+                          <a:srgbClr val="000000"/>
                         </a:solidFill>
                         <a:latin typeface="Cambria Math" panose="02040503050406030204" pitchFamily="18" charset="0"/>
                       </a:rPr>
                       <m:t>𝑡</m:t>
                     </m:r>
                     <m:r>
-                      <a:rPr lang="en-US" sz="1700" b="0" i="1">
+                      <a:rPr lang="en-US" sz="1061" b="0" i="1">
                         <a:solidFill>
-                          <a:schemeClr val="bg1"/>
+                          <a:srgbClr val="000000"/>
                         </a:solidFill>
                         <a:latin typeface="Cambria Math" panose="02040503050406030204" pitchFamily="18" charset="0"/>
                       </a:rPr>
@@ -5341,17 +6195,17 @@
                     </m:r>
                   </m:oMath>
                 </a14:m>
-                <a:endParaRPr lang="en-US" sz="1700">
+                <a:endParaRPr lang="en-US" sz="1061">
                   <a:solidFill>
-                    <a:schemeClr val="bg1"/>
+                    <a:srgbClr val="000000"/>
                   </a:solidFill>
                 </a:endParaRPr>
               </a:p>
               <a:p>
                 <a:r>
-                  <a:rPr lang="en-US" sz="1700">
+                  <a:rPr lang="en-US" sz="1061">
                     <a:solidFill>
-                      <a:schemeClr val="bg1"/>
+                      <a:srgbClr val="000000"/>
                     </a:solidFill>
                   </a:rPr>
                   <a:t>Pass the result through a low pass filter (set </a:t>
@@ -5361,9 +6215,9 @@
                     <m:sSub>
                       <m:sSubPr>
                         <m:ctrlPr>
-                          <a:rPr lang="en-US" sz="1700" i="1">
+                          <a:rPr lang="en-US" sz="1061" i="1">
                             <a:solidFill>
-                              <a:schemeClr val="bg1"/>
+                              <a:srgbClr val="000000"/>
                             </a:solidFill>
                             <a:latin typeface="Cambria Math" panose="02040503050406030204" pitchFamily="18" charset="0"/>
                           </a:rPr>
@@ -5371,9 +6225,9 @@
                       </m:sSubPr>
                       <m:e>
                         <m:r>
-                          <a:rPr lang="en-US" sz="1700" b="0" i="1">
+                          <a:rPr lang="en-US" sz="1061" b="0" i="1">
                             <a:solidFill>
-                              <a:schemeClr val="bg1"/>
+                              <a:srgbClr val="000000"/>
                             </a:solidFill>
                             <a:latin typeface="Cambria Math" panose="02040503050406030204" pitchFamily="18" charset="0"/>
                           </a:rPr>
@@ -5382,9 +6236,9 @@
                       </m:e>
                       <m:sub>
                         <m:r>
-                          <a:rPr lang="en-US" sz="1700" b="0" i="1">
+                          <a:rPr lang="en-US" sz="1061" b="0" i="1">
                             <a:solidFill>
-                              <a:schemeClr val="bg1"/>
+                              <a:srgbClr val="000000"/>
                             </a:solidFill>
                             <a:latin typeface="Cambria Math" panose="02040503050406030204" pitchFamily="18" charset="0"/>
                           </a:rPr>
@@ -5393,18 +6247,18 @@
                       </m:sub>
                     </m:sSub>
                     <m:r>
-                      <a:rPr lang="en-US" sz="1700" b="0" i="1">
+                      <a:rPr lang="en-US" sz="1061" b="0" i="1">
                         <a:solidFill>
-                          <a:schemeClr val="bg1"/>
+                          <a:srgbClr val="000000"/>
                         </a:solidFill>
                         <a:latin typeface="Cambria Math" panose="02040503050406030204" pitchFamily="18" charset="0"/>
                       </a:rPr>
                       <m:t>=</m:t>
                     </m:r>
                     <m:r>
-                      <a:rPr lang="en-US" sz="1700" b="0" i="1">
+                      <a:rPr lang="en-US" sz="1061" b="0" i="1">
                         <a:solidFill>
-                          <a:schemeClr val="bg1"/>
+                          <a:srgbClr val="000000"/>
                         </a:solidFill>
                         <a:latin typeface="Cambria Math" panose="02040503050406030204" pitchFamily="18" charset="0"/>
                       </a:rPr>
@@ -5413,9 +6267,9 @@
                   </m:oMath>
                 </a14:m>
                 <a:r>
-                  <a:rPr lang="en-US" sz="1700">
+                  <a:rPr lang="en-US" sz="1061">
                     <a:solidFill>
-                      <a:schemeClr val="bg1"/>
+                      <a:srgbClr val="000000"/>
                     </a:solidFill>
                   </a:rPr>
                   <a:t>)</a:t>
@@ -5423,9 +6277,9 @@
               </a:p>
               <a:p>
                 <a:r>
-                  <a:rPr lang="en-US" sz="1700">
+                  <a:rPr lang="en-US" sz="1061">
                     <a:solidFill>
-                      <a:schemeClr val="bg1"/>
+                      <a:srgbClr val="000000"/>
                     </a:solidFill>
                   </a:rPr>
                   <a:t>Amplify the signal </a:t>
@@ -5447,14 +6301,12 @@
               <p:cNvSpPr>
                 <a:spLocks noGrp="1" noRot="1" noChangeAspect="1" noMove="1" noResize="1" noEditPoints="1" noAdjustHandles="1" noChangeArrowheads="1" noChangeShapeType="1" noTextEdit="1"/>
               </p:cNvSpPr>
-              <p:nvPr>
-                <p:ph sz="half" idx="1"/>
-              </p:nvPr>
+              <p:nvPr/>
             </p:nvSpPr>
             <p:spPr>
               <a:xfrm>
-                <a:off x="4878784" y="4824249"/>
-                <a:ext cx="6673136" cy="1461780"/>
+                <a:off x="4973139" y="4965589"/>
+                <a:ext cx="5203910" cy="1068971"/>
               </a:xfrm>
               <a:blipFill>
                 <a:blip r:embed="rId2"/>
@@ -5500,8 +6352,8 @@
         </p:blipFill>
         <p:spPr>
           <a:xfrm>
-            <a:off x="1085408" y="800945"/>
-            <a:ext cx="10015378" cy="2987343"/>
+            <a:off x="2014951" y="2095500"/>
+            <a:ext cx="7810290" cy="2329619"/>
           </a:xfrm>
           <a:prstGeom prst="rect">
             <a:avLst/>
@@ -5533,8 +6385,8 @@
         </p:nvCxnSpPr>
         <p:spPr>
           <a:xfrm flipV="1">
-            <a:off x="4639665" y="5097939"/>
-            <a:ext cx="0" cy="914400"/>
+            <a:off x="4786666" y="5446424"/>
+            <a:ext cx="0" cy="713076"/>
           </a:xfrm>
           <a:prstGeom prst="line">
             <a:avLst/>
@@ -5562,35 +6414,6 @@
           </a:fontRef>
         </p:style>
       </p:cxnSp>
-      <p:sp>
-        <p:nvSpPr>
-          <p:cNvPr id="21" name="Slide Number Placeholder 20">
-            <a:extLst>
-              <a:ext uri="{FF2B5EF4-FFF2-40B4-BE49-F238E27FC236}">
-                <a16:creationId xmlns:a16="http://schemas.microsoft.com/office/drawing/2014/main" id="{DF86587C-9ED3-4C7F-869F-B21EE92E0A59}"/>
-              </a:ext>
-            </a:extLst>
-          </p:cNvPr>
-          <p:cNvSpPr>
-            <a:spLocks noGrp="1"/>
-          </p:cNvSpPr>
-          <p:nvPr>
-            <p:ph type="sldNum" sz="quarter" idx="12"/>
-          </p:nvPr>
-        </p:nvSpPr>
-        <p:spPr/>
-        <p:txBody>
-          <a:bodyPr/>
-          <a:lstStyle/>
-          <a:p>
-            <a:fld id="{4A609AEB-AA43-4F11-B5F7-17FA2DC3DBF4}" type="slidenum">
-              <a:rPr lang="en-US" smtClean="0"/>
-              <a:t>4</a:t>
-            </a:fld>
-            <a:endParaRPr lang="en-US"/>
-          </a:p>
-        </p:txBody>
-      </p:sp>
     </p:spTree>
     <p:extLst>
       <p:ext uri="{BB962C8B-B14F-4D97-AF65-F5344CB8AC3E}">
@@ -5605,16 +6428,8 @@
 </file>
 
 <file path=ppt/slides/slide5.xml><?xml version="1.0" encoding="utf-8"?>
-<p:sld xmlns:a="http://schemas.openxmlformats.org/drawingml/2006/main" xmlns:r="http://schemas.openxmlformats.org/officeDocument/2006/relationships" xmlns:p="http://schemas.openxmlformats.org/presentationml/2006/main">
+<p:sld xmlns:a="http://schemas.openxmlformats.org/drawingml/2006/main" xmlns:r="http://schemas.openxmlformats.org/officeDocument/2006/relationships" xmlns:p="http://schemas.openxmlformats.org/presentationml/2006/main" showMasterSp="1">
   <p:cSld>
-    <p:bg>
-      <p:bgPr>
-        <a:solidFill>
-          <a:schemeClr val="bg1"/>
-        </a:solidFill>
-        <a:effectLst/>
-      </p:bgPr>
-    </p:bg>
     <p:spTree>
       <p:nvGrpSpPr>
         <p:cNvPr id="1" name=""/>
@@ -5631,79 +6446,10 @@
       </p:grpSpPr>
       <p:sp>
         <p:nvSpPr>
-          <p:cNvPr id="17" name="Rectangle 14">
+          <p:cNvPr id="110" name="WVU lesson title">
             <a:extLst>
               <a:ext uri="{FF2B5EF4-FFF2-40B4-BE49-F238E27FC236}">
-                <a16:creationId xmlns:a16="http://schemas.microsoft.com/office/drawing/2014/main" id="{E02F3C71-C981-4614-98EA-D6C494F8091E}"/>
-              </a:ext>
-              <a:ext uri="{C183D7F6-B498-43B3-948B-1728B52AA6E4}">
-                <adec:decorative xmlns:adec="http://schemas.microsoft.com/office/drawing/2017/decorative" val="1"/>
-              </a:ext>
-            </a:extLst>
-          </p:cNvPr>
-          <p:cNvSpPr>
-            <a:spLocks noGrp="1" noRot="1" noChangeAspect="1" noMove="1" noResize="1" noEditPoints="1" noAdjustHandles="1" noChangeArrowheads="1" noChangeShapeType="1" noTextEdit="1"/>
-          </p:cNvSpPr>
-          <p:nvPr>
-            <p:extLst>
-              <p:ext uri="{386F3935-93C4-4BCD-93E2-E3B085C9AB24}">
-                <p16:designElem xmlns:p16="http://schemas.microsoft.com/office/powerpoint/2015/main" val="1"/>
-              </p:ext>
-            </p:extLst>
-          </p:nvPr>
-        </p:nvSpPr>
-        <p:spPr bwMode="ltGray">
-          <a:xfrm>
-            <a:off x="336883" y="321176"/>
-            <a:ext cx="7174247" cy="5896743"/>
-          </a:xfrm>
-          <a:prstGeom prst="rect">
-            <a:avLst/>
-          </a:prstGeom>
-          <a:solidFill>
-            <a:schemeClr val="tx1">
-              <a:alpha val="15000"/>
-            </a:schemeClr>
-          </a:solidFill>
-          <a:ln w="127000" cap="sq" cmpd="thinThick">
-            <a:solidFill>
-              <a:schemeClr val="tx1">
-                <a:alpha val="10000"/>
-              </a:schemeClr>
-            </a:solidFill>
-          </a:ln>
-        </p:spPr>
-        <p:style>
-          <a:lnRef idx="2">
-            <a:schemeClr val="accent1">
-              <a:shade val="50000"/>
-            </a:schemeClr>
-          </a:lnRef>
-          <a:fillRef idx="1">
-            <a:schemeClr val="accent1"/>
-          </a:fillRef>
-          <a:effectRef idx="0">
-            <a:schemeClr val="accent1"/>
-          </a:effectRef>
-          <a:fontRef idx="minor">
-            <a:schemeClr val="lt1"/>
-          </a:fontRef>
-        </p:style>
-        <p:txBody>
-          <a:bodyPr rtlCol="0" anchor="ctr"/>
-          <a:lstStyle/>
-          <a:p>
-            <a:pPr algn="ctr"/>
-            <a:endParaRPr lang="en-US"/>
-          </a:p>
-        </p:txBody>
-      </p:sp>
-      <p:sp>
-        <p:nvSpPr>
-          <p:cNvPr id="2" name="Title 1">
-            <a:extLst>
-              <a:ext uri="{FF2B5EF4-FFF2-40B4-BE49-F238E27FC236}">
-                <a16:creationId xmlns:a16="http://schemas.microsoft.com/office/drawing/2014/main" id="{E9BED19B-D4A8-4B47-93EB-FBF834A82C6E}"/>
+                <a16:creationId xmlns:a16="http://schemas.microsoft.com/office/drawing/2014/main" id="{33E7DC27-A5F9-47F9-A216-713460D598EB}"/>
               </a:ext>
             </a:extLst>
           </p:cNvPr>
@@ -5716,18 +6462,121 @@
         </p:nvSpPr>
         <p:spPr>
           <a:xfrm>
-            <a:off x="821516" y="640263"/>
-            <a:ext cx="6204984" cy="1344975"/>
+            <a:off x="609600" y="971550"/>
+            <a:ext cx="10972800" cy="876300"/>
           </a:xfrm>
+          <a:prstGeom prst="rect">
+            <a:avLst/>
+          </a:prstGeom>
+          <a:noFill/>
+          <a:ln w="0">
+            <a:noFill/>
+          </a:ln>
         </p:spPr>
         <p:txBody>
-          <a:bodyPr>
-            <a:normAutofit/>
+          <a:bodyPr lIns="0" tIns="0" rIns="0" bIns="0">
+            <a:noAutofit/>
           </a:bodyPr>
-          <a:lstStyle/>
+          <a:lstStyle>
+            <a:lvl1pPr>
+              <a:defRPr sz="3300" b="1">
+                <a:solidFill>
+                  <a:srgbClr val="002855"/>
+                </a:solidFill>
+                <a:latin typeface="Arial"/>
+                <a:ea typeface="Arial"/>
+                <a:cs typeface="Arial"/>
+              </a:defRPr>
+            </a:lvl1pPr>
+            <a:lvl2pPr>
+              <a:defRPr sz="3300" b="1">
+                <a:solidFill>
+                  <a:srgbClr val="002855"/>
+                </a:solidFill>
+                <a:latin typeface="Arial"/>
+                <a:ea typeface="Arial"/>
+                <a:cs typeface="Arial"/>
+              </a:defRPr>
+            </a:lvl2pPr>
+            <a:lvl3pPr>
+              <a:defRPr sz="3300" b="1">
+                <a:solidFill>
+                  <a:srgbClr val="002855"/>
+                </a:solidFill>
+                <a:latin typeface="Arial"/>
+                <a:ea typeface="Arial"/>
+                <a:cs typeface="Arial"/>
+              </a:defRPr>
+            </a:lvl3pPr>
+            <a:lvl4pPr>
+              <a:defRPr sz="3300" b="1">
+                <a:solidFill>
+                  <a:srgbClr val="002855"/>
+                </a:solidFill>
+                <a:latin typeface="Arial"/>
+                <a:ea typeface="Arial"/>
+                <a:cs typeface="Arial"/>
+              </a:defRPr>
+            </a:lvl4pPr>
+            <a:lvl5pPr>
+              <a:defRPr sz="3300" b="1">
+                <a:solidFill>
+                  <a:srgbClr val="002855"/>
+                </a:solidFill>
+                <a:latin typeface="Arial"/>
+                <a:ea typeface="Arial"/>
+                <a:cs typeface="Arial"/>
+              </a:defRPr>
+            </a:lvl5pPr>
+            <a:lvl6pPr>
+              <a:defRPr sz="3300" b="1">
+                <a:solidFill>
+                  <a:srgbClr val="002855"/>
+                </a:solidFill>
+                <a:latin typeface="Arial"/>
+                <a:ea typeface="Arial"/>
+                <a:cs typeface="Arial"/>
+              </a:defRPr>
+            </a:lvl6pPr>
+            <a:lvl7pPr>
+              <a:defRPr sz="3300" b="1">
+                <a:solidFill>
+                  <a:srgbClr val="002855"/>
+                </a:solidFill>
+                <a:latin typeface="Arial"/>
+                <a:ea typeface="Arial"/>
+                <a:cs typeface="Arial"/>
+              </a:defRPr>
+            </a:lvl7pPr>
+            <a:lvl8pPr>
+              <a:defRPr sz="3300" b="1">
+                <a:solidFill>
+                  <a:srgbClr val="002855"/>
+                </a:solidFill>
+                <a:latin typeface="Arial"/>
+                <a:ea typeface="Arial"/>
+                <a:cs typeface="Arial"/>
+              </a:defRPr>
+            </a:lvl8pPr>
+            <a:lvl9pPr>
+              <a:defRPr sz="3300" b="1">
+                <a:solidFill>
+                  <a:srgbClr val="002855"/>
+                </a:solidFill>
+                <a:latin typeface="Arial"/>
+                <a:ea typeface="Arial"/>
+                <a:cs typeface="Arial"/>
+              </a:defRPr>
+            </a:lvl9pPr>
+          </a:lstStyle>
           <a:p>
             <a:r>
-              <a:rPr lang="en-US" sz="4000" dirty="0"/>
+              <a:rPr lang="en-US" sz="3300" b="1">
+                <a:solidFill>
+                  <a:srgbClr val="002855"/>
+                </a:solidFill>
+                <a:latin typeface="Arial"/>
+              </a:rPr>
               <a:t>A random experiment</a:t>
             </a:r>
           </a:p>
@@ -5745,47 +6594,105 @@
           <p:cNvSpPr>
             <a:spLocks noGrp="1"/>
           </p:cNvSpPr>
-          <p:nvPr>
-            <p:ph idx="1"/>
-          </p:nvPr>
+          <p:nvPr/>
         </p:nvSpPr>
         <p:spPr>
           <a:xfrm>
-            <a:off x="821515" y="2121762"/>
-            <a:ext cx="6204984" cy="3626917"/>
+            <a:off x="609600" y="2095500"/>
+            <a:ext cx="6096000" cy="4064000"/>
           </a:xfrm>
         </p:spPr>
         <p:txBody>
-          <a:bodyPr>
-            <a:normAutofit/>
+          <a:bodyPr lIns="0" rIns="0" tIns="0" bIns="0" anchor="t">
+            <a:noAutofit/>
           </a:bodyPr>
           <a:lstStyle/>
           <a:p>
+            <a:pPr>
+              <a:defRPr sz="2200">
+                <a:solidFill>
+                  <a:srgbClr val="000000"/>
+                </a:solidFill>
+                <a:latin typeface="Arial"/>
+              </a:defRPr>
+            </a:pPr>
             <a:r>
-              <a:rPr lang="en-US" sz="2400"/>
+              <a:rPr lang="en-US" sz="2200">
+                <a:solidFill>
+                  <a:srgbClr val="000000"/>
+                </a:solidFill>
+              </a:rPr>
               <a:t>Random experiment = outcome cannot be predicted</a:t>
             </a:r>
           </a:p>
           <a:p>
+            <a:pPr>
+              <a:defRPr sz="2200">
+                <a:solidFill>
+                  <a:srgbClr val="000000"/>
+                </a:solidFill>
+                <a:latin typeface="Arial"/>
+              </a:defRPr>
+            </a:pPr>
             <a:r>
-              <a:rPr lang="en-US" sz="2400"/>
+              <a:rPr lang="en-US" sz="2200">
+                <a:solidFill>
+                  <a:srgbClr val="000000"/>
+                </a:solidFill>
+              </a:rPr>
               <a:t>Example: Bow and arrows (2d target)</a:t>
             </a:r>
           </a:p>
           <a:p>
+            <a:pPr>
+              <a:defRPr sz="2200">
+                <a:solidFill>
+                  <a:srgbClr val="000000"/>
+                </a:solidFill>
+                <a:latin typeface="Arial"/>
+              </a:defRPr>
+            </a:pPr>
             <a:r>
-              <a:rPr lang="en-US" sz="2400"/>
+              <a:rPr lang="en-US" sz="2200">
+                <a:solidFill>
+                  <a:srgbClr val="000000"/>
+                </a:solidFill>
+              </a:rPr>
               <a:t>Outcomes and their probabilities = weights (how often do we observe an outcome?)</a:t>
             </a:r>
           </a:p>
           <a:p>
+            <a:pPr>
+              <a:defRPr sz="2200">
+                <a:solidFill>
+                  <a:srgbClr val="000000"/>
+                </a:solidFill>
+                <a:latin typeface="Arial"/>
+              </a:defRPr>
+            </a:pPr>
             <a:r>
-              <a:rPr lang="en-US" sz="2400"/>
+              <a:rPr lang="en-US" sz="2200">
+                <a:solidFill>
+                  <a:srgbClr val="000000"/>
+                </a:solidFill>
+              </a:rPr>
               <a:t>Fit a 2D function into the point on the target and look at the slice – it is a Gaussian bell. </a:t>
             </a:r>
           </a:p>
           <a:p>
-            <a:endParaRPr lang="en-US" sz="2400"/>
+            <a:pPr>
+              <a:defRPr sz="2200">
+                <a:solidFill>
+                  <a:srgbClr val="000000"/>
+                </a:solidFill>
+                <a:latin typeface="Arial"/>
+              </a:defRPr>
+            </a:pPr>
+            <a:endParaRPr lang="en-US" sz="2200">
+              <a:solidFill>
+                <a:srgbClr val="000000"/>
+              </a:solidFill>
+            </a:endParaRPr>
           </a:p>
         </p:txBody>
       </p:sp>
@@ -5817,8 +6724,8 @@
         </p:blipFill>
         <p:spPr>
           <a:xfrm>
-            <a:off x="8315927" y="637397"/>
-            <a:ext cx="3037873" cy="2286000"/>
+            <a:off x="7436288" y="2095500"/>
+            <a:ext cx="2158772" cy="1624476"/>
           </a:xfrm>
           <a:prstGeom prst="rect">
             <a:avLst/>
@@ -5853,60 +6760,14 @@
         </p:blipFill>
         <p:spPr>
           <a:xfrm>
-            <a:off x="7995762" y="3122422"/>
-            <a:ext cx="4042410" cy="3233928"/>
+            <a:off x="7208773" y="3861407"/>
+            <a:ext cx="2872616" cy="2298093"/>
           </a:xfrm>
           <a:prstGeom prst="rect">
             <a:avLst/>
           </a:prstGeom>
         </p:spPr>
       </p:pic>
-      <p:sp>
-        <p:nvSpPr>
-          <p:cNvPr id="4" name="Slide Number Placeholder 3">
-            <a:extLst>
-              <a:ext uri="{FF2B5EF4-FFF2-40B4-BE49-F238E27FC236}">
-                <a16:creationId xmlns:a16="http://schemas.microsoft.com/office/drawing/2014/main" id="{E48D008C-59DA-4EF1-AC50-E312B930813D}"/>
-              </a:ext>
-            </a:extLst>
-          </p:cNvPr>
-          <p:cNvSpPr>
-            <a:spLocks noGrp="1"/>
-          </p:cNvSpPr>
-          <p:nvPr>
-            <p:ph type="sldNum" sz="quarter" idx="12"/>
-          </p:nvPr>
-        </p:nvSpPr>
-        <p:spPr>
-          <a:xfrm>
-            <a:off x="8610600" y="6356350"/>
-            <a:ext cx="2743200" cy="365125"/>
-          </a:xfrm>
-        </p:spPr>
-        <p:txBody>
-          <a:bodyPr>
-            <a:normAutofit/>
-          </a:bodyPr>
-          <a:lstStyle/>
-          <a:p>
-            <a:pPr>
-              <a:spcAft>
-                <a:spcPts val="600"/>
-              </a:spcAft>
-            </a:pPr>
-            <a:fld id="{4A609AEB-AA43-4F11-B5F7-17FA2DC3DBF4}" type="slidenum">
-              <a:rPr lang="en-US" smtClean="0"/>
-              <a:pPr>
-                <a:spcAft>
-                  <a:spcPts val="600"/>
-                </a:spcAft>
-              </a:pPr>
-              <a:t>5</a:t>
-            </a:fld>
-            <a:endParaRPr lang="en-US" dirty="0"/>
-          </a:p>
-        </p:txBody>
-      </p:sp>
     </p:spTree>
     <p:extLst>
       <p:ext uri="{BB962C8B-B14F-4D97-AF65-F5344CB8AC3E}">
@@ -5921,7 +6782,7 @@
 </file>
 
 <file path=ppt/slides/slide6.xml><?xml version="1.0" encoding="utf-8"?>
-<p:sld xmlns:a="http://schemas.openxmlformats.org/drawingml/2006/main" xmlns:r="http://schemas.openxmlformats.org/officeDocument/2006/relationships" xmlns:p="http://schemas.openxmlformats.org/presentationml/2006/main">
+<p:sld xmlns:a="http://schemas.openxmlformats.org/drawingml/2006/main" xmlns:r="http://schemas.openxmlformats.org/officeDocument/2006/relationships" xmlns:p="http://schemas.openxmlformats.org/presentationml/2006/main" showMasterSp="1">
   <p:cSld>
     <p:spTree>
       <p:nvGrpSpPr>
@@ -5939,10 +6800,10 @@
       </p:grpSpPr>
       <p:sp>
         <p:nvSpPr>
-          <p:cNvPr id="2" name="Title 1">
+          <p:cNvPr id="103" name="WVU lesson title">
             <a:extLst>
               <a:ext uri="{FF2B5EF4-FFF2-40B4-BE49-F238E27FC236}">
-                <a16:creationId xmlns:a16="http://schemas.microsoft.com/office/drawing/2014/main" id="{B5A4B0D9-C283-430D-9489-746FEEFED9C7}"/>
+                <a16:creationId xmlns:a16="http://schemas.microsoft.com/office/drawing/2014/main" id="{33E7DC27-A5F9-47F9-A216-713460D598EB}"/>
               </a:ext>
             </a:extLst>
           </p:cNvPr>
@@ -5955,18 +6816,121 @@
         </p:nvSpPr>
         <p:spPr>
           <a:xfrm>
-            <a:off x="838200" y="136525"/>
-            <a:ext cx="10515600" cy="866107"/>
+            <a:off x="609600" y="971550"/>
+            <a:ext cx="10972800" cy="876300"/>
           </a:xfrm>
+          <a:prstGeom prst="rect">
+            <a:avLst/>
+          </a:prstGeom>
+          <a:noFill/>
+          <a:ln w="0">
+            <a:noFill/>
+          </a:ln>
         </p:spPr>
         <p:txBody>
-          <a:bodyPr>
-            <a:normAutofit/>
+          <a:bodyPr lIns="0" tIns="0" rIns="0" bIns="0">
+            <a:noAutofit/>
           </a:bodyPr>
-          <a:lstStyle/>
+          <a:lstStyle>
+            <a:lvl1pPr>
+              <a:defRPr sz="3300" b="1">
+                <a:solidFill>
+                  <a:srgbClr val="002855"/>
+                </a:solidFill>
+                <a:latin typeface="Arial"/>
+                <a:ea typeface="Arial"/>
+                <a:cs typeface="Arial"/>
+              </a:defRPr>
+            </a:lvl1pPr>
+            <a:lvl2pPr>
+              <a:defRPr sz="3300" b="1">
+                <a:solidFill>
+                  <a:srgbClr val="002855"/>
+                </a:solidFill>
+                <a:latin typeface="Arial"/>
+                <a:ea typeface="Arial"/>
+                <a:cs typeface="Arial"/>
+              </a:defRPr>
+            </a:lvl2pPr>
+            <a:lvl3pPr>
+              <a:defRPr sz="3300" b="1">
+                <a:solidFill>
+                  <a:srgbClr val="002855"/>
+                </a:solidFill>
+                <a:latin typeface="Arial"/>
+                <a:ea typeface="Arial"/>
+                <a:cs typeface="Arial"/>
+              </a:defRPr>
+            </a:lvl3pPr>
+            <a:lvl4pPr>
+              <a:defRPr sz="3300" b="1">
+                <a:solidFill>
+                  <a:srgbClr val="002855"/>
+                </a:solidFill>
+                <a:latin typeface="Arial"/>
+                <a:ea typeface="Arial"/>
+                <a:cs typeface="Arial"/>
+              </a:defRPr>
+            </a:lvl4pPr>
+            <a:lvl5pPr>
+              <a:defRPr sz="3300" b="1">
+                <a:solidFill>
+                  <a:srgbClr val="002855"/>
+                </a:solidFill>
+                <a:latin typeface="Arial"/>
+                <a:ea typeface="Arial"/>
+                <a:cs typeface="Arial"/>
+              </a:defRPr>
+            </a:lvl5pPr>
+            <a:lvl6pPr>
+              <a:defRPr sz="3300" b="1">
+                <a:solidFill>
+                  <a:srgbClr val="002855"/>
+                </a:solidFill>
+                <a:latin typeface="Arial"/>
+                <a:ea typeface="Arial"/>
+                <a:cs typeface="Arial"/>
+              </a:defRPr>
+            </a:lvl6pPr>
+            <a:lvl7pPr>
+              <a:defRPr sz="3300" b="1">
+                <a:solidFill>
+                  <a:srgbClr val="002855"/>
+                </a:solidFill>
+                <a:latin typeface="Arial"/>
+                <a:ea typeface="Arial"/>
+                <a:cs typeface="Arial"/>
+              </a:defRPr>
+            </a:lvl7pPr>
+            <a:lvl8pPr>
+              <a:defRPr sz="3300" b="1">
+                <a:solidFill>
+                  <a:srgbClr val="002855"/>
+                </a:solidFill>
+                <a:latin typeface="Arial"/>
+                <a:ea typeface="Arial"/>
+                <a:cs typeface="Arial"/>
+              </a:defRPr>
+            </a:lvl8pPr>
+            <a:lvl9pPr>
+              <a:defRPr sz="3300" b="1">
+                <a:solidFill>
+                  <a:srgbClr val="002855"/>
+                </a:solidFill>
+                <a:latin typeface="Arial"/>
+                <a:ea typeface="Arial"/>
+                <a:cs typeface="Arial"/>
+              </a:defRPr>
+            </a:lvl9pPr>
+          </a:lstStyle>
           <a:p>
             <a:r>
-              <a:rPr lang="en-US" dirty="0"/>
+              <a:rPr lang="en-US" sz="3300" b="1">
+                <a:solidFill>
+                  <a:srgbClr val="002855"/>
+                </a:solidFill>
+                <a:latin typeface="Arial"/>
+              </a:rPr>
               <a:t>Gaussian probability density function</a:t>
             </a:r>
           </a:p>
@@ -5986,14 +6950,12 @@
               <p:cNvSpPr>
                 <a:spLocks noGrp="1"/>
               </p:cNvSpPr>
-              <p:nvPr>
-                <p:ph idx="1"/>
-              </p:nvPr>
+              <p:nvPr/>
             </p:nvSpPr>
             <p:spPr>
               <a:xfrm>
-                <a:off x="838200" y="1175924"/>
-                <a:ext cx="10515600" cy="5180426"/>
+                <a:off x="1129662" y="2095500"/>
+                <a:ext cx="9932676" cy="4064000"/>
               </a:xfrm>
             </p:spPr>
             <p:txBody>
@@ -6658,14 +7620,12 @@
               <p:cNvSpPr>
                 <a:spLocks noGrp="1" noRot="1" noChangeAspect="1" noMove="1" noResize="1" noEditPoints="1" noAdjustHandles="1" noChangeArrowheads="1" noChangeShapeType="1" noTextEdit="1"/>
               </p:cNvSpPr>
-              <p:nvPr>
-                <p:ph idx="1"/>
-              </p:nvPr>
+              <p:nvPr/>
             </p:nvSpPr>
             <p:spPr>
               <a:xfrm>
-                <a:off x="838200" y="1175924"/>
-                <a:ext cx="10515600" cy="5180426"/>
+                <a:off x="1129662" y="2095500"/>
+                <a:ext cx="9932676" cy="4064000"/>
               </a:xfrm>
               <a:blipFill>
                 <a:blip r:embed="rId2"/>
@@ -6689,35 +7649,6 @@
           </p:sp>
         </mc:Fallback>
       </mc:AlternateContent>
-      <p:sp>
-        <p:nvSpPr>
-          <p:cNvPr id="4" name="Slide Number Placeholder 3">
-            <a:extLst>
-              <a:ext uri="{FF2B5EF4-FFF2-40B4-BE49-F238E27FC236}">
-                <a16:creationId xmlns:a16="http://schemas.microsoft.com/office/drawing/2014/main" id="{3B564C2B-D8B3-419E-AA59-293FD91246C3}"/>
-              </a:ext>
-            </a:extLst>
-          </p:cNvPr>
-          <p:cNvSpPr>
-            <a:spLocks noGrp="1"/>
-          </p:cNvSpPr>
-          <p:nvPr>
-            <p:ph type="sldNum" sz="quarter" idx="12"/>
-          </p:nvPr>
-        </p:nvSpPr>
-        <p:spPr/>
-        <p:txBody>
-          <a:bodyPr/>
-          <a:lstStyle/>
-          <a:p>
-            <a:fld id="{4A609AEB-AA43-4F11-B5F7-17FA2DC3DBF4}" type="slidenum">
-              <a:rPr lang="en-US" smtClean="0"/>
-              <a:t>6</a:t>
-            </a:fld>
-            <a:endParaRPr lang="en-US"/>
-          </a:p>
-        </p:txBody>
-      </p:sp>
     </p:spTree>
     <p:extLst>
       <p:ext uri="{BB962C8B-B14F-4D97-AF65-F5344CB8AC3E}">
@@ -6732,204 +7663,110 @@
 </file>
 
 <file path=ppt/theme/theme1.xml><?xml version="1.0" encoding="utf-8"?>
-<a:theme xmlns:a="http://schemas.openxmlformats.org/drawingml/2006/main" name="Office Theme">
+<a:theme xmlns:a="http://schemas.openxmlformats.org/drawingml/2006/main" name="ChatGPT">
   <a:themeElements>
-    <a:clrScheme name="Office">
+    <a:clrScheme name="ChatGPT">
       <a:dk1>
-        <a:sysClr val="windowText" lastClr="000000"/>
+        <a:srgbClr val="000000"/>
       </a:dk1>
       <a:lt1>
-        <a:sysClr val="window" lastClr="FFFFFF"/>
+        <a:srgbClr val="FFFFFF"/>
       </a:lt1>
       <a:dk2>
-        <a:srgbClr val="44546A"/>
+        <a:srgbClr val="0E2841"/>
       </a:dk2>
       <a:lt2>
-        <a:srgbClr val="E7E6E6"/>
+        <a:srgbClr val="E8E8E8"/>
       </a:lt2>
       <a:accent1>
-        <a:srgbClr val="4472C4"/>
+        <a:srgbClr val="156082"/>
       </a:accent1>
       <a:accent2>
-        <a:srgbClr val="ED7D31"/>
+        <a:srgbClr val="E97132"/>
       </a:accent2>
       <a:accent3>
-        <a:srgbClr val="A5A5A5"/>
+        <a:srgbClr val="196B24"/>
       </a:accent3>
       <a:accent4>
-        <a:srgbClr val="FFC000"/>
+        <a:srgbClr val="0F9ED5"/>
       </a:accent4>
       <a:accent5>
-        <a:srgbClr val="5B9BD5"/>
+        <a:srgbClr val="A02B93"/>
       </a:accent5>
       <a:accent6>
-        <a:srgbClr val="70AD47"/>
+        <a:srgbClr val="4EA72E"/>
       </a:accent6>
       <a:hlink>
-        <a:srgbClr val="0563C1"/>
+        <a:srgbClr val="467886"/>
       </a:hlink>
       <a:folHlink>
-        <a:srgbClr val="954F72"/>
+        <a:srgbClr val="96607D"/>
       </a:folHlink>
     </a:clrScheme>
     <a:fontScheme name="Office">
       <a:majorFont>
-        <a:latin typeface="Calibri Light" panose="020F0302020204030204"/>
-        <a:ea typeface=""/>
-        <a:cs typeface=""/>
-        <a:font script="Jpan" typeface="游ゴシック Light"/>
-        <a:font script="Hang" typeface="맑은 고딕"/>
-        <a:font script="Hans" typeface="等线 Light"/>
-        <a:font script="Hant" typeface="新細明體"/>
-        <a:font script="Arab" typeface="Times New Roman"/>
-        <a:font script="Hebr" typeface="Times New Roman"/>
-        <a:font script="Thai" typeface="Angsana New"/>
-        <a:font script="Ethi" typeface="Nyala"/>
-        <a:font script="Beng" typeface="Vrinda"/>
-        <a:font script="Gujr" typeface="Shruti"/>
-        <a:font script="Khmr" typeface="MoolBoran"/>
-        <a:font script="Knda" typeface="Tunga"/>
-        <a:font script="Guru" typeface="Raavi"/>
-        <a:font script="Cans" typeface="Euphemia"/>
-        <a:font script="Cher" typeface="Plantagenet Cherokee"/>
-        <a:font script="Yiii" typeface="Microsoft Yi Baiti"/>
-        <a:font script="Tibt" typeface="Microsoft Himalaya"/>
-        <a:font script="Thaa" typeface="MV Boli"/>
-        <a:font script="Deva" typeface="Mangal"/>
-        <a:font script="Telu" typeface="Gautami"/>
-        <a:font script="Taml" typeface="Latha"/>
-        <a:font script="Syrc" typeface="Estrangelo Edessa"/>
-        <a:font script="Orya" typeface="Kalinga"/>
-        <a:font script="Mlym" typeface="Kartika"/>
-        <a:font script="Laoo" typeface="DokChampa"/>
-        <a:font script="Sinh" typeface="Iskoola Pota"/>
-        <a:font script="Mong" typeface="Mongolian Baiti"/>
-        <a:font script="Viet" typeface="Times New Roman"/>
-        <a:font script="Uigh" typeface="Microsoft Uighur"/>
-        <a:font script="Geor" typeface="Sylfaen"/>
-        <a:font script="Armn" typeface="Arial"/>
-        <a:font script="Bugi" typeface="Leelawadee UI"/>
-        <a:font script="Bopo" typeface="Microsoft JhengHei"/>
-        <a:font script="Java" typeface="Javanese Text"/>
-        <a:font script="Lisu" typeface="Segoe UI"/>
-        <a:font script="Mymr" typeface="Myanmar Text"/>
-        <a:font script="Nkoo" typeface="Ebrima"/>
-        <a:font script="Olck" typeface="Nirmala UI"/>
-        <a:font script="Osma" typeface="Ebrima"/>
-        <a:font script="Phag" typeface="Phagspa"/>
-        <a:font script="Syrn" typeface="Estrangelo Edessa"/>
-        <a:font script="Syrj" typeface="Estrangelo Edessa"/>
-        <a:font script="Syre" typeface="Estrangelo Edessa"/>
-        <a:font script="Sora" typeface="Nirmala UI"/>
-        <a:font script="Tale" typeface="Microsoft Tai Le"/>
-        <a:font script="Talu" typeface="Microsoft New Tai Lue"/>
-        <a:font script="Tfng" typeface="Ebrima"/>
+        <a:latin typeface="Arial"/>
+        <a:ea typeface="Arial"/>
+        <a:cs typeface="Arial"/>
       </a:majorFont>
       <a:minorFont>
-        <a:latin typeface="Calibri" panose="020F0502020204030204"/>
-        <a:ea typeface=""/>
-        <a:cs typeface=""/>
-        <a:font script="Jpan" typeface="游ゴシック"/>
-        <a:font script="Hang" typeface="맑은 고딕"/>
-        <a:font script="Hans" typeface="等线"/>
-        <a:font script="Hant" typeface="新細明體"/>
-        <a:font script="Arab" typeface="Arial"/>
-        <a:font script="Hebr" typeface="Arial"/>
-        <a:font script="Thai" typeface="Cordia New"/>
-        <a:font script="Ethi" typeface="Nyala"/>
-        <a:font script="Beng" typeface="Vrinda"/>
-        <a:font script="Gujr" typeface="Shruti"/>
-        <a:font script="Khmr" typeface="DaunPenh"/>
-        <a:font script="Knda" typeface="Tunga"/>
-        <a:font script="Guru" typeface="Raavi"/>
-        <a:font script="Cans" typeface="Euphemia"/>
-        <a:font script="Cher" typeface="Plantagenet Cherokee"/>
-        <a:font script="Yiii" typeface="Microsoft Yi Baiti"/>
-        <a:font script="Tibt" typeface="Microsoft Himalaya"/>
-        <a:font script="Thaa" typeface="MV Boli"/>
-        <a:font script="Deva" typeface="Mangal"/>
-        <a:font script="Telu" typeface="Gautami"/>
-        <a:font script="Taml" typeface="Latha"/>
-        <a:font script="Syrc" typeface="Estrangelo Edessa"/>
-        <a:font script="Orya" typeface="Kalinga"/>
-        <a:font script="Mlym" typeface="Kartika"/>
-        <a:font script="Laoo" typeface="DokChampa"/>
-        <a:font script="Sinh" typeface="Iskoola Pota"/>
-        <a:font script="Mong" typeface="Mongolian Baiti"/>
-        <a:font script="Viet" typeface="Arial"/>
-        <a:font script="Uigh" typeface="Microsoft Uighur"/>
-        <a:font script="Geor" typeface="Sylfaen"/>
-        <a:font script="Armn" typeface="Arial"/>
-        <a:font script="Bugi" typeface="Leelawadee UI"/>
-        <a:font script="Bopo" typeface="Microsoft JhengHei"/>
-        <a:font script="Java" typeface="Javanese Text"/>
-        <a:font script="Lisu" typeface="Segoe UI"/>
-        <a:font script="Mymr" typeface="Myanmar Text"/>
-        <a:font script="Nkoo" typeface="Ebrima"/>
-        <a:font script="Olck" typeface="Nirmala UI"/>
-        <a:font script="Osma" typeface="Ebrima"/>
-        <a:font script="Phag" typeface="Phagspa"/>
-        <a:font script="Syrn" typeface="Estrangelo Edessa"/>
-        <a:font script="Syrj" typeface="Estrangelo Edessa"/>
-        <a:font script="Syre" typeface="Estrangelo Edessa"/>
-        <a:font script="Sora" typeface="Nirmala UI"/>
-        <a:font script="Tale" typeface="Microsoft Tai Le"/>
-        <a:font script="Talu" typeface="Microsoft New Tai Lue"/>
-        <a:font script="Tfng" typeface="Ebrima"/>
+        <a:latin typeface="Arial"/>
+        <a:ea typeface="Arial"/>
+        <a:cs typeface="Arial"/>
       </a:minorFont>
     </a:fontScheme>
-    <a:fmtScheme name="Office">
+    <a:fmtScheme name="ChatGPT">
       <a:fillStyleLst>
         <a:solidFill>
           <a:schemeClr val="phClr"/>
         </a:solidFill>
-        <a:gradFill rotWithShape="1">
+        <a:gradFill>
           <a:gsLst>
             <a:gs pos="0">
               <a:schemeClr val="phClr">
+                <a:tint val="67000"/>
                 <a:lumMod val="110000"/>
                 <a:satMod val="105000"/>
-                <a:tint val="67000"/>
               </a:schemeClr>
             </a:gs>
             <a:gs pos="50000">
               <a:schemeClr val="phClr">
+                <a:tint val="73000"/>
                 <a:lumMod val="105000"/>
                 <a:satMod val="103000"/>
-                <a:tint val="73000"/>
               </a:schemeClr>
             </a:gs>
             <a:gs pos="100000">
               <a:schemeClr val="phClr">
+                <a:tint val="81000"/>
                 <a:lumMod val="105000"/>
                 <a:satMod val="109000"/>
-                <a:tint val="81000"/>
               </a:schemeClr>
             </a:gs>
           </a:gsLst>
           <a:lin ang="5400000" scaled="0"/>
         </a:gradFill>
-        <a:gradFill rotWithShape="1">
+        <a:gradFill>
           <a:gsLst>
             <a:gs pos="0">
               <a:schemeClr val="phClr">
+                <a:tint val="94000"/>
+                <a:lumMod val="102000"/>
                 <a:satMod val="103000"/>
-                <a:lumMod val="102000"/>
-                <a:tint val="94000"/>
               </a:schemeClr>
             </a:gs>
             <a:gs pos="50000">
               <a:schemeClr val="phClr">
+                <a:shade val="100000"/>
+                <a:lumMod val="100000"/>
                 <a:satMod val="110000"/>
-                <a:lumMod val="100000"/>
-                <a:shade val="100000"/>
               </a:schemeClr>
             </a:gs>
             <a:gs pos="100000">
               <a:schemeClr val="phClr">
+                <a:shade val="78000"/>
                 <a:lumMod val="99000"/>
                 <a:satMod val="120000"/>
-                <a:shade val="78000"/>
               </a:schemeClr>
             </a:gs>
           </a:gsLst>
@@ -6937,26 +7774,23 @@
         </a:gradFill>
       </a:fillStyleLst>
       <a:lnStyleLst>
-        <a:ln w="6350" cap="flat" cmpd="sng" algn="ctr">
+        <a:ln w="12700">
           <a:solidFill>
             <a:schemeClr val="phClr"/>
           </a:solidFill>
           <a:prstDash val="solid"/>
-          <a:miter lim="800000"/>
         </a:ln>
-        <a:ln w="12700" cap="flat" cmpd="sng" algn="ctr">
+        <a:ln w="19050">
           <a:solidFill>
             <a:schemeClr val="phClr"/>
           </a:solidFill>
           <a:prstDash val="solid"/>
-          <a:miter lim="800000"/>
         </a:ln>
-        <a:ln w="19050" cap="flat" cmpd="sng" algn="ctr">
+        <a:ln w="25400">
           <a:solidFill>
             <a:schemeClr val="phClr"/>
           </a:solidFill>
           <a:prstDash val="solid"/>
-          <a:miter lim="800000"/>
         </a:ln>
       </a:lnStyleLst>
       <a:effectStyleLst>
@@ -6968,9 +7802,63 @@
         </a:effectStyle>
         <a:effectStyle>
           <a:effectLst>
-            <a:outerShdw blurRad="57150" dist="19050" dir="5400000" algn="ctr" rotWithShape="0">
+            <a:outerShdw blurRad="57150" dist="19050" dir="5400000">
               <a:srgbClr val="000000">
-                <a:alpha val="63000"/>
+                <a:alpha val="16000"/>
+              </a:srgbClr>
+            </a:outerShdw>
+          </a:effectLst>
+        </a:effectStyle>
+        <a:effectStyle>
+          <a:effectLst>
+            <a:outerShdw blurRad="19050" dist="9525" dir="5400000">
+              <a:srgbClr val="000000">
+                <a:alpha val="6000"/>
+              </a:srgbClr>
+            </a:outerShdw>
+          </a:effectLst>
+        </a:effectStyle>
+        <a:effectStyle>
+          <a:effectLst>
+            <a:outerShdw blurRad="28575" dist="9525" dir="5400000">
+              <a:srgbClr val="000000">
+                <a:alpha val="8000"/>
+              </a:srgbClr>
+            </a:outerShdw>
+          </a:effectLst>
+        </a:effectStyle>
+        <a:effectStyle>
+          <a:effectLst>
+            <a:outerShdw blurRad="57150" dist="19050" dir="5400000">
+              <a:srgbClr val="000000">
+                <a:alpha val="10000"/>
+              </a:srgbClr>
+            </a:outerShdw>
+          </a:effectLst>
+        </a:effectStyle>
+        <a:effectStyle>
+          <a:effectLst>
+            <a:outerShdw blurRad="114300" dist="38100" dir="5400000">
+              <a:srgbClr val="000000">
+                <a:alpha val="12000"/>
+              </a:srgbClr>
+            </a:outerShdw>
+          </a:effectLst>
+        </a:effectStyle>
+        <a:effectStyle>
+          <a:effectLst>
+            <a:outerShdw blurRad="171450" dist="57150" dir="5400000">
+              <a:srgbClr val="000000">
+                <a:alpha val="16000"/>
+              </a:srgbClr>
+            </a:outerShdw>
+          </a:effectLst>
+        </a:effectStyle>
+        <a:effectStyle>
+          <a:effectLst>
+            <a:outerShdw blurRad="266700" dist="95250" dir="5400000">
+              <a:srgbClr val="000000">
+                <a:alpha val="24000"/>
               </a:srgbClr>
             </a:outerShdw>
           </a:effectLst>
@@ -6986,22 +7874,22 @@
             <a:satMod val="170000"/>
           </a:schemeClr>
         </a:solidFill>
-        <a:gradFill rotWithShape="1">
+        <a:gradFill>
           <a:gsLst>
             <a:gs pos="0">
               <a:schemeClr val="phClr">
                 <a:tint val="93000"/>
-                <a:satMod val="150000"/>
                 <a:shade val="98000"/>
                 <a:lumMod val="102000"/>
+                <a:satMod val="150000"/>
               </a:schemeClr>
             </a:gs>
             <a:gs pos="50000">
               <a:schemeClr val="phClr">
                 <a:tint val="98000"/>
-                <a:satMod val="130000"/>
                 <a:shade val="90000"/>
                 <a:lumMod val="103000"/>
+                <a:satMod val="130000"/>
               </a:schemeClr>
             </a:gs>
             <a:gs pos="100000">
@@ -7020,211 +7908,117 @@
   <a:extraClrSchemeLst/>
   <a:extLst>
     <a:ext uri="{05A4C25C-085E-4340-85A3-A5531E510DB2}">
-      <thm15:themeFamily xmlns:thm15="http://schemas.microsoft.com/office/thememl/2012/main" name="Office Theme" id="{62F939B6-93AF-4DB8-9C6B-D6C7DFDC589F}" vid="{4A3C46E8-61CC-4603-A589-7422A47A8E4A}"/>
+      <thm15:themeFamily xmlns:thm15="http://schemas.microsoft.com/office/thememl/2012/main" name="slides-ready.pptx" id="{6D5A5D80-B59F-47FE-A006-FBFC2926142F}" vid="{69CEE3E8-36C9-43B0-A0FB-27FA92D72A34}"/>
     </a:ext>
   </a:extLst>
 </a:theme>
 </file>
 
 <file path=ppt/theme/theme2.xml><?xml version="1.0" encoding="utf-8"?>
-<a:theme xmlns:a="http://schemas.openxmlformats.org/drawingml/2006/main" name="Office Theme">
+<a:theme xmlns:a="http://schemas.openxmlformats.org/drawingml/2006/main" name="ChatGPT">
   <a:themeElements>
-    <a:clrScheme name="Office">
+    <a:clrScheme name="ChatGPT">
       <a:dk1>
-        <a:sysClr val="windowText" lastClr="000000"/>
+        <a:srgbClr val="000000"/>
       </a:dk1>
       <a:lt1>
-        <a:sysClr val="window" lastClr="FFFFFF"/>
+        <a:srgbClr val="FFFFFF"/>
       </a:lt1>
       <a:dk2>
-        <a:srgbClr val="44546A"/>
+        <a:srgbClr val="0E2841"/>
       </a:dk2>
       <a:lt2>
-        <a:srgbClr val="E7E6E6"/>
+        <a:srgbClr val="E8E8E8"/>
       </a:lt2>
       <a:accent1>
-        <a:srgbClr val="4472C4"/>
+        <a:srgbClr val="156082"/>
       </a:accent1>
       <a:accent2>
-        <a:srgbClr val="ED7D31"/>
+        <a:srgbClr val="E97132"/>
       </a:accent2>
       <a:accent3>
-        <a:srgbClr val="A5A5A5"/>
+        <a:srgbClr val="196B24"/>
       </a:accent3>
       <a:accent4>
-        <a:srgbClr val="FFC000"/>
+        <a:srgbClr val="0F9ED5"/>
       </a:accent4>
       <a:accent5>
-        <a:srgbClr val="5B9BD5"/>
+        <a:srgbClr val="A02B93"/>
       </a:accent5>
       <a:accent6>
-        <a:srgbClr val="70AD47"/>
+        <a:srgbClr val="4EA72E"/>
       </a:accent6>
       <a:hlink>
-        <a:srgbClr val="0563C1"/>
+        <a:srgbClr val="467886"/>
       </a:hlink>
       <a:folHlink>
-        <a:srgbClr val="954F72"/>
+        <a:srgbClr val="96607D"/>
       </a:folHlink>
     </a:clrScheme>
     <a:fontScheme name="Office">
       <a:majorFont>
-        <a:latin typeface="Calibri Light" panose="020F0302020204030204"/>
-        <a:ea typeface=""/>
-        <a:cs typeface=""/>
-        <a:font script="Jpan" typeface="游ゴシック Light"/>
-        <a:font script="Hang" typeface="맑은 고딕"/>
-        <a:font script="Hans" typeface="等线 Light"/>
-        <a:font script="Hant" typeface="新細明體"/>
-        <a:font script="Arab" typeface="Times New Roman"/>
-        <a:font script="Hebr" typeface="Times New Roman"/>
-        <a:font script="Thai" typeface="Angsana New"/>
-        <a:font script="Ethi" typeface="Nyala"/>
-        <a:font script="Beng" typeface="Vrinda"/>
-        <a:font script="Gujr" typeface="Shruti"/>
-        <a:font script="Khmr" typeface="MoolBoran"/>
-        <a:font script="Knda" typeface="Tunga"/>
-        <a:font script="Guru" typeface="Raavi"/>
-        <a:font script="Cans" typeface="Euphemia"/>
-        <a:font script="Cher" typeface="Plantagenet Cherokee"/>
-        <a:font script="Yiii" typeface="Microsoft Yi Baiti"/>
-        <a:font script="Tibt" typeface="Microsoft Himalaya"/>
-        <a:font script="Thaa" typeface="MV Boli"/>
-        <a:font script="Deva" typeface="Mangal"/>
-        <a:font script="Telu" typeface="Gautami"/>
-        <a:font script="Taml" typeface="Latha"/>
-        <a:font script="Syrc" typeface="Estrangelo Edessa"/>
-        <a:font script="Orya" typeface="Kalinga"/>
-        <a:font script="Mlym" typeface="Kartika"/>
-        <a:font script="Laoo" typeface="DokChampa"/>
-        <a:font script="Sinh" typeface="Iskoola Pota"/>
-        <a:font script="Mong" typeface="Mongolian Baiti"/>
-        <a:font script="Viet" typeface="Times New Roman"/>
-        <a:font script="Uigh" typeface="Microsoft Uighur"/>
-        <a:font script="Geor" typeface="Sylfaen"/>
-        <a:font script="Armn" typeface="Arial"/>
-        <a:font script="Bugi" typeface="Leelawadee UI"/>
-        <a:font script="Bopo" typeface="Microsoft JhengHei"/>
-        <a:font script="Java" typeface="Javanese Text"/>
-        <a:font script="Lisu" typeface="Segoe UI"/>
-        <a:font script="Mymr" typeface="Myanmar Text"/>
-        <a:font script="Nkoo" typeface="Ebrima"/>
-        <a:font script="Olck" typeface="Nirmala UI"/>
-        <a:font script="Osma" typeface="Ebrima"/>
-        <a:font script="Phag" typeface="Phagspa"/>
-        <a:font script="Syrn" typeface="Estrangelo Edessa"/>
-        <a:font script="Syrj" typeface="Estrangelo Edessa"/>
-        <a:font script="Syre" typeface="Estrangelo Edessa"/>
-        <a:font script="Sora" typeface="Nirmala UI"/>
-        <a:font script="Tale" typeface="Microsoft Tai Le"/>
-        <a:font script="Talu" typeface="Microsoft New Tai Lue"/>
-        <a:font script="Tfng" typeface="Ebrima"/>
+        <a:latin typeface="Arial"/>
+        <a:ea typeface="Arial"/>
+        <a:cs typeface="Arial"/>
       </a:majorFont>
       <a:minorFont>
-        <a:latin typeface="Calibri" panose="020F0502020204030204"/>
-        <a:ea typeface=""/>
-        <a:cs typeface=""/>
-        <a:font script="Jpan" typeface="游ゴシック"/>
-        <a:font script="Hang" typeface="맑은 고딕"/>
-        <a:font script="Hans" typeface="等线"/>
-        <a:font script="Hant" typeface="新細明體"/>
-        <a:font script="Arab" typeface="Arial"/>
-        <a:font script="Hebr" typeface="Arial"/>
-        <a:font script="Thai" typeface="Cordia New"/>
-        <a:font script="Ethi" typeface="Nyala"/>
-        <a:font script="Beng" typeface="Vrinda"/>
-        <a:font script="Gujr" typeface="Shruti"/>
-        <a:font script="Khmr" typeface="DaunPenh"/>
-        <a:font script="Knda" typeface="Tunga"/>
-        <a:font script="Guru" typeface="Raavi"/>
-        <a:font script="Cans" typeface="Euphemia"/>
-        <a:font script="Cher" typeface="Plantagenet Cherokee"/>
-        <a:font script="Yiii" typeface="Microsoft Yi Baiti"/>
-        <a:font script="Tibt" typeface="Microsoft Himalaya"/>
-        <a:font script="Thaa" typeface="MV Boli"/>
-        <a:font script="Deva" typeface="Mangal"/>
-        <a:font script="Telu" typeface="Gautami"/>
-        <a:font script="Taml" typeface="Latha"/>
-        <a:font script="Syrc" typeface="Estrangelo Edessa"/>
-        <a:font script="Orya" typeface="Kalinga"/>
-        <a:font script="Mlym" typeface="Kartika"/>
-        <a:font script="Laoo" typeface="DokChampa"/>
-        <a:font script="Sinh" typeface="Iskoola Pota"/>
-        <a:font script="Mong" typeface="Mongolian Baiti"/>
-        <a:font script="Viet" typeface="Arial"/>
-        <a:font script="Uigh" typeface="Microsoft Uighur"/>
-        <a:font script="Geor" typeface="Sylfaen"/>
-        <a:font script="Armn" typeface="Arial"/>
-        <a:font script="Bugi" typeface="Leelawadee UI"/>
-        <a:font script="Bopo" typeface="Microsoft JhengHei"/>
-        <a:font script="Java" typeface="Javanese Text"/>
-        <a:font script="Lisu" typeface="Segoe UI"/>
-        <a:font script="Mymr" typeface="Myanmar Text"/>
-        <a:font script="Nkoo" typeface="Ebrima"/>
-        <a:font script="Olck" typeface="Nirmala UI"/>
-        <a:font script="Osma" typeface="Ebrima"/>
-        <a:font script="Phag" typeface="Phagspa"/>
-        <a:font script="Syrn" typeface="Estrangelo Edessa"/>
-        <a:font script="Syrj" typeface="Estrangelo Edessa"/>
-        <a:font script="Syre" typeface="Estrangelo Edessa"/>
-        <a:font script="Sora" typeface="Nirmala UI"/>
-        <a:font script="Tale" typeface="Microsoft Tai Le"/>
-        <a:font script="Talu" typeface="Microsoft New Tai Lue"/>
-        <a:font script="Tfng" typeface="Ebrima"/>
+        <a:latin typeface="Arial"/>
+        <a:ea typeface="Arial"/>
+        <a:cs typeface="Arial"/>
       </a:minorFont>
     </a:fontScheme>
-    <a:fmtScheme name="Office">
+    <a:fmtScheme name="ChatGPT">
       <a:fillStyleLst>
         <a:solidFill>
           <a:schemeClr val="phClr"/>
         </a:solidFill>
-        <a:gradFill rotWithShape="1">
+        <a:gradFill>
           <a:gsLst>
             <a:gs pos="0">
               <a:schemeClr val="phClr">
+                <a:tint val="67000"/>
                 <a:lumMod val="110000"/>
                 <a:satMod val="105000"/>
-                <a:tint val="67000"/>
               </a:schemeClr>
             </a:gs>
             <a:gs pos="50000">
               <a:schemeClr val="phClr">
+                <a:tint val="73000"/>
                 <a:lumMod val="105000"/>
                 <a:satMod val="103000"/>
-                <a:tint val="73000"/>
               </a:schemeClr>
             </a:gs>
             <a:gs pos="100000">
               <a:schemeClr val="phClr">
+                <a:tint val="81000"/>
                 <a:lumMod val="105000"/>
                 <a:satMod val="109000"/>
-                <a:tint val="81000"/>
               </a:schemeClr>
             </a:gs>
           </a:gsLst>
           <a:lin ang="5400000" scaled="0"/>
         </a:gradFill>
-        <a:gradFill rotWithShape="1">
+        <a:gradFill>
           <a:gsLst>
             <a:gs pos="0">
               <a:schemeClr val="phClr">
+                <a:tint val="94000"/>
+                <a:lumMod val="102000"/>
                 <a:satMod val="103000"/>
-                <a:lumMod val="102000"/>
-                <a:tint val="94000"/>
               </a:schemeClr>
             </a:gs>
             <a:gs pos="50000">
               <a:schemeClr val="phClr">
+                <a:shade val="100000"/>
+                <a:lumMod val="100000"/>
                 <a:satMod val="110000"/>
-                <a:lumMod val="100000"/>
-                <a:shade val="100000"/>
               </a:schemeClr>
             </a:gs>
             <a:gs pos="100000">
               <a:schemeClr val="phClr">
+                <a:shade val="78000"/>
                 <a:lumMod val="99000"/>
                 <a:satMod val="120000"/>
-                <a:shade val="78000"/>
               </a:schemeClr>
             </a:gs>
           </a:gsLst>
@@ -7232,26 +8026,23 @@
         </a:gradFill>
       </a:fillStyleLst>
       <a:lnStyleLst>
-        <a:ln w="6350" cap="flat" cmpd="sng" algn="ctr">
+        <a:ln w="12700">
           <a:solidFill>
             <a:schemeClr val="phClr"/>
           </a:solidFill>
           <a:prstDash val="solid"/>
-          <a:miter lim="800000"/>
         </a:ln>
-        <a:ln w="12700" cap="flat" cmpd="sng" algn="ctr">
+        <a:ln w="19050">
           <a:solidFill>
             <a:schemeClr val="phClr"/>
           </a:solidFill>
           <a:prstDash val="solid"/>
-          <a:miter lim="800000"/>
         </a:ln>
-        <a:ln w="19050" cap="flat" cmpd="sng" algn="ctr">
+        <a:ln w="25400">
           <a:solidFill>
             <a:schemeClr val="phClr"/>
           </a:solidFill>
           <a:prstDash val="solid"/>
-          <a:miter lim="800000"/>
         </a:ln>
       </a:lnStyleLst>
       <a:effectStyleLst>
@@ -7263,9 +8054,63 @@
         </a:effectStyle>
         <a:effectStyle>
           <a:effectLst>
-            <a:outerShdw blurRad="57150" dist="19050" dir="5400000" algn="ctr" rotWithShape="0">
+            <a:outerShdw blurRad="57150" dist="19050" dir="5400000">
               <a:srgbClr val="000000">
-                <a:alpha val="63000"/>
+                <a:alpha val="16000"/>
+              </a:srgbClr>
+            </a:outerShdw>
+          </a:effectLst>
+        </a:effectStyle>
+        <a:effectStyle>
+          <a:effectLst>
+            <a:outerShdw blurRad="19050" dist="9525" dir="5400000">
+              <a:srgbClr val="000000">
+                <a:alpha val="6000"/>
+              </a:srgbClr>
+            </a:outerShdw>
+          </a:effectLst>
+        </a:effectStyle>
+        <a:effectStyle>
+          <a:effectLst>
+            <a:outerShdw blurRad="28575" dist="9525" dir="5400000">
+              <a:srgbClr val="000000">
+                <a:alpha val="8000"/>
+              </a:srgbClr>
+            </a:outerShdw>
+          </a:effectLst>
+        </a:effectStyle>
+        <a:effectStyle>
+          <a:effectLst>
+            <a:outerShdw blurRad="57150" dist="19050" dir="5400000">
+              <a:srgbClr val="000000">
+                <a:alpha val="10000"/>
+              </a:srgbClr>
+            </a:outerShdw>
+          </a:effectLst>
+        </a:effectStyle>
+        <a:effectStyle>
+          <a:effectLst>
+            <a:outerShdw blurRad="114300" dist="38100" dir="5400000">
+              <a:srgbClr val="000000">
+                <a:alpha val="12000"/>
+              </a:srgbClr>
+            </a:outerShdw>
+          </a:effectLst>
+        </a:effectStyle>
+        <a:effectStyle>
+          <a:effectLst>
+            <a:outerShdw blurRad="171450" dist="57150" dir="5400000">
+              <a:srgbClr val="000000">
+                <a:alpha val="16000"/>
+              </a:srgbClr>
+            </a:outerShdw>
+          </a:effectLst>
+        </a:effectStyle>
+        <a:effectStyle>
+          <a:effectLst>
+            <a:outerShdw blurRad="266700" dist="95250" dir="5400000">
+              <a:srgbClr val="000000">
+                <a:alpha val="24000"/>
               </a:srgbClr>
             </a:outerShdw>
           </a:effectLst>
@@ -7281,22 +8126,22 @@
             <a:satMod val="170000"/>
           </a:schemeClr>
         </a:solidFill>
-        <a:gradFill rotWithShape="1">
+        <a:gradFill>
           <a:gsLst>
             <a:gs pos="0">
               <a:schemeClr val="phClr">
                 <a:tint val="93000"/>
-                <a:satMod val="150000"/>
                 <a:shade val="98000"/>
                 <a:lumMod val="102000"/>
+                <a:satMod val="150000"/>
               </a:schemeClr>
             </a:gs>
             <a:gs pos="50000">
               <a:schemeClr val="phClr">
                 <a:tint val="98000"/>
-                <a:satMod val="130000"/>
                 <a:shade val="90000"/>
                 <a:lumMod val="103000"/>
+                <a:satMod val="130000"/>
               </a:schemeClr>
             </a:gs>
             <a:gs pos="100000">
@@ -7313,189 +8158,5 @@
   </a:themeElements>
   <a:objectDefaults/>
   <a:extraClrSchemeLst/>
-  <a:extLst>
-    <a:ext uri="{05A4C25C-085E-4340-85A3-A5531E510DB2}">
-      <thm15:themeFamily xmlns:thm15="http://schemas.microsoft.com/office/thememl/2012/main" name="Office Theme" id="{62F939B6-93AF-4DB8-9C6B-D6C7DFDC589F}" vid="{4A3C46E8-61CC-4603-A589-7422A47A8E4A}"/>
-    </a:ext>
-  </a:extLst>
 </a:theme>
-</file>
-
-<file path=customXml/item1.xml><?xml version="1.0" encoding="utf-8"?>
-<ct:contentTypeSchema xmlns:ct="http://schemas.microsoft.com/office/2006/metadata/contentType" xmlns:ma="http://schemas.microsoft.com/office/2006/metadata/properties/metaAttributes" ct:_="" ma:_="" ma:contentTypeName="Document" ma:contentTypeID="0x01010016C36F108F9F92488C988DDF36346911" ma:contentTypeVersion="5" ma:contentTypeDescription="Create a new document." ma:contentTypeScope="" ma:versionID="c417924321fef32731141cd966ef6f94">
-  <xsd:schema xmlns:xsd="http://www.w3.org/2001/XMLSchema" xmlns:xs="http://www.w3.org/2001/XMLSchema" xmlns:p="http://schemas.microsoft.com/office/2006/metadata/properties" xmlns:ns2="1bb24863-89de-455f-aabf-4424925aa312" targetNamespace="http://schemas.microsoft.com/office/2006/metadata/properties" ma:root="true" ma:fieldsID="a7d3b2212d350eb904df17fc79fef4f4" ns2:_="">
-    <xsd:import namespace="1bb24863-89de-455f-aabf-4424925aa312"/>
-    <xsd:element name="properties">
-      <xsd:complexType>
-        <xsd:sequence>
-          <xsd:element name="documentManagement">
-            <xsd:complexType>
-              <xsd:all>
-                <xsd:element ref="ns2:MediaServiceMetadata" minOccurs="0"/>
-                <xsd:element ref="ns2:MediaServiceFastMetadata" minOccurs="0"/>
-                <xsd:element ref="ns2:MediaServiceAutoTags" minOccurs="0"/>
-                <xsd:element ref="ns2:MediaServiceOCR" minOccurs="0"/>
-                <xsd:element ref="ns2:MediaServiceDateTaken" minOccurs="0"/>
-              </xsd:all>
-            </xsd:complexType>
-          </xsd:element>
-        </xsd:sequence>
-      </xsd:complexType>
-    </xsd:element>
-  </xsd:schema>
-  <xsd:schema xmlns:xsd="http://www.w3.org/2001/XMLSchema" xmlns:xs="http://www.w3.org/2001/XMLSchema" xmlns:dms="http://schemas.microsoft.com/office/2006/documentManagement/types" xmlns:pc="http://schemas.microsoft.com/office/infopath/2007/PartnerControls" targetNamespace="1bb24863-89de-455f-aabf-4424925aa312" elementFormDefault="qualified">
-    <xsd:import namespace="http://schemas.microsoft.com/office/2006/documentManagement/types"/>
-    <xsd:import namespace="http://schemas.microsoft.com/office/infopath/2007/PartnerControls"/>
-    <xsd:element name="MediaServiceMetadata" ma:index="8" nillable="true" ma:displayName="MediaServiceMetadata" ma:hidden="true" ma:internalName="MediaServiceMetadata" ma:readOnly="true">
-      <xsd:simpleType>
-        <xsd:restriction base="dms:Note"/>
-      </xsd:simpleType>
-    </xsd:element>
-    <xsd:element name="MediaServiceFastMetadata" ma:index="9" nillable="true" ma:displayName="MediaServiceFastMetadata" ma:hidden="true" ma:internalName="MediaServiceFastMetadata" ma:readOnly="true">
-      <xsd:simpleType>
-        <xsd:restriction base="dms:Note"/>
-      </xsd:simpleType>
-    </xsd:element>
-    <xsd:element name="MediaServiceAutoTags" ma:index="10" nillable="true" ma:displayName="MediaServiceAutoTags" ma:internalName="MediaServiceAutoTags" ma:readOnly="true">
-      <xsd:simpleType>
-        <xsd:restriction base="dms:Text"/>
-      </xsd:simpleType>
-    </xsd:element>
-    <xsd:element name="MediaServiceOCR" ma:index="11" nillable="true" ma:displayName="MediaServiceOCR" ma:internalName="MediaServiceOCR" ma:readOnly="true">
-      <xsd:simpleType>
-        <xsd:restriction base="dms:Note">
-          <xsd:maxLength value="255"/>
-        </xsd:restriction>
-      </xsd:simpleType>
-    </xsd:element>
-    <xsd:element name="MediaServiceDateTaken" ma:index="12" nillable="true" ma:displayName="MediaServiceDateTaken" ma:hidden="true" ma:internalName="MediaServiceDateTaken" ma:readOnly="true">
-      <xsd:simpleType>
-        <xsd:restriction base="dms:Text"/>
-      </xsd:simpleType>
-    </xsd:element>
-  </xsd:schema>
-  <xsd:schema xmlns="http://schemas.openxmlformats.org/package/2006/metadata/core-properties" xmlns:xsd="http://www.w3.org/2001/XMLSchema" xmlns:xsi="http://www.w3.org/2001/XMLSchema-instance" xmlns:dc="http://purl.org/dc/elements/1.1/" xmlns:dcterms="http://purl.org/dc/terms/" xmlns:odoc="http://schemas.microsoft.com/internal/obd" targetNamespace="http://schemas.openxmlformats.org/package/2006/metadata/core-properties" elementFormDefault="qualified" attributeFormDefault="unqualified" blockDefault="#all">
-    <xsd:import namespace="http://purl.org/dc/elements/1.1/" schemaLocation="http://dublincore.org/schemas/xmls/qdc/2003/04/02/dc.xsd"/>
-    <xsd:import namespace="http://purl.org/dc/terms/" schemaLocation="http://dublincore.org/schemas/xmls/qdc/2003/04/02/dcterms.xsd"/>
-    <xsd:element name="coreProperties" type="CT_coreProperties"/>
-    <xsd:complexType name="CT_coreProperties">
-      <xsd:all>
-        <xsd:element ref="dc:creator" minOccurs="0" maxOccurs="1"/>
-        <xsd:element ref="dcterms:created" minOccurs="0" maxOccurs="1"/>
-        <xsd:element ref="dc:identifier" minOccurs="0" maxOccurs="1"/>
-        <xsd:element name="contentType" minOccurs="0" maxOccurs="1" type="xsd:string" ma:index="0" ma:displayName="Content Type"/>
-        <xsd:element ref="dc:title" minOccurs="0" maxOccurs="1" ma:index="4" ma:displayName="Title"/>
-        <xsd:element ref="dc:subject" minOccurs="0" maxOccurs="1"/>
-        <xsd:element ref="dc:description" minOccurs="0" maxOccurs="1"/>
-        <xsd:element name="keywords" minOccurs="0" maxOccurs="1" type="xsd:string"/>
-        <xsd:element ref="dc:language" minOccurs="0" maxOccurs="1"/>
-        <xsd:element name="category" minOccurs="0" maxOccurs="1" type="xsd:string"/>
-        <xsd:element name="version" minOccurs="0" maxOccurs="1" type="xsd:string"/>
-        <xsd:element name="revision" minOccurs="0" maxOccurs="1" type="xsd:string">
-          <xsd:annotation>
-            <xsd:documentation>
-                        This value indicates the number of saves or revisions. The application is responsible for updating this value after each revision.
-                    </xsd:documentation>
-          </xsd:annotation>
-        </xsd:element>
-        <xsd:element name="lastModifiedBy" minOccurs="0" maxOccurs="1" type="xsd:string"/>
-        <xsd:element ref="dcterms:modified" minOccurs="0" maxOccurs="1"/>
-        <xsd:element name="contentStatus" minOccurs="0" maxOccurs="1" type="xsd:string"/>
-      </xsd:all>
-    </xsd:complexType>
-  </xsd:schema>
-  <xs:schema xmlns:pc="http://schemas.microsoft.com/office/infopath/2007/PartnerControls" xmlns:xs="http://www.w3.org/2001/XMLSchema" targetNamespace="http://schemas.microsoft.com/office/infopath/2007/PartnerControls" elementFormDefault="qualified" attributeFormDefault="unqualified">
-    <xs:element name="Person">
-      <xs:complexType>
-        <xs:sequence>
-          <xs:element ref="pc:DisplayName" minOccurs="0"/>
-          <xs:element ref="pc:AccountId" minOccurs="0"/>
-          <xs:element ref="pc:AccountType" minOccurs="0"/>
-        </xs:sequence>
-      </xs:complexType>
-    </xs:element>
-    <xs:element name="DisplayName" type="xs:string"/>
-    <xs:element name="AccountId" type="xs:string"/>
-    <xs:element name="AccountType" type="xs:string"/>
-    <xs:element name="BDCAssociatedEntity">
-      <xs:complexType>
-        <xs:sequence>
-          <xs:element ref="pc:BDCEntity" minOccurs="0" maxOccurs="unbounded"/>
-        </xs:sequence>
-        <xs:attribute ref="pc:EntityNamespace"/>
-        <xs:attribute ref="pc:EntityName"/>
-        <xs:attribute ref="pc:SystemInstanceName"/>
-        <xs:attribute ref="pc:AssociationName"/>
-      </xs:complexType>
-    </xs:element>
-    <xs:attribute name="EntityNamespace" type="xs:string"/>
-    <xs:attribute name="EntityName" type="xs:string"/>
-    <xs:attribute name="SystemInstanceName" type="xs:string"/>
-    <xs:attribute name="AssociationName" type="xs:string"/>
-    <xs:element name="BDCEntity">
-      <xs:complexType>
-        <xs:sequence>
-          <xs:element ref="pc:EntityDisplayName" minOccurs="0"/>
-          <xs:element ref="pc:EntityInstanceReference" minOccurs="0"/>
-          <xs:element ref="pc:EntityId1" minOccurs="0"/>
-          <xs:element ref="pc:EntityId2" minOccurs="0"/>
-          <xs:element ref="pc:EntityId3" minOccurs="0"/>
-          <xs:element ref="pc:EntityId4" minOccurs="0"/>
-          <xs:element ref="pc:EntityId5" minOccurs="0"/>
-        </xs:sequence>
-      </xs:complexType>
-    </xs:element>
-    <xs:element name="EntityDisplayName" type="xs:string"/>
-    <xs:element name="EntityInstanceReference" type="xs:string"/>
-    <xs:element name="EntityId1" type="xs:string"/>
-    <xs:element name="EntityId2" type="xs:string"/>
-    <xs:element name="EntityId3" type="xs:string"/>
-    <xs:element name="EntityId4" type="xs:string"/>
-    <xs:element name="EntityId5" type="xs:string"/>
-    <xs:element name="Terms">
-      <xs:complexType>
-        <xs:sequence>
-          <xs:element ref="pc:TermInfo" minOccurs="0" maxOccurs="unbounded"/>
-        </xs:sequence>
-      </xs:complexType>
-    </xs:element>
-    <xs:element name="TermInfo">
-      <xs:complexType>
-        <xs:sequence>
-          <xs:element ref="pc:TermName" minOccurs="0"/>
-          <xs:element ref="pc:TermId" minOccurs="0"/>
-        </xs:sequence>
-      </xs:complexType>
-    </xs:element>
-    <xs:element name="TermName" type="xs:string"/>
-    <xs:element name="TermId" type="xs:string"/>
-  </xs:schema>
-</ct:contentTypeSchema>
-</file>
-
-<file path=customXml/item2.xml><?xml version="1.0" encoding="utf-8"?>
-<?mso-contentType ?>
-<FormTemplates xmlns="http://schemas.microsoft.com/sharepoint/v3/contenttype/forms">
-  <Display>DocumentLibraryForm</Display>
-  <Edit>DocumentLibraryForm</Edit>
-  <New>DocumentLibraryForm</New>
-</FormTemplates>
-</file>
-
-<file path=customXml/item3.xml><?xml version="1.0" encoding="utf-8"?>
-<p:properties xmlns:p="http://schemas.microsoft.com/office/2006/metadata/properties" xmlns:xsi="http://www.w3.org/2001/XMLSchema-instance" xmlns:pc="http://schemas.microsoft.com/office/infopath/2007/PartnerControls">
-  <documentManagement/>
-</p:properties>
-</file>
-
-<file path=customXml/itemProps1.xml><?xml version="1.0" encoding="utf-8"?>
-<ds:datastoreItem xmlns:ds="http://schemas.openxmlformats.org/officeDocument/2006/customXml" ds:itemID="{9DCE3C33-DA20-4137-8780-2DFB9D124B5F}"/>
-</file>
-
-<file path=customXml/itemProps2.xml><?xml version="1.0" encoding="utf-8"?>
-<ds:datastoreItem xmlns:ds="http://schemas.openxmlformats.org/officeDocument/2006/customXml" ds:itemID="{EF52A612-AF78-47DD-B93F-797A255C919D}"/>
-</file>
-
-<file path=customXml/itemProps3.xml><?xml version="1.0" encoding="utf-8"?>
-<ds:datastoreItem xmlns:ds="http://schemas.openxmlformats.org/officeDocument/2006/customXml" ds:itemID="{4DD8559E-0254-4CDB-A1BC-0C5BFDA8332E}"/>
 </file>
--- a/assets/lessons/lectures/digital-signal-processing/mixing-2018.pptx
+++ b/assets/lessons/lectures/digital-signal-processing/mixing-2018.pptx
@@ -3998,7 +3998,7 @@
                 <a:ea typeface="Arial"/>
                 <a:cs typeface="Arial"/>
               </a:rPr>
-              <a:t>wvurail.org/dspira</a:t>
+              <a:t>rail.wvu.edu/dspira</a:t>
             </a:r>
           </a:p>
         </p:txBody>
